--- a/HTSplotter_Summary.pptx
+++ b/HTSplotter_Summary.pptx
@@ -8,6 +8,8 @@
     <p:sldId id="256" r:id="rId7"/>
     <p:sldId id="257" r:id="rId8"/>
     <p:sldId id="258" r:id="rId9"/>
+    <p:sldId id="259" r:id="rId10"/>
+    <p:sldId id="260" r:id="rId11"/>
   </p:sldIdLst>
   <p:sldSz cx="12188952" cy="6858000" type="screen4x3"/>
   <p:notesSz cx="6858000" cy="9144000"/>
@@ -3107,7 +3109,7 @@
         <p:spPr>
           <a:xfrm>
             <a:off x="0" y="0"/>
-            <a:ext cx="12188952" cy="109728"/>
+            <a:ext cx="12188952" cy="91440"/>
           </a:xfrm>
           <a:prstGeom prst="rect">
             <a:avLst/>
@@ -3149,8 +3151,8 @@
         </p:nvSpPr>
         <p:spPr>
           <a:xfrm>
-            <a:off x="457200" y="685800"/>
-            <a:ext cx="11247120" cy="1005840"/>
+            <a:off x="548640" y="502920"/>
+            <a:ext cx="11064240" cy="1188720"/>
           </a:xfrm>
           <a:prstGeom prst="rect">
             <a:avLst/>
@@ -3165,12 +3167,12 @@
           <a:p>
             <a:pPr algn="ctr"/>
             <a:r>
-              <a:rPr sz="4000" b="1" i="0">
+              <a:rPr sz="5200" b="1" i="0">
                 <a:solidFill>
                   <a:srgbClr val="FFFFFF"/>
                 </a:solidFill>
               </a:rPr>
-              <a:t>HTSplotter Analysis Summary</a:t>
+              <a:t>HTSplotter</a:t>
             </a:r>
           </a:p>
         </p:txBody>
@@ -3183,8 +3185,8 @@
         </p:nvSpPr>
         <p:spPr>
           <a:xfrm>
-            <a:off x="457200" y="1691640"/>
-            <a:ext cx="11247120" cy="457200"/>
+            <a:off x="548640" y="1645920"/>
+            <a:ext cx="11064240" cy="502920"/>
           </a:xfrm>
           <a:prstGeom prst="rect">
             <a:avLst/>
@@ -3199,12 +3201,12 @@
           <a:p>
             <a:pPr algn="ctr"/>
             <a:r>
-              <a:rPr sz="1800" b="0" i="0">
+              <a:rPr sz="2400" b="0" i="0">
                 <a:solidFill>
                   <a:srgbClr val="BDD7EE"/>
                 </a:solidFill>
               </a:rPr>
-              <a:t>All Example Datasets  |  MCF7 Cells  |  Confluency Readout  |  + AI Chat Interface</a:t>
+              <a:t>High-Throughput Screening Analysis</a:t>
             </a:r>
           </a:p>
         </p:txBody>
@@ -3217,8 +3219,8 @@
         </p:nvSpPr>
         <p:spPr>
           <a:xfrm>
-            <a:off x="1371600" y="2286000"/>
-            <a:ext cx="9445752" cy="36576"/>
+            <a:off x="1828800" y="2286000"/>
+            <a:ext cx="8531352" cy="45720"/>
           </a:xfrm>
           <a:prstGeom prst="rect">
             <a:avLst/>
@@ -3254,14 +3256,48 @@
       </p:sp>
       <p:sp>
         <p:nvSpPr>
-          <p:cNvPr id="6" name="Rectangle 5"/>
+          <p:cNvPr id="6" name="TextBox 5"/>
+          <p:cNvSpPr txBox="1"/>
+          <p:nvPr/>
+        </p:nvSpPr>
+        <p:spPr>
+          <a:xfrm>
+            <a:off x="548640" y="2377440"/>
+            <a:ext cx="11064240" cy="365760"/>
+          </a:xfrm>
+          <a:prstGeom prst="rect">
+            <a:avLst/>
+          </a:prstGeom>
+          <a:noFill/>
+        </p:spPr>
+        <p:txBody>
+          <a:bodyPr wrap="square">
+            <a:spAutoFit/>
+          </a:bodyPr>
+          <a:lstStyle/>
+          <a:p>
+            <a:pPr algn="ctr"/>
+            <a:r>
+              <a:rPr sz="1500" b="0" i="0">
+                <a:solidFill>
+                  <a:srgbClr val="88BBE0"/>
+                </a:solidFill>
+              </a:rPr>
+              <a:t>All Example Datasets  ·  MCF7 Cells  ·  Confluency Readout  ·  AI Chat Interface</a:t>
+            </a:r>
+          </a:p>
+        </p:txBody>
+      </p:sp>
+      <p:sp>
+        <p:nvSpPr>
+          <p:cNvPr id="7" name="Rectangle 6"/>
           <p:cNvSpPr/>
           <p:nvPr/>
         </p:nvSpPr>
         <p:spPr>
           <a:xfrm>
-            <a:off x="365760" y="2423160"/>
-            <a:ext cx="7223760" cy="3383280"/>
+            <a:off x="411480" y="2880360"/>
+            <a:ext cx="6949440" cy="3520440"/>
           </a:xfrm>
           <a:prstGeom prst="rect">
             <a:avLst/>
@@ -3297,14 +3333,57 @@
       </p:sp>
       <p:sp>
         <p:nvSpPr>
-          <p:cNvPr id="7" name="TextBox 6"/>
+          <p:cNvPr id="8" name="Rectangle 7"/>
+          <p:cNvSpPr/>
+          <p:nvPr/>
+        </p:nvSpPr>
+        <p:spPr>
+          <a:xfrm>
+            <a:off x="411480" y="2880360"/>
+            <a:ext cx="64008" cy="3520440"/>
+          </a:xfrm>
+          <a:prstGeom prst="rect">
+            <a:avLst/>
+          </a:prstGeom>
+          <a:solidFill>
+            <a:srgbClr val="2E75B6"/>
+          </a:solidFill>
+          <a:ln>
+            <a:noFill/>
+          </a:ln>
+        </p:spPr>
+        <p:style>
+          <a:lnRef idx="1">
+            <a:schemeClr val="accent1"/>
+          </a:lnRef>
+          <a:fillRef idx="3">
+            <a:schemeClr val="accent1"/>
+          </a:fillRef>
+          <a:effectRef idx="2">
+            <a:schemeClr val="accent1"/>
+          </a:effectRef>
+          <a:fontRef idx="minor">
+            <a:schemeClr val="lt1"/>
+          </a:fontRef>
+        </p:style>
+        <p:txBody>
+          <a:bodyPr rtlCol="0" anchor="ctr"/>
+          <a:lstStyle/>
+          <a:p>
+            <a:pPr algn="ctr"/>
+          </a:p>
+        </p:txBody>
+      </p:sp>
+      <p:sp>
+        <p:nvSpPr>
+          <p:cNvPr id="9" name="TextBox 8"/>
           <p:cNvSpPr txBox="1"/>
           <p:nvPr/>
         </p:nvSpPr>
         <p:spPr>
           <a:xfrm>
-            <a:off x="548640" y="2468880"/>
-            <a:ext cx="6858000" cy="3246120"/>
+            <a:off x="594360" y="2971800"/>
+            <a:ext cx="6583680" cy="3337560"/>
           </a:xfrm>
           <a:prstGeom prst="rect">
             <a:avLst/>
@@ -3317,121 +3396,13 @@
           </a:bodyPr>
           <a:lstStyle/>
           <a:p>
-            <a:pPr algn="l"/>
             <a:r>
               <a:rPr sz="1800" b="1">
                 <a:solidFill>
                   <a:srgbClr val="BDD7EE"/>
                 </a:solidFill>
               </a:rPr>
-              <a:t>About HTSplotter</a:t>
-            </a:r>
-          </a:p>
-          <a:p>
-            <a:pPr algn="l">
-              <a:spcBef>
-                <a:spcPts val="800"/>
-              </a:spcBef>
-            </a:pPr>
-            <a:r>
-              <a:rPr sz="1200" b="0" i="0">
-                <a:solidFill>
-                  <a:srgbClr val="FFFFFF"/>
-                </a:solidFill>
-              </a:rPr>
-              <a:t>HTSplotter is an open-source Python tool for end-to-end processing, analysis, and visualisation of chemical and genetic in vitro perturbation screens. It automates dose-response fitting, IC value calculation, and synergy scoring (Bliss, HSA, ZIP) across four experiment types:</a:t>
-            </a:r>
-          </a:p>
-          <a:p>
-            <a:pPr>
-              <a:spcBef>
-                <a:spcPts val="400"/>
-              </a:spcBef>
-            </a:pPr>
-            <a:r>
-              <a:rPr sz="1100" b="1">
-                <a:solidFill>
-                  <a:srgbClr val="2E75B6"/>
-                </a:solidFill>
-              </a:rPr>
-              <a:t>  ●  Drug screen: </a:t>
-            </a:r>
-            <a:r>
-              <a:rPr sz="1100">
-                <a:solidFill>
-                  <a:srgbClr val="FFFFFF"/>
-                </a:solidFill>
-              </a:rPr>
-              <a:t>Single-agent dose-response, IC values, growth rates</a:t>
-            </a:r>
-          </a:p>
-          <a:p>
-            <a:pPr>
-              <a:spcBef>
-                <a:spcPts val="400"/>
-              </a:spcBef>
-            </a:pPr>
-            <a:r>
-              <a:rPr sz="1100" b="1">
-                <a:solidFill>
-                  <a:srgbClr val="2E75B6"/>
-                </a:solidFill>
-              </a:rPr>
-              <a:t>  ●  Drug combination: </a:t>
-            </a:r>
-            <a:r>
-              <a:rPr sz="1100">
-                <a:solidFill>
-                  <a:srgbClr val="FFFFFF"/>
-                </a:solidFill>
-              </a:rPr>
-              <a:t>Synergy scoring (Bliss/HSA/ZIP) over 7×7 dose matrices</a:t>
-            </a:r>
-          </a:p>
-          <a:p>
-            <a:pPr>
-              <a:spcBef>
-                <a:spcPts val="400"/>
-              </a:spcBef>
-            </a:pPr>
-            <a:r>
-              <a:rPr sz="1100" b="1">
-                <a:solidFill>
-                  <a:srgbClr val="2E75B6"/>
-                </a:solidFill>
-              </a:rPr>
-              <a:t>  ●  Genetic perturbagen: </a:t>
-            </a:r>
-            <a:r>
-              <a:rPr sz="1100">
-                <a:solidFill>
-                  <a:srgbClr val="FFFFFF"/>
-                </a:solidFill>
-              </a:rPr>
-              <a:t>siRNA/shRNA screen, normalised confluency + growth rates</a:t>
-            </a:r>
-          </a:p>
-          <a:p>
-            <a:pPr>
-              <a:spcBef>
-                <a:spcPts val="400"/>
-              </a:spcBef>
-            </a:pPr>
-            <a:r>
-              <a:rPr sz="1100" b="1">
-                <a:solidFill>
-                  <a:srgbClr val="2E75B6"/>
-                </a:solidFill>
-              </a:rPr>
-              <a:t>  ●  Genetic-chemical: </a:t>
-            </a:r>
-            <a:r>
-              <a:rPr sz="1100">
-                <a:solidFill>
-                  <a:srgbClr val="FFFFFF"/>
-                </a:solidFill>
-              </a:rPr>
-              <a:t>Combined gene-knockdown + drug treatment</a:t>
+              <a:t>What is HTSplotter?</a:t>
             </a:r>
           </a:p>
           <a:p>
@@ -3441,27 +3412,116 @@
               </a:spcBef>
             </a:pPr>
             <a:r>
-              <a:rPr sz="1100" b="0" i="0">
+              <a:rPr sz="1200" b="0" i="0">
+                <a:solidFill>
+                  <a:srgbClr val="FFFFFF"/>
+                </a:solidFill>
+              </a:rPr>
+              <a:t>HTSplotter is an open-source Python tool for end-to-end processing, analysis, and visualisation of chemical and genetic in vitro perturbation screens. It automatically identifies the experiment type, normalises data, fits dose-response curves, calculates IC values, and scores drug synergy.</a:t>
+            </a:r>
+          </a:p>
+          <a:p>
+            <a:pPr algn="l">
+              <a:spcBef>
+                <a:spcPts val="1000"/>
+              </a:spcBef>
+            </a:pPr>
+            <a:r>
+              <a:rPr sz="1200" b="0" i="0">
                 <a:solidFill>
                   <a:srgbClr val="BDD7EE"/>
                 </a:solidFill>
               </a:rPr>
-              <a:t>●  Web tool: htsplotter.cmgg.be
-●  GitHub: github.com/CBIGR/HTSplotter</a:t>
-            </a:r>
-          </a:p>
-        </p:txBody>
-      </p:sp>
-      <p:sp>
-        <p:nvSpPr>
-          <p:cNvPr id="8" name="Rectangle 7"/>
+              <a:t>Supports four experiment types:</a:t>
+            </a:r>
+          </a:p>
+          <a:p>
+            <a:pPr>
+              <a:spcBef>
+                <a:spcPts val="300"/>
+              </a:spcBef>
+            </a:pPr>
+            <a:r>
+              <a:rPr sz="1100">
+                <a:solidFill>
+                  <a:srgbClr val="FFFFFF"/>
+                </a:solidFill>
+              </a:rPr>
+              <a:t>     ●  Drug screen  —  IC values, dose-response curves, growth rates</a:t>
+            </a:r>
+          </a:p>
+          <a:p>
+            <a:pPr>
+              <a:spcBef>
+                <a:spcPts val="300"/>
+              </a:spcBef>
+            </a:pPr>
+            <a:r>
+              <a:rPr sz="1100">
+                <a:solidFill>
+                  <a:srgbClr val="FFFFFF"/>
+                </a:solidFill>
+              </a:rPr>
+              <a:t>     ●  Drug combination  —  Bliss / HSA / ZIP synergy scoring</a:t>
+            </a:r>
+          </a:p>
+          <a:p>
+            <a:pPr>
+              <a:spcBef>
+                <a:spcPts val="300"/>
+              </a:spcBef>
+            </a:pPr>
+            <a:r>
+              <a:rPr sz="1100">
+                <a:solidFill>
+                  <a:srgbClr val="FFFFFF"/>
+                </a:solidFill>
+              </a:rPr>
+              <a:t>     ●  Genetic perturbagen  —  siRNA/shRNA normalised activity</a:t>
+            </a:r>
+          </a:p>
+          <a:p>
+            <a:pPr>
+              <a:spcBef>
+                <a:spcPts val="300"/>
+              </a:spcBef>
+            </a:pPr>
+            <a:r>
+              <a:rPr sz="1100">
+                <a:solidFill>
+                  <a:srgbClr val="FFFFFF"/>
+                </a:solidFill>
+              </a:rPr>
+              <a:t>     ●  Genetic-chemical  —  gene-knockdown + drug interaction</a:t>
+            </a:r>
+          </a:p>
+          <a:p>
+            <a:pPr algn="l">
+              <a:spcBef>
+                <a:spcPts val="1000"/>
+              </a:spcBef>
+            </a:pPr>
+            <a:r>
+              <a:rPr sz="1000" b="0" i="0">
+                <a:solidFill>
+                  <a:srgbClr val="88BBE0"/>
+                </a:solidFill>
+              </a:rPr>
+              <a:t>Web tool: htsplotter.cmgg.be  ·  GitHub: github.com/CBIGR/HTSplotter</a:t>
+            </a:r>
+          </a:p>
+        </p:txBody>
+      </p:sp>
+      <p:sp>
+        <p:nvSpPr>
+          <p:cNvPr id="10" name="Rectangle 9"/>
           <p:cNvSpPr/>
           <p:nvPr/>
         </p:nvSpPr>
         <p:spPr>
           <a:xfrm>
-            <a:off x="7863840" y="2423160"/>
-            <a:ext cx="4069080" cy="3383280"/>
+            <a:off x="7635240" y="2880360"/>
+            <a:ext cx="4160520" cy="3520440"/>
           </a:xfrm>
           <a:prstGeom prst="rect">
             <a:avLst/>
@@ -3497,14 +3557,57 @@
       </p:sp>
       <p:sp>
         <p:nvSpPr>
-          <p:cNvPr id="9" name="TextBox 8"/>
+          <p:cNvPr id="11" name="Rectangle 10"/>
+          <p:cNvSpPr/>
+          <p:nvPr/>
+        </p:nvSpPr>
+        <p:spPr>
+          <a:xfrm>
+            <a:off x="7635240" y="2880360"/>
+            <a:ext cx="64008" cy="3520440"/>
+          </a:xfrm>
+          <a:prstGeom prst="rect">
+            <a:avLst/>
+          </a:prstGeom>
+          <a:solidFill>
+            <a:srgbClr val="2E75B6"/>
+          </a:solidFill>
+          <a:ln>
+            <a:noFill/>
+          </a:ln>
+        </p:spPr>
+        <p:style>
+          <a:lnRef idx="1">
+            <a:schemeClr val="accent1"/>
+          </a:lnRef>
+          <a:fillRef idx="3">
+            <a:schemeClr val="accent1"/>
+          </a:fillRef>
+          <a:effectRef idx="2">
+            <a:schemeClr val="accent1"/>
+          </a:effectRef>
+          <a:fontRef idx="minor">
+            <a:schemeClr val="lt1"/>
+          </a:fontRef>
+        </p:style>
+        <p:txBody>
+          <a:bodyPr rtlCol="0" anchor="ctr"/>
+          <a:lstStyle/>
+          <a:p>
+            <a:pPr algn="ctr"/>
+          </a:p>
+        </p:txBody>
+      </p:sp>
+      <p:sp>
+        <p:nvSpPr>
+          <p:cNvPr id="12" name="TextBox 11"/>
           <p:cNvSpPr txBox="1"/>
           <p:nvPr/>
         </p:nvSpPr>
         <p:spPr>
           <a:xfrm>
-            <a:off x="8046720" y="2468880"/>
-            <a:ext cx="3749039" cy="3246120"/>
+            <a:off x="7818120" y="2971800"/>
+            <a:ext cx="3840480" cy="3337560"/>
           </a:xfrm>
           <a:prstGeom prst="rect">
             <a:avLst/>
@@ -3524,6 +3627,21 @@
                 </a:solidFill>
               </a:rPr>
               <a:t>Citation</a:t>
+            </a:r>
+          </a:p>
+          <a:p>
+            <a:pPr algn="l">
+              <a:spcBef>
+                <a:spcPts val="1200"/>
+              </a:spcBef>
+            </a:pPr>
+            <a:r>
+              <a:rPr sz="1100" b="0" i="0">
+                <a:solidFill>
+                  <a:srgbClr val="FFFFFF"/>
+                </a:solidFill>
+              </a:rPr>
+              <a:t>Nunes C, Anckaert J, De Vloed F, De Wyn J, Durinck K, Vandesompele J, Speleman F, Vermeirssen V.</a:t>
             </a:r>
           </a:p>
           <a:p>
@@ -3533,42 +3651,42 @@
               </a:spcBef>
             </a:pPr>
             <a:r>
-              <a:rPr sz="1100" b="0" i="0">
+              <a:rPr sz="1100" b="1" i="0">
                 <a:solidFill>
                   <a:srgbClr val="FFFFFF"/>
                 </a:solidFill>
               </a:rPr>
-              <a:t>Nunes C, Anckaert J, De Vloed F, De Wyn J, Durinck K, Vandesompele J, Speleman F, Vermeirssen V.</a:t>
+              <a:t>HTSplotter: An end-to-end data processing, analysis and visualisation tool for chemical and genetic in vitro perturbation screening.</a:t>
             </a:r>
           </a:p>
           <a:p>
             <a:pPr algn="l">
               <a:spcBef>
-                <a:spcPts val="600"/>
+                <a:spcPts val="800"/>
               </a:spcBef>
             </a:pPr>
             <a:r>
-              <a:rPr sz="1100" b="1" i="0">
-                <a:solidFill>
-                  <a:srgbClr val="FFFFFF"/>
-                </a:solidFill>
-              </a:rPr>
-              <a:t>HTSplotter: An end-to-end data processing, analysis and visualisation tool for chemical and genetic in vitro perturbation screening.</a:t>
+              <a:rPr sz="1100" b="0" i="1">
+                <a:solidFill>
+                  <a:srgbClr val="BDD7EE"/>
+                </a:solidFill>
+              </a:rPr>
+              <a:t>PLoS One. 2024;19(1):e0296322</a:t>
             </a:r>
           </a:p>
           <a:p>
             <a:pPr algn="l">
               <a:spcBef>
-                <a:spcPts val="600"/>
+                <a:spcPts val="500"/>
               </a:spcBef>
             </a:pPr>
             <a:r>
-              <a:rPr sz="1100" b="0" i="1">
+              <a:rPr sz="1100" b="0" i="0">
                 <a:solidFill>
                   <a:srgbClr val="BDD7EE"/>
                 </a:solidFill>
               </a:rPr>
-              <a:t>PLoS One. 2024;19(1):e0296322</a:t>
+              <a:t>DOI: 10.1371/journal.pone.0296322</a:t>
             </a:r>
           </a:p>
           <a:p>
@@ -3583,21 +3701,6 @@
                   <a:srgbClr val="BDD7EE"/>
                 </a:solidFill>
               </a:rPr>
-              <a:t>DOI: 10.1371/journal.pone.0296322</a:t>
-            </a:r>
-          </a:p>
-          <a:p>
-            <a:pPr algn="l">
-              <a:spcBef>
-                <a:spcPts val="200"/>
-              </a:spcBef>
-            </a:pPr>
-            <a:r>
-              <a:rPr sz="1100" b="0" i="0">
-                <a:solidFill>
-                  <a:srgbClr val="BDD7EE"/>
-                </a:solidFill>
-              </a:rPr>
               <a:t>PMID: 38181013</a:t>
             </a:r>
           </a:p>
@@ -3605,14 +3708,14 @@
       </p:sp>
       <p:sp>
         <p:nvSpPr>
-          <p:cNvPr id="10" name="Rectangle 9"/>
+          <p:cNvPr id="13" name="Rectangle 12"/>
           <p:cNvSpPr/>
           <p:nvPr/>
         </p:nvSpPr>
         <p:spPr>
           <a:xfrm>
-            <a:off x="0" y="6675120"/>
-            <a:ext cx="12188952" cy="182880"/>
+            <a:off x="0" y="6656832"/>
+            <a:ext cx="12188952" cy="201168"/>
           </a:xfrm>
           <a:prstGeom prst="rect">
             <a:avLst/>
@@ -3648,7 +3751,7 @@
       </p:sp>
       <p:sp>
         <p:nvSpPr>
-          <p:cNvPr id="11" name="TextBox 10"/>
+          <p:cNvPr id="14" name="TextBox 13"/>
           <p:cNvSpPr txBox="1"/>
           <p:nvPr/>
         </p:nvSpPr>
@@ -3675,7 +3778,41 @@
                   <a:srgbClr val="FFFFFF"/>
                 </a:solidFill>
               </a:rPr>
-              <a:t>Slide 1 of 3</a:t>
+              <a:t>Slide 1 of 5</a:t>
+            </a:r>
+          </a:p>
+        </p:txBody>
+      </p:sp>
+      <p:sp>
+        <p:nvSpPr>
+          <p:cNvPr id="15" name="TextBox 14"/>
+          <p:cNvSpPr txBox="1"/>
+          <p:nvPr/>
+        </p:nvSpPr>
+        <p:spPr>
+          <a:xfrm>
+            <a:off x="228600" y="6675120"/>
+            <a:ext cx="9144000" cy="182880"/>
+          </a:xfrm>
+          <a:prstGeom prst="rect">
+            <a:avLst/>
+          </a:prstGeom>
+          <a:noFill/>
+        </p:spPr>
+        <p:txBody>
+          <a:bodyPr wrap="square">
+            <a:spAutoFit/>
+          </a:bodyPr>
+          <a:lstStyle/>
+          <a:p>
+            <a:pPr algn="l"/>
+            <a:r>
+              <a:rPr sz="900" b="0" i="0">
+                <a:solidFill>
+                  <a:srgbClr val="BDD7EE"/>
+                </a:solidFill>
+              </a:rPr>
+              <a:t>HTSplotter  |  Nunes et al., PLoS One 2024  |  DOI: 10.1371/journal.pone.0296322</a:t>
             </a:r>
           </a:p>
         </p:txBody>
@@ -3715,7 +3852,7 @@
         <p:spPr>
           <a:xfrm>
             <a:off x="0" y="0"/>
-            <a:ext cx="12188952" cy="822960"/>
+            <a:ext cx="12188952" cy="804672"/>
           </a:xfrm>
           <a:prstGeom prst="rect">
             <a:avLst/>
@@ -3751,14 +3888,57 @@
       </p:sp>
       <p:sp>
         <p:nvSpPr>
-          <p:cNvPr id="3" name="TextBox 2"/>
+          <p:cNvPr id="3" name="Rectangle 2"/>
+          <p:cNvSpPr/>
+          <p:nvPr/>
+        </p:nvSpPr>
+        <p:spPr>
+          <a:xfrm>
+            <a:off x="0" y="0"/>
+            <a:ext cx="73152" cy="804672"/>
+          </a:xfrm>
+          <a:prstGeom prst="rect">
+            <a:avLst/>
+          </a:prstGeom>
+          <a:solidFill>
+            <a:srgbClr val="2E75B6"/>
+          </a:solidFill>
+          <a:ln>
+            <a:noFill/>
+          </a:ln>
+        </p:spPr>
+        <p:style>
+          <a:lnRef idx="1">
+            <a:schemeClr val="accent1"/>
+          </a:lnRef>
+          <a:fillRef idx="3">
+            <a:schemeClr val="accent1"/>
+          </a:fillRef>
+          <a:effectRef idx="2">
+            <a:schemeClr val="accent1"/>
+          </a:effectRef>
+          <a:fontRef idx="minor">
+            <a:schemeClr val="lt1"/>
+          </a:fontRef>
+        </p:style>
+        <p:txBody>
+          <a:bodyPr rtlCol="0" anchor="ctr"/>
+          <a:lstStyle/>
+          <a:p>
+            <a:pPr algn="ctr"/>
+          </a:p>
+        </p:txBody>
+      </p:sp>
+      <p:sp>
+        <p:nvSpPr>
+          <p:cNvPr id="4" name="TextBox 3"/>
           <p:cNvSpPr txBox="1"/>
           <p:nvPr/>
         </p:nvSpPr>
         <p:spPr>
           <a:xfrm>
-            <a:off x="274320" y="137160"/>
-            <a:ext cx="11430000" cy="548640"/>
+            <a:off x="228600" y="91440"/>
+            <a:ext cx="11704320" cy="502920"/>
           </a:xfrm>
           <a:prstGeom prst="rect">
             <a:avLst/>
@@ -3773,26 +3953,26 @@
           <a:p>
             <a:pPr algn="l"/>
             <a:r>
-              <a:rPr sz="2400" b="1" i="0">
+              <a:rPr sz="2600" b="1" i="0">
                 <a:solidFill>
                   <a:srgbClr val="FFFFFF"/>
                 </a:solidFill>
               </a:rPr>
-              <a:t>Drug Screen &amp; Combination Results  —  MCF7 / 72 h</a:t>
-            </a:r>
-          </a:p>
-        </p:txBody>
-      </p:sp>
-      <p:sp>
-        <p:nvSpPr>
-          <p:cNvPr id="4" name="TextBox 3"/>
+              <a:t>The 4 Experiment Types Supported by HTSplotter</a:t>
+            </a:r>
+          </a:p>
+        </p:txBody>
+      </p:sp>
+      <p:sp>
+        <p:nvSpPr>
+          <p:cNvPr id="5" name="TextBox 4"/>
           <p:cNvSpPr txBox="1"/>
           <p:nvPr/>
         </p:nvSpPr>
         <p:spPr>
           <a:xfrm>
-            <a:off x="274320" y="914400"/>
-            <a:ext cx="5669280" cy="347472"/>
+            <a:off x="228600" y="548640"/>
+            <a:ext cx="11704320" cy="228600"/>
           </a:xfrm>
           <a:prstGeom prst="rect">
             <a:avLst/>
@@ -3807,26 +3987,1744 @@
           <a:p>
             <a:pPr algn="l"/>
             <a:r>
-              <a:rPr sz="1400" b="1" i="0">
-                <a:solidFill>
-                  <a:srgbClr val="1A375E"/>
-                </a:solidFill>
-              </a:rPr>
-              <a:t>Single-Agent Dose-Response  (1 time point)</a:t>
-            </a:r>
-          </a:p>
-        </p:txBody>
-      </p:sp>
-      <p:sp>
-        <p:nvSpPr>
-          <p:cNvPr id="5" name="Rectangle 4"/>
+              <a:rPr sz="1200" b="0" i="0">
+                <a:solidFill>
+                  <a:srgbClr val="BDD7EE"/>
+                </a:solidFill>
+              </a:rPr>
+              <a:t>Each type auto-detected from input file header — no manual configuration needed</a:t>
+            </a:r>
+          </a:p>
+        </p:txBody>
+      </p:sp>
+      <p:sp>
+        <p:nvSpPr>
+          <p:cNvPr id="6" name="Rectangle 5"/>
           <p:cNvSpPr/>
           <p:nvPr/>
         </p:nvSpPr>
         <p:spPr>
           <a:xfrm>
-            <a:off x="274320" y="1298448"/>
-            <a:ext cx="1737360" cy="347472"/>
+            <a:off x="274320" y="960120"/>
+            <a:ext cx="5669280" cy="2743200"/>
+          </a:xfrm>
+          <a:prstGeom prst="rect">
+            <a:avLst/>
+          </a:prstGeom>
+          <a:solidFill>
+            <a:srgbClr val="EFF4FB"/>
+          </a:solidFill>
+          <a:ln w="19050">
+            <a:solidFill>
+              <a:srgbClr val="2E75B6"/>
+            </a:solidFill>
+          </a:ln>
+        </p:spPr>
+        <p:style>
+          <a:lnRef idx="1">
+            <a:schemeClr val="accent1"/>
+          </a:lnRef>
+          <a:fillRef idx="3">
+            <a:schemeClr val="accent1"/>
+          </a:fillRef>
+          <a:effectRef idx="2">
+            <a:schemeClr val="accent1"/>
+          </a:effectRef>
+          <a:fontRef idx="minor">
+            <a:schemeClr val="lt1"/>
+          </a:fontRef>
+        </p:style>
+        <p:txBody>
+          <a:bodyPr rtlCol="0" anchor="ctr"/>
+          <a:lstStyle/>
+          <a:p>
+            <a:pPr algn="ctr"/>
+          </a:p>
+        </p:txBody>
+      </p:sp>
+      <p:sp>
+        <p:nvSpPr>
+          <p:cNvPr id="7" name="Rectangle 6"/>
+          <p:cNvSpPr/>
+          <p:nvPr/>
+        </p:nvSpPr>
+        <p:spPr>
+          <a:xfrm>
+            <a:off x="274320" y="960120"/>
+            <a:ext cx="5669280" cy="457200"/>
+          </a:xfrm>
+          <a:prstGeom prst="rect">
+            <a:avLst/>
+          </a:prstGeom>
+          <a:solidFill>
+            <a:srgbClr val="2E75B6"/>
+          </a:solidFill>
+          <a:ln>
+            <a:noFill/>
+          </a:ln>
+        </p:spPr>
+        <p:style>
+          <a:lnRef idx="1">
+            <a:schemeClr val="accent1"/>
+          </a:lnRef>
+          <a:fillRef idx="3">
+            <a:schemeClr val="accent1"/>
+          </a:fillRef>
+          <a:effectRef idx="2">
+            <a:schemeClr val="accent1"/>
+          </a:effectRef>
+          <a:fontRef idx="minor">
+            <a:schemeClr val="lt1"/>
+          </a:fontRef>
+        </p:style>
+        <p:txBody>
+          <a:bodyPr rtlCol="0" anchor="ctr"/>
+          <a:lstStyle/>
+          <a:p>
+            <a:pPr algn="ctr"/>
+          </a:p>
+        </p:txBody>
+      </p:sp>
+      <p:sp>
+        <p:nvSpPr>
+          <p:cNvPr id="8" name="TextBox 7"/>
+          <p:cNvSpPr txBox="1"/>
+          <p:nvPr/>
+        </p:nvSpPr>
+        <p:spPr>
+          <a:xfrm>
+            <a:off x="411479" y="1024128"/>
+            <a:ext cx="4754880" cy="347472"/>
+          </a:xfrm>
+          <a:prstGeom prst="rect">
+            <a:avLst/>
+          </a:prstGeom>
+          <a:noFill/>
+        </p:spPr>
+        <p:txBody>
+          <a:bodyPr wrap="square">
+            <a:spAutoFit/>
+          </a:bodyPr>
+          <a:lstStyle/>
+          <a:p>
+            <a:pPr algn="l"/>
+            <a:r>
+              <a:rPr sz="1600" b="1" i="0">
+                <a:solidFill>
+                  <a:srgbClr val="FFFFFF"/>
+                </a:solidFill>
+              </a:rPr>
+              <a:t>💊  Drug Screen</a:t>
+            </a:r>
+          </a:p>
+        </p:txBody>
+      </p:sp>
+      <p:sp>
+        <p:nvSpPr>
+          <p:cNvPr id="9" name="Rectangle 8"/>
+          <p:cNvSpPr/>
+          <p:nvPr/>
+        </p:nvSpPr>
+        <p:spPr>
+          <a:xfrm>
+            <a:off x="4206240" y="1042416"/>
+            <a:ext cx="1600200" cy="274320"/>
+          </a:xfrm>
+          <a:prstGeom prst="rect">
+            <a:avLst/>
+          </a:prstGeom>
+          <a:solidFill>
+            <a:srgbClr val="1F8678"/>
+          </a:solidFill>
+          <a:ln>
+            <a:noFill/>
+          </a:ln>
+        </p:spPr>
+        <p:style>
+          <a:lnRef idx="1">
+            <a:schemeClr val="accent1"/>
+          </a:lnRef>
+          <a:fillRef idx="3">
+            <a:schemeClr val="accent1"/>
+          </a:fillRef>
+          <a:effectRef idx="2">
+            <a:schemeClr val="accent1"/>
+          </a:effectRef>
+          <a:fontRef idx="minor">
+            <a:schemeClr val="lt1"/>
+          </a:fontRef>
+        </p:style>
+        <p:txBody>
+          <a:bodyPr rtlCol="0" anchor="ctr"/>
+          <a:lstStyle/>
+          <a:p>
+            <a:pPr algn="ctr"/>
+          </a:p>
+        </p:txBody>
+      </p:sp>
+      <p:sp>
+        <p:nvSpPr>
+          <p:cNvPr id="10" name="TextBox 9"/>
+          <p:cNvSpPr txBox="1"/>
+          <p:nvPr/>
+        </p:nvSpPr>
+        <p:spPr>
+          <a:xfrm>
+            <a:off x="4224528" y="1051560"/>
+            <a:ext cx="1581912" cy="256032"/>
+          </a:xfrm>
+          <a:prstGeom prst="rect">
+            <a:avLst/>
+          </a:prstGeom>
+          <a:noFill/>
+        </p:spPr>
+        <p:txBody>
+          <a:bodyPr wrap="square">
+            <a:spAutoFit/>
+          </a:bodyPr>
+          <a:lstStyle/>
+          <a:p>
+            <a:pPr algn="ctr"/>
+            <a:r>
+              <a:rPr sz="900" b="1" i="0">
+                <a:solidFill>
+                  <a:srgbClr val="FFFFFF"/>
+                </a:solidFill>
+              </a:rPr>
+              <a:t>✅</a:t>
+            </a:r>
+          </a:p>
+        </p:txBody>
+      </p:sp>
+      <p:sp>
+        <p:nvSpPr>
+          <p:cNvPr id="11" name="TextBox 10"/>
+          <p:cNvSpPr txBox="1"/>
+          <p:nvPr/>
+        </p:nvSpPr>
+        <p:spPr>
+          <a:xfrm>
+            <a:off x="411479" y="1481328"/>
+            <a:ext cx="5349240" cy="384048"/>
+          </a:xfrm>
+          <a:prstGeom prst="rect">
+            <a:avLst/>
+          </a:prstGeom>
+          <a:noFill/>
+        </p:spPr>
+        <p:txBody>
+          <a:bodyPr wrap="square">
+            <a:spAutoFit/>
+          </a:bodyPr>
+          <a:lstStyle/>
+          <a:p>
+            <a:pPr algn="l"/>
+            <a:r>
+              <a:rPr sz="1100" b="0" i="0">
+                <a:solidFill>
+                  <a:srgbClr val="1A1A1A"/>
+                </a:solidFill>
+              </a:rPr>
+              <a:t>Tests a single drug across a concentration range to determine potency.</a:t>
+            </a:r>
+          </a:p>
+        </p:txBody>
+      </p:sp>
+      <p:sp>
+        <p:nvSpPr>
+          <p:cNvPr id="12" name="TextBox 11"/>
+          <p:cNvSpPr txBox="1"/>
+          <p:nvPr/>
+        </p:nvSpPr>
+        <p:spPr>
+          <a:xfrm>
+            <a:off x="411479" y="1920240"/>
+            <a:ext cx="1005840" cy="228600"/>
+          </a:xfrm>
+          <a:prstGeom prst="rect">
+            <a:avLst/>
+          </a:prstGeom>
+          <a:noFill/>
+        </p:spPr>
+        <p:txBody>
+          <a:bodyPr wrap="square">
+            <a:spAutoFit/>
+          </a:bodyPr>
+          <a:lstStyle/>
+          <a:p>
+            <a:pPr algn="l"/>
+            <a:r>
+              <a:rPr sz="1000" b="1" i="0">
+                <a:solidFill>
+                  <a:srgbClr val="2E75B6"/>
+                </a:solidFill>
+              </a:rPr>
+              <a:t>Outputs:</a:t>
+            </a:r>
+          </a:p>
+        </p:txBody>
+      </p:sp>
+      <p:sp>
+        <p:nvSpPr>
+          <p:cNvPr id="13" name="TextBox 12"/>
+          <p:cNvSpPr txBox="1"/>
+          <p:nvPr/>
+        </p:nvSpPr>
+        <p:spPr>
+          <a:xfrm>
+            <a:off x="411479" y="2148840"/>
+            <a:ext cx="2606040" cy="1371600"/>
+          </a:xfrm>
+          <a:prstGeom prst="rect">
+            <a:avLst/>
+          </a:prstGeom>
+          <a:noFill/>
+        </p:spPr>
+        <p:txBody>
+          <a:bodyPr wrap="square">
+            <a:spAutoFit/>
+          </a:bodyPr>
+          <a:lstStyle/>
+          <a:p>
+            <a:pPr>
+              <a:spcBef>
+                <a:spcPts val="400"/>
+              </a:spcBef>
+            </a:pPr>
+            <a:r>
+              <a:rPr sz="1000">
+                <a:solidFill>
+                  <a:srgbClr val="1A1A1A"/>
+                </a:solidFill>
+              </a:rPr>
+              <a:t>•  Dose-response curves (sigmoidal fit)</a:t>
+            </a:r>
+          </a:p>
+          <a:p>
+            <a:pPr>
+              <a:spcBef>
+                <a:spcPts val="400"/>
+              </a:spcBef>
+            </a:pPr>
+            <a:r>
+              <a:rPr sz="1000">
+                <a:solidFill>
+                  <a:srgbClr val="1A1A1A"/>
+                </a:solidFill>
+              </a:rPr>
+              <a:t>•  IC₂₅ / IC₅₀ / IC₇₅ values</a:t>
+            </a:r>
+          </a:p>
+          <a:p>
+            <a:pPr>
+              <a:spcBef>
+                <a:spcPts val="400"/>
+              </a:spcBef>
+            </a:pPr>
+            <a:r>
+              <a:rPr sz="1000">
+                <a:solidFill>
+                  <a:srgbClr val="1A1A1A"/>
+                </a:solidFill>
+              </a:rPr>
+              <a:t>•  R² and curve fit statistics</a:t>
+            </a:r>
+          </a:p>
+          <a:p>
+            <a:pPr>
+              <a:spcBef>
+                <a:spcPts val="400"/>
+              </a:spcBef>
+            </a:pPr>
+            <a:r>
+              <a:rPr sz="1000">
+                <a:solidFill>
+                  <a:srgbClr val="1A1A1A"/>
+                </a:solidFill>
+              </a:rPr>
+              <a:t>•  Growth rate over time (multi-TP)</a:t>
+            </a:r>
+          </a:p>
+        </p:txBody>
+      </p:sp>
+      <p:sp>
+        <p:nvSpPr>
+          <p:cNvPr id="14" name="TextBox 13"/>
+          <p:cNvSpPr txBox="1"/>
+          <p:nvPr/>
+        </p:nvSpPr>
+        <p:spPr>
+          <a:xfrm>
+            <a:off x="3200400" y="1920240"/>
+            <a:ext cx="2286000" cy="228600"/>
+          </a:xfrm>
+          <a:prstGeom prst="rect">
+            <a:avLst/>
+          </a:prstGeom>
+          <a:noFill/>
+        </p:spPr>
+        <p:txBody>
+          <a:bodyPr wrap="square">
+            <a:spAutoFit/>
+          </a:bodyPr>
+          <a:lstStyle/>
+          <a:p>
+            <a:pPr algn="l"/>
+            <a:r>
+              <a:rPr sz="1000" b="1" i="0">
+                <a:solidFill>
+                  <a:srgbClr val="2E75B6"/>
+                </a:solidFill>
+              </a:rPr>
+              <a:t>Datasets run:</a:t>
+            </a:r>
+          </a:p>
+        </p:txBody>
+      </p:sp>
+      <p:sp>
+        <p:nvSpPr>
+          <p:cNvPr id="15" name="TextBox 14"/>
+          <p:cNvSpPr txBox="1"/>
+          <p:nvPr/>
+        </p:nvSpPr>
+        <p:spPr>
+          <a:xfrm>
+            <a:off x="3200400" y="2148840"/>
+            <a:ext cx="2651760" cy="1371600"/>
+          </a:xfrm>
+          <a:prstGeom prst="rect">
+            <a:avLst/>
+          </a:prstGeom>
+          <a:noFill/>
+        </p:spPr>
+        <p:txBody>
+          <a:bodyPr wrap="square">
+            <a:spAutoFit/>
+          </a:bodyPr>
+          <a:lstStyle/>
+          <a:p>
+            <a:pPr>
+              <a:spcBef>
+                <a:spcPts val="400"/>
+              </a:spcBef>
+            </a:pPr>
+            <a:r>
+              <a:rPr sz="1000">
+                <a:solidFill>
+                  <a:srgbClr val="1A1A1A"/>
+                </a:solidFill>
+              </a:rPr>
+              <a:t>•  1 time point (72 h endpoint)</a:t>
+            </a:r>
+          </a:p>
+          <a:p>
+            <a:pPr>
+              <a:spcBef>
+                <a:spcPts val="400"/>
+              </a:spcBef>
+            </a:pPr>
+            <a:r>
+              <a:rPr sz="1000">
+                <a:solidFill>
+                  <a:srgbClr val="1A1A1A"/>
+                </a:solidFill>
+              </a:rPr>
+              <a:t>•  37 time points (2 h interval, 74 h total) × 2 variants</a:t>
+            </a:r>
+          </a:p>
+        </p:txBody>
+      </p:sp>
+      <p:sp>
+        <p:nvSpPr>
+          <p:cNvPr id="16" name="Rectangle 15"/>
+          <p:cNvSpPr/>
+          <p:nvPr/>
+        </p:nvSpPr>
+        <p:spPr>
+          <a:xfrm>
+            <a:off x="6263640" y="960120"/>
+            <a:ext cx="5669280" cy="2743200"/>
+          </a:xfrm>
+          <a:prstGeom prst="rect">
+            <a:avLst/>
+          </a:prstGeom>
+          <a:solidFill>
+            <a:srgbClr val="F3EEFA"/>
+          </a:solidFill>
+          <a:ln w="19050">
+            <a:solidFill>
+              <a:srgbClr val="7030A0"/>
+            </a:solidFill>
+          </a:ln>
+        </p:spPr>
+        <p:style>
+          <a:lnRef idx="1">
+            <a:schemeClr val="accent1"/>
+          </a:lnRef>
+          <a:fillRef idx="3">
+            <a:schemeClr val="accent1"/>
+          </a:fillRef>
+          <a:effectRef idx="2">
+            <a:schemeClr val="accent1"/>
+          </a:effectRef>
+          <a:fontRef idx="minor">
+            <a:schemeClr val="lt1"/>
+          </a:fontRef>
+        </p:style>
+        <p:txBody>
+          <a:bodyPr rtlCol="0" anchor="ctr"/>
+          <a:lstStyle/>
+          <a:p>
+            <a:pPr algn="ctr"/>
+          </a:p>
+        </p:txBody>
+      </p:sp>
+      <p:sp>
+        <p:nvSpPr>
+          <p:cNvPr id="17" name="Rectangle 16"/>
+          <p:cNvSpPr/>
+          <p:nvPr/>
+        </p:nvSpPr>
+        <p:spPr>
+          <a:xfrm>
+            <a:off x="6263640" y="960120"/>
+            <a:ext cx="5669280" cy="457200"/>
+          </a:xfrm>
+          <a:prstGeom prst="rect">
+            <a:avLst/>
+          </a:prstGeom>
+          <a:solidFill>
+            <a:srgbClr val="7030A0"/>
+          </a:solidFill>
+          <a:ln>
+            <a:noFill/>
+          </a:ln>
+        </p:spPr>
+        <p:style>
+          <a:lnRef idx="1">
+            <a:schemeClr val="accent1"/>
+          </a:lnRef>
+          <a:fillRef idx="3">
+            <a:schemeClr val="accent1"/>
+          </a:fillRef>
+          <a:effectRef idx="2">
+            <a:schemeClr val="accent1"/>
+          </a:effectRef>
+          <a:fontRef idx="minor">
+            <a:schemeClr val="lt1"/>
+          </a:fontRef>
+        </p:style>
+        <p:txBody>
+          <a:bodyPr rtlCol="0" anchor="ctr"/>
+          <a:lstStyle/>
+          <a:p>
+            <a:pPr algn="ctr"/>
+          </a:p>
+        </p:txBody>
+      </p:sp>
+      <p:sp>
+        <p:nvSpPr>
+          <p:cNvPr id="18" name="TextBox 17"/>
+          <p:cNvSpPr txBox="1"/>
+          <p:nvPr/>
+        </p:nvSpPr>
+        <p:spPr>
+          <a:xfrm>
+            <a:off x="6400800" y="1024128"/>
+            <a:ext cx="4754880" cy="347472"/>
+          </a:xfrm>
+          <a:prstGeom prst="rect">
+            <a:avLst/>
+          </a:prstGeom>
+          <a:noFill/>
+        </p:spPr>
+        <p:txBody>
+          <a:bodyPr wrap="square">
+            <a:spAutoFit/>
+          </a:bodyPr>
+          <a:lstStyle/>
+          <a:p>
+            <a:pPr algn="l"/>
+            <a:r>
+              <a:rPr sz="1600" b="1" i="0">
+                <a:solidFill>
+                  <a:srgbClr val="FFFFFF"/>
+                </a:solidFill>
+              </a:rPr>
+              <a:t>🔬  Drug Combination</a:t>
+            </a:r>
+          </a:p>
+        </p:txBody>
+      </p:sp>
+      <p:sp>
+        <p:nvSpPr>
+          <p:cNvPr id="19" name="Rectangle 18"/>
+          <p:cNvSpPr/>
+          <p:nvPr/>
+        </p:nvSpPr>
+        <p:spPr>
+          <a:xfrm>
+            <a:off x="10195559" y="1042416"/>
+            <a:ext cx="1600200" cy="274320"/>
+          </a:xfrm>
+          <a:prstGeom prst="rect">
+            <a:avLst/>
+          </a:prstGeom>
+          <a:solidFill>
+            <a:srgbClr val="1F8678"/>
+          </a:solidFill>
+          <a:ln>
+            <a:noFill/>
+          </a:ln>
+        </p:spPr>
+        <p:style>
+          <a:lnRef idx="1">
+            <a:schemeClr val="accent1"/>
+          </a:lnRef>
+          <a:fillRef idx="3">
+            <a:schemeClr val="accent1"/>
+          </a:fillRef>
+          <a:effectRef idx="2">
+            <a:schemeClr val="accent1"/>
+          </a:effectRef>
+          <a:fontRef idx="minor">
+            <a:schemeClr val="lt1"/>
+          </a:fontRef>
+        </p:style>
+        <p:txBody>
+          <a:bodyPr rtlCol="0" anchor="ctr"/>
+          <a:lstStyle/>
+          <a:p>
+            <a:pPr algn="ctr"/>
+          </a:p>
+        </p:txBody>
+      </p:sp>
+      <p:sp>
+        <p:nvSpPr>
+          <p:cNvPr id="20" name="TextBox 19"/>
+          <p:cNvSpPr txBox="1"/>
+          <p:nvPr/>
+        </p:nvSpPr>
+        <p:spPr>
+          <a:xfrm>
+            <a:off x="10213848" y="1051560"/>
+            <a:ext cx="1581912" cy="256032"/>
+          </a:xfrm>
+          <a:prstGeom prst="rect">
+            <a:avLst/>
+          </a:prstGeom>
+          <a:noFill/>
+        </p:spPr>
+        <p:txBody>
+          <a:bodyPr wrap="square">
+            <a:spAutoFit/>
+          </a:bodyPr>
+          <a:lstStyle/>
+          <a:p>
+            <a:pPr algn="ctr"/>
+            <a:r>
+              <a:rPr sz="900" b="1" i="0">
+                <a:solidFill>
+                  <a:srgbClr val="FFFFFF"/>
+                </a:solidFill>
+              </a:rPr>
+              <a:t>✅</a:t>
+            </a:r>
+          </a:p>
+        </p:txBody>
+      </p:sp>
+      <p:sp>
+        <p:nvSpPr>
+          <p:cNvPr id="21" name="TextBox 20"/>
+          <p:cNvSpPr txBox="1"/>
+          <p:nvPr/>
+        </p:nvSpPr>
+        <p:spPr>
+          <a:xfrm>
+            <a:off x="6400800" y="1481328"/>
+            <a:ext cx="5349240" cy="384048"/>
+          </a:xfrm>
+          <a:prstGeom prst="rect">
+            <a:avLst/>
+          </a:prstGeom>
+          <a:noFill/>
+        </p:spPr>
+        <p:txBody>
+          <a:bodyPr wrap="square">
+            <a:spAutoFit/>
+          </a:bodyPr>
+          <a:lstStyle/>
+          <a:p>
+            <a:pPr algn="l"/>
+            <a:r>
+              <a:rPr sz="1100" b="0" i="0">
+                <a:solidFill>
+                  <a:srgbClr val="1A1A1A"/>
+                </a:solidFill>
+              </a:rPr>
+              <a:t>Tests two drugs in a 7×7 dose matrix to identify synergy or antagonism.</a:t>
+            </a:r>
+          </a:p>
+        </p:txBody>
+      </p:sp>
+      <p:sp>
+        <p:nvSpPr>
+          <p:cNvPr id="22" name="TextBox 21"/>
+          <p:cNvSpPr txBox="1"/>
+          <p:nvPr/>
+        </p:nvSpPr>
+        <p:spPr>
+          <a:xfrm>
+            <a:off x="6400800" y="1920240"/>
+            <a:ext cx="1005840" cy="228600"/>
+          </a:xfrm>
+          <a:prstGeom prst="rect">
+            <a:avLst/>
+          </a:prstGeom>
+          <a:noFill/>
+        </p:spPr>
+        <p:txBody>
+          <a:bodyPr wrap="square">
+            <a:spAutoFit/>
+          </a:bodyPr>
+          <a:lstStyle/>
+          <a:p>
+            <a:pPr algn="l"/>
+            <a:r>
+              <a:rPr sz="1000" b="1" i="0">
+                <a:solidFill>
+                  <a:srgbClr val="7030A0"/>
+                </a:solidFill>
+              </a:rPr>
+              <a:t>Outputs:</a:t>
+            </a:r>
+          </a:p>
+        </p:txBody>
+      </p:sp>
+      <p:sp>
+        <p:nvSpPr>
+          <p:cNvPr id="23" name="TextBox 22"/>
+          <p:cNvSpPr txBox="1"/>
+          <p:nvPr/>
+        </p:nvSpPr>
+        <p:spPr>
+          <a:xfrm>
+            <a:off x="6400800" y="2148840"/>
+            <a:ext cx="2606040" cy="1371600"/>
+          </a:xfrm>
+          <a:prstGeom prst="rect">
+            <a:avLst/>
+          </a:prstGeom>
+          <a:noFill/>
+        </p:spPr>
+        <p:txBody>
+          <a:bodyPr wrap="square">
+            <a:spAutoFit/>
+          </a:bodyPr>
+          <a:lstStyle/>
+          <a:p>
+            <a:pPr>
+              <a:spcBef>
+                <a:spcPts val="400"/>
+              </a:spcBef>
+            </a:pPr>
+            <a:r>
+              <a:rPr sz="1000">
+                <a:solidFill>
+                  <a:srgbClr val="1A1A1A"/>
+                </a:solidFill>
+              </a:rPr>
+              <a:t>•  Bliss / HSA / ZIP synergy scores per dose pair</a:t>
+            </a:r>
+          </a:p>
+          <a:p>
+            <a:pPr>
+              <a:spcBef>
+                <a:spcPts val="400"/>
+              </a:spcBef>
+            </a:pPr>
+            <a:r>
+              <a:rPr sz="1000">
+                <a:solidFill>
+                  <a:srgbClr val="1A1A1A"/>
+                </a:solidFill>
+              </a:rPr>
+              <a:t>•  Predicted vs. observed effect</a:t>
+            </a:r>
+          </a:p>
+          <a:p>
+            <a:pPr>
+              <a:spcBef>
+                <a:spcPts val="400"/>
+              </a:spcBef>
+            </a:pPr>
+            <a:r>
+              <a:rPr sz="1000">
+                <a:solidFill>
+                  <a:srgbClr val="1A1A1A"/>
+                </a:solidFill>
+              </a:rPr>
+              <a:t>•  Dose-response for each drug alone</a:t>
+            </a:r>
+          </a:p>
+          <a:p>
+            <a:pPr>
+              <a:spcBef>
+                <a:spcPts val="400"/>
+              </a:spcBef>
+            </a:pPr>
+            <a:r>
+              <a:rPr sz="1000">
+                <a:solidFill>
+                  <a:srgbClr val="1A1A1A"/>
+                </a:solidFill>
+              </a:rPr>
+              <a:t>•  Synergy heatmaps (PDF)</a:t>
+            </a:r>
+          </a:p>
+        </p:txBody>
+      </p:sp>
+      <p:sp>
+        <p:nvSpPr>
+          <p:cNvPr id="24" name="TextBox 23"/>
+          <p:cNvSpPr txBox="1"/>
+          <p:nvPr/>
+        </p:nvSpPr>
+        <p:spPr>
+          <a:xfrm>
+            <a:off x="9189720" y="1920240"/>
+            <a:ext cx="2286000" cy="228600"/>
+          </a:xfrm>
+          <a:prstGeom prst="rect">
+            <a:avLst/>
+          </a:prstGeom>
+          <a:noFill/>
+        </p:spPr>
+        <p:txBody>
+          <a:bodyPr wrap="square">
+            <a:spAutoFit/>
+          </a:bodyPr>
+          <a:lstStyle/>
+          <a:p>
+            <a:pPr algn="l"/>
+            <a:r>
+              <a:rPr sz="1000" b="1" i="0">
+                <a:solidFill>
+                  <a:srgbClr val="7030A0"/>
+                </a:solidFill>
+              </a:rPr>
+              <a:t>Datasets run:</a:t>
+            </a:r>
+          </a:p>
+        </p:txBody>
+      </p:sp>
+      <p:sp>
+        <p:nvSpPr>
+          <p:cNvPr id="25" name="TextBox 24"/>
+          <p:cNvSpPr txBox="1"/>
+          <p:nvPr/>
+        </p:nvSpPr>
+        <p:spPr>
+          <a:xfrm>
+            <a:off x="9189720" y="2148840"/>
+            <a:ext cx="2651760" cy="1371600"/>
+          </a:xfrm>
+          <a:prstGeom prst="rect">
+            <a:avLst/>
+          </a:prstGeom>
+          <a:noFill/>
+        </p:spPr>
+        <p:txBody>
+          <a:bodyPr wrap="square">
+            <a:spAutoFit/>
+          </a:bodyPr>
+          <a:lstStyle/>
+          <a:p>
+            <a:pPr>
+              <a:spcBef>
+                <a:spcPts val="400"/>
+              </a:spcBef>
+            </a:pPr>
+            <a:r>
+              <a:rPr sz="1000">
+                <a:solidFill>
+                  <a:srgbClr val="1A1A1A"/>
+                </a:solidFill>
+              </a:rPr>
+              <a:t>•  1 time point</a:t>
+            </a:r>
+          </a:p>
+          <a:p>
+            <a:pPr>
+              <a:spcBef>
+                <a:spcPts val="400"/>
+              </a:spcBef>
+            </a:pPr>
+            <a:r>
+              <a:rPr sz="1000">
+                <a:solidFill>
+                  <a:srgbClr val="1A1A1A"/>
+                </a:solidFill>
+              </a:rPr>
+              <a:t>•  37 time points × 2 variants (incl. repetitive conditions)</a:t>
+            </a:r>
+          </a:p>
+        </p:txBody>
+      </p:sp>
+      <p:sp>
+        <p:nvSpPr>
+          <p:cNvPr id="26" name="Rectangle 25"/>
+          <p:cNvSpPr/>
+          <p:nvPr/>
+        </p:nvSpPr>
+        <p:spPr>
+          <a:xfrm>
+            <a:off x="274320" y="3840480"/>
+            <a:ext cx="5669280" cy="2743200"/>
+          </a:xfrm>
+          <a:prstGeom prst="rect">
+            <a:avLst/>
+          </a:prstGeom>
+          <a:solidFill>
+            <a:srgbClr val="EAF5EA"/>
+          </a:solidFill>
+          <a:ln w="19050">
+            <a:solidFill>
+              <a:srgbClr val="379637"/>
+            </a:solidFill>
+          </a:ln>
+        </p:spPr>
+        <p:style>
+          <a:lnRef idx="1">
+            <a:schemeClr val="accent1"/>
+          </a:lnRef>
+          <a:fillRef idx="3">
+            <a:schemeClr val="accent1"/>
+          </a:fillRef>
+          <a:effectRef idx="2">
+            <a:schemeClr val="accent1"/>
+          </a:effectRef>
+          <a:fontRef idx="minor">
+            <a:schemeClr val="lt1"/>
+          </a:fontRef>
+        </p:style>
+        <p:txBody>
+          <a:bodyPr rtlCol="0" anchor="ctr"/>
+          <a:lstStyle/>
+          <a:p>
+            <a:pPr algn="ctr"/>
+          </a:p>
+        </p:txBody>
+      </p:sp>
+      <p:sp>
+        <p:nvSpPr>
+          <p:cNvPr id="27" name="Rectangle 26"/>
+          <p:cNvSpPr/>
+          <p:nvPr/>
+        </p:nvSpPr>
+        <p:spPr>
+          <a:xfrm>
+            <a:off x="274320" y="3840480"/>
+            <a:ext cx="5669280" cy="457200"/>
+          </a:xfrm>
+          <a:prstGeom prst="rect">
+            <a:avLst/>
+          </a:prstGeom>
+          <a:solidFill>
+            <a:srgbClr val="379637"/>
+          </a:solidFill>
+          <a:ln>
+            <a:noFill/>
+          </a:ln>
+        </p:spPr>
+        <p:style>
+          <a:lnRef idx="1">
+            <a:schemeClr val="accent1"/>
+          </a:lnRef>
+          <a:fillRef idx="3">
+            <a:schemeClr val="accent1"/>
+          </a:fillRef>
+          <a:effectRef idx="2">
+            <a:schemeClr val="accent1"/>
+          </a:effectRef>
+          <a:fontRef idx="minor">
+            <a:schemeClr val="lt1"/>
+          </a:fontRef>
+        </p:style>
+        <p:txBody>
+          <a:bodyPr rtlCol="0" anchor="ctr"/>
+          <a:lstStyle/>
+          <a:p>
+            <a:pPr algn="ctr"/>
+          </a:p>
+        </p:txBody>
+      </p:sp>
+      <p:sp>
+        <p:nvSpPr>
+          <p:cNvPr id="28" name="TextBox 27"/>
+          <p:cNvSpPr txBox="1"/>
+          <p:nvPr/>
+        </p:nvSpPr>
+        <p:spPr>
+          <a:xfrm>
+            <a:off x="411479" y="3904488"/>
+            <a:ext cx="4754880" cy="347472"/>
+          </a:xfrm>
+          <a:prstGeom prst="rect">
+            <a:avLst/>
+          </a:prstGeom>
+          <a:noFill/>
+        </p:spPr>
+        <p:txBody>
+          <a:bodyPr wrap="square">
+            <a:spAutoFit/>
+          </a:bodyPr>
+          <a:lstStyle/>
+          <a:p>
+            <a:pPr algn="l"/>
+            <a:r>
+              <a:rPr sz="1600" b="1" i="0">
+                <a:solidFill>
+                  <a:srgbClr val="FFFFFF"/>
+                </a:solidFill>
+              </a:rPr>
+              <a:t>🧬  Genetic Perturbagen</a:t>
+            </a:r>
+          </a:p>
+        </p:txBody>
+      </p:sp>
+      <p:sp>
+        <p:nvSpPr>
+          <p:cNvPr id="29" name="Rectangle 28"/>
+          <p:cNvSpPr/>
+          <p:nvPr/>
+        </p:nvSpPr>
+        <p:spPr>
+          <a:xfrm>
+            <a:off x="4206240" y="3922776"/>
+            <a:ext cx="1600200" cy="274320"/>
+          </a:xfrm>
+          <a:prstGeom prst="rect">
+            <a:avLst/>
+          </a:prstGeom>
+          <a:solidFill>
+            <a:srgbClr val="1F8678"/>
+          </a:solidFill>
+          <a:ln>
+            <a:noFill/>
+          </a:ln>
+        </p:spPr>
+        <p:style>
+          <a:lnRef idx="1">
+            <a:schemeClr val="accent1"/>
+          </a:lnRef>
+          <a:fillRef idx="3">
+            <a:schemeClr val="accent1"/>
+          </a:fillRef>
+          <a:effectRef idx="2">
+            <a:schemeClr val="accent1"/>
+          </a:effectRef>
+          <a:fontRef idx="minor">
+            <a:schemeClr val="lt1"/>
+          </a:fontRef>
+        </p:style>
+        <p:txBody>
+          <a:bodyPr rtlCol="0" anchor="ctr"/>
+          <a:lstStyle/>
+          <a:p>
+            <a:pPr algn="ctr"/>
+          </a:p>
+        </p:txBody>
+      </p:sp>
+      <p:sp>
+        <p:nvSpPr>
+          <p:cNvPr id="30" name="TextBox 29"/>
+          <p:cNvSpPr txBox="1"/>
+          <p:nvPr/>
+        </p:nvSpPr>
+        <p:spPr>
+          <a:xfrm>
+            <a:off x="4224528" y="3931920"/>
+            <a:ext cx="1581912" cy="256032"/>
+          </a:xfrm>
+          <a:prstGeom prst="rect">
+            <a:avLst/>
+          </a:prstGeom>
+          <a:noFill/>
+        </p:spPr>
+        <p:txBody>
+          <a:bodyPr wrap="square">
+            <a:spAutoFit/>
+          </a:bodyPr>
+          <a:lstStyle/>
+          <a:p>
+            <a:pPr algn="ctr"/>
+            <a:r>
+              <a:rPr sz="900" b="1" i="0">
+                <a:solidFill>
+                  <a:srgbClr val="FFFFFF"/>
+                </a:solidFill>
+              </a:rPr>
+              <a:t>✅</a:t>
+            </a:r>
+          </a:p>
+        </p:txBody>
+      </p:sp>
+      <p:sp>
+        <p:nvSpPr>
+          <p:cNvPr id="31" name="TextBox 30"/>
+          <p:cNvSpPr txBox="1"/>
+          <p:nvPr/>
+        </p:nvSpPr>
+        <p:spPr>
+          <a:xfrm>
+            <a:off x="411479" y="4361688"/>
+            <a:ext cx="5349240" cy="384048"/>
+          </a:xfrm>
+          <a:prstGeom prst="rect">
+            <a:avLst/>
+          </a:prstGeom>
+          <a:noFill/>
+        </p:spPr>
+        <p:txBody>
+          <a:bodyPr wrap="square">
+            <a:spAutoFit/>
+          </a:bodyPr>
+          <a:lstStyle/>
+          <a:p>
+            <a:pPr algn="l"/>
+            <a:r>
+              <a:rPr sz="1100" b="0" i="0">
+                <a:solidFill>
+                  <a:srgbClr val="1A1A1A"/>
+                </a:solidFill>
+              </a:rPr>
+              <a:t>Screens siRNA / shRNA knockdowns to identify genes affecting cell growth.</a:t>
+            </a:r>
+          </a:p>
+        </p:txBody>
+      </p:sp>
+      <p:sp>
+        <p:nvSpPr>
+          <p:cNvPr id="32" name="TextBox 31"/>
+          <p:cNvSpPr txBox="1"/>
+          <p:nvPr/>
+        </p:nvSpPr>
+        <p:spPr>
+          <a:xfrm>
+            <a:off x="411479" y="4800600"/>
+            <a:ext cx="1005840" cy="228600"/>
+          </a:xfrm>
+          <a:prstGeom prst="rect">
+            <a:avLst/>
+          </a:prstGeom>
+          <a:noFill/>
+        </p:spPr>
+        <p:txBody>
+          <a:bodyPr wrap="square">
+            <a:spAutoFit/>
+          </a:bodyPr>
+          <a:lstStyle/>
+          <a:p>
+            <a:pPr algn="l"/>
+            <a:r>
+              <a:rPr sz="1000" b="1" i="0">
+                <a:solidFill>
+                  <a:srgbClr val="379637"/>
+                </a:solidFill>
+              </a:rPr>
+              <a:t>Outputs:</a:t>
+            </a:r>
+          </a:p>
+        </p:txBody>
+      </p:sp>
+      <p:sp>
+        <p:nvSpPr>
+          <p:cNvPr id="33" name="TextBox 32"/>
+          <p:cNvSpPr txBox="1"/>
+          <p:nvPr/>
+        </p:nvSpPr>
+        <p:spPr>
+          <a:xfrm>
+            <a:off x="411479" y="5029200"/>
+            <a:ext cx="2606040" cy="1371600"/>
+          </a:xfrm>
+          <a:prstGeom prst="rect">
+            <a:avLst/>
+          </a:prstGeom>
+          <a:noFill/>
+        </p:spPr>
+        <p:txBody>
+          <a:bodyPr wrap="square">
+            <a:spAutoFit/>
+          </a:bodyPr>
+          <a:lstStyle/>
+          <a:p>
+            <a:pPr>
+              <a:spcBef>
+                <a:spcPts val="400"/>
+              </a:spcBef>
+            </a:pPr>
+            <a:r>
+              <a:rPr sz="1000">
+                <a:solidFill>
+                  <a:srgbClr val="1A1A1A"/>
+                </a:solidFill>
+              </a:rPr>
+              <a:t>•  Normalised confluency per perturbagen vs. control</a:t>
+            </a:r>
+          </a:p>
+          <a:p>
+            <a:pPr>
+              <a:spcBef>
+                <a:spcPts val="400"/>
+              </a:spcBef>
+            </a:pPr>
+            <a:r>
+              <a:rPr sz="1000">
+                <a:solidFill>
+                  <a:srgbClr val="1A1A1A"/>
+                </a:solidFill>
+              </a:rPr>
+              <a:t>•  Growth rate at each time point</a:t>
+            </a:r>
+          </a:p>
+          <a:p>
+            <a:pPr>
+              <a:spcBef>
+                <a:spcPts val="400"/>
+              </a:spcBef>
+            </a:pPr>
+            <a:r>
+              <a:rPr sz="1000">
+                <a:solidFill>
+                  <a:srgbClr val="1A1A1A"/>
+                </a:solidFill>
+              </a:rPr>
+              <a:t>•  Multiple control group support</a:t>
+            </a:r>
+          </a:p>
+        </p:txBody>
+      </p:sp>
+      <p:sp>
+        <p:nvSpPr>
+          <p:cNvPr id="34" name="TextBox 33"/>
+          <p:cNvSpPr txBox="1"/>
+          <p:nvPr/>
+        </p:nvSpPr>
+        <p:spPr>
+          <a:xfrm>
+            <a:off x="3200400" y="4800600"/>
+            <a:ext cx="2286000" cy="228600"/>
+          </a:xfrm>
+          <a:prstGeom prst="rect">
+            <a:avLst/>
+          </a:prstGeom>
+          <a:noFill/>
+        </p:spPr>
+        <p:txBody>
+          <a:bodyPr wrap="square">
+            <a:spAutoFit/>
+          </a:bodyPr>
+          <a:lstStyle/>
+          <a:p>
+            <a:pPr algn="l"/>
+            <a:r>
+              <a:rPr sz="1000" b="1" i="0">
+                <a:solidFill>
+                  <a:srgbClr val="379637"/>
+                </a:solidFill>
+              </a:rPr>
+              <a:t>Datasets run:</a:t>
+            </a:r>
+          </a:p>
+        </p:txBody>
+      </p:sp>
+      <p:sp>
+        <p:nvSpPr>
+          <p:cNvPr id="35" name="TextBox 34"/>
+          <p:cNvSpPr txBox="1"/>
+          <p:nvPr/>
+        </p:nvSpPr>
+        <p:spPr>
+          <a:xfrm>
+            <a:off x="3200400" y="5029200"/>
+            <a:ext cx="2651760" cy="1371600"/>
+          </a:xfrm>
+          <a:prstGeom prst="rect">
+            <a:avLst/>
+          </a:prstGeom>
+          <a:noFill/>
+        </p:spPr>
+        <p:txBody>
+          <a:bodyPr wrap="square">
+            <a:spAutoFit/>
+          </a:bodyPr>
+          <a:lstStyle/>
+          <a:p>
+            <a:pPr>
+              <a:spcBef>
+                <a:spcPts val="400"/>
+              </a:spcBef>
+            </a:pPr>
+            <a:r>
+              <a:rPr sz="1000">
+                <a:solidFill>
+                  <a:srgbClr val="1A1A1A"/>
+                </a:solidFill>
+              </a:rPr>
+              <a:t>•  1 time point, 1 control</a:t>
+            </a:r>
+          </a:p>
+          <a:p>
+            <a:pPr>
+              <a:spcBef>
+                <a:spcPts val="400"/>
+              </a:spcBef>
+            </a:pPr>
+            <a:r>
+              <a:rPr sz="1000">
+                <a:solidFill>
+                  <a:srgbClr val="1A1A1A"/>
+                </a:solidFill>
+              </a:rPr>
+              <a:t>•  23 time points, multiple controls</a:t>
+            </a:r>
+          </a:p>
+        </p:txBody>
+      </p:sp>
+      <p:sp>
+        <p:nvSpPr>
+          <p:cNvPr id="36" name="Rectangle 35"/>
+          <p:cNvSpPr/>
+          <p:nvPr/>
+        </p:nvSpPr>
+        <p:spPr>
+          <a:xfrm>
+            <a:off x="6263640" y="3840480"/>
+            <a:ext cx="5669280" cy="2743200"/>
+          </a:xfrm>
+          <a:prstGeom prst="rect">
+            <a:avLst/>
+          </a:prstGeom>
+          <a:solidFill>
+            <a:srgbClr val="FFF3E8"/>
+          </a:solidFill>
+          <a:ln w="19050">
+            <a:solidFill>
+              <a:srgbClr val="C55A11"/>
+            </a:solidFill>
+          </a:ln>
+        </p:spPr>
+        <p:style>
+          <a:lnRef idx="1">
+            <a:schemeClr val="accent1"/>
+          </a:lnRef>
+          <a:fillRef idx="3">
+            <a:schemeClr val="accent1"/>
+          </a:fillRef>
+          <a:effectRef idx="2">
+            <a:schemeClr val="accent1"/>
+          </a:effectRef>
+          <a:fontRef idx="minor">
+            <a:schemeClr val="lt1"/>
+          </a:fontRef>
+        </p:style>
+        <p:txBody>
+          <a:bodyPr rtlCol="0" anchor="ctr"/>
+          <a:lstStyle/>
+          <a:p>
+            <a:pPr algn="ctr"/>
+          </a:p>
+        </p:txBody>
+      </p:sp>
+      <p:sp>
+        <p:nvSpPr>
+          <p:cNvPr id="37" name="Rectangle 36"/>
+          <p:cNvSpPr/>
+          <p:nvPr/>
+        </p:nvSpPr>
+        <p:spPr>
+          <a:xfrm>
+            <a:off x="6263640" y="3840480"/>
+            <a:ext cx="5669280" cy="457200"/>
+          </a:xfrm>
+          <a:prstGeom prst="rect">
+            <a:avLst/>
+          </a:prstGeom>
+          <a:solidFill>
+            <a:srgbClr val="C55A11"/>
+          </a:solidFill>
+          <a:ln>
+            <a:noFill/>
+          </a:ln>
+        </p:spPr>
+        <p:style>
+          <a:lnRef idx="1">
+            <a:schemeClr val="accent1"/>
+          </a:lnRef>
+          <a:fillRef idx="3">
+            <a:schemeClr val="accent1"/>
+          </a:fillRef>
+          <a:effectRef idx="2">
+            <a:schemeClr val="accent1"/>
+          </a:effectRef>
+          <a:fontRef idx="minor">
+            <a:schemeClr val="lt1"/>
+          </a:fontRef>
+        </p:style>
+        <p:txBody>
+          <a:bodyPr rtlCol="0" anchor="ctr"/>
+          <a:lstStyle/>
+          <a:p>
+            <a:pPr algn="ctr"/>
+          </a:p>
+        </p:txBody>
+      </p:sp>
+      <p:sp>
+        <p:nvSpPr>
+          <p:cNvPr id="38" name="TextBox 37"/>
+          <p:cNvSpPr txBox="1"/>
+          <p:nvPr/>
+        </p:nvSpPr>
+        <p:spPr>
+          <a:xfrm>
+            <a:off x="6400800" y="3904488"/>
+            <a:ext cx="4754880" cy="347472"/>
+          </a:xfrm>
+          <a:prstGeom prst="rect">
+            <a:avLst/>
+          </a:prstGeom>
+          <a:noFill/>
+        </p:spPr>
+        <p:txBody>
+          <a:bodyPr wrap="square">
+            <a:spAutoFit/>
+          </a:bodyPr>
+          <a:lstStyle/>
+          <a:p>
+            <a:pPr algn="l"/>
+            <a:r>
+              <a:rPr sz="1600" b="1" i="0">
+                <a:solidFill>
+                  <a:srgbClr val="FFFFFF"/>
+                </a:solidFill>
+              </a:rPr>
+              <a:t>⚗️  Genetic-Chemical</a:t>
+            </a:r>
+          </a:p>
+        </p:txBody>
+      </p:sp>
+      <p:sp>
+        <p:nvSpPr>
+          <p:cNvPr id="39" name="Rectangle 38"/>
+          <p:cNvSpPr/>
+          <p:nvPr/>
+        </p:nvSpPr>
+        <p:spPr>
+          <a:xfrm>
+            <a:off x="10195559" y="3922776"/>
+            <a:ext cx="1600200" cy="274320"/>
+          </a:xfrm>
+          <a:prstGeom prst="rect">
+            <a:avLst/>
+          </a:prstGeom>
+          <a:solidFill>
+            <a:srgbClr val="C55A11"/>
+          </a:solidFill>
+          <a:ln>
+            <a:noFill/>
+          </a:ln>
+        </p:spPr>
+        <p:style>
+          <a:lnRef idx="1">
+            <a:schemeClr val="accent1"/>
+          </a:lnRef>
+          <a:fillRef idx="3">
+            <a:schemeClr val="accent1"/>
+          </a:fillRef>
+          <a:effectRef idx="2">
+            <a:schemeClr val="accent1"/>
+          </a:effectRef>
+          <a:fontRef idx="minor">
+            <a:schemeClr val="lt1"/>
+          </a:fontRef>
+        </p:style>
+        <p:txBody>
+          <a:bodyPr rtlCol="0" anchor="ctr"/>
+          <a:lstStyle/>
+          <a:p>
+            <a:pPr algn="ctr"/>
+          </a:p>
+        </p:txBody>
+      </p:sp>
+      <p:sp>
+        <p:nvSpPr>
+          <p:cNvPr id="40" name="TextBox 39"/>
+          <p:cNvSpPr txBox="1"/>
+          <p:nvPr/>
+        </p:nvSpPr>
+        <p:spPr>
+          <a:xfrm>
+            <a:off x="10213848" y="3931920"/>
+            <a:ext cx="1581912" cy="256032"/>
+          </a:xfrm>
+          <a:prstGeom prst="rect">
+            <a:avLst/>
+          </a:prstGeom>
+          <a:noFill/>
+        </p:spPr>
+        <p:txBody>
+          <a:bodyPr wrap="square">
+            <a:spAutoFit/>
+          </a:bodyPr>
+          <a:lstStyle/>
+          <a:p>
+            <a:pPr algn="ctr"/>
+            <a:r>
+              <a:rPr sz="900" b="1" i="0">
+                <a:solidFill>
+                  <a:srgbClr val="FFFFFF"/>
+                </a:solidFill>
+              </a:rPr>
+              <a:t>⚠️</a:t>
+            </a:r>
+          </a:p>
+        </p:txBody>
+      </p:sp>
+      <p:sp>
+        <p:nvSpPr>
+          <p:cNvPr id="41" name="TextBox 40"/>
+          <p:cNvSpPr txBox="1"/>
+          <p:nvPr/>
+        </p:nvSpPr>
+        <p:spPr>
+          <a:xfrm>
+            <a:off x="6400800" y="4361688"/>
+            <a:ext cx="5349240" cy="384048"/>
+          </a:xfrm>
+          <a:prstGeom prst="rect">
+            <a:avLst/>
+          </a:prstGeom>
+          <a:noFill/>
+        </p:spPr>
+        <p:txBody>
+          <a:bodyPr wrap="square">
+            <a:spAutoFit/>
+          </a:bodyPr>
+          <a:lstStyle/>
+          <a:p>
+            <a:pPr algn="l"/>
+            <a:r>
+              <a:rPr sz="1100" b="0" i="0">
+                <a:solidFill>
+                  <a:srgbClr val="1A1A1A"/>
+                </a:solidFill>
+              </a:rPr>
+              <a:t>Combines gene knockdown with drug treatment to test gene–drug interactions.</a:t>
+            </a:r>
+          </a:p>
+        </p:txBody>
+      </p:sp>
+      <p:sp>
+        <p:nvSpPr>
+          <p:cNvPr id="42" name="TextBox 41"/>
+          <p:cNvSpPr txBox="1"/>
+          <p:nvPr/>
+        </p:nvSpPr>
+        <p:spPr>
+          <a:xfrm>
+            <a:off x="6400800" y="4800600"/>
+            <a:ext cx="1005840" cy="228600"/>
+          </a:xfrm>
+          <a:prstGeom prst="rect">
+            <a:avLst/>
+          </a:prstGeom>
+          <a:noFill/>
+        </p:spPr>
+        <p:txBody>
+          <a:bodyPr wrap="square">
+            <a:spAutoFit/>
+          </a:bodyPr>
+          <a:lstStyle/>
+          <a:p>
+            <a:pPr algn="l"/>
+            <a:r>
+              <a:rPr sz="1000" b="1" i="0">
+                <a:solidFill>
+                  <a:srgbClr val="C55A11"/>
+                </a:solidFill>
+              </a:rPr>
+              <a:t>Outputs:</a:t>
+            </a:r>
+          </a:p>
+        </p:txBody>
+      </p:sp>
+      <p:sp>
+        <p:nvSpPr>
+          <p:cNvPr id="43" name="TextBox 42"/>
+          <p:cNvSpPr txBox="1"/>
+          <p:nvPr/>
+        </p:nvSpPr>
+        <p:spPr>
+          <a:xfrm>
+            <a:off x="6400800" y="5029200"/>
+            <a:ext cx="2606040" cy="1371600"/>
+          </a:xfrm>
+          <a:prstGeom prst="rect">
+            <a:avLst/>
+          </a:prstGeom>
+          <a:noFill/>
+        </p:spPr>
+        <p:txBody>
+          <a:bodyPr wrap="square">
+            <a:spAutoFit/>
+          </a:bodyPr>
+          <a:lstStyle/>
+          <a:p>
+            <a:pPr>
+              <a:spcBef>
+                <a:spcPts val="400"/>
+              </a:spcBef>
+            </a:pPr>
+            <a:r>
+              <a:rPr sz="1000">
+                <a:solidFill>
+                  <a:srgbClr val="1A1A1A"/>
+                </a:solidFill>
+              </a:rPr>
+              <a:t>•  Normalised activity per gene/drug condition</a:t>
+            </a:r>
+          </a:p>
+          <a:p>
+            <a:pPr>
+              <a:spcBef>
+                <a:spcPts val="400"/>
+              </a:spcBef>
+            </a:pPr>
+            <a:r>
+              <a:rPr sz="1000">
+                <a:solidFill>
+                  <a:srgbClr val="1A1A1A"/>
+                </a:solidFill>
+              </a:rPr>
+              <a:t>•  Synergy scoring between genetic and chemical perturbagens</a:t>
+            </a:r>
+          </a:p>
+          <a:p>
+            <a:pPr>
+              <a:spcBef>
+                <a:spcPts val="400"/>
+              </a:spcBef>
+            </a:pPr>
+            <a:r>
+              <a:rPr sz="1000">
+                <a:solidFill>
+                  <a:srgbClr val="1A1A1A"/>
+                </a:solidFill>
+              </a:rPr>
+              <a:t>•  Growth rates for combined conditions</a:t>
+            </a:r>
+          </a:p>
+        </p:txBody>
+      </p:sp>
+      <p:sp>
+        <p:nvSpPr>
+          <p:cNvPr id="44" name="TextBox 43"/>
+          <p:cNvSpPr txBox="1"/>
+          <p:nvPr/>
+        </p:nvSpPr>
+        <p:spPr>
+          <a:xfrm>
+            <a:off x="9189720" y="4800600"/>
+            <a:ext cx="2286000" cy="228600"/>
+          </a:xfrm>
+          <a:prstGeom prst="rect">
+            <a:avLst/>
+          </a:prstGeom>
+          <a:noFill/>
+        </p:spPr>
+        <p:txBody>
+          <a:bodyPr wrap="square">
+            <a:spAutoFit/>
+          </a:bodyPr>
+          <a:lstStyle/>
+          <a:p>
+            <a:pPr algn="l"/>
+            <a:r>
+              <a:rPr sz="1000" b="1" i="0">
+                <a:solidFill>
+                  <a:srgbClr val="C55A11"/>
+                </a:solidFill>
+              </a:rPr>
+              <a:t>Datasets run:</a:t>
+            </a:r>
+          </a:p>
+        </p:txBody>
+      </p:sp>
+      <p:sp>
+        <p:nvSpPr>
+          <p:cNvPr id="45" name="TextBox 44"/>
+          <p:cNvSpPr txBox="1"/>
+          <p:nvPr/>
+        </p:nvSpPr>
+        <p:spPr>
+          <a:xfrm>
+            <a:off x="9189720" y="5029200"/>
+            <a:ext cx="2651760" cy="1371600"/>
+          </a:xfrm>
+          <a:prstGeom prst="rect">
+            <a:avLst/>
+          </a:prstGeom>
+          <a:noFill/>
+        </p:spPr>
+        <p:txBody>
+          <a:bodyPr wrap="square">
+            <a:spAutoFit/>
+          </a:bodyPr>
+          <a:lstStyle/>
+          <a:p>
+            <a:pPr>
+              <a:spcBef>
+                <a:spcPts val="400"/>
+              </a:spcBef>
+            </a:pPr>
+            <a:r>
+              <a:rPr sz="1000">
+                <a:solidFill>
+                  <a:srgbClr val="1A1A1A"/>
+                </a:solidFill>
+              </a:rPr>
+              <a:t>•  1 time point (53 TP)</a:t>
+            </a:r>
+          </a:p>
+          <a:p>
+            <a:pPr>
+              <a:spcBef>
+                <a:spcPts val="400"/>
+              </a:spcBef>
+            </a:pPr>
+            <a:r>
+              <a:rPr sz="1000">
+                <a:solidFill>
+                  <a:srgbClr val="1A1A1A"/>
+                </a:solidFill>
+              </a:rPr>
+              <a:t>•  Several time points (53 TP)</a:t>
+            </a:r>
+          </a:p>
+        </p:txBody>
+      </p:sp>
+      <p:sp>
+        <p:nvSpPr>
+          <p:cNvPr id="46" name="Rectangle 45"/>
+          <p:cNvSpPr/>
+          <p:nvPr/>
+        </p:nvSpPr>
+        <p:spPr>
+          <a:xfrm>
+            <a:off x="0" y="6656832"/>
+            <a:ext cx="12188952" cy="201168"/>
           </a:xfrm>
           <a:prstGeom prst="rect">
             <a:avLst/>
@@ -3862,14 +5760,14 @@
       </p:sp>
       <p:sp>
         <p:nvSpPr>
-          <p:cNvPr id="6" name="TextBox 5"/>
+          <p:cNvPr id="47" name="TextBox 46"/>
           <p:cNvSpPr txBox="1"/>
           <p:nvPr/>
         </p:nvSpPr>
         <p:spPr>
           <a:xfrm>
-            <a:off x="320040" y="1335024"/>
-            <a:ext cx="1645919" cy="274320"/>
+            <a:off x="10515600" y="6675120"/>
+            <a:ext cx="1554480" cy="182880"/>
           </a:xfrm>
           <a:prstGeom prst="rect">
             <a:avLst/>
@@ -3882,71 +5780,28 @@
           </a:bodyPr>
           <a:lstStyle/>
           <a:p>
-            <a:pPr algn="ctr"/>
-            <a:r>
-              <a:rPr sz="1200" b="1" i="0">
+            <a:pPr algn="r"/>
+            <a:r>
+              <a:rPr sz="900" b="0" i="0">
                 <a:solidFill>
                   <a:srgbClr val="FFFFFF"/>
                 </a:solidFill>
               </a:rPr>
-              <a:t>Drug</a:t>
-            </a:r>
-          </a:p>
-        </p:txBody>
-      </p:sp>
-      <p:sp>
-        <p:nvSpPr>
-          <p:cNvPr id="7" name="Rectangle 6"/>
-          <p:cNvSpPr/>
-          <p:nvPr/>
-        </p:nvSpPr>
-        <p:spPr>
-          <a:xfrm>
-            <a:off x="2011680" y="1298448"/>
-            <a:ext cx="1234440" cy="347472"/>
-          </a:xfrm>
-          <a:prstGeom prst="rect">
-            <a:avLst/>
-          </a:prstGeom>
-          <a:solidFill>
-            <a:srgbClr val="1A375E"/>
-          </a:solidFill>
-          <a:ln>
-            <a:noFill/>
-          </a:ln>
-        </p:spPr>
-        <p:style>
-          <a:lnRef idx="1">
-            <a:schemeClr val="accent1"/>
-          </a:lnRef>
-          <a:fillRef idx="3">
-            <a:schemeClr val="accent1"/>
-          </a:fillRef>
-          <a:effectRef idx="2">
-            <a:schemeClr val="accent1"/>
-          </a:effectRef>
-          <a:fontRef idx="minor">
-            <a:schemeClr val="lt1"/>
-          </a:fontRef>
-        </p:style>
-        <p:txBody>
-          <a:bodyPr rtlCol="0" anchor="ctr"/>
-          <a:lstStyle/>
-          <a:p>
-            <a:pPr algn="ctr"/>
-          </a:p>
-        </p:txBody>
-      </p:sp>
-      <p:sp>
-        <p:nvSpPr>
-          <p:cNvPr id="8" name="TextBox 7"/>
+              <a:t>Slide 2 of 5</a:t>
+            </a:r>
+          </a:p>
+        </p:txBody>
+      </p:sp>
+      <p:sp>
+        <p:nvSpPr>
+          <p:cNvPr id="48" name="TextBox 47"/>
           <p:cNvSpPr txBox="1"/>
           <p:nvPr/>
         </p:nvSpPr>
         <p:spPr>
           <a:xfrm>
-            <a:off x="2057400" y="1335024"/>
-            <a:ext cx="1143000" cy="274320"/>
+            <a:off x="228600" y="6675120"/>
+            <a:ext cx="9144000" cy="182880"/>
           </a:xfrm>
           <a:prstGeom prst="rect">
             <a:avLst/>
@@ -3959,2274 +5814,14 @@
           </a:bodyPr>
           <a:lstStyle/>
           <a:p>
-            <a:pPr algn="ctr"/>
-            <a:r>
-              <a:rPr sz="1200" b="1" i="0">
-                <a:solidFill>
-                  <a:srgbClr val="FFFFFF"/>
-                </a:solidFill>
-              </a:rPr>
-              <a:t>IC₅₀ (nM)</a:t>
-            </a:r>
-          </a:p>
-        </p:txBody>
-      </p:sp>
-      <p:sp>
-        <p:nvSpPr>
-          <p:cNvPr id="9" name="Rectangle 8"/>
-          <p:cNvSpPr/>
-          <p:nvPr/>
-        </p:nvSpPr>
-        <p:spPr>
-          <a:xfrm>
-            <a:off x="3246120" y="1298448"/>
-            <a:ext cx="777240" cy="347472"/>
-          </a:xfrm>
-          <a:prstGeom prst="rect">
-            <a:avLst/>
-          </a:prstGeom>
-          <a:solidFill>
-            <a:srgbClr val="1A375E"/>
-          </a:solidFill>
-          <a:ln>
-            <a:noFill/>
-          </a:ln>
-        </p:spPr>
-        <p:style>
-          <a:lnRef idx="1">
-            <a:schemeClr val="accent1"/>
-          </a:lnRef>
-          <a:fillRef idx="3">
-            <a:schemeClr val="accent1"/>
-          </a:fillRef>
-          <a:effectRef idx="2">
-            <a:schemeClr val="accent1"/>
-          </a:effectRef>
-          <a:fontRef idx="minor">
-            <a:schemeClr val="lt1"/>
-          </a:fontRef>
-        </p:style>
-        <p:txBody>
-          <a:bodyPr rtlCol="0" anchor="ctr"/>
-          <a:lstStyle/>
-          <a:p>
-            <a:pPr algn="ctr"/>
-          </a:p>
-        </p:txBody>
-      </p:sp>
-      <p:sp>
-        <p:nvSpPr>
-          <p:cNvPr id="10" name="TextBox 9"/>
-          <p:cNvSpPr txBox="1"/>
-          <p:nvPr/>
-        </p:nvSpPr>
-        <p:spPr>
-          <a:xfrm>
-            <a:off x="3291839" y="1335024"/>
-            <a:ext cx="685800" cy="274320"/>
-          </a:xfrm>
-          <a:prstGeom prst="rect">
-            <a:avLst/>
-          </a:prstGeom>
-          <a:noFill/>
-        </p:spPr>
-        <p:txBody>
-          <a:bodyPr wrap="square">
-            <a:spAutoFit/>
-          </a:bodyPr>
-          <a:lstStyle/>
-          <a:p>
-            <a:pPr algn="ctr"/>
-            <a:r>
-              <a:rPr sz="1200" b="1" i="0">
-                <a:solidFill>
-                  <a:srgbClr val="FFFFFF"/>
-                </a:solidFill>
-              </a:rPr>
-              <a:t>R²</a:t>
-            </a:r>
-          </a:p>
-        </p:txBody>
-      </p:sp>
-      <p:sp>
-        <p:nvSpPr>
-          <p:cNvPr id="11" name="Rectangle 10"/>
-          <p:cNvSpPr/>
-          <p:nvPr/>
-        </p:nvSpPr>
-        <p:spPr>
-          <a:xfrm>
-            <a:off x="4023360" y="1298448"/>
-            <a:ext cx="1188720" cy="347472"/>
-          </a:xfrm>
-          <a:prstGeom prst="rect">
-            <a:avLst/>
-          </a:prstGeom>
-          <a:solidFill>
-            <a:srgbClr val="1A375E"/>
-          </a:solidFill>
-          <a:ln>
-            <a:noFill/>
-          </a:ln>
-        </p:spPr>
-        <p:style>
-          <a:lnRef idx="1">
-            <a:schemeClr val="accent1"/>
-          </a:lnRef>
-          <a:fillRef idx="3">
-            <a:schemeClr val="accent1"/>
-          </a:fillRef>
-          <a:effectRef idx="2">
-            <a:schemeClr val="accent1"/>
-          </a:effectRef>
-          <a:fontRef idx="minor">
-            <a:schemeClr val="lt1"/>
-          </a:fontRef>
-        </p:style>
-        <p:txBody>
-          <a:bodyPr rtlCol="0" anchor="ctr"/>
-          <a:lstStyle/>
-          <a:p>
-            <a:pPr algn="ctr"/>
-          </a:p>
-        </p:txBody>
-      </p:sp>
-      <p:sp>
-        <p:nvSpPr>
-          <p:cNvPr id="12" name="TextBox 11"/>
-          <p:cNvSpPr txBox="1"/>
-          <p:nvPr/>
-        </p:nvSpPr>
-        <p:spPr>
-          <a:xfrm>
-            <a:off x="4069080" y="1335024"/>
-            <a:ext cx="1097280" cy="274320"/>
-          </a:xfrm>
-          <a:prstGeom prst="rect">
-            <a:avLst/>
-          </a:prstGeom>
-          <a:noFill/>
-        </p:spPr>
-        <p:txBody>
-          <a:bodyPr wrap="square">
-            <a:spAutoFit/>
-          </a:bodyPr>
-          <a:lstStyle/>
-          <a:p>
-            <a:pPr algn="ctr"/>
-            <a:r>
-              <a:rPr sz="1200" b="1" i="0">
-                <a:solidFill>
-                  <a:srgbClr val="FFFFFF"/>
-                </a:solidFill>
-              </a:rPr>
-              <a:t>Fit</a:t>
-            </a:r>
-          </a:p>
-        </p:txBody>
-      </p:sp>
-      <p:sp>
-        <p:nvSpPr>
-          <p:cNvPr id="13" name="Rectangle 12"/>
-          <p:cNvSpPr/>
-          <p:nvPr/>
-        </p:nvSpPr>
-        <p:spPr>
-          <a:xfrm>
-            <a:off x="274320" y="1645920"/>
-            <a:ext cx="1737360" cy="475488"/>
-          </a:xfrm>
-          <a:prstGeom prst="rect">
-            <a:avLst/>
-          </a:prstGeom>
-          <a:solidFill>
-            <a:srgbClr val="E2EFDA"/>
-          </a:solidFill>
-          <a:ln w="6350">
-            <a:solidFill>
-              <a:srgbClr val="CCCCCC"/>
-            </a:solidFill>
-          </a:ln>
-        </p:spPr>
-        <p:style>
-          <a:lnRef idx="1">
-            <a:schemeClr val="accent1"/>
-          </a:lnRef>
-          <a:fillRef idx="3">
-            <a:schemeClr val="accent1"/>
-          </a:fillRef>
-          <a:effectRef idx="2">
-            <a:schemeClr val="accent1"/>
-          </a:effectRef>
-          <a:fontRef idx="minor">
-            <a:schemeClr val="lt1"/>
-          </a:fontRef>
-        </p:style>
-        <p:txBody>
-          <a:bodyPr rtlCol="0" anchor="ctr"/>
-          <a:lstStyle/>
-          <a:p>
-            <a:pPr algn="ctr"/>
-          </a:p>
-        </p:txBody>
-      </p:sp>
-      <p:sp>
-        <p:nvSpPr>
-          <p:cNvPr id="14" name="TextBox 13"/>
-          <p:cNvSpPr txBox="1"/>
-          <p:nvPr/>
-        </p:nvSpPr>
-        <p:spPr>
-          <a:xfrm>
-            <a:off x="329184" y="1719072"/>
-            <a:ext cx="1645919" cy="347472"/>
-          </a:xfrm>
-          <a:prstGeom prst="rect">
-            <a:avLst/>
-          </a:prstGeom>
-          <a:noFill/>
-        </p:spPr>
-        <p:txBody>
-          <a:bodyPr wrap="square">
-            <a:spAutoFit/>
-          </a:bodyPr>
-          <a:lstStyle/>
-          <a:p>
             <a:pPr algn="l"/>
             <a:r>
-              <a:rPr sz="1200" b="1" i="0">
-                <a:solidFill>
-                  <a:srgbClr val="379637"/>
-                </a:solidFill>
-              </a:rPr>
-              <a:t>Prexasertib</a:t>
-            </a:r>
-          </a:p>
-        </p:txBody>
-      </p:sp>
-      <p:sp>
-        <p:nvSpPr>
-          <p:cNvPr id="15" name="Rectangle 14"/>
-          <p:cNvSpPr/>
-          <p:nvPr/>
-        </p:nvSpPr>
-        <p:spPr>
-          <a:xfrm>
-            <a:off x="2011680" y="1645920"/>
-            <a:ext cx="1234440" cy="475488"/>
-          </a:xfrm>
-          <a:prstGeom prst="rect">
-            <a:avLst/>
-          </a:prstGeom>
-          <a:solidFill>
-            <a:srgbClr val="E2EFDA"/>
-          </a:solidFill>
-          <a:ln w="6350">
-            <a:solidFill>
-              <a:srgbClr val="CCCCCC"/>
-            </a:solidFill>
-          </a:ln>
-        </p:spPr>
-        <p:style>
-          <a:lnRef idx="1">
-            <a:schemeClr val="accent1"/>
-          </a:lnRef>
-          <a:fillRef idx="3">
-            <a:schemeClr val="accent1"/>
-          </a:fillRef>
-          <a:effectRef idx="2">
-            <a:schemeClr val="accent1"/>
-          </a:effectRef>
-          <a:fontRef idx="minor">
-            <a:schemeClr val="lt1"/>
-          </a:fontRef>
-        </p:style>
-        <p:txBody>
-          <a:bodyPr rtlCol="0" anchor="ctr"/>
-          <a:lstStyle/>
-          <a:p>
-            <a:pPr algn="ctr"/>
-          </a:p>
-        </p:txBody>
-      </p:sp>
-      <p:sp>
-        <p:nvSpPr>
-          <p:cNvPr id="16" name="TextBox 15"/>
-          <p:cNvSpPr txBox="1"/>
-          <p:nvPr/>
-        </p:nvSpPr>
-        <p:spPr>
-          <a:xfrm>
-            <a:off x="2066544" y="1719072"/>
-            <a:ext cx="1143000" cy="347472"/>
-          </a:xfrm>
-          <a:prstGeom prst="rect">
-            <a:avLst/>
-          </a:prstGeom>
-          <a:noFill/>
-        </p:spPr>
-        <p:txBody>
-          <a:bodyPr wrap="square">
-            <a:spAutoFit/>
-          </a:bodyPr>
-          <a:lstStyle/>
-          <a:p>
-            <a:pPr algn="ctr"/>
-            <a:r>
-              <a:rPr sz="1300" b="0" i="0">
-                <a:solidFill>
-                  <a:srgbClr val="1A1A1A"/>
-                </a:solidFill>
-              </a:rPr>
-              <a:t>9.98</a:t>
-            </a:r>
-          </a:p>
-        </p:txBody>
-      </p:sp>
-      <p:sp>
-        <p:nvSpPr>
-          <p:cNvPr id="17" name="Rectangle 16"/>
-          <p:cNvSpPr/>
-          <p:nvPr/>
-        </p:nvSpPr>
-        <p:spPr>
-          <a:xfrm>
-            <a:off x="3246120" y="1645920"/>
-            <a:ext cx="777240" cy="475488"/>
-          </a:xfrm>
-          <a:prstGeom prst="rect">
-            <a:avLst/>
-          </a:prstGeom>
-          <a:solidFill>
-            <a:srgbClr val="E2EFDA"/>
-          </a:solidFill>
-          <a:ln w="6350">
-            <a:solidFill>
-              <a:srgbClr val="CCCCCC"/>
-            </a:solidFill>
-          </a:ln>
-        </p:spPr>
-        <p:style>
-          <a:lnRef idx="1">
-            <a:schemeClr val="accent1"/>
-          </a:lnRef>
-          <a:fillRef idx="3">
-            <a:schemeClr val="accent1"/>
-          </a:fillRef>
-          <a:effectRef idx="2">
-            <a:schemeClr val="accent1"/>
-          </a:effectRef>
-          <a:fontRef idx="minor">
-            <a:schemeClr val="lt1"/>
-          </a:fontRef>
-        </p:style>
-        <p:txBody>
-          <a:bodyPr rtlCol="0" anchor="ctr"/>
-          <a:lstStyle/>
-          <a:p>
-            <a:pPr algn="ctr"/>
-          </a:p>
-        </p:txBody>
-      </p:sp>
-      <p:sp>
-        <p:nvSpPr>
-          <p:cNvPr id="18" name="TextBox 17"/>
-          <p:cNvSpPr txBox="1"/>
-          <p:nvPr/>
-        </p:nvSpPr>
-        <p:spPr>
-          <a:xfrm>
-            <a:off x="3300984" y="1719072"/>
-            <a:ext cx="685800" cy="347472"/>
-          </a:xfrm>
-          <a:prstGeom prst="rect">
-            <a:avLst/>
-          </a:prstGeom>
-          <a:noFill/>
-        </p:spPr>
-        <p:txBody>
-          <a:bodyPr wrap="square">
-            <a:spAutoFit/>
-          </a:bodyPr>
-          <a:lstStyle/>
-          <a:p>
-            <a:pPr algn="ctr"/>
-            <a:r>
-              <a:rPr sz="1200" b="0" i="0">
-                <a:solidFill>
-                  <a:srgbClr val="1A1A1A"/>
-                </a:solidFill>
-              </a:rPr>
-              <a:t>0.967</a:t>
-            </a:r>
-          </a:p>
-        </p:txBody>
-      </p:sp>
-      <p:sp>
-        <p:nvSpPr>
-          <p:cNvPr id="19" name="Rectangle 18"/>
-          <p:cNvSpPr/>
-          <p:nvPr/>
-        </p:nvSpPr>
-        <p:spPr>
-          <a:xfrm>
-            <a:off x="4023360" y="1645920"/>
-            <a:ext cx="1188720" cy="475488"/>
-          </a:xfrm>
-          <a:prstGeom prst="rect">
-            <a:avLst/>
-          </a:prstGeom>
-          <a:solidFill>
-            <a:srgbClr val="E2EFDA"/>
-          </a:solidFill>
-          <a:ln w="6350">
-            <a:solidFill>
-              <a:srgbClr val="CCCCCC"/>
-            </a:solidFill>
-          </a:ln>
-        </p:spPr>
-        <p:style>
-          <a:lnRef idx="1">
-            <a:schemeClr val="accent1"/>
-          </a:lnRef>
-          <a:fillRef idx="3">
-            <a:schemeClr val="accent1"/>
-          </a:fillRef>
-          <a:effectRef idx="2">
-            <a:schemeClr val="accent1"/>
-          </a:effectRef>
-          <a:fontRef idx="minor">
-            <a:schemeClr val="lt1"/>
-          </a:fontRef>
-        </p:style>
-        <p:txBody>
-          <a:bodyPr rtlCol="0" anchor="ctr"/>
-          <a:lstStyle/>
-          <a:p>
-            <a:pPr algn="ctr"/>
-          </a:p>
-        </p:txBody>
-      </p:sp>
-      <p:sp>
-        <p:nvSpPr>
-          <p:cNvPr id="20" name="TextBox 19"/>
-          <p:cNvSpPr txBox="1"/>
-          <p:nvPr/>
-        </p:nvSpPr>
-        <p:spPr>
-          <a:xfrm>
-            <a:off x="4078224" y="1719072"/>
-            <a:ext cx="1097280" cy="347472"/>
-          </a:xfrm>
-          <a:prstGeom prst="rect">
-            <a:avLst/>
-          </a:prstGeom>
-          <a:noFill/>
-        </p:spPr>
-        <p:txBody>
-          <a:bodyPr wrap="square">
-            <a:spAutoFit/>
-          </a:bodyPr>
-          <a:lstStyle/>
-          <a:p>
-            <a:pPr algn="ctr"/>
-            <a:r>
-              <a:rPr sz="1200" b="0" i="0">
-                <a:solidFill>
-                  <a:srgbClr val="1A1A1A"/>
-                </a:solidFill>
-              </a:rPr>
-              <a:t>Good</a:t>
-            </a:r>
-          </a:p>
-        </p:txBody>
-      </p:sp>
-      <p:sp>
-        <p:nvSpPr>
-          <p:cNvPr id="21" name="Rectangle 20"/>
-          <p:cNvSpPr/>
-          <p:nvPr/>
-        </p:nvSpPr>
-        <p:spPr>
-          <a:xfrm>
-            <a:off x="274320" y="2148840"/>
-            <a:ext cx="1737360" cy="475488"/>
-          </a:xfrm>
-          <a:prstGeom prst="rect">
-            <a:avLst/>
-          </a:prstGeom>
-          <a:solidFill>
-            <a:srgbClr val="F2F2F2"/>
-          </a:solidFill>
-          <a:ln w="6350">
-            <a:solidFill>
-              <a:srgbClr val="CCCCCC"/>
-            </a:solidFill>
-          </a:ln>
-        </p:spPr>
-        <p:style>
-          <a:lnRef idx="1">
-            <a:schemeClr val="accent1"/>
-          </a:lnRef>
-          <a:fillRef idx="3">
-            <a:schemeClr val="accent1"/>
-          </a:fillRef>
-          <a:effectRef idx="2">
-            <a:schemeClr val="accent1"/>
-          </a:effectRef>
-          <a:fontRef idx="minor">
-            <a:schemeClr val="lt1"/>
-          </a:fontRef>
-        </p:style>
-        <p:txBody>
-          <a:bodyPr rtlCol="0" anchor="ctr"/>
-          <a:lstStyle/>
-          <a:p>
-            <a:pPr algn="ctr"/>
-          </a:p>
-        </p:txBody>
-      </p:sp>
-      <p:sp>
-        <p:nvSpPr>
-          <p:cNvPr id="22" name="TextBox 21"/>
-          <p:cNvSpPr txBox="1"/>
-          <p:nvPr/>
-        </p:nvSpPr>
-        <p:spPr>
-          <a:xfrm>
-            <a:off x="329184" y="2221992"/>
-            <a:ext cx="1645919" cy="347472"/>
-          </a:xfrm>
-          <a:prstGeom prst="rect">
-            <a:avLst/>
-          </a:prstGeom>
-          <a:noFill/>
-        </p:spPr>
-        <p:txBody>
-          <a:bodyPr wrap="square">
-            <a:spAutoFit/>
-          </a:bodyPr>
-          <a:lstStyle/>
-          <a:p>
-            <a:pPr algn="l"/>
-            <a:r>
-              <a:rPr sz="1200" b="1" i="0">
-                <a:solidFill>
-                  <a:srgbClr val="1A1A1A"/>
-                </a:solidFill>
-              </a:rPr>
-              <a:t>BAY1895344</a:t>
-            </a:r>
-          </a:p>
-        </p:txBody>
-      </p:sp>
-      <p:sp>
-        <p:nvSpPr>
-          <p:cNvPr id="23" name="Rectangle 22"/>
-          <p:cNvSpPr/>
-          <p:nvPr/>
-        </p:nvSpPr>
-        <p:spPr>
-          <a:xfrm>
-            <a:off x="2011680" y="2148840"/>
-            <a:ext cx="1234440" cy="475488"/>
-          </a:xfrm>
-          <a:prstGeom prst="rect">
-            <a:avLst/>
-          </a:prstGeom>
-          <a:solidFill>
-            <a:srgbClr val="F2F2F2"/>
-          </a:solidFill>
-          <a:ln w="6350">
-            <a:solidFill>
-              <a:srgbClr val="CCCCCC"/>
-            </a:solidFill>
-          </a:ln>
-        </p:spPr>
-        <p:style>
-          <a:lnRef idx="1">
-            <a:schemeClr val="accent1"/>
-          </a:lnRef>
-          <a:fillRef idx="3">
-            <a:schemeClr val="accent1"/>
-          </a:fillRef>
-          <a:effectRef idx="2">
-            <a:schemeClr val="accent1"/>
-          </a:effectRef>
-          <a:fontRef idx="minor">
-            <a:schemeClr val="lt1"/>
-          </a:fontRef>
-        </p:style>
-        <p:txBody>
-          <a:bodyPr rtlCol="0" anchor="ctr"/>
-          <a:lstStyle/>
-          <a:p>
-            <a:pPr algn="ctr"/>
-          </a:p>
-        </p:txBody>
-      </p:sp>
-      <p:sp>
-        <p:nvSpPr>
-          <p:cNvPr id="24" name="TextBox 23"/>
-          <p:cNvSpPr txBox="1"/>
-          <p:nvPr/>
-        </p:nvSpPr>
-        <p:spPr>
-          <a:xfrm>
-            <a:off x="2066544" y="2221992"/>
-            <a:ext cx="1143000" cy="347472"/>
-          </a:xfrm>
-          <a:prstGeom prst="rect">
-            <a:avLst/>
-          </a:prstGeom>
-          <a:noFill/>
-        </p:spPr>
-        <p:txBody>
-          <a:bodyPr wrap="square">
-            <a:spAutoFit/>
-          </a:bodyPr>
-          <a:lstStyle/>
-          <a:p>
-            <a:pPr algn="ctr"/>
-            <a:r>
-              <a:rPr sz="1300" b="0" i="0">
-                <a:solidFill>
-                  <a:srgbClr val="1A1A1A"/>
-                </a:solidFill>
-              </a:rPr>
-              <a:t>272.87</a:t>
-            </a:r>
-          </a:p>
-        </p:txBody>
-      </p:sp>
-      <p:sp>
-        <p:nvSpPr>
-          <p:cNvPr id="25" name="Rectangle 24"/>
-          <p:cNvSpPr/>
-          <p:nvPr/>
-        </p:nvSpPr>
-        <p:spPr>
-          <a:xfrm>
-            <a:off x="3246120" y="2148840"/>
-            <a:ext cx="777240" cy="475488"/>
-          </a:xfrm>
-          <a:prstGeom prst="rect">
-            <a:avLst/>
-          </a:prstGeom>
-          <a:solidFill>
-            <a:srgbClr val="F2F2F2"/>
-          </a:solidFill>
-          <a:ln w="6350">
-            <a:solidFill>
-              <a:srgbClr val="CCCCCC"/>
-            </a:solidFill>
-          </a:ln>
-        </p:spPr>
-        <p:style>
-          <a:lnRef idx="1">
-            <a:schemeClr val="accent1"/>
-          </a:lnRef>
-          <a:fillRef idx="3">
-            <a:schemeClr val="accent1"/>
-          </a:fillRef>
-          <a:effectRef idx="2">
-            <a:schemeClr val="accent1"/>
-          </a:effectRef>
-          <a:fontRef idx="minor">
-            <a:schemeClr val="lt1"/>
-          </a:fontRef>
-        </p:style>
-        <p:txBody>
-          <a:bodyPr rtlCol="0" anchor="ctr"/>
-          <a:lstStyle/>
-          <a:p>
-            <a:pPr algn="ctr"/>
-          </a:p>
-        </p:txBody>
-      </p:sp>
-      <p:sp>
-        <p:nvSpPr>
-          <p:cNvPr id="26" name="TextBox 25"/>
-          <p:cNvSpPr txBox="1"/>
-          <p:nvPr/>
-        </p:nvSpPr>
-        <p:spPr>
-          <a:xfrm>
-            <a:off x="3300984" y="2221992"/>
-            <a:ext cx="685800" cy="347472"/>
-          </a:xfrm>
-          <a:prstGeom prst="rect">
-            <a:avLst/>
-          </a:prstGeom>
-          <a:noFill/>
-        </p:spPr>
-        <p:txBody>
-          <a:bodyPr wrap="square">
-            <a:spAutoFit/>
-          </a:bodyPr>
-          <a:lstStyle/>
-          <a:p>
-            <a:pPr algn="ctr"/>
-            <a:r>
-              <a:rPr sz="1200" b="0" i="0">
-                <a:solidFill>
-                  <a:srgbClr val="1A1A1A"/>
-                </a:solidFill>
-              </a:rPr>
-              <a:t>0.957</a:t>
-            </a:r>
-          </a:p>
-        </p:txBody>
-      </p:sp>
-      <p:sp>
-        <p:nvSpPr>
-          <p:cNvPr id="27" name="Rectangle 26"/>
-          <p:cNvSpPr/>
-          <p:nvPr/>
-        </p:nvSpPr>
-        <p:spPr>
-          <a:xfrm>
-            <a:off x="4023360" y="2148840"/>
-            <a:ext cx="1188720" cy="475488"/>
-          </a:xfrm>
-          <a:prstGeom prst="rect">
-            <a:avLst/>
-          </a:prstGeom>
-          <a:solidFill>
-            <a:srgbClr val="F2F2F2"/>
-          </a:solidFill>
-          <a:ln w="6350">
-            <a:solidFill>
-              <a:srgbClr val="CCCCCC"/>
-            </a:solidFill>
-          </a:ln>
-        </p:spPr>
-        <p:style>
-          <a:lnRef idx="1">
-            <a:schemeClr val="accent1"/>
-          </a:lnRef>
-          <a:fillRef idx="3">
-            <a:schemeClr val="accent1"/>
-          </a:fillRef>
-          <a:effectRef idx="2">
-            <a:schemeClr val="accent1"/>
-          </a:effectRef>
-          <a:fontRef idx="minor">
-            <a:schemeClr val="lt1"/>
-          </a:fontRef>
-        </p:style>
-        <p:txBody>
-          <a:bodyPr rtlCol="0" anchor="ctr"/>
-          <a:lstStyle/>
-          <a:p>
-            <a:pPr algn="ctr"/>
-          </a:p>
-        </p:txBody>
-      </p:sp>
-      <p:sp>
-        <p:nvSpPr>
-          <p:cNvPr id="28" name="TextBox 27"/>
-          <p:cNvSpPr txBox="1"/>
-          <p:nvPr/>
-        </p:nvSpPr>
-        <p:spPr>
-          <a:xfrm>
-            <a:off x="4078224" y="2221992"/>
-            <a:ext cx="1097280" cy="347472"/>
-          </a:xfrm>
-          <a:prstGeom prst="rect">
-            <a:avLst/>
-          </a:prstGeom>
-          <a:noFill/>
-        </p:spPr>
-        <p:txBody>
-          <a:bodyPr wrap="square">
-            <a:spAutoFit/>
-          </a:bodyPr>
-          <a:lstStyle/>
-          <a:p>
-            <a:pPr algn="ctr"/>
-            <a:r>
-              <a:rPr sz="1200" b="0" i="0">
-                <a:solidFill>
-                  <a:srgbClr val="1A1A1A"/>
-                </a:solidFill>
-              </a:rPr>
-              <a:t>Good</a:t>
-            </a:r>
-          </a:p>
-        </p:txBody>
-      </p:sp>
-      <p:sp>
-        <p:nvSpPr>
-          <p:cNvPr id="29" name="Rectangle 28"/>
-          <p:cNvSpPr/>
-          <p:nvPr/>
-        </p:nvSpPr>
-        <p:spPr>
-          <a:xfrm>
-            <a:off x="274320" y="2651760"/>
-            <a:ext cx="1737360" cy="475488"/>
-          </a:xfrm>
-          <a:prstGeom prst="rect">
-            <a:avLst/>
-          </a:prstGeom>
-          <a:solidFill>
-            <a:srgbClr val="FFFFFF"/>
-          </a:solidFill>
-          <a:ln w="6350">
-            <a:solidFill>
-              <a:srgbClr val="CCCCCC"/>
-            </a:solidFill>
-          </a:ln>
-        </p:spPr>
-        <p:style>
-          <a:lnRef idx="1">
-            <a:schemeClr val="accent1"/>
-          </a:lnRef>
-          <a:fillRef idx="3">
-            <a:schemeClr val="accent1"/>
-          </a:fillRef>
-          <a:effectRef idx="2">
-            <a:schemeClr val="accent1"/>
-          </a:effectRef>
-          <a:fontRef idx="minor">
-            <a:schemeClr val="lt1"/>
-          </a:fontRef>
-        </p:style>
-        <p:txBody>
-          <a:bodyPr rtlCol="0" anchor="ctr"/>
-          <a:lstStyle/>
-          <a:p>
-            <a:pPr algn="ctr"/>
-          </a:p>
-        </p:txBody>
-      </p:sp>
-      <p:sp>
-        <p:nvSpPr>
-          <p:cNvPr id="30" name="TextBox 29"/>
-          <p:cNvSpPr txBox="1"/>
-          <p:nvPr/>
-        </p:nvSpPr>
-        <p:spPr>
-          <a:xfrm>
-            <a:off x="329184" y="2724912"/>
-            <a:ext cx="1645919" cy="347472"/>
-          </a:xfrm>
-          <a:prstGeom prst="rect">
-            <a:avLst/>
-          </a:prstGeom>
-          <a:noFill/>
-        </p:spPr>
-        <p:txBody>
-          <a:bodyPr wrap="square">
-            <a:spAutoFit/>
-          </a:bodyPr>
-          <a:lstStyle/>
-          <a:p>
-            <a:pPr algn="l"/>
-            <a:r>
-              <a:rPr sz="1200" b="1" i="0">
-                <a:solidFill>
-                  <a:srgbClr val="1A1A1A"/>
-                </a:solidFill>
-              </a:rPr>
-              <a:t>MK-1775</a:t>
-            </a:r>
-          </a:p>
-        </p:txBody>
-      </p:sp>
-      <p:sp>
-        <p:nvSpPr>
-          <p:cNvPr id="31" name="Rectangle 30"/>
-          <p:cNvSpPr/>
-          <p:nvPr/>
-        </p:nvSpPr>
-        <p:spPr>
-          <a:xfrm>
-            <a:off x="2011680" y="2651760"/>
-            <a:ext cx="1234440" cy="475488"/>
-          </a:xfrm>
-          <a:prstGeom prst="rect">
-            <a:avLst/>
-          </a:prstGeom>
-          <a:solidFill>
-            <a:srgbClr val="FFFFFF"/>
-          </a:solidFill>
-          <a:ln w="6350">
-            <a:solidFill>
-              <a:srgbClr val="CCCCCC"/>
-            </a:solidFill>
-          </a:ln>
-        </p:spPr>
-        <p:style>
-          <a:lnRef idx="1">
-            <a:schemeClr val="accent1"/>
-          </a:lnRef>
-          <a:fillRef idx="3">
-            <a:schemeClr val="accent1"/>
-          </a:fillRef>
-          <a:effectRef idx="2">
-            <a:schemeClr val="accent1"/>
-          </a:effectRef>
-          <a:fontRef idx="minor">
-            <a:schemeClr val="lt1"/>
-          </a:fontRef>
-        </p:style>
-        <p:txBody>
-          <a:bodyPr rtlCol="0" anchor="ctr"/>
-          <a:lstStyle/>
-          <a:p>
-            <a:pPr algn="ctr"/>
-          </a:p>
-        </p:txBody>
-      </p:sp>
-      <p:sp>
-        <p:nvSpPr>
-          <p:cNvPr id="32" name="TextBox 31"/>
-          <p:cNvSpPr txBox="1"/>
-          <p:nvPr/>
-        </p:nvSpPr>
-        <p:spPr>
-          <a:xfrm>
-            <a:off x="2066544" y="2724912"/>
-            <a:ext cx="1143000" cy="347472"/>
-          </a:xfrm>
-          <a:prstGeom prst="rect">
-            <a:avLst/>
-          </a:prstGeom>
-          <a:noFill/>
-        </p:spPr>
-        <p:txBody>
-          <a:bodyPr wrap="square">
-            <a:spAutoFit/>
-          </a:bodyPr>
-          <a:lstStyle/>
-          <a:p>
-            <a:pPr algn="ctr"/>
-            <a:r>
-              <a:rPr sz="1300" b="0" i="0">
-                <a:solidFill>
-                  <a:srgbClr val="1A1A1A"/>
-                </a:solidFill>
-              </a:rPr>
-              <a:t>657.30</a:t>
-            </a:r>
-          </a:p>
-        </p:txBody>
-      </p:sp>
-      <p:sp>
-        <p:nvSpPr>
-          <p:cNvPr id="33" name="Rectangle 32"/>
-          <p:cNvSpPr/>
-          <p:nvPr/>
-        </p:nvSpPr>
-        <p:spPr>
-          <a:xfrm>
-            <a:off x="3246120" y="2651760"/>
-            <a:ext cx="777240" cy="475488"/>
-          </a:xfrm>
-          <a:prstGeom prst="rect">
-            <a:avLst/>
-          </a:prstGeom>
-          <a:solidFill>
-            <a:srgbClr val="FFFFFF"/>
-          </a:solidFill>
-          <a:ln w="6350">
-            <a:solidFill>
-              <a:srgbClr val="CCCCCC"/>
-            </a:solidFill>
-          </a:ln>
-        </p:spPr>
-        <p:style>
-          <a:lnRef idx="1">
-            <a:schemeClr val="accent1"/>
-          </a:lnRef>
-          <a:fillRef idx="3">
-            <a:schemeClr val="accent1"/>
-          </a:fillRef>
-          <a:effectRef idx="2">
-            <a:schemeClr val="accent1"/>
-          </a:effectRef>
-          <a:fontRef idx="minor">
-            <a:schemeClr val="lt1"/>
-          </a:fontRef>
-        </p:style>
-        <p:txBody>
-          <a:bodyPr rtlCol="0" anchor="ctr"/>
-          <a:lstStyle/>
-          <a:p>
-            <a:pPr algn="ctr"/>
-          </a:p>
-        </p:txBody>
-      </p:sp>
-      <p:sp>
-        <p:nvSpPr>
-          <p:cNvPr id="34" name="TextBox 33"/>
-          <p:cNvSpPr txBox="1"/>
-          <p:nvPr/>
-        </p:nvSpPr>
-        <p:spPr>
-          <a:xfrm>
-            <a:off x="3300984" y="2724912"/>
-            <a:ext cx="685800" cy="347472"/>
-          </a:xfrm>
-          <a:prstGeom prst="rect">
-            <a:avLst/>
-          </a:prstGeom>
-          <a:noFill/>
-        </p:spPr>
-        <p:txBody>
-          <a:bodyPr wrap="square">
-            <a:spAutoFit/>
-          </a:bodyPr>
-          <a:lstStyle/>
-          <a:p>
-            <a:pPr algn="ctr"/>
-            <a:r>
-              <a:rPr sz="1200" b="0" i="0">
-                <a:solidFill>
-                  <a:srgbClr val="1A1A1A"/>
-                </a:solidFill>
-              </a:rPr>
-              <a:t>0.989</a:t>
-            </a:r>
-          </a:p>
-        </p:txBody>
-      </p:sp>
-      <p:sp>
-        <p:nvSpPr>
-          <p:cNvPr id="35" name="Rectangle 34"/>
-          <p:cNvSpPr/>
-          <p:nvPr/>
-        </p:nvSpPr>
-        <p:spPr>
-          <a:xfrm>
-            <a:off x="4023360" y="2651760"/>
-            <a:ext cx="1188720" cy="475488"/>
-          </a:xfrm>
-          <a:prstGeom prst="rect">
-            <a:avLst/>
-          </a:prstGeom>
-          <a:solidFill>
-            <a:srgbClr val="FFFFFF"/>
-          </a:solidFill>
-          <a:ln w="6350">
-            <a:solidFill>
-              <a:srgbClr val="CCCCCC"/>
-            </a:solidFill>
-          </a:ln>
-        </p:spPr>
-        <p:style>
-          <a:lnRef idx="1">
-            <a:schemeClr val="accent1"/>
-          </a:lnRef>
-          <a:fillRef idx="3">
-            <a:schemeClr val="accent1"/>
-          </a:fillRef>
-          <a:effectRef idx="2">
-            <a:schemeClr val="accent1"/>
-          </a:effectRef>
-          <a:fontRef idx="minor">
-            <a:schemeClr val="lt1"/>
-          </a:fontRef>
-        </p:style>
-        <p:txBody>
-          <a:bodyPr rtlCol="0" anchor="ctr"/>
-          <a:lstStyle/>
-          <a:p>
-            <a:pPr algn="ctr"/>
-          </a:p>
-        </p:txBody>
-      </p:sp>
-      <p:sp>
-        <p:nvSpPr>
-          <p:cNvPr id="36" name="TextBox 35"/>
-          <p:cNvSpPr txBox="1"/>
-          <p:nvPr/>
-        </p:nvSpPr>
-        <p:spPr>
-          <a:xfrm>
-            <a:off x="4078224" y="2724912"/>
-            <a:ext cx="1097280" cy="347472"/>
-          </a:xfrm>
-          <a:prstGeom prst="rect">
-            <a:avLst/>
-          </a:prstGeom>
-          <a:noFill/>
-        </p:spPr>
-        <p:txBody>
-          <a:bodyPr wrap="square">
-            <a:spAutoFit/>
-          </a:bodyPr>
-          <a:lstStyle/>
-          <a:p>
-            <a:pPr algn="ctr"/>
-            <a:r>
-              <a:rPr sz="1200" b="0" i="0">
-                <a:solidFill>
-                  <a:srgbClr val="1A1A1A"/>
-                </a:solidFill>
-              </a:rPr>
-              <a:t>Excellent</a:t>
-            </a:r>
-          </a:p>
-        </p:txBody>
-      </p:sp>
-      <p:sp>
-        <p:nvSpPr>
-          <p:cNvPr id="37" name="Rectangle 36"/>
-          <p:cNvSpPr/>
-          <p:nvPr/>
-        </p:nvSpPr>
-        <p:spPr>
-          <a:xfrm>
-            <a:off x="4572000" y="1673352"/>
-            <a:ext cx="1371600" cy="347472"/>
-          </a:xfrm>
-          <a:prstGeom prst="rect">
-            <a:avLst/>
-          </a:prstGeom>
-          <a:solidFill>
-            <a:srgbClr val="379637"/>
-          </a:solidFill>
-          <a:ln>
-            <a:noFill/>
-          </a:ln>
-        </p:spPr>
-        <p:style>
-          <a:lnRef idx="1">
-            <a:schemeClr val="accent1"/>
-          </a:lnRef>
-          <a:fillRef idx="3">
-            <a:schemeClr val="accent1"/>
-          </a:fillRef>
-          <a:effectRef idx="2">
-            <a:schemeClr val="accent1"/>
-          </a:effectRef>
-          <a:fontRef idx="minor">
-            <a:schemeClr val="lt1"/>
-          </a:fontRef>
-        </p:style>
-        <p:txBody>
-          <a:bodyPr rtlCol="0" anchor="ctr"/>
-          <a:lstStyle/>
-          <a:p>
-            <a:pPr algn="ctr"/>
-          </a:p>
-        </p:txBody>
-      </p:sp>
-      <p:sp>
-        <p:nvSpPr>
-          <p:cNvPr id="38" name="TextBox 37"/>
-          <p:cNvSpPr txBox="1"/>
-          <p:nvPr/>
-        </p:nvSpPr>
-        <p:spPr>
-          <a:xfrm>
-            <a:off x="4590288" y="1691640"/>
-            <a:ext cx="1335024" cy="310896"/>
-          </a:xfrm>
-          <a:prstGeom prst="rect">
-            <a:avLst/>
-          </a:prstGeom>
-          <a:noFill/>
-        </p:spPr>
-        <p:txBody>
-          <a:bodyPr wrap="square">
-            <a:spAutoFit/>
-          </a:bodyPr>
-          <a:lstStyle/>
-          <a:p>
-            <a:pPr algn="ctr"/>
-            <a:r>
-              <a:rPr sz="1000" b="1" i="0">
-                <a:solidFill>
-                  <a:srgbClr val="FFFFFF"/>
-                </a:solidFill>
-              </a:rPr>
-              <a:t>★ Most Potent</a:t>
-            </a:r>
-          </a:p>
-        </p:txBody>
-      </p:sp>
-      <p:sp>
-        <p:nvSpPr>
-          <p:cNvPr id="39" name="Rectangle 38"/>
-          <p:cNvSpPr/>
-          <p:nvPr/>
-        </p:nvSpPr>
-        <p:spPr>
-          <a:xfrm>
-            <a:off x="274320" y="3200400"/>
-            <a:ext cx="5212080" cy="502920"/>
-          </a:xfrm>
-          <a:prstGeom prst="rect">
-            <a:avLst/>
-          </a:prstGeom>
-          <a:solidFill>
-            <a:srgbClr val="EFF4FB"/>
-          </a:solidFill>
-          <a:ln w="12700">
-            <a:solidFill>
-              <a:srgbClr val="2E75B6"/>
-            </a:solidFill>
-          </a:ln>
-        </p:spPr>
-        <p:style>
-          <a:lnRef idx="1">
-            <a:schemeClr val="accent1"/>
-          </a:lnRef>
-          <a:fillRef idx="3">
-            <a:schemeClr val="accent1"/>
-          </a:fillRef>
-          <a:effectRef idx="2">
-            <a:schemeClr val="accent1"/>
-          </a:effectRef>
-          <a:fontRef idx="minor">
-            <a:schemeClr val="lt1"/>
-          </a:fontRef>
-        </p:style>
-        <p:txBody>
-          <a:bodyPr rtlCol="0" anchor="ctr"/>
-          <a:lstStyle/>
-          <a:p>
-            <a:pPr algn="ctr"/>
-          </a:p>
-        </p:txBody>
-      </p:sp>
-      <p:sp>
-        <p:nvSpPr>
-          <p:cNvPr id="40" name="TextBox 39"/>
-          <p:cNvSpPr txBox="1"/>
-          <p:nvPr/>
-        </p:nvSpPr>
-        <p:spPr>
-          <a:xfrm>
-            <a:off x="365760" y="3246120"/>
-            <a:ext cx="5029200" cy="411480"/>
-          </a:xfrm>
-          <a:prstGeom prst="rect">
-            <a:avLst/>
-          </a:prstGeom>
-          <a:noFill/>
-        </p:spPr>
-        <p:txBody>
-          <a:bodyPr wrap="square">
-            <a:spAutoFit/>
-          </a:bodyPr>
-          <a:lstStyle/>
-          <a:p>
-            <a:pPr algn="l"/>
-            <a:r>
-              <a:rPr sz="1000" b="0" i="0">
-                <a:solidFill>
-                  <a:srgbClr val="1A375E"/>
-                </a:solidFill>
-              </a:rPr>
-              <a:t>📈  Multi-timepoint datasets (37 time points, 74 h) also analysed — IC values and growth rates computed at each time point, showing potency increases over time for all three drugs.</a:t>
-            </a:r>
-          </a:p>
-        </p:txBody>
-      </p:sp>
-      <p:sp>
-        <p:nvSpPr>
-          <p:cNvPr id="41" name="Rectangle 40"/>
-          <p:cNvSpPr/>
-          <p:nvPr/>
-        </p:nvSpPr>
-        <p:spPr>
-          <a:xfrm>
-            <a:off x="274320" y="3794760"/>
-            <a:ext cx="5212080" cy="2560320"/>
-          </a:xfrm>
-          <a:prstGeom prst="rect">
-            <a:avLst/>
-          </a:prstGeom>
-          <a:solidFill>
-            <a:srgbClr val="F5F9FF"/>
-          </a:solidFill>
-          <a:ln w="12700">
-            <a:solidFill>
-              <a:srgbClr val="2E75B6"/>
-            </a:solidFill>
-          </a:ln>
-        </p:spPr>
-        <p:style>
-          <a:lnRef idx="1">
-            <a:schemeClr val="accent1"/>
-          </a:lnRef>
-          <a:fillRef idx="3">
-            <a:schemeClr val="accent1"/>
-          </a:fillRef>
-          <a:effectRef idx="2">
-            <a:schemeClr val="accent1"/>
-          </a:effectRef>
-          <a:fontRef idx="minor">
-            <a:schemeClr val="lt1"/>
-          </a:fontRef>
-        </p:style>
-        <p:txBody>
-          <a:bodyPr rtlCol="0" anchor="ctr"/>
-          <a:lstStyle/>
-          <a:p>
-            <a:pPr algn="ctr"/>
-          </a:p>
-        </p:txBody>
-      </p:sp>
-      <p:sp>
-        <p:nvSpPr>
-          <p:cNvPr id="42" name="TextBox 41"/>
-          <p:cNvSpPr txBox="1"/>
-          <p:nvPr/>
-        </p:nvSpPr>
-        <p:spPr>
-          <a:xfrm>
-            <a:off x="457200" y="3858768"/>
-            <a:ext cx="3657600" cy="320040"/>
-          </a:xfrm>
-          <a:prstGeom prst="rect">
-            <a:avLst/>
-          </a:prstGeom>
-          <a:noFill/>
-        </p:spPr>
-        <p:txBody>
-          <a:bodyPr wrap="square">
-            <a:spAutoFit/>
-          </a:bodyPr>
-          <a:lstStyle/>
-          <a:p>
-            <a:pPr algn="l"/>
-            <a:r>
-              <a:rPr sz="1400" b="1" i="0">
-                <a:solidFill>
-                  <a:srgbClr val="1A375E"/>
-                </a:solidFill>
-              </a:rPr>
-              <a:t>Key Takeaways</a:t>
-            </a:r>
-          </a:p>
-        </p:txBody>
-      </p:sp>
-      <p:sp>
-        <p:nvSpPr>
-          <p:cNvPr id="43" name="TextBox 42"/>
-          <p:cNvSpPr txBox="1"/>
-          <p:nvPr/>
-        </p:nvSpPr>
-        <p:spPr>
-          <a:xfrm>
-            <a:off x="457200" y="4233672"/>
-            <a:ext cx="4846320" cy="2011680"/>
-          </a:xfrm>
-          <a:prstGeom prst="rect">
-            <a:avLst/>
-          </a:prstGeom>
-          <a:noFill/>
-        </p:spPr>
-        <p:txBody>
-          <a:bodyPr wrap="square">
-            <a:spAutoFit/>
-          </a:bodyPr>
-          <a:lstStyle/>
-          <a:p>
-            <a:pPr>
-              <a:spcBef>
-                <a:spcPts val="500"/>
-              </a:spcBef>
-            </a:pPr>
-            <a:r>
-              <a:rPr sz="1100">
-                <a:solidFill>
-                  <a:srgbClr val="1A1A1A"/>
-                </a:solidFill>
-              </a:rPr>
-              <a:t>▶  Prexasertib is ~27× more potent than BAY1895344 and ~66× more potent than MK-1775 in MCF7 cells.</a:t>
-            </a:r>
-          </a:p>
-          <a:p>
-            <a:pPr>
-              <a:spcBef>
-                <a:spcPts val="500"/>
-              </a:spcBef>
-            </a:pPr>
-            <a:r>
-              <a:rPr sz="1100">
-                <a:solidFill>
-                  <a:srgbClr val="1A1A1A"/>
-                </a:solidFill>
-              </a:rPr>
-              <a:t>▶  Prexasertib's curve plateaus at ~40–50% inhibition — did not reach full inhibition across the tested range.</a:t>
-            </a:r>
-          </a:p>
-          <a:p>
-            <a:pPr>
-              <a:spcBef>
-                <a:spcPts val="500"/>
-              </a:spcBef>
-            </a:pPr>
-            <a:r>
-              <a:rPr sz="1100">
-                <a:solidFill>
-                  <a:srgbClr val="1A1A1A"/>
-                </a:solidFill>
-              </a:rPr>
-              <a:t>▶  MK-1775 has the best curve fit (R² = 0.989), indicating a clean sigmoidal dose-response.</a:t>
-            </a:r>
-          </a:p>
-          <a:p>
-            <a:pPr>
-              <a:spcBef>
-                <a:spcPts val="500"/>
-              </a:spcBef>
-            </a:pPr>
-            <a:r>
-              <a:rPr sz="1100">
-                <a:solidFill>
-                  <a:srgbClr val="1A1A1A"/>
-                </a:solidFill>
-              </a:rPr>
-              <a:t>▶  Growth rate analysis (multi-timepoint) confirms sustained inhibition with increasing effect over 74 h.</a:t>
-            </a:r>
-          </a:p>
-        </p:txBody>
-      </p:sp>
-      <p:sp>
-        <p:nvSpPr>
-          <p:cNvPr id="44" name="TextBox 43"/>
-          <p:cNvSpPr txBox="1"/>
-          <p:nvPr/>
-        </p:nvSpPr>
-        <p:spPr>
-          <a:xfrm>
-            <a:off x="5806440" y="914400"/>
-            <a:ext cx="6035040" cy="347472"/>
-          </a:xfrm>
-          <a:prstGeom prst="rect">
-            <a:avLst/>
-          </a:prstGeom>
-          <a:noFill/>
-        </p:spPr>
-        <p:txBody>
-          <a:bodyPr wrap="square">
-            <a:spAutoFit/>
-          </a:bodyPr>
-          <a:lstStyle/>
-          <a:p>
-            <a:pPr algn="l"/>
-            <a:r>
-              <a:rPr sz="1400" b="1" i="0">
-                <a:solidFill>
-                  <a:srgbClr val="1A375E"/>
-                </a:solidFill>
-              </a:rPr>
-              <a:t>Drug Combination Synergy  —  Bliss Model</a:t>
-            </a:r>
-          </a:p>
-        </p:txBody>
-      </p:sp>
-      <p:sp>
-        <p:nvSpPr>
-          <p:cNvPr id="45" name="Rectangle 44"/>
-          <p:cNvSpPr/>
-          <p:nvPr/>
-        </p:nvSpPr>
-        <p:spPr>
-          <a:xfrm>
-            <a:off x="5806440" y="1298448"/>
-            <a:ext cx="6035040" cy="1737360"/>
-          </a:xfrm>
-          <a:prstGeom prst="rect">
-            <a:avLst/>
-          </a:prstGeom>
-          <a:solidFill>
-            <a:srgbClr val="E2EFDA"/>
-          </a:solidFill>
-          <a:ln w="12700">
-            <a:solidFill>
-              <a:srgbClr val="379637"/>
-            </a:solidFill>
-          </a:ln>
-        </p:spPr>
-        <p:style>
-          <a:lnRef idx="1">
-            <a:schemeClr val="accent1"/>
-          </a:lnRef>
-          <a:fillRef idx="3">
-            <a:schemeClr val="accent1"/>
-          </a:fillRef>
-          <a:effectRef idx="2">
-            <a:schemeClr val="accent1"/>
-          </a:effectRef>
-          <a:fontRef idx="minor">
-            <a:schemeClr val="lt1"/>
-          </a:fontRef>
-        </p:style>
-        <p:txBody>
-          <a:bodyPr rtlCol="0" anchor="ctr"/>
-          <a:lstStyle/>
-          <a:p>
-            <a:pPr algn="ctr"/>
-          </a:p>
-        </p:txBody>
-      </p:sp>
-      <p:sp>
-        <p:nvSpPr>
-          <p:cNvPr id="46" name="TextBox 45"/>
-          <p:cNvSpPr txBox="1"/>
-          <p:nvPr/>
-        </p:nvSpPr>
-        <p:spPr>
-          <a:xfrm>
-            <a:off x="5943600" y="1371600"/>
-            <a:ext cx="4389120" cy="320040"/>
-          </a:xfrm>
-          <a:prstGeom prst="rect">
-            <a:avLst/>
-          </a:prstGeom>
-          <a:noFill/>
-        </p:spPr>
-        <p:txBody>
-          <a:bodyPr wrap="square">
-            <a:spAutoFit/>
-          </a:bodyPr>
-          <a:lstStyle/>
-          <a:p>
-            <a:pPr algn="l"/>
-            <a:r>
-              <a:rPr sz="1300" b="1" i="0">
-                <a:solidFill>
-                  <a:srgbClr val="1A375E"/>
-                </a:solidFill>
-              </a:rPr>
-              <a:t>MK-1775  +  Prexasertib</a:t>
-            </a:r>
-          </a:p>
-        </p:txBody>
-      </p:sp>
-      <p:sp>
-        <p:nvSpPr>
-          <p:cNvPr id="47" name="Rectangle 46"/>
-          <p:cNvSpPr/>
-          <p:nvPr/>
-        </p:nvSpPr>
-        <p:spPr>
-          <a:xfrm>
-            <a:off x="10332720" y="1371600"/>
-            <a:ext cx="1371600" cy="320040"/>
-          </a:xfrm>
-          <a:prstGeom prst="rect">
-            <a:avLst/>
-          </a:prstGeom>
-          <a:solidFill>
-            <a:srgbClr val="379637"/>
-          </a:solidFill>
-          <a:ln>
-            <a:noFill/>
-          </a:ln>
-        </p:spPr>
-        <p:style>
-          <a:lnRef idx="1">
-            <a:schemeClr val="accent1"/>
-          </a:lnRef>
-          <a:fillRef idx="3">
-            <a:schemeClr val="accent1"/>
-          </a:fillRef>
-          <a:effectRef idx="2">
-            <a:schemeClr val="accent1"/>
-          </a:effectRef>
-          <a:fontRef idx="minor">
-            <a:schemeClr val="lt1"/>
-          </a:fontRef>
-        </p:style>
-        <p:txBody>
-          <a:bodyPr rtlCol="0" anchor="ctr"/>
-          <a:lstStyle/>
-          <a:p>
-            <a:pPr algn="ctr"/>
-          </a:p>
-        </p:txBody>
-      </p:sp>
-      <p:sp>
-        <p:nvSpPr>
-          <p:cNvPr id="48" name="TextBox 47"/>
-          <p:cNvSpPr txBox="1"/>
-          <p:nvPr/>
-        </p:nvSpPr>
-        <p:spPr>
-          <a:xfrm>
-            <a:off x="10341864" y="1389888"/>
-            <a:ext cx="1353312" cy="274320"/>
-          </a:xfrm>
-          <a:prstGeom prst="rect">
-            <a:avLst/>
-          </a:prstGeom>
-          <a:noFill/>
-        </p:spPr>
-        <p:txBody>
-          <a:bodyPr wrap="square">
-            <a:spAutoFit/>
-          </a:bodyPr>
-          <a:lstStyle/>
-          <a:p>
-            <a:pPr algn="ctr"/>
-            <a:r>
-              <a:rPr sz="900" b="1" i="0">
-                <a:solidFill>
-                  <a:srgbClr val="FFFFFF"/>
-                </a:solidFill>
-              </a:rPr>
-              <a:t>SYNERGISTIC</a:t>
-            </a:r>
-          </a:p>
-        </p:txBody>
-      </p:sp>
-      <p:sp>
-        <p:nvSpPr>
-          <p:cNvPr id="49" name="TextBox 48"/>
-          <p:cNvSpPr txBox="1"/>
-          <p:nvPr/>
-        </p:nvSpPr>
-        <p:spPr>
-          <a:xfrm>
-            <a:off x="5943600" y="1773936"/>
-            <a:ext cx="5669280" cy="1188720"/>
-          </a:xfrm>
-          <a:prstGeom prst="rect">
-            <a:avLst/>
-          </a:prstGeom>
-          <a:noFill/>
-        </p:spPr>
-        <p:txBody>
-          <a:bodyPr wrap="square">
-            <a:spAutoFit/>
-          </a:bodyPr>
-          <a:lstStyle/>
-          <a:p>
-            <a:pPr>
-              <a:spcBef>
-                <a:spcPts val="300"/>
-              </a:spcBef>
-            </a:pPr>
-            <a:r>
-              <a:rPr sz="1100">
-                <a:solidFill>
-                  <a:srgbClr val="1A1A1A"/>
-                </a:solidFill>
-              </a:rPr>
-              <a:t>•  Max Bliss: +0.56  (MK-1775 1235 nM + Prexasertib 4.7 nM)</a:t>
-            </a:r>
-          </a:p>
-          <a:p>
-            <a:pPr>
-              <a:spcBef>
-                <a:spcPts val="300"/>
-              </a:spcBef>
-            </a:pPr>
-            <a:r>
-              <a:rPr sz="1100">
-                <a:solidFill>
-                  <a:srgbClr val="1A1A1A"/>
-                </a:solidFill>
-              </a:rPr>
-              <a:t>•  Strong synergy at mid-range MK-1775 (137–1235 nM) with low Prexasertib</a:t>
-            </a:r>
-          </a:p>
-          <a:p>
-            <a:pPr>
-              <a:spcBef>
-                <a:spcPts val="300"/>
-              </a:spcBef>
-            </a:pPr>
-            <a:r>
-              <a:rPr sz="1100">
-                <a:solidFill>
-                  <a:srgbClr val="1A1A1A"/>
-                </a:solidFill>
-              </a:rPr>
-              <a:t>•  Effect diminishes at saturating MK-1775 doses — ceiling effect</a:t>
-            </a:r>
-          </a:p>
-        </p:txBody>
-      </p:sp>
-      <p:sp>
-        <p:nvSpPr>
-          <p:cNvPr id="50" name="Rectangle 49"/>
-          <p:cNvSpPr/>
-          <p:nvPr/>
-        </p:nvSpPr>
-        <p:spPr>
-          <a:xfrm>
-            <a:off x="5806440" y="3246120"/>
-            <a:ext cx="6035040" cy="1737360"/>
-          </a:xfrm>
-          <a:prstGeom prst="rect">
-            <a:avLst/>
-          </a:prstGeom>
-          <a:solidFill>
-            <a:srgbClr val="FFF3E8"/>
-          </a:solidFill>
-          <a:ln w="12700">
-            <a:solidFill>
-              <a:srgbClr val="C55A11"/>
-            </a:solidFill>
-          </a:ln>
-        </p:spPr>
-        <p:style>
-          <a:lnRef idx="1">
-            <a:schemeClr val="accent1"/>
-          </a:lnRef>
-          <a:fillRef idx="3">
-            <a:schemeClr val="accent1"/>
-          </a:fillRef>
-          <a:effectRef idx="2">
-            <a:schemeClr val="accent1"/>
-          </a:effectRef>
-          <a:fontRef idx="minor">
-            <a:schemeClr val="lt1"/>
-          </a:fontRef>
-        </p:style>
-        <p:txBody>
-          <a:bodyPr rtlCol="0" anchor="ctr"/>
-          <a:lstStyle/>
-          <a:p>
-            <a:pPr algn="ctr"/>
-          </a:p>
-        </p:txBody>
-      </p:sp>
-      <p:sp>
-        <p:nvSpPr>
-          <p:cNvPr id="51" name="TextBox 50"/>
-          <p:cNvSpPr txBox="1"/>
-          <p:nvPr/>
-        </p:nvSpPr>
-        <p:spPr>
-          <a:xfrm>
-            <a:off x="5943600" y="3319272"/>
-            <a:ext cx="4389120" cy="320040"/>
-          </a:xfrm>
-          <a:prstGeom prst="rect">
-            <a:avLst/>
-          </a:prstGeom>
-          <a:noFill/>
-        </p:spPr>
-        <p:txBody>
-          <a:bodyPr wrap="square">
-            <a:spAutoFit/>
-          </a:bodyPr>
-          <a:lstStyle/>
-          <a:p>
-            <a:pPr algn="l"/>
-            <a:r>
-              <a:rPr sz="1300" b="1" i="0">
-                <a:solidFill>
-                  <a:srgbClr val="1A375E"/>
-                </a:solidFill>
-              </a:rPr>
-              <a:t>MK-1775  +  BAY1895344</a:t>
-            </a:r>
-          </a:p>
-        </p:txBody>
-      </p:sp>
-      <p:sp>
-        <p:nvSpPr>
-          <p:cNvPr id="52" name="Rectangle 51"/>
-          <p:cNvSpPr/>
-          <p:nvPr/>
-        </p:nvSpPr>
-        <p:spPr>
-          <a:xfrm>
-            <a:off x="10332720" y="3319272"/>
-            <a:ext cx="1371600" cy="320040"/>
-          </a:xfrm>
-          <a:prstGeom prst="rect">
-            <a:avLst/>
-          </a:prstGeom>
-          <a:solidFill>
-            <a:srgbClr val="C55A11"/>
-          </a:solidFill>
-          <a:ln>
-            <a:noFill/>
-          </a:ln>
-        </p:spPr>
-        <p:style>
-          <a:lnRef idx="1">
-            <a:schemeClr val="accent1"/>
-          </a:lnRef>
-          <a:fillRef idx="3">
-            <a:schemeClr val="accent1"/>
-          </a:fillRef>
-          <a:effectRef idx="2">
-            <a:schemeClr val="accent1"/>
-          </a:effectRef>
-          <a:fontRef idx="minor">
-            <a:schemeClr val="lt1"/>
-          </a:fontRef>
-        </p:style>
-        <p:txBody>
-          <a:bodyPr rtlCol="0" anchor="ctr"/>
-          <a:lstStyle/>
-          <a:p>
-            <a:pPr algn="ctr"/>
-          </a:p>
-        </p:txBody>
-      </p:sp>
-      <p:sp>
-        <p:nvSpPr>
-          <p:cNvPr id="53" name="TextBox 52"/>
-          <p:cNvSpPr txBox="1"/>
-          <p:nvPr/>
-        </p:nvSpPr>
-        <p:spPr>
-          <a:xfrm>
-            <a:off x="10341864" y="3337560"/>
-            <a:ext cx="1353312" cy="274320"/>
-          </a:xfrm>
-          <a:prstGeom prst="rect">
-            <a:avLst/>
-          </a:prstGeom>
-          <a:noFill/>
-        </p:spPr>
-        <p:txBody>
-          <a:bodyPr wrap="square">
-            <a:spAutoFit/>
-          </a:bodyPr>
-          <a:lstStyle/>
-          <a:p>
-            <a:pPr algn="ctr"/>
-            <a:r>
-              <a:rPr sz="900" b="1" i="0">
-                <a:solidFill>
-                  <a:srgbClr val="FFFFFF"/>
-                </a:solidFill>
-              </a:rPr>
-              <a:t>WEAK / ADDITIVE</a:t>
-            </a:r>
-          </a:p>
-        </p:txBody>
-      </p:sp>
-      <p:sp>
-        <p:nvSpPr>
-          <p:cNvPr id="54" name="TextBox 53"/>
-          <p:cNvSpPr txBox="1"/>
-          <p:nvPr/>
-        </p:nvSpPr>
-        <p:spPr>
-          <a:xfrm>
-            <a:off x="5943600" y="3721608"/>
-            <a:ext cx="5669280" cy="1188720"/>
-          </a:xfrm>
-          <a:prstGeom prst="rect">
-            <a:avLst/>
-          </a:prstGeom>
-          <a:noFill/>
-        </p:spPr>
-        <p:txBody>
-          <a:bodyPr wrap="square">
-            <a:spAutoFit/>
-          </a:bodyPr>
-          <a:lstStyle/>
-          <a:p>
-            <a:pPr>
-              <a:spcBef>
-                <a:spcPts val="300"/>
-              </a:spcBef>
-            </a:pPr>
-            <a:r>
-              <a:rPr sz="1100">
-                <a:solidFill>
-                  <a:srgbClr val="1A1A1A"/>
-                </a:solidFill>
-              </a:rPr>
-              <a:t>•  Max Bliss: +0.42  (MK-1775 137 nM + BAY1895344 167 nM)</a:t>
-            </a:r>
-          </a:p>
-          <a:p>
-            <a:pPr>
-              <a:spcBef>
-                <a:spcPts val="300"/>
-              </a:spcBef>
-            </a:pPr>
-            <a:r>
-              <a:rPr sz="1100">
-                <a:solidFill>
-                  <a:srgbClr val="1A1A1A"/>
-                </a:solidFill>
-              </a:rPr>
-              <a:t>•  Most scores near zero — interaction is largely additive</a:t>
-            </a:r>
-          </a:p>
-          <a:p>
-            <a:pPr>
-              <a:spcBef>
-                <a:spcPts val="300"/>
-              </a:spcBef>
-            </a:pPr>
-            <a:r>
-              <a:rPr sz="1100">
-                <a:solidFill>
-                  <a:srgbClr val="1A1A1A"/>
-                </a:solidFill>
-              </a:rPr>
-              <a:t>•  No consistent synergy pattern across the 7×7 matrix</a:t>
-            </a:r>
-          </a:p>
-        </p:txBody>
-      </p:sp>
-      <p:sp>
-        <p:nvSpPr>
-          <p:cNvPr id="55" name="Rectangle 54"/>
-          <p:cNvSpPr/>
-          <p:nvPr/>
-        </p:nvSpPr>
-        <p:spPr>
-          <a:xfrm>
-            <a:off x="5806440" y="5074920"/>
-            <a:ext cx="6035040" cy="1234440"/>
-          </a:xfrm>
-          <a:prstGeom prst="rect">
-            <a:avLst/>
-          </a:prstGeom>
-          <a:solidFill>
-            <a:srgbClr val="F2F2F2"/>
-          </a:solidFill>
-          <a:ln>
-            <a:noFill/>
-          </a:ln>
-        </p:spPr>
-        <p:style>
-          <a:lnRef idx="1">
-            <a:schemeClr val="accent1"/>
-          </a:lnRef>
-          <a:fillRef idx="3">
-            <a:schemeClr val="accent1"/>
-          </a:fillRef>
-          <a:effectRef idx="2">
-            <a:schemeClr val="accent1"/>
-          </a:effectRef>
-          <a:fontRef idx="minor">
-            <a:schemeClr val="lt1"/>
-          </a:fontRef>
-        </p:style>
-        <p:txBody>
-          <a:bodyPr rtlCol="0" anchor="ctr"/>
-          <a:lstStyle/>
-          <a:p>
-            <a:pPr algn="ctr"/>
-          </a:p>
-        </p:txBody>
-      </p:sp>
-      <p:sp>
-        <p:nvSpPr>
-          <p:cNvPr id="56" name="TextBox 55"/>
-          <p:cNvSpPr txBox="1"/>
-          <p:nvPr/>
-        </p:nvSpPr>
-        <p:spPr>
-          <a:xfrm>
-            <a:off x="5989320" y="5120640"/>
-            <a:ext cx="2743200" cy="256032"/>
-          </a:xfrm>
-          <a:prstGeom prst="rect">
-            <a:avLst/>
-          </a:prstGeom>
-          <a:noFill/>
-        </p:spPr>
-        <p:txBody>
-          <a:bodyPr wrap="square">
-            <a:spAutoFit/>
-          </a:bodyPr>
-          <a:lstStyle/>
-          <a:p>
-            <a:pPr algn="l"/>
-            <a:r>
-              <a:rPr sz="1100" b="1" i="0">
-                <a:solidFill>
-                  <a:srgbClr val="1A375E"/>
-                </a:solidFill>
-              </a:rPr>
-              <a:t>Bliss Score Key</a:t>
-            </a:r>
-          </a:p>
-        </p:txBody>
-      </p:sp>
-      <p:sp>
-        <p:nvSpPr>
-          <p:cNvPr id="57" name="TextBox 56"/>
-          <p:cNvSpPr txBox="1"/>
-          <p:nvPr/>
-        </p:nvSpPr>
-        <p:spPr>
-          <a:xfrm>
-            <a:off x="5897880" y="5422392"/>
-            <a:ext cx="640080" cy="246888"/>
-          </a:xfrm>
-          <a:prstGeom prst="rect">
-            <a:avLst/>
-          </a:prstGeom>
-          <a:noFill/>
-        </p:spPr>
-        <p:txBody>
-          <a:bodyPr wrap="square">
-            <a:spAutoFit/>
-          </a:bodyPr>
-          <a:lstStyle/>
-          <a:p>
-            <a:pPr algn="l"/>
-            <a:r>
-              <a:rPr sz="1100" b="1" i="0">
-                <a:solidFill>
-                  <a:srgbClr val="379637"/>
-                </a:solidFill>
-              </a:rPr>
-              <a:t>&gt; 0</a:t>
-            </a:r>
-          </a:p>
-        </p:txBody>
-      </p:sp>
-      <p:sp>
-        <p:nvSpPr>
-          <p:cNvPr id="58" name="TextBox 57"/>
-          <p:cNvSpPr txBox="1"/>
-          <p:nvPr/>
-        </p:nvSpPr>
-        <p:spPr>
-          <a:xfrm>
-            <a:off x="6537960" y="5422392"/>
-            <a:ext cx="5120640" cy="246888"/>
-          </a:xfrm>
-          <a:prstGeom prst="rect">
-            <a:avLst/>
-          </a:prstGeom>
-          <a:noFill/>
-        </p:spPr>
-        <p:txBody>
-          <a:bodyPr wrap="square">
-            <a:spAutoFit/>
-          </a:bodyPr>
-          <a:lstStyle/>
-          <a:p>
-            <a:pPr algn="l"/>
-            <a:r>
-              <a:rPr sz="1100" b="0" i="0">
-                <a:solidFill>
-                  <a:srgbClr val="1A1A1A"/>
-                </a:solidFill>
-              </a:rPr>
-              <a:t>Synergy — exceeds expected additive effect</a:t>
-            </a:r>
-          </a:p>
-        </p:txBody>
-      </p:sp>
-      <p:sp>
-        <p:nvSpPr>
-          <p:cNvPr id="59" name="TextBox 58"/>
-          <p:cNvSpPr txBox="1"/>
-          <p:nvPr/>
-        </p:nvSpPr>
-        <p:spPr>
-          <a:xfrm>
-            <a:off x="5897880" y="5696712"/>
-            <a:ext cx="640080" cy="246888"/>
-          </a:xfrm>
-          <a:prstGeom prst="rect">
-            <a:avLst/>
-          </a:prstGeom>
-          <a:noFill/>
-        </p:spPr>
-        <p:txBody>
-          <a:bodyPr wrap="square">
-            <a:spAutoFit/>
-          </a:bodyPr>
-          <a:lstStyle/>
-          <a:p>
-            <a:pPr algn="l"/>
-            <a:r>
-              <a:rPr sz="1100" b="1" i="0">
-                <a:solidFill>
-                  <a:srgbClr val="1A1A1A"/>
-                </a:solidFill>
-              </a:rPr>
-              <a:t>= 0</a:t>
-            </a:r>
-          </a:p>
-        </p:txBody>
-      </p:sp>
-      <p:sp>
-        <p:nvSpPr>
-          <p:cNvPr id="60" name="TextBox 59"/>
-          <p:cNvSpPr txBox="1"/>
-          <p:nvPr/>
-        </p:nvSpPr>
-        <p:spPr>
-          <a:xfrm>
-            <a:off x="6537960" y="5696712"/>
-            <a:ext cx="5120640" cy="246888"/>
-          </a:xfrm>
-          <a:prstGeom prst="rect">
-            <a:avLst/>
-          </a:prstGeom>
-          <a:noFill/>
-        </p:spPr>
-        <p:txBody>
-          <a:bodyPr wrap="square">
-            <a:spAutoFit/>
-          </a:bodyPr>
-          <a:lstStyle/>
-          <a:p>
-            <a:pPr algn="l"/>
-            <a:r>
-              <a:rPr sz="1100" b="0" i="0">
-                <a:solidFill>
-                  <a:srgbClr val="1A1A1A"/>
-                </a:solidFill>
-              </a:rPr>
-              <a:t>Additivity — drugs act independently</a:t>
-            </a:r>
-          </a:p>
-        </p:txBody>
-      </p:sp>
-      <p:sp>
-        <p:nvSpPr>
-          <p:cNvPr id="61" name="TextBox 60"/>
-          <p:cNvSpPr txBox="1"/>
-          <p:nvPr/>
-        </p:nvSpPr>
-        <p:spPr>
-          <a:xfrm>
-            <a:off x="5897880" y="5971031"/>
-            <a:ext cx="640080" cy="246888"/>
-          </a:xfrm>
-          <a:prstGeom prst="rect">
-            <a:avLst/>
-          </a:prstGeom>
-          <a:noFill/>
-        </p:spPr>
-        <p:txBody>
-          <a:bodyPr wrap="square">
-            <a:spAutoFit/>
-          </a:bodyPr>
-          <a:lstStyle/>
-          <a:p>
-            <a:pPr algn="l"/>
-            <a:r>
-              <a:rPr sz="1100" b="1" i="0">
-                <a:solidFill>
-                  <a:srgbClr val="C55A11"/>
-                </a:solidFill>
-              </a:rPr>
-              <a:t>&lt; 0</a:t>
-            </a:r>
-          </a:p>
-        </p:txBody>
-      </p:sp>
-      <p:sp>
-        <p:nvSpPr>
-          <p:cNvPr id="62" name="TextBox 61"/>
-          <p:cNvSpPr txBox="1"/>
-          <p:nvPr/>
-        </p:nvSpPr>
-        <p:spPr>
-          <a:xfrm>
-            <a:off x="6537960" y="5971031"/>
-            <a:ext cx="5120640" cy="246888"/>
-          </a:xfrm>
-          <a:prstGeom prst="rect">
-            <a:avLst/>
-          </a:prstGeom>
-          <a:noFill/>
-        </p:spPr>
-        <p:txBody>
-          <a:bodyPr wrap="square">
-            <a:spAutoFit/>
-          </a:bodyPr>
-          <a:lstStyle/>
-          <a:p>
-            <a:pPr algn="l"/>
-            <a:r>
-              <a:rPr sz="1100" b="0" i="0">
-                <a:solidFill>
-                  <a:srgbClr val="1A1A1A"/>
-                </a:solidFill>
-              </a:rPr>
-              <a:t>Antagonism — weaker than predicted</a:t>
-            </a:r>
-          </a:p>
-        </p:txBody>
-      </p:sp>
-      <p:sp>
-        <p:nvSpPr>
-          <p:cNvPr id="63" name="Rectangle 62"/>
-          <p:cNvSpPr/>
-          <p:nvPr/>
-        </p:nvSpPr>
-        <p:spPr>
-          <a:xfrm>
-            <a:off x="0" y="6675120"/>
-            <a:ext cx="12188952" cy="182880"/>
-          </a:xfrm>
-          <a:prstGeom prst="rect">
-            <a:avLst/>
-          </a:prstGeom>
-          <a:solidFill>
-            <a:srgbClr val="1A375E"/>
-          </a:solidFill>
-          <a:ln>
-            <a:noFill/>
-          </a:ln>
-        </p:spPr>
-        <p:style>
-          <a:lnRef idx="1">
-            <a:schemeClr val="accent1"/>
-          </a:lnRef>
-          <a:fillRef idx="3">
-            <a:schemeClr val="accent1"/>
-          </a:fillRef>
-          <a:effectRef idx="2">
-            <a:schemeClr val="accent1"/>
-          </a:effectRef>
-          <a:fontRef idx="minor">
-            <a:schemeClr val="lt1"/>
-          </a:fontRef>
-        </p:style>
-        <p:txBody>
-          <a:bodyPr rtlCol="0" anchor="ctr"/>
-          <a:lstStyle/>
-          <a:p>
-            <a:pPr algn="ctr"/>
-          </a:p>
-        </p:txBody>
-      </p:sp>
-      <p:sp>
-        <p:nvSpPr>
-          <p:cNvPr id="64" name="TextBox 63"/>
-          <p:cNvSpPr txBox="1"/>
-          <p:nvPr/>
-        </p:nvSpPr>
-        <p:spPr>
-          <a:xfrm>
-            <a:off x="10515600" y="6675120"/>
-            <a:ext cx="1554480" cy="182880"/>
-          </a:xfrm>
-          <a:prstGeom prst="rect">
-            <a:avLst/>
-          </a:prstGeom>
-          <a:noFill/>
-        </p:spPr>
-        <p:txBody>
-          <a:bodyPr wrap="square">
-            <a:spAutoFit/>
-          </a:bodyPr>
-          <a:lstStyle/>
-          <a:p>
-            <a:pPr algn="r"/>
-            <a:r>
               <a:rPr sz="900" b="0" i="0">
                 <a:solidFill>
-                  <a:srgbClr val="FFFFFF"/>
-                </a:solidFill>
-              </a:rPr>
-              <a:t>Slide 2 of 3</a:t>
+                  <a:srgbClr val="BDD7EE"/>
+                </a:solidFill>
+              </a:rPr>
+              <a:t>HTSplotter  |  Nunes et al., PLoS One 2024  |  DOI: 10.1371/journal.pone.0296322</a:t>
             </a:r>
           </a:p>
         </p:txBody>
@@ -6266,7 +5861,7 @@
         <p:spPr>
           <a:xfrm>
             <a:off x="0" y="0"/>
-            <a:ext cx="12188952" cy="822960"/>
+            <a:ext cx="12188952" cy="804672"/>
           </a:xfrm>
           <a:prstGeom prst="rect">
             <a:avLst/>
@@ -6302,14 +5897,57 @@
       </p:sp>
       <p:sp>
         <p:nvSpPr>
-          <p:cNvPr id="3" name="TextBox 2"/>
+          <p:cNvPr id="3" name="Rectangle 2"/>
+          <p:cNvSpPr/>
+          <p:nvPr/>
+        </p:nvSpPr>
+        <p:spPr>
+          <a:xfrm>
+            <a:off x="0" y="0"/>
+            <a:ext cx="73152" cy="804672"/>
+          </a:xfrm>
+          <a:prstGeom prst="rect">
+            <a:avLst/>
+          </a:prstGeom>
+          <a:solidFill>
+            <a:srgbClr val="2E75B6"/>
+          </a:solidFill>
+          <a:ln>
+            <a:noFill/>
+          </a:ln>
+        </p:spPr>
+        <p:style>
+          <a:lnRef idx="1">
+            <a:schemeClr val="accent1"/>
+          </a:lnRef>
+          <a:fillRef idx="3">
+            <a:schemeClr val="accent1"/>
+          </a:fillRef>
+          <a:effectRef idx="2">
+            <a:schemeClr val="accent1"/>
+          </a:effectRef>
+          <a:fontRef idx="minor">
+            <a:schemeClr val="lt1"/>
+          </a:fontRef>
+        </p:style>
+        <p:txBody>
+          <a:bodyPr rtlCol="0" anchor="ctr"/>
+          <a:lstStyle/>
+          <a:p>
+            <a:pPr algn="ctr"/>
+          </a:p>
+        </p:txBody>
+      </p:sp>
+      <p:sp>
+        <p:nvSpPr>
+          <p:cNvPr id="4" name="TextBox 3"/>
           <p:cNvSpPr txBox="1"/>
           <p:nvPr/>
         </p:nvSpPr>
         <p:spPr>
           <a:xfrm>
-            <a:off x="274320" y="137160"/>
-            <a:ext cx="11430000" cy="548640"/>
+            <a:off x="228600" y="91440"/>
+            <a:ext cx="11704320" cy="502920"/>
           </a:xfrm>
           <a:prstGeom prst="rect">
             <a:avLst/>
@@ -6324,26 +5962,1710 @@
           <a:p>
             <a:pPr algn="l"/>
             <a:r>
-              <a:rPr sz="2300" b="1" i="0">
+              <a:rPr sz="2600" b="1" i="0">
                 <a:solidFill>
                   <a:srgbClr val="FFFFFF"/>
                 </a:solidFill>
               </a:rPr>
-              <a:t>Genetic Perturbagen Screens &amp; AI-Assisted Interpretation</a:t>
-            </a:r>
-          </a:p>
-        </p:txBody>
-      </p:sp>
-      <p:sp>
-        <p:nvSpPr>
-          <p:cNvPr id="4" name="Rectangle 3"/>
+              <a:t>Drug Screen Results — Single Agent Dose-Response</a:t>
+            </a:r>
+          </a:p>
+        </p:txBody>
+      </p:sp>
+      <p:sp>
+        <p:nvSpPr>
+          <p:cNvPr id="5" name="TextBox 4"/>
+          <p:cNvSpPr txBox="1"/>
+          <p:nvPr/>
+        </p:nvSpPr>
+        <p:spPr>
+          <a:xfrm>
+            <a:off x="228600" y="548640"/>
+            <a:ext cx="11704320" cy="228600"/>
+          </a:xfrm>
+          <a:prstGeom prst="rect">
+            <a:avLst/>
+          </a:prstGeom>
+          <a:noFill/>
+        </p:spPr>
+        <p:txBody>
+          <a:bodyPr wrap="square">
+            <a:spAutoFit/>
+          </a:bodyPr>
+          <a:lstStyle/>
+          <a:p>
+            <a:pPr algn="l"/>
+            <a:r>
+              <a:rPr sz="1200" b="0" i="0">
+                <a:solidFill>
+                  <a:srgbClr val="BDD7EE"/>
+                </a:solidFill>
+              </a:rPr>
+              <a:t>MK-1775, BAY1895344, Prexasertib  ·  MCF7 cells  ·  10K/well  ·  72 h endpoint</a:t>
+            </a:r>
+          </a:p>
+        </p:txBody>
+      </p:sp>
+      <p:sp>
+        <p:nvSpPr>
+          <p:cNvPr id="6" name="Rectangle 5"/>
           <p:cNvSpPr/>
           <p:nvPr/>
         </p:nvSpPr>
         <p:spPr>
           <a:xfrm>
             <a:off x="274320" y="914400"/>
-            <a:ext cx="5577840" cy="5349240"/>
+            <a:ext cx="1920240" cy="384048"/>
+          </a:xfrm>
+          <a:prstGeom prst="rect">
+            <a:avLst/>
+          </a:prstGeom>
+          <a:solidFill>
+            <a:srgbClr val="1A375E"/>
+          </a:solidFill>
+          <a:ln>
+            <a:noFill/>
+          </a:ln>
+        </p:spPr>
+        <p:style>
+          <a:lnRef idx="1">
+            <a:schemeClr val="accent1"/>
+          </a:lnRef>
+          <a:fillRef idx="3">
+            <a:schemeClr val="accent1"/>
+          </a:fillRef>
+          <a:effectRef idx="2">
+            <a:schemeClr val="accent1"/>
+          </a:effectRef>
+          <a:fontRef idx="minor">
+            <a:schemeClr val="lt1"/>
+          </a:fontRef>
+        </p:style>
+        <p:txBody>
+          <a:bodyPr rtlCol="0" anchor="ctr"/>
+          <a:lstStyle/>
+          <a:p>
+            <a:pPr algn="ctr"/>
+          </a:p>
+        </p:txBody>
+      </p:sp>
+      <p:sp>
+        <p:nvSpPr>
+          <p:cNvPr id="7" name="TextBox 6"/>
+          <p:cNvSpPr txBox="1"/>
+          <p:nvPr/>
+        </p:nvSpPr>
+        <p:spPr>
+          <a:xfrm>
+            <a:off x="329184" y="950976"/>
+            <a:ext cx="1828800" cy="310896"/>
+          </a:xfrm>
+          <a:prstGeom prst="rect">
+            <a:avLst/>
+          </a:prstGeom>
+          <a:noFill/>
+        </p:spPr>
+        <p:txBody>
+          <a:bodyPr wrap="square">
+            <a:spAutoFit/>
+          </a:bodyPr>
+          <a:lstStyle/>
+          <a:p>
+            <a:pPr algn="ctr"/>
+            <a:r>
+              <a:rPr sz="1200" b="1" i="0">
+                <a:solidFill>
+                  <a:srgbClr val="FFFFFF"/>
+                </a:solidFill>
+              </a:rPr>
+              <a:t>Drug</a:t>
+            </a:r>
+          </a:p>
+        </p:txBody>
+      </p:sp>
+      <p:sp>
+        <p:nvSpPr>
+          <p:cNvPr id="8" name="Rectangle 7"/>
+          <p:cNvSpPr/>
+          <p:nvPr/>
+        </p:nvSpPr>
+        <p:spPr>
+          <a:xfrm>
+            <a:off x="2212848" y="914400"/>
+            <a:ext cx="1371600" cy="384048"/>
+          </a:xfrm>
+          <a:prstGeom prst="rect">
+            <a:avLst/>
+          </a:prstGeom>
+          <a:solidFill>
+            <a:srgbClr val="1A375E"/>
+          </a:solidFill>
+          <a:ln>
+            <a:noFill/>
+          </a:ln>
+        </p:spPr>
+        <p:style>
+          <a:lnRef idx="1">
+            <a:schemeClr val="accent1"/>
+          </a:lnRef>
+          <a:fillRef idx="3">
+            <a:schemeClr val="accent1"/>
+          </a:fillRef>
+          <a:effectRef idx="2">
+            <a:schemeClr val="accent1"/>
+          </a:effectRef>
+          <a:fontRef idx="minor">
+            <a:schemeClr val="lt1"/>
+          </a:fontRef>
+        </p:style>
+        <p:txBody>
+          <a:bodyPr rtlCol="0" anchor="ctr"/>
+          <a:lstStyle/>
+          <a:p>
+            <a:pPr algn="ctr"/>
+          </a:p>
+        </p:txBody>
+      </p:sp>
+      <p:sp>
+        <p:nvSpPr>
+          <p:cNvPr id="9" name="TextBox 8"/>
+          <p:cNvSpPr txBox="1"/>
+          <p:nvPr/>
+        </p:nvSpPr>
+        <p:spPr>
+          <a:xfrm>
+            <a:off x="2267712" y="950976"/>
+            <a:ext cx="1280160" cy="310896"/>
+          </a:xfrm>
+          <a:prstGeom prst="rect">
+            <a:avLst/>
+          </a:prstGeom>
+          <a:noFill/>
+        </p:spPr>
+        <p:txBody>
+          <a:bodyPr wrap="square">
+            <a:spAutoFit/>
+          </a:bodyPr>
+          <a:lstStyle/>
+          <a:p>
+            <a:pPr algn="ctr"/>
+            <a:r>
+              <a:rPr sz="1200" b="1" i="0">
+                <a:solidFill>
+                  <a:srgbClr val="FFFFFF"/>
+                </a:solidFill>
+              </a:rPr>
+              <a:t>IC₅₀ (nM)</a:t>
+            </a:r>
+          </a:p>
+        </p:txBody>
+      </p:sp>
+      <p:sp>
+        <p:nvSpPr>
+          <p:cNvPr id="10" name="Rectangle 9"/>
+          <p:cNvSpPr/>
+          <p:nvPr/>
+        </p:nvSpPr>
+        <p:spPr>
+          <a:xfrm>
+            <a:off x="3602736" y="914400"/>
+            <a:ext cx="822960" cy="384048"/>
+          </a:xfrm>
+          <a:prstGeom prst="rect">
+            <a:avLst/>
+          </a:prstGeom>
+          <a:solidFill>
+            <a:srgbClr val="1A375E"/>
+          </a:solidFill>
+          <a:ln>
+            <a:noFill/>
+          </a:ln>
+        </p:spPr>
+        <p:style>
+          <a:lnRef idx="1">
+            <a:schemeClr val="accent1"/>
+          </a:lnRef>
+          <a:fillRef idx="3">
+            <a:schemeClr val="accent1"/>
+          </a:fillRef>
+          <a:effectRef idx="2">
+            <a:schemeClr val="accent1"/>
+          </a:effectRef>
+          <a:fontRef idx="minor">
+            <a:schemeClr val="lt1"/>
+          </a:fontRef>
+        </p:style>
+        <p:txBody>
+          <a:bodyPr rtlCol="0" anchor="ctr"/>
+          <a:lstStyle/>
+          <a:p>
+            <a:pPr algn="ctr"/>
+          </a:p>
+        </p:txBody>
+      </p:sp>
+      <p:sp>
+        <p:nvSpPr>
+          <p:cNvPr id="11" name="TextBox 10"/>
+          <p:cNvSpPr txBox="1"/>
+          <p:nvPr/>
+        </p:nvSpPr>
+        <p:spPr>
+          <a:xfrm>
+            <a:off x="3657600" y="950976"/>
+            <a:ext cx="731520" cy="310896"/>
+          </a:xfrm>
+          <a:prstGeom prst="rect">
+            <a:avLst/>
+          </a:prstGeom>
+          <a:noFill/>
+        </p:spPr>
+        <p:txBody>
+          <a:bodyPr wrap="square">
+            <a:spAutoFit/>
+          </a:bodyPr>
+          <a:lstStyle/>
+          <a:p>
+            <a:pPr algn="ctr"/>
+            <a:r>
+              <a:rPr sz="1200" b="1" i="0">
+                <a:solidFill>
+                  <a:srgbClr val="FFFFFF"/>
+                </a:solidFill>
+              </a:rPr>
+              <a:t>R²</a:t>
+            </a:r>
+          </a:p>
+        </p:txBody>
+      </p:sp>
+      <p:sp>
+        <p:nvSpPr>
+          <p:cNvPr id="12" name="Rectangle 11"/>
+          <p:cNvSpPr/>
+          <p:nvPr/>
+        </p:nvSpPr>
+        <p:spPr>
+          <a:xfrm>
+            <a:off x="4443984" y="914400"/>
+            <a:ext cx="914400" cy="384048"/>
+          </a:xfrm>
+          <a:prstGeom prst="rect">
+            <a:avLst/>
+          </a:prstGeom>
+          <a:solidFill>
+            <a:srgbClr val="1A375E"/>
+          </a:solidFill>
+          <a:ln>
+            <a:noFill/>
+          </a:ln>
+        </p:spPr>
+        <p:style>
+          <a:lnRef idx="1">
+            <a:schemeClr val="accent1"/>
+          </a:lnRef>
+          <a:fillRef idx="3">
+            <a:schemeClr val="accent1"/>
+          </a:fillRef>
+          <a:effectRef idx="2">
+            <a:schemeClr val="accent1"/>
+          </a:effectRef>
+          <a:fontRef idx="minor">
+            <a:schemeClr val="lt1"/>
+          </a:fontRef>
+        </p:style>
+        <p:txBody>
+          <a:bodyPr rtlCol="0" anchor="ctr"/>
+          <a:lstStyle/>
+          <a:p>
+            <a:pPr algn="ctr"/>
+          </a:p>
+        </p:txBody>
+      </p:sp>
+      <p:sp>
+        <p:nvSpPr>
+          <p:cNvPr id="13" name="TextBox 12"/>
+          <p:cNvSpPr txBox="1"/>
+          <p:nvPr/>
+        </p:nvSpPr>
+        <p:spPr>
+          <a:xfrm>
+            <a:off x="4498848" y="950976"/>
+            <a:ext cx="822960" cy="310896"/>
+          </a:xfrm>
+          <a:prstGeom prst="rect">
+            <a:avLst/>
+          </a:prstGeom>
+          <a:noFill/>
+        </p:spPr>
+        <p:txBody>
+          <a:bodyPr wrap="square">
+            <a:spAutoFit/>
+          </a:bodyPr>
+          <a:lstStyle/>
+          <a:p>
+            <a:pPr algn="ctr"/>
+            <a:r>
+              <a:rPr sz="1200" b="1" i="0">
+                <a:solidFill>
+                  <a:srgbClr val="FFFFFF"/>
+                </a:solidFill>
+              </a:rPr>
+              <a:t>Fit</a:t>
+            </a:r>
+          </a:p>
+        </p:txBody>
+      </p:sp>
+      <p:sp>
+        <p:nvSpPr>
+          <p:cNvPr id="14" name="Rectangle 13"/>
+          <p:cNvSpPr/>
+          <p:nvPr/>
+        </p:nvSpPr>
+        <p:spPr>
+          <a:xfrm>
+            <a:off x="5376672" y="914400"/>
+            <a:ext cx="2286000" cy="384048"/>
+          </a:xfrm>
+          <a:prstGeom prst="rect">
+            <a:avLst/>
+          </a:prstGeom>
+          <a:solidFill>
+            <a:srgbClr val="1A375E"/>
+          </a:solidFill>
+          <a:ln>
+            <a:noFill/>
+          </a:ln>
+        </p:spPr>
+        <p:style>
+          <a:lnRef idx="1">
+            <a:schemeClr val="accent1"/>
+          </a:lnRef>
+          <a:fillRef idx="3">
+            <a:schemeClr val="accent1"/>
+          </a:fillRef>
+          <a:effectRef idx="2">
+            <a:schemeClr val="accent1"/>
+          </a:effectRef>
+          <a:fontRef idx="minor">
+            <a:schemeClr val="lt1"/>
+          </a:fontRef>
+        </p:style>
+        <p:txBody>
+          <a:bodyPr rtlCol="0" anchor="ctr"/>
+          <a:lstStyle/>
+          <a:p>
+            <a:pPr algn="ctr"/>
+          </a:p>
+        </p:txBody>
+      </p:sp>
+      <p:sp>
+        <p:nvSpPr>
+          <p:cNvPr id="15" name="TextBox 14"/>
+          <p:cNvSpPr txBox="1"/>
+          <p:nvPr/>
+        </p:nvSpPr>
+        <p:spPr>
+          <a:xfrm>
+            <a:off x="5431536" y="950976"/>
+            <a:ext cx="2194560" cy="310896"/>
+          </a:xfrm>
+          <a:prstGeom prst="rect">
+            <a:avLst/>
+          </a:prstGeom>
+          <a:noFill/>
+        </p:spPr>
+        <p:txBody>
+          <a:bodyPr wrap="square">
+            <a:spAutoFit/>
+          </a:bodyPr>
+          <a:lstStyle/>
+          <a:p>
+            <a:pPr algn="ctr"/>
+            <a:r>
+              <a:rPr sz="1200" b="1" i="0">
+                <a:solidFill>
+                  <a:srgbClr val="FFFFFF"/>
+                </a:solidFill>
+              </a:rPr>
+              <a:t>Notes</a:t>
+            </a:r>
+          </a:p>
+        </p:txBody>
+      </p:sp>
+      <p:sp>
+        <p:nvSpPr>
+          <p:cNvPr id="16" name="Rectangle 15"/>
+          <p:cNvSpPr/>
+          <p:nvPr/>
+        </p:nvSpPr>
+        <p:spPr>
+          <a:xfrm>
+            <a:off x="274320" y="1298448"/>
+            <a:ext cx="1920240" cy="566928"/>
+          </a:xfrm>
+          <a:prstGeom prst="rect">
+            <a:avLst/>
+          </a:prstGeom>
+          <a:solidFill>
+            <a:srgbClr val="E2EFDA"/>
+          </a:solidFill>
+          <a:ln w="6350">
+            <a:solidFill>
+              <a:srgbClr val="CCCCCC"/>
+            </a:solidFill>
+          </a:ln>
+        </p:spPr>
+        <p:style>
+          <a:lnRef idx="1">
+            <a:schemeClr val="accent1"/>
+          </a:lnRef>
+          <a:fillRef idx="3">
+            <a:schemeClr val="accent1"/>
+          </a:fillRef>
+          <a:effectRef idx="2">
+            <a:schemeClr val="accent1"/>
+          </a:effectRef>
+          <a:fontRef idx="minor">
+            <a:schemeClr val="lt1"/>
+          </a:fontRef>
+        </p:style>
+        <p:txBody>
+          <a:bodyPr rtlCol="0" anchor="ctr"/>
+          <a:lstStyle/>
+          <a:p>
+            <a:pPr algn="ctr"/>
+          </a:p>
+        </p:txBody>
+      </p:sp>
+      <p:sp>
+        <p:nvSpPr>
+          <p:cNvPr id="17" name="TextBox 16"/>
+          <p:cNvSpPr txBox="1"/>
+          <p:nvPr/>
+        </p:nvSpPr>
+        <p:spPr>
+          <a:xfrm>
+            <a:off x="338328" y="1353312"/>
+            <a:ext cx="1810512" cy="475488"/>
+          </a:xfrm>
+          <a:prstGeom prst="rect">
+            <a:avLst/>
+          </a:prstGeom>
+          <a:noFill/>
+        </p:spPr>
+        <p:txBody>
+          <a:bodyPr wrap="square">
+            <a:spAutoFit/>
+          </a:bodyPr>
+          <a:lstStyle/>
+          <a:p>
+            <a:pPr algn="l"/>
+            <a:r>
+              <a:rPr sz="1200" b="1" i="0">
+                <a:solidFill>
+                  <a:srgbClr val="379637"/>
+                </a:solidFill>
+              </a:rPr>
+              <a:t>Prexasertib</a:t>
+            </a:r>
+          </a:p>
+        </p:txBody>
+      </p:sp>
+      <p:sp>
+        <p:nvSpPr>
+          <p:cNvPr id="18" name="Rectangle 17"/>
+          <p:cNvSpPr/>
+          <p:nvPr/>
+        </p:nvSpPr>
+        <p:spPr>
+          <a:xfrm>
+            <a:off x="2212848" y="1298448"/>
+            <a:ext cx="1371600" cy="566928"/>
+          </a:xfrm>
+          <a:prstGeom prst="rect">
+            <a:avLst/>
+          </a:prstGeom>
+          <a:solidFill>
+            <a:srgbClr val="E2EFDA"/>
+          </a:solidFill>
+          <a:ln w="6350">
+            <a:solidFill>
+              <a:srgbClr val="CCCCCC"/>
+            </a:solidFill>
+          </a:ln>
+        </p:spPr>
+        <p:style>
+          <a:lnRef idx="1">
+            <a:schemeClr val="accent1"/>
+          </a:lnRef>
+          <a:fillRef idx="3">
+            <a:schemeClr val="accent1"/>
+          </a:fillRef>
+          <a:effectRef idx="2">
+            <a:schemeClr val="accent1"/>
+          </a:effectRef>
+          <a:fontRef idx="minor">
+            <a:schemeClr val="lt1"/>
+          </a:fontRef>
+        </p:style>
+        <p:txBody>
+          <a:bodyPr rtlCol="0" anchor="ctr"/>
+          <a:lstStyle/>
+          <a:p>
+            <a:pPr algn="ctr"/>
+          </a:p>
+        </p:txBody>
+      </p:sp>
+      <p:sp>
+        <p:nvSpPr>
+          <p:cNvPr id="19" name="TextBox 18"/>
+          <p:cNvSpPr txBox="1"/>
+          <p:nvPr/>
+        </p:nvSpPr>
+        <p:spPr>
+          <a:xfrm>
+            <a:off x="2276856" y="1353312"/>
+            <a:ext cx="1261872" cy="475488"/>
+          </a:xfrm>
+          <a:prstGeom prst="rect">
+            <a:avLst/>
+          </a:prstGeom>
+          <a:noFill/>
+        </p:spPr>
+        <p:txBody>
+          <a:bodyPr wrap="square">
+            <a:spAutoFit/>
+          </a:bodyPr>
+          <a:lstStyle/>
+          <a:p>
+            <a:pPr algn="ctr"/>
+            <a:r>
+              <a:rPr sz="1300" b="0" i="0">
+                <a:solidFill>
+                  <a:srgbClr val="1A1A1A"/>
+                </a:solidFill>
+              </a:rPr>
+              <a:t>9.98</a:t>
+            </a:r>
+          </a:p>
+        </p:txBody>
+      </p:sp>
+      <p:sp>
+        <p:nvSpPr>
+          <p:cNvPr id="20" name="Rectangle 19"/>
+          <p:cNvSpPr/>
+          <p:nvPr/>
+        </p:nvSpPr>
+        <p:spPr>
+          <a:xfrm>
+            <a:off x="3602736" y="1298448"/>
+            <a:ext cx="822960" cy="566928"/>
+          </a:xfrm>
+          <a:prstGeom prst="rect">
+            <a:avLst/>
+          </a:prstGeom>
+          <a:solidFill>
+            <a:srgbClr val="E2EFDA"/>
+          </a:solidFill>
+          <a:ln w="6350">
+            <a:solidFill>
+              <a:srgbClr val="CCCCCC"/>
+            </a:solidFill>
+          </a:ln>
+        </p:spPr>
+        <p:style>
+          <a:lnRef idx="1">
+            <a:schemeClr val="accent1"/>
+          </a:lnRef>
+          <a:fillRef idx="3">
+            <a:schemeClr val="accent1"/>
+          </a:fillRef>
+          <a:effectRef idx="2">
+            <a:schemeClr val="accent1"/>
+          </a:effectRef>
+          <a:fontRef idx="minor">
+            <a:schemeClr val="lt1"/>
+          </a:fontRef>
+        </p:style>
+        <p:txBody>
+          <a:bodyPr rtlCol="0" anchor="ctr"/>
+          <a:lstStyle/>
+          <a:p>
+            <a:pPr algn="ctr"/>
+          </a:p>
+        </p:txBody>
+      </p:sp>
+      <p:sp>
+        <p:nvSpPr>
+          <p:cNvPr id="21" name="TextBox 20"/>
+          <p:cNvSpPr txBox="1"/>
+          <p:nvPr/>
+        </p:nvSpPr>
+        <p:spPr>
+          <a:xfrm>
+            <a:off x="3666744" y="1353312"/>
+            <a:ext cx="713232" cy="475488"/>
+          </a:xfrm>
+          <a:prstGeom prst="rect">
+            <a:avLst/>
+          </a:prstGeom>
+          <a:noFill/>
+        </p:spPr>
+        <p:txBody>
+          <a:bodyPr wrap="square">
+            <a:spAutoFit/>
+          </a:bodyPr>
+          <a:lstStyle/>
+          <a:p>
+            <a:pPr algn="ctr"/>
+            <a:r>
+              <a:rPr sz="1100" b="0" i="0">
+                <a:solidFill>
+                  <a:srgbClr val="1A1A1A"/>
+                </a:solidFill>
+              </a:rPr>
+              <a:t>0.967</a:t>
+            </a:r>
+          </a:p>
+        </p:txBody>
+      </p:sp>
+      <p:sp>
+        <p:nvSpPr>
+          <p:cNvPr id="22" name="Rectangle 21"/>
+          <p:cNvSpPr/>
+          <p:nvPr/>
+        </p:nvSpPr>
+        <p:spPr>
+          <a:xfrm>
+            <a:off x="4443984" y="1298448"/>
+            <a:ext cx="914400" cy="566928"/>
+          </a:xfrm>
+          <a:prstGeom prst="rect">
+            <a:avLst/>
+          </a:prstGeom>
+          <a:solidFill>
+            <a:srgbClr val="E2EFDA"/>
+          </a:solidFill>
+          <a:ln w="6350">
+            <a:solidFill>
+              <a:srgbClr val="CCCCCC"/>
+            </a:solidFill>
+          </a:ln>
+        </p:spPr>
+        <p:style>
+          <a:lnRef idx="1">
+            <a:schemeClr val="accent1"/>
+          </a:lnRef>
+          <a:fillRef idx="3">
+            <a:schemeClr val="accent1"/>
+          </a:fillRef>
+          <a:effectRef idx="2">
+            <a:schemeClr val="accent1"/>
+          </a:effectRef>
+          <a:fontRef idx="minor">
+            <a:schemeClr val="lt1"/>
+          </a:fontRef>
+        </p:style>
+        <p:txBody>
+          <a:bodyPr rtlCol="0" anchor="ctr"/>
+          <a:lstStyle/>
+          <a:p>
+            <a:pPr algn="ctr"/>
+          </a:p>
+        </p:txBody>
+      </p:sp>
+      <p:sp>
+        <p:nvSpPr>
+          <p:cNvPr id="23" name="TextBox 22"/>
+          <p:cNvSpPr txBox="1"/>
+          <p:nvPr/>
+        </p:nvSpPr>
+        <p:spPr>
+          <a:xfrm>
+            <a:off x="4507992" y="1353312"/>
+            <a:ext cx="804672" cy="475488"/>
+          </a:xfrm>
+          <a:prstGeom prst="rect">
+            <a:avLst/>
+          </a:prstGeom>
+          <a:noFill/>
+        </p:spPr>
+        <p:txBody>
+          <a:bodyPr wrap="square">
+            <a:spAutoFit/>
+          </a:bodyPr>
+          <a:lstStyle/>
+          <a:p>
+            <a:pPr algn="ctr"/>
+            <a:r>
+              <a:rPr sz="1100" b="0" i="0">
+                <a:solidFill>
+                  <a:srgbClr val="1A1A1A"/>
+                </a:solidFill>
+              </a:rPr>
+              <a:t>Good</a:t>
+            </a:r>
+          </a:p>
+        </p:txBody>
+      </p:sp>
+      <p:sp>
+        <p:nvSpPr>
+          <p:cNvPr id="24" name="Rectangle 23"/>
+          <p:cNvSpPr/>
+          <p:nvPr/>
+        </p:nvSpPr>
+        <p:spPr>
+          <a:xfrm>
+            <a:off x="5376672" y="1298448"/>
+            <a:ext cx="2286000" cy="566928"/>
+          </a:xfrm>
+          <a:prstGeom prst="rect">
+            <a:avLst/>
+          </a:prstGeom>
+          <a:solidFill>
+            <a:srgbClr val="E2EFDA"/>
+          </a:solidFill>
+          <a:ln w="6350">
+            <a:solidFill>
+              <a:srgbClr val="CCCCCC"/>
+            </a:solidFill>
+          </a:ln>
+        </p:spPr>
+        <p:style>
+          <a:lnRef idx="1">
+            <a:schemeClr val="accent1"/>
+          </a:lnRef>
+          <a:fillRef idx="3">
+            <a:schemeClr val="accent1"/>
+          </a:fillRef>
+          <a:effectRef idx="2">
+            <a:schemeClr val="accent1"/>
+          </a:effectRef>
+          <a:fontRef idx="minor">
+            <a:schemeClr val="lt1"/>
+          </a:fontRef>
+        </p:style>
+        <p:txBody>
+          <a:bodyPr rtlCol="0" anchor="ctr"/>
+          <a:lstStyle/>
+          <a:p>
+            <a:pPr algn="ctr"/>
+          </a:p>
+        </p:txBody>
+      </p:sp>
+      <p:sp>
+        <p:nvSpPr>
+          <p:cNvPr id="25" name="TextBox 24"/>
+          <p:cNvSpPr txBox="1"/>
+          <p:nvPr/>
+        </p:nvSpPr>
+        <p:spPr>
+          <a:xfrm>
+            <a:off x="5440680" y="1353312"/>
+            <a:ext cx="2176272" cy="475488"/>
+          </a:xfrm>
+          <a:prstGeom prst="rect">
+            <a:avLst/>
+          </a:prstGeom>
+          <a:noFill/>
+        </p:spPr>
+        <p:txBody>
+          <a:bodyPr wrap="square">
+            <a:spAutoFit/>
+          </a:bodyPr>
+          <a:lstStyle/>
+          <a:p>
+            <a:pPr algn="l"/>
+            <a:r>
+              <a:rPr sz="1100" b="0" i="0">
+                <a:solidFill>
+                  <a:srgbClr val="1A1A1A"/>
+                </a:solidFill>
+              </a:rPr>
+              <a:t>Curve plateaus at ~40–50%
+— partial inhibition in tested range</a:t>
+            </a:r>
+          </a:p>
+        </p:txBody>
+      </p:sp>
+      <p:sp>
+        <p:nvSpPr>
+          <p:cNvPr id="26" name="Rectangle 25"/>
+          <p:cNvSpPr/>
+          <p:nvPr/>
+        </p:nvSpPr>
+        <p:spPr>
+          <a:xfrm>
+            <a:off x="274320" y="1892807"/>
+            <a:ext cx="1920240" cy="566928"/>
+          </a:xfrm>
+          <a:prstGeom prst="rect">
+            <a:avLst/>
+          </a:prstGeom>
+          <a:solidFill>
+            <a:srgbClr val="F2F2F2"/>
+          </a:solidFill>
+          <a:ln w="6350">
+            <a:solidFill>
+              <a:srgbClr val="CCCCCC"/>
+            </a:solidFill>
+          </a:ln>
+        </p:spPr>
+        <p:style>
+          <a:lnRef idx="1">
+            <a:schemeClr val="accent1"/>
+          </a:lnRef>
+          <a:fillRef idx="3">
+            <a:schemeClr val="accent1"/>
+          </a:fillRef>
+          <a:effectRef idx="2">
+            <a:schemeClr val="accent1"/>
+          </a:effectRef>
+          <a:fontRef idx="minor">
+            <a:schemeClr val="lt1"/>
+          </a:fontRef>
+        </p:style>
+        <p:txBody>
+          <a:bodyPr rtlCol="0" anchor="ctr"/>
+          <a:lstStyle/>
+          <a:p>
+            <a:pPr algn="ctr"/>
+          </a:p>
+        </p:txBody>
+      </p:sp>
+      <p:sp>
+        <p:nvSpPr>
+          <p:cNvPr id="27" name="TextBox 26"/>
+          <p:cNvSpPr txBox="1"/>
+          <p:nvPr/>
+        </p:nvSpPr>
+        <p:spPr>
+          <a:xfrm>
+            <a:off x="338328" y="1947672"/>
+            <a:ext cx="1810512" cy="475488"/>
+          </a:xfrm>
+          <a:prstGeom prst="rect">
+            <a:avLst/>
+          </a:prstGeom>
+          <a:noFill/>
+        </p:spPr>
+        <p:txBody>
+          <a:bodyPr wrap="square">
+            <a:spAutoFit/>
+          </a:bodyPr>
+          <a:lstStyle/>
+          <a:p>
+            <a:pPr algn="l"/>
+            <a:r>
+              <a:rPr sz="1200" b="1" i="0">
+                <a:solidFill>
+                  <a:srgbClr val="1A1A1A"/>
+                </a:solidFill>
+              </a:rPr>
+              <a:t>BAY1895344</a:t>
+            </a:r>
+          </a:p>
+        </p:txBody>
+      </p:sp>
+      <p:sp>
+        <p:nvSpPr>
+          <p:cNvPr id="28" name="Rectangle 27"/>
+          <p:cNvSpPr/>
+          <p:nvPr/>
+        </p:nvSpPr>
+        <p:spPr>
+          <a:xfrm>
+            <a:off x="2212848" y="1892807"/>
+            <a:ext cx="1371600" cy="566928"/>
+          </a:xfrm>
+          <a:prstGeom prst="rect">
+            <a:avLst/>
+          </a:prstGeom>
+          <a:solidFill>
+            <a:srgbClr val="F2F2F2"/>
+          </a:solidFill>
+          <a:ln w="6350">
+            <a:solidFill>
+              <a:srgbClr val="CCCCCC"/>
+            </a:solidFill>
+          </a:ln>
+        </p:spPr>
+        <p:style>
+          <a:lnRef idx="1">
+            <a:schemeClr val="accent1"/>
+          </a:lnRef>
+          <a:fillRef idx="3">
+            <a:schemeClr val="accent1"/>
+          </a:fillRef>
+          <a:effectRef idx="2">
+            <a:schemeClr val="accent1"/>
+          </a:effectRef>
+          <a:fontRef idx="minor">
+            <a:schemeClr val="lt1"/>
+          </a:fontRef>
+        </p:style>
+        <p:txBody>
+          <a:bodyPr rtlCol="0" anchor="ctr"/>
+          <a:lstStyle/>
+          <a:p>
+            <a:pPr algn="ctr"/>
+          </a:p>
+        </p:txBody>
+      </p:sp>
+      <p:sp>
+        <p:nvSpPr>
+          <p:cNvPr id="29" name="TextBox 28"/>
+          <p:cNvSpPr txBox="1"/>
+          <p:nvPr/>
+        </p:nvSpPr>
+        <p:spPr>
+          <a:xfrm>
+            <a:off x="2276856" y="1947672"/>
+            <a:ext cx="1261872" cy="475488"/>
+          </a:xfrm>
+          <a:prstGeom prst="rect">
+            <a:avLst/>
+          </a:prstGeom>
+          <a:noFill/>
+        </p:spPr>
+        <p:txBody>
+          <a:bodyPr wrap="square">
+            <a:spAutoFit/>
+          </a:bodyPr>
+          <a:lstStyle/>
+          <a:p>
+            <a:pPr algn="ctr"/>
+            <a:r>
+              <a:rPr sz="1300" b="0" i="0">
+                <a:solidFill>
+                  <a:srgbClr val="1A1A1A"/>
+                </a:solidFill>
+              </a:rPr>
+              <a:t>272.87</a:t>
+            </a:r>
+          </a:p>
+        </p:txBody>
+      </p:sp>
+      <p:sp>
+        <p:nvSpPr>
+          <p:cNvPr id="30" name="Rectangle 29"/>
+          <p:cNvSpPr/>
+          <p:nvPr/>
+        </p:nvSpPr>
+        <p:spPr>
+          <a:xfrm>
+            <a:off x="3602736" y="1892807"/>
+            <a:ext cx="822960" cy="566928"/>
+          </a:xfrm>
+          <a:prstGeom prst="rect">
+            <a:avLst/>
+          </a:prstGeom>
+          <a:solidFill>
+            <a:srgbClr val="F2F2F2"/>
+          </a:solidFill>
+          <a:ln w="6350">
+            <a:solidFill>
+              <a:srgbClr val="CCCCCC"/>
+            </a:solidFill>
+          </a:ln>
+        </p:spPr>
+        <p:style>
+          <a:lnRef idx="1">
+            <a:schemeClr val="accent1"/>
+          </a:lnRef>
+          <a:fillRef idx="3">
+            <a:schemeClr val="accent1"/>
+          </a:fillRef>
+          <a:effectRef idx="2">
+            <a:schemeClr val="accent1"/>
+          </a:effectRef>
+          <a:fontRef idx="minor">
+            <a:schemeClr val="lt1"/>
+          </a:fontRef>
+        </p:style>
+        <p:txBody>
+          <a:bodyPr rtlCol="0" anchor="ctr"/>
+          <a:lstStyle/>
+          <a:p>
+            <a:pPr algn="ctr"/>
+          </a:p>
+        </p:txBody>
+      </p:sp>
+      <p:sp>
+        <p:nvSpPr>
+          <p:cNvPr id="31" name="TextBox 30"/>
+          <p:cNvSpPr txBox="1"/>
+          <p:nvPr/>
+        </p:nvSpPr>
+        <p:spPr>
+          <a:xfrm>
+            <a:off x="3666744" y="1947672"/>
+            <a:ext cx="713232" cy="475488"/>
+          </a:xfrm>
+          <a:prstGeom prst="rect">
+            <a:avLst/>
+          </a:prstGeom>
+          <a:noFill/>
+        </p:spPr>
+        <p:txBody>
+          <a:bodyPr wrap="square">
+            <a:spAutoFit/>
+          </a:bodyPr>
+          <a:lstStyle/>
+          <a:p>
+            <a:pPr algn="ctr"/>
+            <a:r>
+              <a:rPr sz="1100" b="0" i="0">
+                <a:solidFill>
+                  <a:srgbClr val="1A1A1A"/>
+                </a:solidFill>
+              </a:rPr>
+              <a:t>0.957</a:t>
+            </a:r>
+          </a:p>
+        </p:txBody>
+      </p:sp>
+      <p:sp>
+        <p:nvSpPr>
+          <p:cNvPr id="32" name="Rectangle 31"/>
+          <p:cNvSpPr/>
+          <p:nvPr/>
+        </p:nvSpPr>
+        <p:spPr>
+          <a:xfrm>
+            <a:off x="4443984" y="1892807"/>
+            <a:ext cx="914400" cy="566928"/>
+          </a:xfrm>
+          <a:prstGeom prst="rect">
+            <a:avLst/>
+          </a:prstGeom>
+          <a:solidFill>
+            <a:srgbClr val="F2F2F2"/>
+          </a:solidFill>
+          <a:ln w="6350">
+            <a:solidFill>
+              <a:srgbClr val="CCCCCC"/>
+            </a:solidFill>
+          </a:ln>
+        </p:spPr>
+        <p:style>
+          <a:lnRef idx="1">
+            <a:schemeClr val="accent1"/>
+          </a:lnRef>
+          <a:fillRef idx="3">
+            <a:schemeClr val="accent1"/>
+          </a:fillRef>
+          <a:effectRef idx="2">
+            <a:schemeClr val="accent1"/>
+          </a:effectRef>
+          <a:fontRef idx="minor">
+            <a:schemeClr val="lt1"/>
+          </a:fontRef>
+        </p:style>
+        <p:txBody>
+          <a:bodyPr rtlCol="0" anchor="ctr"/>
+          <a:lstStyle/>
+          <a:p>
+            <a:pPr algn="ctr"/>
+          </a:p>
+        </p:txBody>
+      </p:sp>
+      <p:sp>
+        <p:nvSpPr>
+          <p:cNvPr id="33" name="TextBox 32"/>
+          <p:cNvSpPr txBox="1"/>
+          <p:nvPr/>
+        </p:nvSpPr>
+        <p:spPr>
+          <a:xfrm>
+            <a:off x="4507992" y="1947672"/>
+            <a:ext cx="804672" cy="475488"/>
+          </a:xfrm>
+          <a:prstGeom prst="rect">
+            <a:avLst/>
+          </a:prstGeom>
+          <a:noFill/>
+        </p:spPr>
+        <p:txBody>
+          <a:bodyPr wrap="square">
+            <a:spAutoFit/>
+          </a:bodyPr>
+          <a:lstStyle/>
+          <a:p>
+            <a:pPr algn="ctr"/>
+            <a:r>
+              <a:rPr sz="1100" b="0" i="0">
+                <a:solidFill>
+                  <a:srgbClr val="1A1A1A"/>
+                </a:solidFill>
+              </a:rPr>
+              <a:t>Good</a:t>
+            </a:r>
+          </a:p>
+        </p:txBody>
+      </p:sp>
+      <p:sp>
+        <p:nvSpPr>
+          <p:cNvPr id="34" name="Rectangle 33"/>
+          <p:cNvSpPr/>
+          <p:nvPr/>
+        </p:nvSpPr>
+        <p:spPr>
+          <a:xfrm>
+            <a:off x="5376672" y="1892807"/>
+            <a:ext cx="2286000" cy="566928"/>
+          </a:xfrm>
+          <a:prstGeom prst="rect">
+            <a:avLst/>
+          </a:prstGeom>
+          <a:solidFill>
+            <a:srgbClr val="F2F2F2"/>
+          </a:solidFill>
+          <a:ln w="6350">
+            <a:solidFill>
+              <a:srgbClr val="CCCCCC"/>
+            </a:solidFill>
+          </a:ln>
+        </p:spPr>
+        <p:style>
+          <a:lnRef idx="1">
+            <a:schemeClr val="accent1"/>
+          </a:lnRef>
+          <a:fillRef idx="3">
+            <a:schemeClr val="accent1"/>
+          </a:fillRef>
+          <a:effectRef idx="2">
+            <a:schemeClr val="accent1"/>
+          </a:effectRef>
+          <a:fontRef idx="minor">
+            <a:schemeClr val="lt1"/>
+          </a:fontRef>
+        </p:style>
+        <p:txBody>
+          <a:bodyPr rtlCol="0" anchor="ctr"/>
+          <a:lstStyle/>
+          <a:p>
+            <a:pPr algn="ctr"/>
+          </a:p>
+        </p:txBody>
+      </p:sp>
+      <p:sp>
+        <p:nvSpPr>
+          <p:cNvPr id="35" name="TextBox 34"/>
+          <p:cNvSpPr txBox="1"/>
+          <p:nvPr/>
+        </p:nvSpPr>
+        <p:spPr>
+          <a:xfrm>
+            <a:off x="5440680" y="1947672"/>
+            <a:ext cx="2176272" cy="475488"/>
+          </a:xfrm>
+          <a:prstGeom prst="rect">
+            <a:avLst/>
+          </a:prstGeom>
+          <a:noFill/>
+        </p:spPr>
+        <p:txBody>
+          <a:bodyPr wrap="square">
+            <a:spAutoFit/>
+          </a:bodyPr>
+          <a:lstStyle/>
+          <a:p>
+            <a:pPr algn="l"/>
+            <a:r>
+              <a:rPr sz="1100" b="0" i="0">
+                <a:solidFill>
+                  <a:srgbClr val="1A1A1A"/>
+                </a:solidFill>
+              </a:rPr>
+              <a:t>Full inhibition achieved
+at high concentrations</a:t>
+            </a:r>
+          </a:p>
+        </p:txBody>
+      </p:sp>
+      <p:sp>
+        <p:nvSpPr>
+          <p:cNvPr id="36" name="Rectangle 35"/>
+          <p:cNvSpPr/>
+          <p:nvPr/>
+        </p:nvSpPr>
+        <p:spPr>
+          <a:xfrm>
+            <a:off x="274320" y="2487168"/>
+            <a:ext cx="1920240" cy="566928"/>
+          </a:xfrm>
+          <a:prstGeom prst="rect">
+            <a:avLst/>
+          </a:prstGeom>
+          <a:solidFill>
+            <a:srgbClr val="FFFFFF"/>
+          </a:solidFill>
+          <a:ln w="6350">
+            <a:solidFill>
+              <a:srgbClr val="CCCCCC"/>
+            </a:solidFill>
+          </a:ln>
+        </p:spPr>
+        <p:style>
+          <a:lnRef idx="1">
+            <a:schemeClr val="accent1"/>
+          </a:lnRef>
+          <a:fillRef idx="3">
+            <a:schemeClr val="accent1"/>
+          </a:fillRef>
+          <a:effectRef idx="2">
+            <a:schemeClr val="accent1"/>
+          </a:effectRef>
+          <a:fontRef idx="minor">
+            <a:schemeClr val="lt1"/>
+          </a:fontRef>
+        </p:style>
+        <p:txBody>
+          <a:bodyPr rtlCol="0" anchor="ctr"/>
+          <a:lstStyle/>
+          <a:p>
+            <a:pPr algn="ctr"/>
+          </a:p>
+        </p:txBody>
+      </p:sp>
+      <p:sp>
+        <p:nvSpPr>
+          <p:cNvPr id="37" name="TextBox 36"/>
+          <p:cNvSpPr txBox="1"/>
+          <p:nvPr/>
+        </p:nvSpPr>
+        <p:spPr>
+          <a:xfrm>
+            <a:off x="338328" y="2542032"/>
+            <a:ext cx="1810512" cy="475488"/>
+          </a:xfrm>
+          <a:prstGeom prst="rect">
+            <a:avLst/>
+          </a:prstGeom>
+          <a:noFill/>
+        </p:spPr>
+        <p:txBody>
+          <a:bodyPr wrap="square">
+            <a:spAutoFit/>
+          </a:bodyPr>
+          <a:lstStyle/>
+          <a:p>
+            <a:pPr algn="l"/>
+            <a:r>
+              <a:rPr sz="1200" b="1" i="0">
+                <a:solidFill>
+                  <a:srgbClr val="1A1A1A"/>
+                </a:solidFill>
+              </a:rPr>
+              <a:t>MK-1775</a:t>
+            </a:r>
+          </a:p>
+        </p:txBody>
+      </p:sp>
+      <p:sp>
+        <p:nvSpPr>
+          <p:cNvPr id="38" name="Rectangle 37"/>
+          <p:cNvSpPr/>
+          <p:nvPr/>
+        </p:nvSpPr>
+        <p:spPr>
+          <a:xfrm>
+            <a:off x="2212848" y="2487168"/>
+            <a:ext cx="1371600" cy="566928"/>
+          </a:xfrm>
+          <a:prstGeom prst="rect">
+            <a:avLst/>
+          </a:prstGeom>
+          <a:solidFill>
+            <a:srgbClr val="FFFFFF"/>
+          </a:solidFill>
+          <a:ln w="6350">
+            <a:solidFill>
+              <a:srgbClr val="CCCCCC"/>
+            </a:solidFill>
+          </a:ln>
+        </p:spPr>
+        <p:style>
+          <a:lnRef idx="1">
+            <a:schemeClr val="accent1"/>
+          </a:lnRef>
+          <a:fillRef idx="3">
+            <a:schemeClr val="accent1"/>
+          </a:fillRef>
+          <a:effectRef idx="2">
+            <a:schemeClr val="accent1"/>
+          </a:effectRef>
+          <a:fontRef idx="minor">
+            <a:schemeClr val="lt1"/>
+          </a:fontRef>
+        </p:style>
+        <p:txBody>
+          <a:bodyPr rtlCol="0" anchor="ctr"/>
+          <a:lstStyle/>
+          <a:p>
+            <a:pPr algn="ctr"/>
+          </a:p>
+        </p:txBody>
+      </p:sp>
+      <p:sp>
+        <p:nvSpPr>
+          <p:cNvPr id="39" name="TextBox 38"/>
+          <p:cNvSpPr txBox="1"/>
+          <p:nvPr/>
+        </p:nvSpPr>
+        <p:spPr>
+          <a:xfrm>
+            <a:off x="2276856" y="2542032"/>
+            <a:ext cx="1261872" cy="475488"/>
+          </a:xfrm>
+          <a:prstGeom prst="rect">
+            <a:avLst/>
+          </a:prstGeom>
+          <a:noFill/>
+        </p:spPr>
+        <p:txBody>
+          <a:bodyPr wrap="square">
+            <a:spAutoFit/>
+          </a:bodyPr>
+          <a:lstStyle/>
+          <a:p>
+            <a:pPr algn="ctr"/>
+            <a:r>
+              <a:rPr sz="1300" b="0" i="0">
+                <a:solidFill>
+                  <a:srgbClr val="1A1A1A"/>
+                </a:solidFill>
+              </a:rPr>
+              <a:t>657.30</a:t>
+            </a:r>
+          </a:p>
+        </p:txBody>
+      </p:sp>
+      <p:sp>
+        <p:nvSpPr>
+          <p:cNvPr id="40" name="Rectangle 39"/>
+          <p:cNvSpPr/>
+          <p:nvPr/>
+        </p:nvSpPr>
+        <p:spPr>
+          <a:xfrm>
+            <a:off x="3602736" y="2487168"/>
+            <a:ext cx="822960" cy="566928"/>
+          </a:xfrm>
+          <a:prstGeom prst="rect">
+            <a:avLst/>
+          </a:prstGeom>
+          <a:solidFill>
+            <a:srgbClr val="FFFFFF"/>
+          </a:solidFill>
+          <a:ln w="6350">
+            <a:solidFill>
+              <a:srgbClr val="CCCCCC"/>
+            </a:solidFill>
+          </a:ln>
+        </p:spPr>
+        <p:style>
+          <a:lnRef idx="1">
+            <a:schemeClr val="accent1"/>
+          </a:lnRef>
+          <a:fillRef idx="3">
+            <a:schemeClr val="accent1"/>
+          </a:fillRef>
+          <a:effectRef idx="2">
+            <a:schemeClr val="accent1"/>
+          </a:effectRef>
+          <a:fontRef idx="minor">
+            <a:schemeClr val="lt1"/>
+          </a:fontRef>
+        </p:style>
+        <p:txBody>
+          <a:bodyPr rtlCol="0" anchor="ctr"/>
+          <a:lstStyle/>
+          <a:p>
+            <a:pPr algn="ctr"/>
+          </a:p>
+        </p:txBody>
+      </p:sp>
+      <p:sp>
+        <p:nvSpPr>
+          <p:cNvPr id="41" name="TextBox 40"/>
+          <p:cNvSpPr txBox="1"/>
+          <p:nvPr/>
+        </p:nvSpPr>
+        <p:spPr>
+          <a:xfrm>
+            <a:off x="3666744" y="2542032"/>
+            <a:ext cx="713232" cy="475488"/>
+          </a:xfrm>
+          <a:prstGeom prst="rect">
+            <a:avLst/>
+          </a:prstGeom>
+          <a:noFill/>
+        </p:spPr>
+        <p:txBody>
+          <a:bodyPr wrap="square">
+            <a:spAutoFit/>
+          </a:bodyPr>
+          <a:lstStyle/>
+          <a:p>
+            <a:pPr algn="ctr"/>
+            <a:r>
+              <a:rPr sz="1100" b="0" i="0">
+                <a:solidFill>
+                  <a:srgbClr val="1A1A1A"/>
+                </a:solidFill>
+              </a:rPr>
+              <a:t>0.989</a:t>
+            </a:r>
+          </a:p>
+        </p:txBody>
+      </p:sp>
+      <p:sp>
+        <p:nvSpPr>
+          <p:cNvPr id="42" name="Rectangle 41"/>
+          <p:cNvSpPr/>
+          <p:nvPr/>
+        </p:nvSpPr>
+        <p:spPr>
+          <a:xfrm>
+            <a:off x="4443984" y="2487168"/>
+            <a:ext cx="914400" cy="566928"/>
+          </a:xfrm>
+          <a:prstGeom prst="rect">
+            <a:avLst/>
+          </a:prstGeom>
+          <a:solidFill>
+            <a:srgbClr val="FFFFFF"/>
+          </a:solidFill>
+          <a:ln w="6350">
+            <a:solidFill>
+              <a:srgbClr val="CCCCCC"/>
+            </a:solidFill>
+          </a:ln>
+        </p:spPr>
+        <p:style>
+          <a:lnRef idx="1">
+            <a:schemeClr val="accent1"/>
+          </a:lnRef>
+          <a:fillRef idx="3">
+            <a:schemeClr val="accent1"/>
+          </a:fillRef>
+          <a:effectRef idx="2">
+            <a:schemeClr val="accent1"/>
+          </a:effectRef>
+          <a:fontRef idx="minor">
+            <a:schemeClr val="lt1"/>
+          </a:fontRef>
+        </p:style>
+        <p:txBody>
+          <a:bodyPr rtlCol="0" anchor="ctr"/>
+          <a:lstStyle/>
+          <a:p>
+            <a:pPr algn="ctr"/>
+          </a:p>
+        </p:txBody>
+      </p:sp>
+      <p:sp>
+        <p:nvSpPr>
+          <p:cNvPr id="43" name="TextBox 42"/>
+          <p:cNvSpPr txBox="1"/>
+          <p:nvPr/>
+        </p:nvSpPr>
+        <p:spPr>
+          <a:xfrm>
+            <a:off x="4507992" y="2542032"/>
+            <a:ext cx="804672" cy="475488"/>
+          </a:xfrm>
+          <a:prstGeom prst="rect">
+            <a:avLst/>
+          </a:prstGeom>
+          <a:noFill/>
+        </p:spPr>
+        <p:txBody>
+          <a:bodyPr wrap="square">
+            <a:spAutoFit/>
+          </a:bodyPr>
+          <a:lstStyle/>
+          <a:p>
+            <a:pPr algn="ctr"/>
+            <a:r>
+              <a:rPr sz="1100" b="0" i="0">
+                <a:solidFill>
+                  <a:srgbClr val="1A1A1A"/>
+                </a:solidFill>
+              </a:rPr>
+              <a:t>Excellent</a:t>
+            </a:r>
+          </a:p>
+        </p:txBody>
+      </p:sp>
+      <p:sp>
+        <p:nvSpPr>
+          <p:cNvPr id="44" name="Rectangle 43"/>
+          <p:cNvSpPr/>
+          <p:nvPr/>
+        </p:nvSpPr>
+        <p:spPr>
+          <a:xfrm>
+            <a:off x="5376672" y="2487168"/>
+            <a:ext cx="2286000" cy="566928"/>
+          </a:xfrm>
+          <a:prstGeom prst="rect">
+            <a:avLst/>
+          </a:prstGeom>
+          <a:solidFill>
+            <a:srgbClr val="FFFFFF"/>
+          </a:solidFill>
+          <a:ln w="6350">
+            <a:solidFill>
+              <a:srgbClr val="CCCCCC"/>
+            </a:solidFill>
+          </a:ln>
+        </p:spPr>
+        <p:style>
+          <a:lnRef idx="1">
+            <a:schemeClr val="accent1"/>
+          </a:lnRef>
+          <a:fillRef idx="3">
+            <a:schemeClr val="accent1"/>
+          </a:fillRef>
+          <a:effectRef idx="2">
+            <a:schemeClr val="accent1"/>
+          </a:effectRef>
+          <a:fontRef idx="minor">
+            <a:schemeClr val="lt1"/>
+          </a:fontRef>
+        </p:style>
+        <p:txBody>
+          <a:bodyPr rtlCol="0" anchor="ctr"/>
+          <a:lstStyle/>
+          <a:p>
+            <a:pPr algn="ctr"/>
+          </a:p>
+        </p:txBody>
+      </p:sp>
+      <p:sp>
+        <p:nvSpPr>
+          <p:cNvPr id="45" name="TextBox 44"/>
+          <p:cNvSpPr txBox="1"/>
+          <p:nvPr/>
+        </p:nvSpPr>
+        <p:spPr>
+          <a:xfrm>
+            <a:off x="5440680" y="2542032"/>
+            <a:ext cx="2176272" cy="475488"/>
+          </a:xfrm>
+          <a:prstGeom prst="rect">
+            <a:avLst/>
+          </a:prstGeom>
+          <a:noFill/>
+        </p:spPr>
+        <p:txBody>
+          <a:bodyPr wrap="square">
+            <a:spAutoFit/>
+          </a:bodyPr>
+          <a:lstStyle/>
+          <a:p>
+            <a:pPr algn="l"/>
+            <a:r>
+              <a:rPr sz="1100" b="0" i="0">
+                <a:solidFill>
+                  <a:srgbClr val="1A1A1A"/>
+                </a:solidFill>
+              </a:rPr>
+              <a:t>Cleanest sigmoidal fit;
+highest R² of the three</a:t>
+            </a:r>
+          </a:p>
+        </p:txBody>
+      </p:sp>
+      <p:sp>
+        <p:nvSpPr>
+          <p:cNvPr id="46" name="Rectangle 45"/>
+          <p:cNvSpPr/>
+          <p:nvPr/>
+        </p:nvSpPr>
+        <p:spPr>
+          <a:xfrm>
+            <a:off x="7726679" y="1298448"/>
+            <a:ext cx="1280160" cy="384048"/>
+          </a:xfrm>
+          <a:prstGeom prst="rect">
+            <a:avLst/>
+          </a:prstGeom>
+          <a:solidFill>
+            <a:srgbClr val="379637"/>
+          </a:solidFill>
+          <a:ln>
+            <a:noFill/>
+          </a:ln>
+        </p:spPr>
+        <p:style>
+          <a:lnRef idx="1">
+            <a:schemeClr val="accent1"/>
+          </a:lnRef>
+          <a:fillRef idx="3">
+            <a:schemeClr val="accent1"/>
+          </a:fillRef>
+          <a:effectRef idx="2">
+            <a:schemeClr val="accent1"/>
+          </a:effectRef>
+          <a:fontRef idx="minor">
+            <a:schemeClr val="lt1"/>
+          </a:fontRef>
+        </p:style>
+        <p:txBody>
+          <a:bodyPr rtlCol="0" anchor="ctr"/>
+          <a:lstStyle/>
+          <a:p>
+            <a:pPr algn="ctr"/>
+          </a:p>
+        </p:txBody>
+      </p:sp>
+      <p:sp>
+        <p:nvSpPr>
+          <p:cNvPr id="47" name="TextBox 46"/>
+          <p:cNvSpPr txBox="1"/>
+          <p:nvPr/>
+        </p:nvSpPr>
+        <p:spPr>
+          <a:xfrm>
+            <a:off x="7744968" y="1316736"/>
+            <a:ext cx="1243584" cy="347472"/>
+          </a:xfrm>
+          <a:prstGeom prst="rect">
+            <a:avLst/>
+          </a:prstGeom>
+          <a:noFill/>
+        </p:spPr>
+        <p:txBody>
+          <a:bodyPr wrap="square">
+            <a:spAutoFit/>
+          </a:bodyPr>
+          <a:lstStyle/>
+          <a:p>
+            <a:pPr algn="ctr"/>
+            <a:r>
+              <a:rPr sz="1000" b="1" i="0">
+                <a:solidFill>
+                  <a:srgbClr val="FFFFFF"/>
+                </a:solidFill>
+              </a:rPr>
+              <a:t>★  Most Potent</a:t>
+            </a:r>
+          </a:p>
+        </p:txBody>
+      </p:sp>
+      <p:sp>
+        <p:nvSpPr>
+          <p:cNvPr id="48" name="Rectangle 47"/>
+          <p:cNvSpPr/>
+          <p:nvPr/>
+        </p:nvSpPr>
+        <p:spPr>
+          <a:xfrm>
+            <a:off x="274320" y="3154680"/>
+            <a:ext cx="7406640" cy="3246120"/>
           </a:xfrm>
           <a:prstGeom prst="rect">
             <a:avLst/>
@@ -6381,14 +7703,14 @@
       </p:sp>
       <p:sp>
         <p:nvSpPr>
-          <p:cNvPr id="5" name="TextBox 4"/>
+          <p:cNvPr id="49" name="TextBox 48"/>
           <p:cNvSpPr txBox="1"/>
           <p:nvPr/>
         </p:nvSpPr>
         <p:spPr>
           <a:xfrm>
-            <a:off x="457200" y="987552"/>
-            <a:ext cx="5212080" cy="365760"/>
+            <a:off x="457200" y="3218688"/>
+            <a:ext cx="3657600" cy="320040"/>
           </a:xfrm>
           <a:prstGeom prst="rect">
             <a:avLst/>
@@ -6403,12 +7725,768 @@
           <a:p>
             <a:pPr algn="l"/>
             <a:r>
-              <a:rPr sz="1500" b="1" i="0">
+              <a:rPr sz="1400" b="1" i="0">
                 <a:solidFill>
                   <a:srgbClr val="1A375E"/>
                 </a:solidFill>
               </a:rPr>
-              <a:t>Genetic Perturbagen Screen</a:t>
+              <a:t>Key Findings</a:t>
+            </a:r>
+          </a:p>
+        </p:txBody>
+      </p:sp>
+      <p:sp>
+        <p:nvSpPr>
+          <p:cNvPr id="50" name="TextBox 49"/>
+          <p:cNvSpPr txBox="1"/>
+          <p:nvPr/>
+        </p:nvSpPr>
+        <p:spPr>
+          <a:xfrm>
+            <a:off x="457200" y="3611880"/>
+            <a:ext cx="7040880" cy="2560320"/>
+          </a:xfrm>
+          <a:prstGeom prst="rect">
+            <a:avLst/>
+          </a:prstGeom>
+          <a:noFill/>
+        </p:spPr>
+        <p:txBody>
+          <a:bodyPr wrap="square">
+            <a:spAutoFit/>
+          </a:bodyPr>
+          <a:lstStyle/>
+          <a:p>
+            <a:pPr>
+              <a:spcBef>
+                <a:spcPts val="400"/>
+              </a:spcBef>
+            </a:pPr>
+            <a:r>
+              <a:rPr sz="1100">
+                <a:solidFill>
+                  <a:srgbClr val="1A1A1A"/>
+                </a:solidFill>
+              </a:rPr>
+              <a:t>▶  Prexasertib is the most potent agent — IC₅₀ ≈ 10 nM, roughly 27× more potent than BAY1895344 and 66× more potent than MK-1775.</a:t>
+            </a:r>
+          </a:p>
+          <a:p>
+            <a:pPr>
+              <a:spcBef>
+                <a:spcPts val="400"/>
+              </a:spcBef>
+            </a:pPr>
+            <a:r>
+              <a:rPr sz="1100">
+                <a:solidFill>
+                  <a:srgbClr val="1A1A1A"/>
+                </a:solidFill>
+              </a:rPr>
+              <a:t>▶  Prexasertib's dose-response curve did not reach complete inhibition (plateaus at ~40–50%), suggesting a cytostatic rather than cytotoxic effect at the concentrations tested.</a:t>
+            </a:r>
+          </a:p>
+          <a:p>
+            <a:pPr>
+              <a:spcBef>
+                <a:spcPts val="400"/>
+              </a:spcBef>
+            </a:pPr>
+            <a:r>
+              <a:rPr sz="1100">
+                <a:solidFill>
+                  <a:srgbClr val="1A1A1A"/>
+                </a:solidFill>
+              </a:rPr>
+              <a:t>▶  MK-1775 produced the cleanest curve fit (R² = 0.989), indicating a reliable, well-defined sigmoidal dose-response relationship.</a:t>
+            </a:r>
+          </a:p>
+          <a:p>
+            <a:pPr>
+              <a:spcBef>
+                <a:spcPts val="400"/>
+              </a:spcBef>
+            </a:pPr>
+            <a:r>
+              <a:rPr sz="1100">
+                <a:solidFill>
+                  <a:srgbClr val="1A1A1A"/>
+                </a:solidFill>
+              </a:rPr>
+              <a:t>▶  Multi-timepoint analysis (37 time points, 74 h) confirmed that potency increases over time for all three drugs, as captured by the growth rate metric.</a:t>
+            </a:r>
+          </a:p>
+          <a:p>
+            <a:pPr>
+              <a:spcBef>
+                <a:spcPts val="400"/>
+              </a:spcBef>
+            </a:pPr>
+            <a:r>
+              <a:rPr sz="1100">
+                <a:solidFill>
+                  <a:srgbClr val="1A1A1A"/>
+                </a:solidFill>
+              </a:rPr>
+              <a:t>▶  Single biological replicate — results should be interpreted with caution and validated with additional replicates.</a:t>
+            </a:r>
+          </a:p>
+        </p:txBody>
+      </p:sp>
+      <p:sp>
+        <p:nvSpPr>
+          <p:cNvPr id="51" name="TextBox 50"/>
+          <p:cNvSpPr txBox="1"/>
+          <p:nvPr/>
+        </p:nvSpPr>
+        <p:spPr>
+          <a:xfrm>
+            <a:off x="7863840" y="3218688"/>
+            <a:ext cx="4114800" cy="292608"/>
+          </a:xfrm>
+          <a:prstGeom prst="rect">
+            <a:avLst/>
+          </a:prstGeom>
+          <a:noFill/>
+        </p:spPr>
+        <p:txBody>
+          <a:bodyPr wrap="square">
+            <a:spAutoFit/>
+          </a:bodyPr>
+          <a:lstStyle/>
+          <a:p>
+            <a:pPr algn="l"/>
+            <a:r>
+              <a:rPr sz="1300" b="1" i="0">
+                <a:solidFill>
+                  <a:srgbClr val="1A375E"/>
+                </a:solidFill>
+              </a:rPr>
+              <a:t>Relative Potency</a:t>
+            </a:r>
+          </a:p>
+        </p:txBody>
+      </p:sp>
+      <p:sp>
+        <p:nvSpPr>
+          <p:cNvPr id="52" name="TextBox 51"/>
+          <p:cNvSpPr txBox="1"/>
+          <p:nvPr/>
+        </p:nvSpPr>
+        <p:spPr>
+          <a:xfrm>
+            <a:off x="7863840" y="3611880"/>
+            <a:ext cx="2011680" cy="274320"/>
+          </a:xfrm>
+          <a:prstGeom prst="rect">
+            <a:avLst/>
+          </a:prstGeom>
+          <a:noFill/>
+        </p:spPr>
+        <p:txBody>
+          <a:bodyPr wrap="square">
+            <a:spAutoFit/>
+          </a:bodyPr>
+          <a:lstStyle/>
+          <a:p>
+            <a:pPr algn="l"/>
+            <a:r>
+              <a:rPr sz="1100" b="1" i="0">
+                <a:solidFill>
+                  <a:srgbClr val="379637"/>
+                </a:solidFill>
+              </a:rPr>
+              <a:t>Prexasertib</a:t>
+            </a:r>
+          </a:p>
+        </p:txBody>
+      </p:sp>
+      <p:sp>
+        <p:nvSpPr>
+          <p:cNvPr id="53" name="Rectangle 52"/>
+          <p:cNvSpPr/>
+          <p:nvPr/>
+        </p:nvSpPr>
+        <p:spPr>
+          <a:xfrm>
+            <a:off x="7863840" y="3913632"/>
+            <a:ext cx="56922" cy="347472"/>
+          </a:xfrm>
+          <a:prstGeom prst="rect">
+            <a:avLst/>
+          </a:prstGeom>
+          <a:solidFill>
+            <a:srgbClr val="379637"/>
+          </a:solidFill>
+          <a:ln>
+            <a:noFill/>
+          </a:ln>
+        </p:spPr>
+        <p:style>
+          <a:lnRef idx="1">
+            <a:schemeClr val="accent1"/>
+          </a:lnRef>
+          <a:fillRef idx="3">
+            <a:schemeClr val="accent1"/>
+          </a:fillRef>
+          <a:effectRef idx="2">
+            <a:schemeClr val="accent1"/>
+          </a:effectRef>
+          <a:fontRef idx="minor">
+            <a:schemeClr val="lt1"/>
+          </a:fontRef>
+        </p:style>
+        <p:txBody>
+          <a:bodyPr rtlCol="0" anchor="ctr"/>
+          <a:lstStyle/>
+          <a:p>
+            <a:pPr algn="ctr"/>
+          </a:p>
+        </p:txBody>
+      </p:sp>
+      <p:sp>
+        <p:nvSpPr>
+          <p:cNvPr id="54" name="TextBox 53"/>
+          <p:cNvSpPr txBox="1"/>
+          <p:nvPr/>
+        </p:nvSpPr>
+        <p:spPr>
+          <a:xfrm>
+            <a:off x="7993914" y="3941064"/>
+            <a:ext cx="1645920" cy="274320"/>
+          </a:xfrm>
+          <a:prstGeom prst="rect">
+            <a:avLst/>
+          </a:prstGeom>
+          <a:noFill/>
+        </p:spPr>
+        <p:txBody>
+          <a:bodyPr wrap="square">
+            <a:spAutoFit/>
+          </a:bodyPr>
+          <a:lstStyle/>
+          <a:p>
+            <a:pPr algn="l"/>
+            <a:r>
+              <a:rPr sz="1000" b="1" i="0">
+                <a:solidFill>
+                  <a:srgbClr val="379637"/>
+                </a:solidFill>
+              </a:rPr>
+              <a:t>IC₅₀ = 9.98 nM</a:t>
+            </a:r>
+          </a:p>
+        </p:txBody>
+      </p:sp>
+      <p:sp>
+        <p:nvSpPr>
+          <p:cNvPr id="55" name="TextBox 54"/>
+          <p:cNvSpPr txBox="1"/>
+          <p:nvPr/>
+        </p:nvSpPr>
+        <p:spPr>
+          <a:xfrm>
+            <a:off x="7863840" y="4572000"/>
+            <a:ext cx="2011680" cy="274320"/>
+          </a:xfrm>
+          <a:prstGeom prst="rect">
+            <a:avLst/>
+          </a:prstGeom>
+          <a:noFill/>
+        </p:spPr>
+        <p:txBody>
+          <a:bodyPr wrap="square">
+            <a:spAutoFit/>
+          </a:bodyPr>
+          <a:lstStyle/>
+          <a:p>
+            <a:pPr algn="l"/>
+            <a:r>
+              <a:rPr sz="1100" b="1" i="0">
+                <a:solidFill>
+                  <a:srgbClr val="2E75B6"/>
+                </a:solidFill>
+              </a:rPr>
+              <a:t>BAY1895344</a:t>
+            </a:r>
+          </a:p>
+        </p:txBody>
+      </p:sp>
+      <p:sp>
+        <p:nvSpPr>
+          <p:cNvPr id="56" name="Rectangle 55"/>
+          <p:cNvSpPr/>
+          <p:nvPr/>
+        </p:nvSpPr>
+        <p:spPr>
+          <a:xfrm>
+            <a:off x="7863840" y="4873752"/>
+            <a:ext cx="1556367" cy="347472"/>
+          </a:xfrm>
+          <a:prstGeom prst="rect">
+            <a:avLst/>
+          </a:prstGeom>
+          <a:solidFill>
+            <a:srgbClr val="2E75B6"/>
+          </a:solidFill>
+          <a:ln>
+            <a:noFill/>
+          </a:ln>
+        </p:spPr>
+        <p:style>
+          <a:lnRef idx="1">
+            <a:schemeClr val="accent1"/>
+          </a:lnRef>
+          <a:fillRef idx="3">
+            <a:schemeClr val="accent1"/>
+          </a:fillRef>
+          <a:effectRef idx="2">
+            <a:schemeClr val="accent1"/>
+          </a:effectRef>
+          <a:fontRef idx="minor">
+            <a:schemeClr val="lt1"/>
+          </a:fontRef>
+        </p:style>
+        <p:txBody>
+          <a:bodyPr rtlCol="0" anchor="ctr"/>
+          <a:lstStyle/>
+          <a:p>
+            <a:pPr algn="ctr"/>
+          </a:p>
+        </p:txBody>
+      </p:sp>
+      <p:sp>
+        <p:nvSpPr>
+          <p:cNvPr id="57" name="TextBox 56"/>
+          <p:cNvSpPr txBox="1"/>
+          <p:nvPr/>
+        </p:nvSpPr>
+        <p:spPr>
+          <a:xfrm>
+            <a:off x="9493359" y="4901184"/>
+            <a:ext cx="1645920" cy="274320"/>
+          </a:xfrm>
+          <a:prstGeom prst="rect">
+            <a:avLst/>
+          </a:prstGeom>
+          <a:noFill/>
+        </p:spPr>
+        <p:txBody>
+          <a:bodyPr wrap="square">
+            <a:spAutoFit/>
+          </a:bodyPr>
+          <a:lstStyle/>
+          <a:p>
+            <a:pPr algn="l"/>
+            <a:r>
+              <a:rPr sz="1000" b="1" i="0">
+                <a:solidFill>
+                  <a:srgbClr val="2E75B6"/>
+                </a:solidFill>
+              </a:rPr>
+              <a:t>IC₅₀ = 272.87 nM</a:t>
+            </a:r>
+          </a:p>
+        </p:txBody>
+      </p:sp>
+      <p:sp>
+        <p:nvSpPr>
+          <p:cNvPr id="58" name="TextBox 57"/>
+          <p:cNvSpPr txBox="1"/>
+          <p:nvPr/>
+        </p:nvSpPr>
+        <p:spPr>
+          <a:xfrm>
+            <a:off x="7863840" y="5532120"/>
+            <a:ext cx="2011680" cy="274320"/>
+          </a:xfrm>
+          <a:prstGeom prst="rect">
+            <a:avLst/>
+          </a:prstGeom>
+          <a:noFill/>
+        </p:spPr>
+        <p:txBody>
+          <a:bodyPr wrap="square">
+            <a:spAutoFit/>
+          </a:bodyPr>
+          <a:lstStyle/>
+          <a:p>
+            <a:pPr algn="l"/>
+            <a:r>
+              <a:rPr sz="1100" b="1" i="0">
+                <a:solidFill>
+                  <a:srgbClr val="1A375E"/>
+                </a:solidFill>
+              </a:rPr>
+              <a:t>MK-1775</a:t>
+            </a:r>
+          </a:p>
+        </p:txBody>
+      </p:sp>
+      <p:sp>
+        <p:nvSpPr>
+          <p:cNvPr id="59" name="Rectangle 58"/>
+          <p:cNvSpPr/>
+          <p:nvPr/>
+        </p:nvSpPr>
+        <p:spPr>
+          <a:xfrm>
+            <a:off x="7863840" y="5833872"/>
+            <a:ext cx="3749039" cy="347472"/>
+          </a:xfrm>
+          <a:prstGeom prst="rect">
+            <a:avLst/>
+          </a:prstGeom>
+          <a:solidFill>
+            <a:srgbClr val="1A375E"/>
+          </a:solidFill>
+          <a:ln>
+            <a:noFill/>
+          </a:ln>
+        </p:spPr>
+        <p:style>
+          <a:lnRef idx="1">
+            <a:schemeClr val="accent1"/>
+          </a:lnRef>
+          <a:fillRef idx="3">
+            <a:schemeClr val="accent1"/>
+          </a:fillRef>
+          <a:effectRef idx="2">
+            <a:schemeClr val="accent1"/>
+          </a:effectRef>
+          <a:fontRef idx="minor">
+            <a:schemeClr val="lt1"/>
+          </a:fontRef>
+        </p:style>
+        <p:txBody>
+          <a:bodyPr rtlCol="0" anchor="ctr"/>
+          <a:lstStyle/>
+          <a:p>
+            <a:pPr algn="ctr"/>
+          </a:p>
+        </p:txBody>
+      </p:sp>
+      <p:sp>
+        <p:nvSpPr>
+          <p:cNvPr id="60" name="TextBox 59"/>
+          <p:cNvSpPr txBox="1"/>
+          <p:nvPr/>
+        </p:nvSpPr>
+        <p:spPr>
+          <a:xfrm>
+            <a:off x="11686032" y="5861304"/>
+            <a:ext cx="1645920" cy="274320"/>
+          </a:xfrm>
+          <a:prstGeom prst="rect">
+            <a:avLst/>
+          </a:prstGeom>
+          <a:noFill/>
+        </p:spPr>
+        <p:txBody>
+          <a:bodyPr wrap="square">
+            <a:spAutoFit/>
+          </a:bodyPr>
+          <a:lstStyle/>
+          <a:p>
+            <a:pPr algn="l"/>
+            <a:r>
+              <a:rPr sz="1000" b="1" i="0">
+                <a:solidFill>
+                  <a:srgbClr val="1A375E"/>
+                </a:solidFill>
+              </a:rPr>
+              <a:t>IC₅₀ = 657.3 nM</a:t>
+            </a:r>
+          </a:p>
+        </p:txBody>
+      </p:sp>
+      <p:sp>
+        <p:nvSpPr>
+          <p:cNvPr id="61" name="Rectangle 60"/>
+          <p:cNvSpPr/>
+          <p:nvPr/>
+        </p:nvSpPr>
+        <p:spPr>
+          <a:xfrm>
+            <a:off x="0" y="6656832"/>
+            <a:ext cx="12188952" cy="201168"/>
+          </a:xfrm>
+          <a:prstGeom prst="rect">
+            <a:avLst/>
+          </a:prstGeom>
+          <a:solidFill>
+            <a:srgbClr val="1A375E"/>
+          </a:solidFill>
+          <a:ln>
+            <a:noFill/>
+          </a:ln>
+        </p:spPr>
+        <p:style>
+          <a:lnRef idx="1">
+            <a:schemeClr val="accent1"/>
+          </a:lnRef>
+          <a:fillRef idx="3">
+            <a:schemeClr val="accent1"/>
+          </a:fillRef>
+          <a:effectRef idx="2">
+            <a:schemeClr val="accent1"/>
+          </a:effectRef>
+          <a:fontRef idx="minor">
+            <a:schemeClr val="lt1"/>
+          </a:fontRef>
+        </p:style>
+        <p:txBody>
+          <a:bodyPr rtlCol="0" anchor="ctr"/>
+          <a:lstStyle/>
+          <a:p>
+            <a:pPr algn="ctr"/>
+          </a:p>
+        </p:txBody>
+      </p:sp>
+      <p:sp>
+        <p:nvSpPr>
+          <p:cNvPr id="62" name="TextBox 61"/>
+          <p:cNvSpPr txBox="1"/>
+          <p:nvPr/>
+        </p:nvSpPr>
+        <p:spPr>
+          <a:xfrm>
+            <a:off x="10515600" y="6675120"/>
+            <a:ext cx="1554480" cy="182880"/>
+          </a:xfrm>
+          <a:prstGeom prst="rect">
+            <a:avLst/>
+          </a:prstGeom>
+          <a:noFill/>
+        </p:spPr>
+        <p:txBody>
+          <a:bodyPr wrap="square">
+            <a:spAutoFit/>
+          </a:bodyPr>
+          <a:lstStyle/>
+          <a:p>
+            <a:pPr algn="r"/>
+            <a:r>
+              <a:rPr sz="900" b="0" i="0">
+                <a:solidFill>
+                  <a:srgbClr val="FFFFFF"/>
+                </a:solidFill>
+              </a:rPr>
+              <a:t>Slide 3 of 5</a:t>
+            </a:r>
+          </a:p>
+        </p:txBody>
+      </p:sp>
+      <p:sp>
+        <p:nvSpPr>
+          <p:cNvPr id="63" name="TextBox 62"/>
+          <p:cNvSpPr txBox="1"/>
+          <p:nvPr/>
+        </p:nvSpPr>
+        <p:spPr>
+          <a:xfrm>
+            <a:off x="228600" y="6675120"/>
+            <a:ext cx="9144000" cy="182880"/>
+          </a:xfrm>
+          <a:prstGeom prst="rect">
+            <a:avLst/>
+          </a:prstGeom>
+          <a:noFill/>
+        </p:spPr>
+        <p:txBody>
+          <a:bodyPr wrap="square">
+            <a:spAutoFit/>
+          </a:bodyPr>
+          <a:lstStyle/>
+          <a:p>
+            <a:pPr algn="l"/>
+            <a:r>
+              <a:rPr sz="900" b="0" i="0">
+                <a:solidFill>
+                  <a:srgbClr val="BDD7EE"/>
+                </a:solidFill>
+              </a:rPr>
+              <a:t>HTSplotter  |  Nunes et al., PLoS One 2024  |  DOI: 10.1371/journal.pone.0296322</a:t>
+            </a:r>
+          </a:p>
+        </p:txBody>
+      </p:sp>
+    </p:spTree>
+  </p:cSld>
+  <p:clrMapOvr>
+    <a:masterClrMapping/>
+  </p:clrMapOvr>
+</p:sld>
+</file>
+
+<file path=ppt/slides/slide4.xml><?xml version="1.0" encoding="utf-8"?>
+<p:sld xmlns:a="http://schemas.openxmlformats.org/drawingml/2006/main" xmlns:p="http://schemas.openxmlformats.org/presentationml/2006/main" xmlns:r="http://schemas.openxmlformats.org/officeDocument/2006/relationships">
+  <p:cSld>
+    <p:bg>
+      <p:bgPr>
+        <a:solidFill>
+          <a:srgbClr val="FFFFFF"/>
+        </a:solidFill>
+        <a:effectLst/>
+      </p:bgPr>
+    </p:bg>
+    <p:spTree>
+      <p:nvGrpSpPr>
+        <p:cNvPr id="1" name=""/>
+        <p:cNvGrpSpPr/>
+        <p:nvPr/>
+      </p:nvGrpSpPr>
+      <p:grpSpPr/>
+      <p:sp>
+        <p:nvSpPr>
+          <p:cNvPr id="2" name="Rectangle 1"/>
+          <p:cNvSpPr/>
+          <p:nvPr/>
+        </p:nvSpPr>
+        <p:spPr>
+          <a:xfrm>
+            <a:off x="0" y="0"/>
+            <a:ext cx="12188952" cy="804672"/>
+          </a:xfrm>
+          <a:prstGeom prst="rect">
+            <a:avLst/>
+          </a:prstGeom>
+          <a:solidFill>
+            <a:srgbClr val="1A375E"/>
+          </a:solidFill>
+          <a:ln>
+            <a:noFill/>
+          </a:ln>
+        </p:spPr>
+        <p:style>
+          <a:lnRef idx="1">
+            <a:schemeClr val="accent1"/>
+          </a:lnRef>
+          <a:fillRef idx="3">
+            <a:schemeClr val="accent1"/>
+          </a:fillRef>
+          <a:effectRef idx="2">
+            <a:schemeClr val="accent1"/>
+          </a:effectRef>
+          <a:fontRef idx="minor">
+            <a:schemeClr val="lt1"/>
+          </a:fontRef>
+        </p:style>
+        <p:txBody>
+          <a:bodyPr rtlCol="0" anchor="ctr"/>
+          <a:lstStyle/>
+          <a:p>
+            <a:pPr algn="ctr"/>
+          </a:p>
+        </p:txBody>
+      </p:sp>
+      <p:sp>
+        <p:nvSpPr>
+          <p:cNvPr id="3" name="Rectangle 2"/>
+          <p:cNvSpPr/>
+          <p:nvPr/>
+        </p:nvSpPr>
+        <p:spPr>
+          <a:xfrm>
+            <a:off x="0" y="0"/>
+            <a:ext cx="73152" cy="804672"/>
+          </a:xfrm>
+          <a:prstGeom prst="rect">
+            <a:avLst/>
+          </a:prstGeom>
+          <a:solidFill>
+            <a:srgbClr val="2E75B6"/>
+          </a:solidFill>
+          <a:ln>
+            <a:noFill/>
+          </a:ln>
+        </p:spPr>
+        <p:style>
+          <a:lnRef idx="1">
+            <a:schemeClr val="accent1"/>
+          </a:lnRef>
+          <a:fillRef idx="3">
+            <a:schemeClr val="accent1"/>
+          </a:fillRef>
+          <a:effectRef idx="2">
+            <a:schemeClr val="accent1"/>
+          </a:effectRef>
+          <a:fontRef idx="minor">
+            <a:schemeClr val="lt1"/>
+          </a:fontRef>
+        </p:style>
+        <p:txBody>
+          <a:bodyPr rtlCol="0" anchor="ctr"/>
+          <a:lstStyle/>
+          <a:p>
+            <a:pPr algn="ctr"/>
+          </a:p>
+        </p:txBody>
+      </p:sp>
+      <p:sp>
+        <p:nvSpPr>
+          <p:cNvPr id="4" name="TextBox 3"/>
+          <p:cNvSpPr txBox="1"/>
+          <p:nvPr/>
+        </p:nvSpPr>
+        <p:spPr>
+          <a:xfrm>
+            <a:off x="228600" y="91440"/>
+            <a:ext cx="11704320" cy="502920"/>
+          </a:xfrm>
+          <a:prstGeom prst="rect">
+            <a:avLst/>
+          </a:prstGeom>
+          <a:noFill/>
+        </p:spPr>
+        <p:txBody>
+          <a:bodyPr wrap="square">
+            <a:spAutoFit/>
+          </a:bodyPr>
+          <a:lstStyle/>
+          <a:p>
+            <a:pPr algn="l"/>
+            <a:r>
+              <a:rPr sz="2600" b="1" i="0">
+                <a:solidFill>
+                  <a:srgbClr val="FFFFFF"/>
+                </a:solidFill>
+              </a:rPr>
+              <a:t>Drug Combination Synergy — Bliss Independence Model</a:t>
+            </a:r>
+          </a:p>
+        </p:txBody>
+      </p:sp>
+      <p:sp>
+        <p:nvSpPr>
+          <p:cNvPr id="5" name="TextBox 4"/>
+          <p:cNvSpPr txBox="1"/>
+          <p:nvPr/>
+        </p:nvSpPr>
+        <p:spPr>
+          <a:xfrm>
+            <a:off x="228600" y="548640"/>
+            <a:ext cx="11704320" cy="228600"/>
+          </a:xfrm>
+          <a:prstGeom prst="rect">
+            <a:avLst/>
+          </a:prstGeom>
+          <a:noFill/>
+        </p:spPr>
+        <p:txBody>
+          <a:bodyPr wrap="square">
+            <a:spAutoFit/>
+          </a:bodyPr>
+          <a:lstStyle/>
+          <a:p>
+            <a:pPr algn="l"/>
+            <a:r>
+              <a:rPr sz="1200" b="0" i="0">
+                <a:solidFill>
+                  <a:srgbClr val="BDD7EE"/>
+                </a:solidFill>
+              </a:rPr>
+              <a:t>MK-1775 combined with Prexasertib and BAY1895344  ·  MCF7 cells  ·  7×7 dose matrix  ·  72 h</a:t>
             </a:r>
           </a:p>
         </p:txBody>
@@ -6421,14 +8499,1253 @@
         </p:nvSpPr>
         <p:spPr>
           <a:xfrm>
-            <a:off x="411480" y="1417320"/>
-            <a:ext cx="5212080" cy="1508760"/>
+            <a:off x="274320" y="914400"/>
+            <a:ext cx="11612880" cy="502920"/>
           </a:xfrm>
           <a:prstGeom prst="rect">
             <a:avLst/>
           </a:prstGeom>
           <a:solidFill>
-            <a:srgbClr val="F0F7FF"/>
+            <a:srgbClr val="EFF4FB"/>
+          </a:solidFill>
+          <a:ln w="12700">
+            <a:solidFill>
+              <a:srgbClr val="2E75B6"/>
+            </a:solidFill>
+          </a:ln>
+        </p:spPr>
+        <p:style>
+          <a:lnRef idx="1">
+            <a:schemeClr val="accent1"/>
+          </a:lnRef>
+          <a:fillRef idx="3">
+            <a:schemeClr val="accent1"/>
+          </a:fillRef>
+          <a:effectRef idx="2">
+            <a:schemeClr val="accent1"/>
+          </a:effectRef>
+          <a:fontRef idx="minor">
+            <a:schemeClr val="lt1"/>
+          </a:fontRef>
+        </p:style>
+        <p:txBody>
+          <a:bodyPr rtlCol="0" anchor="ctr"/>
+          <a:lstStyle/>
+          <a:p>
+            <a:pPr algn="ctr"/>
+          </a:p>
+        </p:txBody>
+      </p:sp>
+      <p:sp>
+        <p:nvSpPr>
+          <p:cNvPr id="7" name="TextBox 6"/>
+          <p:cNvSpPr txBox="1"/>
+          <p:nvPr/>
+        </p:nvSpPr>
+        <p:spPr>
+          <a:xfrm>
+            <a:off x="457200" y="969264"/>
+            <a:ext cx="11247120" cy="384048"/>
+          </a:xfrm>
+          <a:prstGeom prst="rect">
+            <a:avLst/>
+          </a:prstGeom>
+          <a:noFill/>
+        </p:spPr>
+        <p:txBody>
+          <a:bodyPr wrap="square">
+            <a:spAutoFit/>
+          </a:bodyPr>
+          <a:lstStyle/>
+          <a:p>
+            <a:pPr algn="l"/>
+            <a:r>
+              <a:rPr sz="1100" b="0" i="0">
+                <a:solidFill>
+                  <a:srgbClr val="1A375E"/>
+                </a:solidFill>
+              </a:rPr>
+              <a:t>Bliss independence assumes the two drugs act independently. A Bliss score &gt; 0 means the combination is more effective than predicted (synergy); &lt; 0 means less effective (antagonism); ≈ 0 means additive.</a:t>
+            </a:r>
+          </a:p>
+        </p:txBody>
+      </p:sp>
+      <p:sp>
+        <p:nvSpPr>
+          <p:cNvPr id="8" name="Rectangle 7"/>
+          <p:cNvSpPr/>
+          <p:nvPr/>
+        </p:nvSpPr>
+        <p:spPr>
+          <a:xfrm>
+            <a:off x="274320" y="1508760"/>
+            <a:ext cx="11612880" cy="2331720"/>
+          </a:xfrm>
+          <a:prstGeom prst="rect">
+            <a:avLst/>
+          </a:prstGeom>
+          <a:solidFill>
+            <a:srgbClr val="E8F5E9"/>
+          </a:solidFill>
+          <a:ln w="19050">
+            <a:solidFill>
+              <a:srgbClr val="379637"/>
+            </a:solidFill>
+          </a:ln>
+        </p:spPr>
+        <p:style>
+          <a:lnRef idx="1">
+            <a:schemeClr val="accent1"/>
+          </a:lnRef>
+          <a:fillRef idx="3">
+            <a:schemeClr val="accent1"/>
+          </a:fillRef>
+          <a:effectRef idx="2">
+            <a:schemeClr val="accent1"/>
+          </a:effectRef>
+          <a:fontRef idx="minor">
+            <a:schemeClr val="lt1"/>
+          </a:fontRef>
+        </p:style>
+        <p:txBody>
+          <a:bodyPr rtlCol="0" anchor="ctr"/>
+          <a:lstStyle/>
+          <a:p>
+            <a:pPr algn="ctr"/>
+          </a:p>
+        </p:txBody>
+      </p:sp>
+      <p:sp>
+        <p:nvSpPr>
+          <p:cNvPr id="9" name="Rectangle 8"/>
+          <p:cNvSpPr/>
+          <p:nvPr/>
+        </p:nvSpPr>
+        <p:spPr>
+          <a:xfrm>
+            <a:off x="274320" y="1508760"/>
+            <a:ext cx="11612880" cy="438912"/>
+          </a:xfrm>
+          <a:prstGeom prst="rect">
+            <a:avLst/>
+          </a:prstGeom>
+          <a:solidFill>
+            <a:srgbClr val="379637"/>
+          </a:solidFill>
+          <a:ln>
+            <a:noFill/>
+          </a:ln>
+        </p:spPr>
+        <p:style>
+          <a:lnRef idx="1">
+            <a:schemeClr val="accent1"/>
+          </a:lnRef>
+          <a:fillRef idx="3">
+            <a:schemeClr val="accent1"/>
+          </a:fillRef>
+          <a:effectRef idx="2">
+            <a:schemeClr val="accent1"/>
+          </a:effectRef>
+          <a:fontRef idx="minor">
+            <a:schemeClr val="lt1"/>
+          </a:fontRef>
+        </p:style>
+        <p:txBody>
+          <a:bodyPr rtlCol="0" anchor="ctr"/>
+          <a:lstStyle/>
+          <a:p>
+            <a:pPr algn="ctr"/>
+          </a:p>
+        </p:txBody>
+      </p:sp>
+      <p:sp>
+        <p:nvSpPr>
+          <p:cNvPr id="10" name="TextBox 9"/>
+          <p:cNvSpPr txBox="1"/>
+          <p:nvPr/>
+        </p:nvSpPr>
+        <p:spPr>
+          <a:xfrm>
+            <a:off x="457200" y="1572768"/>
+            <a:ext cx="7315200" cy="320040"/>
+          </a:xfrm>
+          <a:prstGeom prst="rect">
+            <a:avLst/>
+          </a:prstGeom>
+          <a:noFill/>
+        </p:spPr>
+        <p:txBody>
+          <a:bodyPr wrap="square">
+            <a:spAutoFit/>
+          </a:bodyPr>
+          <a:lstStyle/>
+          <a:p>
+            <a:pPr algn="l"/>
+            <a:r>
+              <a:rPr sz="1500" b="1" i="0">
+                <a:solidFill>
+                  <a:srgbClr val="FFFFFF"/>
+                </a:solidFill>
+              </a:rPr>
+              <a:t>MK-1775  +  Prexasertib</a:t>
+            </a:r>
+          </a:p>
+        </p:txBody>
+      </p:sp>
+      <p:sp>
+        <p:nvSpPr>
+          <p:cNvPr id="11" name="Rectangle 10"/>
+          <p:cNvSpPr/>
+          <p:nvPr/>
+        </p:nvSpPr>
+        <p:spPr>
+          <a:xfrm>
+            <a:off x="8869680" y="1572768"/>
+            <a:ext cx="2834640" cy="320040"/>
+          </a:xfrm>
+          <a:prstGeom prst="rect">
+            <a:avLst/>
+          </a:prstGeom>
+          <a:solidFill>
+            <a:srgbClr val="FFFFFF"/>
+          </a:solidFill>
+          <a:ln>
+            <a:noFill/>
+          </a:ln>
+        </p:spPr>
+        <p:style>
+          <a:lnRef idx="1">
+            <a:schemeClr val="accent1"/>
+          </a:lnRef>
+          <a:fillRef idx="3">
+            <a:schemeClr val="accent1"/>
+          </a:fillRef>
+          <a:effectRef idx="2">
+            <a:schemeClr val="accent1"/>
+          </a:effectRef>
+          <a:fontRef idx="minor">
+            <a:schemeClr val="lt1"/>
+          </a:fontRef>
+        </p:style>
+        <p:txBody>
+          <a:bodyPr rtlCol="0" anchor="ctr"/>
+          <a:lstStyle/>
+          <a:p>
+            <a:pPr algn="ctr"/>
+          </a:p>
+        </p:txBody>
+      </p:sp>
+      <p:sp>
+        <p:nvSpPr>
+          <p:cNvPr id="12" name="TextBox 11"/>
+          <p:cNvSpPr txBox="1"/>
+          <p:nvPr/>
+        </p:nvSpPr>
+        <p:spPr>
+          <a:xfrm>
+            <a:off x="8887968" y="1581912"/>
+            <a:ext cx="2798064" cy="274320"/>
+          </a:xfrm>
+          <a:prstGeom prst="rect">
+            <a:avLst/>
+          </a:prstGeom>
+          <a:noFill/>
+        </p:spPr>
+        <p:txBody>
+          <a:bodyPr wrap="square">
+            <a:spAutoFit/>
+          </a:bodyPr>
+          <a:lstStyle/>
+          <a:p>
+            <a:pPr algn="ctr"/>
+            <a:r>
+              <a:rPr sz="1200" b="1" i="0">
+                <a:solidFill>
+                  <a:srgbClr val="379637"/>
+                </a:solidFill>
+              </a:rPr>
+              <a:t>SYNERGISTIC</a:t>
+            </a:r>
+          </a:p>
+        </p:txBody>
+      </p:sp>
+      <p:sp>
+        <p:nvSpPr>
+          <p:cNvPr id="13" name="TextBox 12"/>
+          <p:cNvSpPr txBox="1"/>
+          <p:nvPr/>
+        </p:nvSpPr>
+        <p:spPr>
+          <a:xfrm>
+            <a:off x="411480" y="2029967"/>
+            <a:ext cx="6858000" cy="1691640"/>
+          </a:xfrm>
+          <a:prstGeom prst="rect">
+            <a:avLst/>
+          </a:prstGeom>
+          <a:noFill/>
+        </p:spPr>
+        <p:txBody>
+          <a:bodyPr wrap="square">
+            <a:spAutoFit/>
+          </a:bodyPr>
+          <a:lstStyle/>
+          <a:p>
+            <a:pPr>
+              <a:spcBef>
+                <a:spcPts val="400"/>
+              </a:spcBef>
+            </a:pPr>
+            <a:r>
+              <a:rPr sz="1100">
+                <a:solidFill>
+                  <a:srgbClr val="1A1A1A"/>
+                </a:solidFill>
+              </a:rPr>
+              <a:t>•  Max Bliss score: +0.56  (MK-1775 1,235 nM + Prexasertib 4.7 nM)</a:t>
+            </a:r>
+          </a:p>
+          <a:p>
+            <a:pPr>
+              <a:spcBef>
+                <a:spcPts val="400"/>
+              </a:spcBef>
+            </a:pPr>
+            <a:r>
+              <a:rPr sz="1100">
+                <a:solidFill>
+                  <a:srgbClr val="1A1A1A"/>
+                </a:solidFill>
+              </a:rPr>
+              <a:t>•  Strong synergy across mid-range MK-1775 (137–1,235 nM) combined with low-dose Prexasertib (1.4–7.1 nM)</a:t>
+            </a:r>
+          </a:p>
+          <a:p>
+            <a:pPr>
+              <a:spcBef>
+                <a:spcPts val="400"/>
+              </a:spcBef>
+            </a:pPr>
+            <a:r>
+              <a:rPr sz="1100">
+                <a:solidFill>
+                  <a:srgbClr val="1A1A1A"/>
+                </a:solidFill>
+              </a:rPr>
+              <a:t>•  Synergy diminishes at saturating MK-1775 concentrations (≥11,111 nM) — ceiling effect as single agent effect dominates</a:t>
+            </a:r>
+          </a:p>
+          <a:p>
+            <a:pPr>
+              <a:spcBef>
+                <a:spcPts val="400"/>
+              </a:spcBef>
+            </a:pPr>
+            <a:r>
+              <a:rPr sz="1100">
+                <a:solidFill>
+                  <a:srgbClr val="1A1A1A"/>
+                </a:solidFill>
+              </a:rPr>
+              <a:t>•  Pattern consistent across both 1-timepoint and multi-timepoint datasets</a:t>
+            </a:r>
+          </a:p>
+        </p:txBody>
+      </p:sp>
+      <p:sp>
+        <p:nvSpPr>
+          <p:cNvPr id="14" name="Rectangle 13"/>
+          <p:cNvSpPr/>
+          <p:nvPr/>
+        </p:nvSpPr>
+        <p:spPr>
+          <a:xfrm>
+            <a:off x="7406640" y="2011680"/>
+            <a:ext cx="4343400" cy="1719072"/>
+          </a:xfrm>
+          <a:prstGeom prst="rect">
+            <a:avLst/>
+          </a:prstGeom>
+          <a:solidFill>
+            <a:srgbClr val="FFFFFF"/>
+          </a:solidFill>
+          <a:ln w="10160">
+            <a:solidFill>
+              <a:srgbClr val="379637"/>
+            </a:solidFill>
+          </a:ln>
+        </p:spPr>
+        <p:style>
+          <a:lnRef idx="1">
+            <a:schemeClr val="accent1"/>
+          </a:lnRef>
+          <a:fillRef idx="3">
+            <a:schemeClr val="accent1"/>
+          </a:fillRef>
+          <a:effectRef idx="2">
+            <a:schemeClr val="accent1"/>
+          </a:effectRef>
+          <a:fontRef idx="minor">
+            <a:schemeClr val="lt1"/>
+          </a:fontRef>
+        </p:style>
+        <p:txBody>
+          <a:bodyPr rtlCol="0" anchor="ctr"/>
+          <a:lstStyle/>
+          <a:p>
+            <a:pPr algn="ctr"/>
+          </a:p>
+        </p:txBody>
+      </p:sp>
+      <p:sp>
+        <p:nvSpPr>
+          <p:cNvPr id="15" name="TextBox 14"/>
+          <p:cNvSpPr txBox="1"/>
+          <p:nvPr/>
+        </p:nvSpPr>
+        <p:spPr>
+          <a:xfrm>
+            <a:off x="7543800" y="2057400"/>
+            <a:ext cx="4023360" cy="256032"/>
+          </a:xfrm>
+          <a:prstGeom prst="rect">
+            <a:avLst/>
+          </a:prstGeom>
+          <a:noFill/>
+        </p:spPr>
+        <p:txBody>
+          <a:bodyPr wrap="square">
+            <a:spAutoFit/>
+          </a:bodyPr>
+          <a:lstStyle/>
+          <a:p>
+            <a:pPr algn="l"/>
+            <a:r>
+              <a:rPr sz="1000" b="1" i="0">
+                <a:solidFill>
+                  <a:srgbClr val="379637"/>
+                </a:solidFill>
+              </a:rPr>
+              <a:t>Interpretation</a:t>
+            </a:r>
+          </a:p>
+        </p:txBody>
+      </p:sp>
+      <p:sp>
+        <p:nvSpPr>
+          <p:cNvPr id="16" name="TextBox 15"/>
+          <p:cNvSpPr txBox="1"/>
+          <p:nvPr/>
+        </p:nvSpPr>
+        <p:spPr>
+          <a:xfrm>
+            <a:off x="7543800" y="2350008"/>
+            <a:ext cx="4069080" cy="1280160"/>
+          </a:xfrm>
+          <a:prstGeom prst="rect">
+            <a:avLst/>
+          </a:prstGeom>
+          <a:noFill/>
+        </p:spPr>
+        <p:txBody>
+          <a:bodyPr wrap="square">
+            <a:spAutoFit/>
+          </a:bodyPr>
+          <a:lstStyle/>
+          <a:p>
+            <a:pPr algn="l"/>
+            <a:r>
+              <a:rPr sz="1000" b="0" i="1">
+                <a:solidFill>
+                  <a:srgbClr val="1A1A1A"/>
+                </a:solidFill>
+              </a:rPr>
+              <a:t>These two checkpoint kinase inhibitors (WEE1 + CHK1/2) show clear synergy at clinically relevant dose combinations, supporting their combined use in MCF7 cells.</a:t>
+            </a:r>
+          </a:p>
+        </p:txBody>
+      </p:sp>
+      <p:sp>
+        <p:nvSpPr>
+          <p:cNvPr id="17" name="Rectangle 16"/>
+          <p:cNvSpPr/>
+          <p:nvPr/>
+        </p:nvSpPr>
+        <p:spPr>
+          <a:xfrm>
+            <a:off x="274320" y="4023360"/>
+            <a:ext cx="11612880" cy="2331720"/>
+          </a:xfrm>
+          <a:prstGeom prst="rect">
+            <a:avLst/>
+          </a:prstGeom>
+          <a:solidFill>
+            <a:srgbClr val="FFF8F0"/>
+          </a:solidFill>
+          <a:ln w="19050">
+            <a:solidFill>
+              <a:srgbClr val="C55A11"/>
+            </a:solidFill>
+          </a:ln>
+        </p:spPr>
+        <p:style>
+          <a:lnRef idx="1">
+            <a:schemeClr val="accent1"/>
+          </a:lnRef>
+          <a:fillRef idx="3">
+            <a:schemeClr val="accent1"/>
+          </a:fillRef>
+          <a:effectRef idx="2">
+            <a:schemeClr val="accent1"/>
+          </a:effectRef>
+          <a:fontRef idx="minor">
+            <a:schemeClr val="lt1"/>
+          </a:fontRef>
+        </p:style>
+        <p:txBody>
+          <a:bodyPr rtlCol="0" anchor="ctr"/>
+          <a:lstStyle/>
+          <a:p>
+            <a:pPr algn="ctr"/>
+          </a:p>
+        </p:txBody>
+      </p:sp>
+      <p:sp>
+        <p:nvSpPr>
+          <p:cNvPr id="18" name="Rectangle 17"/>
+          <p:cNvSpPr/>
+          <p:nvPr/>
+        </p:nvSpPr>
+        <p:spPr>
+          <a:xfrm>
+            <a:off x="274320" y="4023360"/>
+            <a:ext cx="11612880" cy="438912"/>
+          </a:xfrm>
+          <a:prstGeom prst="rect">
+            <a:avLst/>
+          </a:prstGeom>
+          <a:solidFill>
+            <a:srgbClr val="C55A11"/>
+          </a:solidFill>
+          <a:ln>
+            <a:noFill/>
+          </a:ln>
+        </p:spPr>
+        <p:style>
+          <a:lnRef idx="1">
+            <a:schemeClr val="accent1"/>
+          </a:lnRef>
+          <a:fillRef idx="3">
+            <a:schemeClr val="accent1"/>
+          </a:fillRef>
+          <a:effectRef idx="2">
+            <a:schemeClr val="accent1"/>
+          </a:effectRef>
+          <a:fontRef idx="minor">
+            <a:schemeClr val="lt1"/>
+          </a:fontRef>
+        </p:style>
+        <p:txBody>
+          <a:bodyPr rtlCol="0" anchor="ctr"/>
+          <a:lstStyle/>
+          <a:p>
+            <a:pPr algn="ctr"/>
+          </a:p>
+        </p:txBody>
+      </p:sp>
+      <p:sp>
+        <p:nvSpPr>
+          <p:cNvPr id="19" name="TextBox 18"/>
+          <p:cNvSpPr txBox="1"/>
+          <p:nvPr/>
+        </p:nvSpPr>
+        <p:spPr>
+          <a:xfrm>
+            <a:off x="457200" y="4087368"/>
+            <a:ext cx="7315200" cy="320040"/>
+          </a:xfrm>
+          <a:prstGeom prst="rect">
+            <a:avLst/>
+          </a:prstGeom>
+          <a:noFill/>
+        </p:spPr>
+        <p:txBody>
+          <a:bodyPr wrap="square">
+            <a:spAutoFit/>
+          </a:bodyPr>
+          <a:lstStyle/>
+          <a:p>
+            <a:pPr algn="l"/>
+            <a:r>
+              <a:rPr sz="1500" b="1" i="0">
+                <a:solidFill>
+                  <a:srgbClr val="FFFFFF"/>
+                </a:solidFill>
+              </a:rPr>
+              <a:t>MK-1775  +  BAY1895344</a:t>
+            </a:r>
+          </a:p>
+        </p:txBody>
+      </p:sp>
+      <p:sp>
+        <p:nvSpPr>
+          <p:cNvPr id="20" name="Rectangle 19"/>
+          <p:cNvSpPr/>
+          <p:nvPr/>
+        </p:nvSpPr>
+        <p:spPr>
+          <a:xfrm>
+            <a:off x="8869680" y="4087368"/>
+            <a:ext cx="2834640" cy="320040"/>
+          </a:xfrm>
+          <a:prstGeom prst="rect">
+            <a:avLst/>
+          </a:prstGeom>
+          <a:solidFill>
+            <a:srgbClr val="FFFFFF"/>
+          </a:solidFill>
+          <a:ln>
+            <a:noFill/>
+          </a:ln>
+        </p:spPr>
+        <p:style>
+          <a:lnRef idx="1">
+            <a:schemeClr val="accent1"/>
+          </a:lnRef>
+          <a:fillRef idx="3">
+            <a:schemeClr val="accent1"/>
+          </a:fillRef>
+          <a:effectRef idx="2">
+            <a:schemeClr val="accent1"/>
+          </a:effectRef>
+          <a:fontRef idx="minor">
+            <a:schemeClr val="lt1"/>
+          </a:fontRef>
+        </p:style>
+        <p:txBody>
+          <a:bodyPr rtlCol="0" anchor="ctr"/>
+          <a:lstStyle/>
+          <a:p>
+            <a:pPr algn="ctr"/>
+          </a:p>
+        </p:txBody>
+      </p:sp>
+      <p:sp>
+        <p:nvSpPr>
+          <p:cNvPr id="21" name="TextBox 20"/>
+          <p:cNvSpPr txBox="1"/>
+          <p:nvPr/>
+        </p:nvSpPr>
+        <p:spPr>
+          <a:xfrm>
+            <a:off x="8887968" y="4096512"/>
+            <a:ext cx="2798064" cy="274320"/>
+          </a:xfrm>
+          <a:prstGeom prst="rect">
+            <a:avLst/>
+          </a:prstGeom>
+          <a:noFill/>
+        </p:spPr>
+        <p:txBody>
+          <a:bodyPr wrap="square">
+            <a:spAutoFit/>
+          </a:bodyPr>
+          <a:lstStyle/>
+          <a:p>
+            <a:pPr algn="ctr"/>
+            <a:r>
+              <a:rPr sz="1200" b="1" i="0">
+                <a:solidFill>
+                  <a:srgbClr val="C55A11"/>
+                </a:solidFill>
+              </a:rPr>
+              <a:t>WEAK / ADDITIVE</a:t>
+            </a:r>
+          </a:p>
+        </p:txBody>
+      </p:sp>
+      <p:sp>
+        <p:nvSpPr>
+          <p:cNvPr id="22" name="TextBox 21"/>
+          <p:cNvSpPr txBox="1"/>
+          <p:nvPr/>
+        </p:nvSpPr>
+        <p:spPr>
+          <a:xfrm>
+            <a:off x="411480" y="4544568"/>
+            <a:ext cx="6858000" cy="1691640"/>
+          </a:xfrm>
+          <a:prstGeom prst="rect">
+            <a:avLst/>
+          </a:prstGeom>
+          <a:noFill/>
+        </p:spPr>
+        <p:txBody>
+          <a:bodyPr wrap="square">
+            <a:spAutoFit/>
+          </a:bodyPr>
+          <a:lstStyle/>
+          <a:p>
+            <a:pPr>
+              <a:spcBef>
+                <a:spcPts val="400"/>
+              </a:spcBef>
+            </a:pPr>
+            <a:r>
+              <a:rPr sz="1100">
+                <a:solidFill>
+                  <a:srgbClr val="1A1A1A"/>
+                </a:solidFill>
+              </a:rPr>
+              <a:t>•  Max Bliss score: +0.42  (MK-1775 137 nM + BAY1895344 167 nM)</a:t>
+            </a:r>
+          </a:p>
+          <a:p>
+            <a:pPr>
+              <a:spcBef>
+                <a:spcPts val="400"/>
+              </a:spcBef>
+            </a:pPr>
+            <a:r>
+              <a:rPr sz="1100">
+                <a:solidFill>
+                  <a:srgbClr val="1A1A1A"/>
+                </a:solidFill>
+              </a:rPr>
+              <a:t>•  Majority of scores near zero — interaction is largely additive across the matrix</a:t>
+            </a:r>
+          </a:p>
+          <a:p>
+            <a:pPr>
+              <a:spcBef>
+                <a:spcPts val="400"/>
+              </a:spcBef>
+            </a:pPr>
+            <a:r>
+              <a:rPr sz="1100">
+                <a:solidFill>
+                  <a:srgbClr val="1A1A1A"/>
+                </a:solidFill>
+              </a:rPr>
+              <a:t>•  Occasional moderate synergy at specific dose pairs but no consistent pattern</a:t>
+            </a:r>
+          </a:p>
+          <a:p>
+            <a:pPr>
+              <a:spcBef>
+                <a:spcPts val="400"/>
+              </a:spcBef>
+            </a:pPr>
+            <a:r>
+              <a:rPr sz="1100">
+                <a:solidFill>
+                  <a:srgbClr val="1A1A1A"/>
+                </a:solidFill>
+              </a:rPr>
+              <a:t>•  Both 1-timepoint and multi-timepoint datasets show similar additive behaviour</a:t>
+            </a:r>
+          </a:p>
+        </p:txBody>
+      </p:sp>
+      <p:sp>
+        <p:nvSpPr>
+          <p:cNvPr id="23" name="Rectangle 22"/>
+          <p:cNvSpPr/>
+          <p:nvPr/>
+        </p:nvSpPr>
+        <p:spPr>
+          <a:xfrm>
+            <a:off x="7406640" y="4526280"/>
+            <a:ext cx="4343400" cy="1719072"/>
+          </a:xfrm>
+          <a:prstGeom prst="rect">
+            <a:avLst/>
+          </a:prstGeom>
+          <a:solidFill>
+            <a:srgbClr val="FFFFFF"/>
+          </a:solidFill>
+          <a:ln w="10160">
+            <a:solidFill>
+              <a:srgbClr val="C55A11"/>
+            </a:solidFill>
+          </a:ln>
+        </p:spPr>
+        <p:style>
+          <a:lnRef idx="1">
+            <a:schemeClr val="accent1"/>
+          </a:lnRef>
+          <a:fillRef idx="3">
+            <a:schemeClr val="accent1"/>
+          </a:fillRef>
+          <a:effectRef idx="2">
+            <a:schemeClr val="accent1"/>
+          </a:effectRef>
+          <a:fontRef idx="minor">
+            <a:schemeClr val="lt1"/>
+          </a:fontRef>
+        </p:style>
+        <p:txBody>
+          <a:bodyPr rtlCol="0" anchor="ctr"/>
+          <a:lstStyle/>
+          <a:p>
+            <a:pPr algn="ctr"/>
+          </a:p>
+        </p:txBody>
+      </p:sp>
+      <p:sp>
+        <p:nvSpPr>
+          <p:cNvPr id="24" name="TextBox 23"/>
+          <p:cNvSpPr txBox="1"/>
+          <p:nvPr/>
+        </p:nvSpPr>
+        <p:spPr>
+          <a:xfrm>
+            <a:off x="7543800" y="4572000"/>
+            <a:ext cx="4023360" cy="256032"/>
+          </a:xfrm>
+          <a:prstGeom prst="rect">
+            <a:avLst/>
+          </a:prstGeom>
+          <a:noFill/>
+        </p:spPr>
+        <p:txBody>
+          <a:bodyPr wrap="square">
+            <a:spAutoFit/>
+          </a:bodyPr>
+          <a:lstStyle/>
+          <a:p>
+            <a:pPr algn="l"/>
+            <a:r>
+              <a:rPr sz="1000" b="1" i="0">
+                <a:solidFill>
+                  <a:srgbClr val="C55A11"/>
+                </a:solidFill>
+              </a:rPr>
+              <a:t>Interpretation</a:t>
+            </a:r>
+          </a:p>
+        </p:txBody>
+      </p:sp>
+      <p:sp>
+        <p:nvSpPr>
+          <p:cNvPr id="25" name="TextBox 24"/>
+          <p:cNvSpPr txBox="1"/>
+          <p:nvPr/>
+        </p:nvSpPr>
+        <p:spPr>
+          <a:xfrm>
+            <a:off x="7543800" y="4864608"/>
+            <a:ext cx="4069080" cy="1280160"/>
+          </a:xfrm>
+          <a:prstGeom prst="rect">
+            <a:avLst/>
+          </a:prstGeom>
+          <a:noFill/>
+        </p:spPr>
+        <p:txBody>
+          <a:bodyPr wrap="square">
+            <a:spAutoFit/>
+          </a:bodyPr>
+          <a:lstStyle/>
+          <a:p>
+            <a:pPr algn="l"/>
+            <a:r>
+              <a:rPr sz="1000" b="0" i="1">
+                <a:solidFill>
+                  <a:srgbClr val="1A1A1A"/>
+                </a:solidFill>
+              </a:rPr>
+              <a:t>MK-1775 (WEE1i) and BAY1895344 (ATRi) do not demonstrate robust synergy in MCF7 cells at the concentrations tested — the combination does not exceed additive expectations.</a:t>
+            </a:r>
+          </a:p>
+        </p:txBody>
+      </p:sp>
+      <p:sp>
+        <p:nvSpPr>
+          <p:cNvPr id="26" name="Rectangle 25"/>
+          <p:cNvSpPr/>
+          <p:nvPr/>
+        </p:nvSpPr>
+        <p:spPr>
+          <a:xfrm>
+            <a:off x="0" y="6656832"/>
+            <a:ext cx="12188952" cy="201168"/>
+          </a:xfrm>
+          <a:prstGeom prst="rect">
+            <a:avLst/>
+          </a:prstGeom>
+          <a:solidFill>
+            <a:srgbClr val="1A375E"/>
+          </a:solidFill>
+          <a:ln>
+            <a:noFill/>
+          </a:ln>
+        </p:spPr>
+        <p:style>
+          <a:lnRef idx="1">
+            <a:schemeClr val="accent1"/>
+          </a:lnRef>
+          <a:fillRef idx="3">
+            <a:schemeClr val="accent1"/>
+          </a:fillRef>
+          <a:effectRef idx="2">
+            <a:schemeClr val="accent1"/>
+          </a:effectRef>
+          <a:fontRef idx="minor">
+            <a:schemeClr val="lt1"/>
+          </a:fontRef>
+        </p:style>
+        <p:txBody>
+          <a:bodyPr rtlCol="0" anchor="ctr"/>
+          <a:lstStyle/>
+          <a:p>
+            <a:pPr algn="ctr"/>
+          </a:p>
+        </p:txBody>
+      </p:sp>
+      <p:sp>
+        <p:nvSpPr>
+          <p:cNvPr id="27" name="TextBox 26"/>
+          <p:cNvSpPr txBox="1"/>
+          <p:nvPr/>
+        </p:nvSpPr>
+        <p:spPr>
+          <a:xfrm>
+            <a:off x="10515600" y="6675120"/>
+            <a:ext cx="1554480" cy="182880"/>
+          </a:xfrm>
+          <a:prstGeom prst="rect">
+            <a:avLst/>
+          </a:prstGeom>
+          <a:noFill/>
+        </p:spPr>
+        <p:txBody>
+          <a:bodyPr wrap="square">
+            <a:spAutoFit/>
+          </a:bodyPr>
+          <a:lstStyle/>
+          <a:p>
+            <a:pPr algn="r"/>
+            <a:r>
+              <a:rPr sz="900" b="0" i="0">
+                <a:solidFill>
+                  <a:srgbClr val="FFFFFF"/>
+                </a:solidFill>
+              </a:rPr>
+              <a:t>Slide 4 of 5</a:t>
+            </a:r>
+          </a:p>
+        </p:txBody>
+      </p:sp>
+      <p:sp>
+        <p:nvSpPr>
+          <p:cNvPr id="28" name="TextBox 27"/>
+          <p:cNvSpPr txBox="1"/>
+          <p:nvPr/>
+        </p:nvSpPr>
+        <p:spPr>
+          <a:xfrm>
+            <a:off x="228600" y="6675120"/>
+            <a:ext cx="9144000" cy="182880"/>
+          </a:xfrm>
+          <a:prstGeom prst="rect">
+            <a:avLst/>
+          </a:prstGeom>
+          <a:noFill/>
+        </p:spPr>
+        <p:txBody>
+          <a:bodyPr wrap="square">
+            <a:spAutoFit/>
+          </a:bodyPr>
+          <a:lstStyle/>
+          <a:p>
+            <a:pPr algn="l"/>
+            <a:r>
+              <a:rPr sz="900" b="0" i="0">
+                <a:solidFill>
+                  <a:srgbClr val="BDD7EE"/>
+                </a:solidFill>
+              </a:rPr>
+              <a:t>HTSplotter  |  Nunes et al., PLoS One 2024  |  DOI: 10.1371/journal.pone.0296322</a:t>
+            </a:r>
+          </a:p>
+        </p:txBody>
+      </p:sp>
+    </p:spTree>
+  </p:cSld>
+  <p:clrMapOvr>
+    <a:masterClrMapping/>
+  </p:clrMapOvr>
+</p:sld>
+</file>
+
+<file path=ppt/slides/slide5.xml><?xml version="1.0" encoding="utf-8"?>
+<p:sld xmlns:a="http://schemas.openxmlformats.org/drawingml/2006/main" xmlns:p="http://schemas.openxmlformats.org/presentationml/2006/main" xmlns:r="http://schemas.openxmlformats.org/officeDocument/2006/relationships">
+  <p:cSld>
+    <p:bg>
+      <p:bgPr>
+        <a:solidFill>
+          <a:srgbClr val="FFFFFF"/>
+        </a:solidFill>
+        <a:effectLst/>
+      </p:bgPr>
+    </p:bg>
+    <p:spTree>
+      <p:nvGrpSpPr>
+        <p:cNvPr id="1" name=""/>
+        <p:cNvGrpSpPr/>
+        <p:nvPr/>
+      </p:nvGrpSpPr>
+      <p:grpSpPr/>
+      <p:sp>
+        <p:nvSpPr>
+          <p:cNvPr id="2" name="Rectangle 1"/>
+          <p:cNvSpPr/>
+          <p:nvPr/>
+        </p:nvSpPr>
+        <p:spPr>
+          <a:xfrm>
+            <a:off x="0" y="0"/>
+            <a:ext cx="12188952" cy="804672"/>
+          </a:xfrm>
+          <a:prstGeom prst="rect">
+            <a:avLst/>
+          </a:prstGeom>
+          <a:solidFill>
+            <a:srgbClr val="1A375E"/>
+          </a:solidFill>
+          <a:ln>
+            <a:noFill/>
+          </a:ln>
+        </p:spPr>
+        <p:style>
+          <a:lnRef idx="1">
+            <a:schemeClr val="accent1"/>
+          </a:lnRef>
+          <a:fillRef idx="3">
+            <a:schemeClr val="accent1"/>
+          </a:fillRef>
+          <a:effectRef idx="2">
+            <a:schemeClr val="accent1"/>
+          </a:effectRef>
+          <a:fontRef idx="minor">
+            <a:schemeClr val="lt1"/>
+          </a:fontRef>
+        </p:style>
+        <p:txBody>
+          <a:bodyPr rtlCol="0" anchor="ctr"/>
+          <a:lstStyle/>
+          <a:p>
+            <a:pPr algn="ctr"/>
+          </a:p>
+        </p:txBody>
+      </p:sp>
+      <p:sp>
+        <p:nvSpPr>
+          <p:cNvPr id="3" name="Rectangle 2"/>
+          <p:cNvSpPr/>
+          <p:nvPr/>
+        </p:nvSpPr>
+        <p:spPr>
+          <a:xfrm>
+            <a:off x="0" y="0"/>
+            <a:ext cx="73152" cy="804672"/>
+          </a:xfrm>
+          <a:prstGeom prst="rect">
+            <a:avLst/>
+          </a:prstGeom>
+          <a:solidFill>
+            <a:srgbClr val="2E75B6"/>
+          </a:solidFill>
+          <a:ln>
+            <a:noFill/>
+          </a:ln>
+        </p:spPr>
+        <p:style>
+          <a:lnRef idx="1">
+            <a:schemeClr val="accent1"/>
+          </a:lnRef>
+          <a:fillRef idx="3">
+            <a:schemeClr val="accent1"/>
+          </a:fillRef>
+          <a:effectRef idx="2">
+            <a:schemeClr val="accent1"/>
+          </a:effectRef>
+          <a:fontRef idx="minor">
+            <a:schemeClr val="lt1"/>
+          </a:fontRef>
+        </p:style>
+        <p:txBody>
+          <a:bodyPr rtlCol="0" anchor="ctr"/>
+          <a:lstStyle/>
+          <a:p>
+            <a:pPr algn="ctr"/>
+          </a:p>
+        </p:txBody>
+      </p:sp>
+      <p:sp>
+        <p:nvSpPr>
+          <p:cNvPr id="4" name="TextBox 3"/>
+          <p:cNvSpPr txBox="1"/>
+          <p:nvPr/>
+        </p:nvSpPr>
+        <p:spPr>
+          <a:xfrm>
+            <a:off x="228600" y="91440"/>
+            <a:ext cx="11704320" cy="502920"/>
+          </a:xfrm>
+          <a:prstGeom prst="rect">
+            <a:avLst/>
+          </a:prstGeom>
+          <a:noFill/>
+        </p:spPr>
+        <p:txBody>
+          <a:bodyPr wrap="square">
+            <a:spAutoFit/>
+          </a:bodyPr>
+          <a:lstStyle/>
+          <a:p>
+            <a:pPr algn="l"/>
+            <a:r>
+              <a:rPr sz="2600" b="1" i="0">
+                <a:solidFill>
+                  <a:srgbClr val="FFFFFF"/>
+                </a:solidFill>
+              </a:rPr>
+              <a:t>Genetic Perturbagen Screens &amp; AI-Assisted Interpretation</a:t>
+            </a:r>
+          </a:p>
+        </p:txBody>
+      </p:sp>
+      <p:sp>
+        <p:nvSpPr>
+          <p:cNvPr id="5" name="TextBox 4"/>
+          <p:cNvSpPr txBox="1"/>
+          <p:nvPr/>
+        </p:nvSpPr>
+        <p:spPr>
+          <a:xfrm>
+            <a:off x="228600" y="548640"/>
+            <a:ext cx="11704320" cy="228600"/>
+          </a:xfrm>
+          <a:prstGeom prst="rect">
+            <a:avLst/>
+          </a:prstGeom>
+          <a:noFill/>
+        </p:spPr>
+        <p:txBody>
+          <a:bodyPr wrap="square">
+            <a:spAutoFit/>
+          </a:bodyPr>
+          <a:lstStyle/>
+          <a:p>
+            <a:pPr algn="l"/>
+            <a:r>
+              <a:rPr sz="1200" b="0" i="0">
+                <a:solidFill>
+                  <a:srgbClr val="BDD7EE"/>
+                </a:solidFill>
+              </a:rPr>
+              <a:t>siRNA/shRNA knockdown screens  ·  MCF7 cells  ·  1 and multi-timepoint datasets</a:t>
+            </a:r>
+          </a:p>
+        </p:txBody>
+      </p:sp>
+      <p:sp>
+        <p:nvSpPr>
+          <p:cNvPr id="6" name="Rectangle 5"/>
+          <p:cNvSpPr/>
+          <p:nvPr/>
+        </p:nvSpPr>
+        <p:spPr>
+          <a:xfrm>
+            <a:off x="274320" y="914400"/>
+            <a:ext cx="5577840" cy="5532120"/>
+          </a:xfrm>
+          <a:prstGeom prst="rect">
+            <a:avLst/>
+          </a:prstGeom>
+          <a:solidFill>
+            <a:srgbClr val="F5F9FF"/>
+          </a:solidFill>
+          <a:ln w="12700">
+            <a:solidFill>
+              <a:srgbClr val="2E75B6"/>
+            </a:solidFill>
+          </a:ln>
+        </p:spPr>
+        <p:style>
+          <a:lnRef idx="1">
+            <a:schemeClr val="accent1"/>
+          </a:lnRef>
+          <a:fillRef idx="3">
+            <a:schemeClr val="accent1"/>
+          </a:fillRef>
+          <a:effectRef idx="2">
+            <a:schemeClr val="accent1"/>
+          </a:effectRef>
+          <a:fontRef idx="minor">
+            <a:schemeClr val="lt1"/>
+          </a:fontRef>
+        </p:style>
+        <p:txBody>
+          <a:bodyPr rtlCol="0" anchor="ctr"/>
+          <a:lstStyle/>
+          <a:p>
+            <a:pPr algn="ctr"/>
+          </a:p>
+        </p:txBody>
+      </p:sp>
+      <p:sp>
+        <p:nvSpPr>
+          <p:cNvPr id="7" name="TextBox 6"/>
+          <p:cNvSpPr txBox="1"/>
+          <p:nvPr/>
+        </p:nvSpPr>
+        <p:spPr>
+          <a:xfrm>
+            <a:off x="457200" y="978408"/>
+            <a:ext cx="5212080" cy="347472"/>
+          </a:xfrm>
+          <a:prstGeom prst="rect">
+            <a:avLst/>
+          </a:prstGeom>
+          <a:noFill/>
+        </p:spPr>
+        <p:txBody>
+          <a:bodyPr wrap="square">
+            <a:spAutoFit/>
+          </a:bodyPr>
+          <a:lstStyle/>
+          <a:p>
+            <a:pPr algn="l"/>
+            <a:r>
+              <a:rPr sz="1400" b="1" i="0">
+                <a:solidFill>
+                  <a:srgbClr val="1A375E"/>
+                </a:solidFill>
+              </a:rPr>
+              <a:t>Genetic Perturbagen Screen Results</a:t>
+            </a:r>
+          </a:p>
+        </p:txBody>
+      </p:sp>
+      <p:sp>
+        <p:nvSpPr>
+          <p:cNvPr id="8" name="Rectangle 7"/>
+          <p:cNvSpPr/>
+          <p:nvPr/>
+        </p:nvSpPr>
+        <p:spPr>
+          <a:xfrm>
+            <a:off x="411480" y="1389888"/>
+            <a:ext cx="5257800" cy="1664208"/>
+          </a:xfrm>
+          <a:prstGeom prst="rect">
+            <a:avLst/>
+          </a:prstGeom>
+          <a:solidFill>
+            <a:srgbClr val="FFFFFF"/>
           </a:solidFill>
           <a:ln w="10160">
             <a:solidFill>
@@ -6460,14 +9777,57 @@
       </p:sp>
       <p:sp>
         <p:nvSpPr>
-          <p:cNvPr id="7" name="TextBox 6"/>
+          <p:cNvPr id="9" name="Rectangle 8"/>
+          <p:cNvSpPr/>
+          <p:nvPr/>
+        </p:nvSpPr>
+        <p:spPr>
+          <a:xfrm>
+            <a:off x="411480" y="1389888"/>
+            <a:ext cx="5257800" cy="347472"/>
+          </a:xfrm>
+          <a:prstGeom prst="rect">
+            <a:avLst/>
+          </a:prstGeom>
+          <a:solidFill>
+            <a:srgbClr val="2E75B6"/>
+          </a:solidFill>
+          <a:ln>
+            <a:noFill/>
+          </a:ln>
+        </p:spPr>
+        <p:style>
+          <a:lnRef idx="1">
+            <a:schemeClr val="accent1"/>
+          </a:lnRef>
+          <a:fillRef idx="3">
+            <a:schemeClr val="accent1"/>
+          </a:fillRef>
+          <a:effectRef idx="2">
+            <a:schemeClr val="accent1"/>
+          </a:effectRef>
+          <a:fontRef idx="minor">
+            <a:schemeClr val="lt1"/>
+          </a:fontRef>
+        </p:style>
+        <p:txBody>
+          <a:bodyPr rtlCol="0" anchor="ctr"/>
+          <a:lstStyle/>
+          <a:p>
+            <a:pPr algn="ctr"/>
+          </a:p>
+        </p:txBody>
+      </p:sp>
+      <p:sp>
+        <p:nvSpPr>
+          <p:cNvPr id="10" name="TextBox 9"/>
           <p:cNvSpPr txBox="1"/>
           <p:nvPr/>
         </p:nvSpPr>
         <p:spPr>
           <a:xfrm>
-            <a:off x="548640" y="1481328"/>
-            <a:ext cx="3657600" cy="274320"/>
+            <a:off x="548640" y="1435608"/>
+            <a:ext cx="3931920" cy="274320"/>
           </a:xfrm>
           <a:prstGeom prst="rect">
             <a:avLst/>
@@ -6482,26 +9842,26 @@
           <a:p>
             <a:pPr algn="l"/>
             <a:r>
-              <a:rPr sz="1300" b="1" i="0">
-                <a:solidFill>
-                  <a:srgbClr val="1A375E"/>
-                </a:solidFill>
-              </a:rPr>
-              <a:t>1 Time Point  |  1 Control</a:t>
-            </a:r>
-          </a:p>
-        </p:txBody>
-      </p:sp>
-      <p:sp>
-        <p:nvSpPr>
-          <p:cNvPr id="8" name="Rectangle 7"/>
+              <a:rPr sz="1200" b="1" i="0">
+                <a:solidFill>
+                  <a:srgbClr val="FFFFFF"/>
+                </a:solidFill>
+              </a:rPr>
+              <a:t>1 Time Point  |  1 Control  (48 h)</a:t>
+            </a:r>
+          </a:p>
+        </p:txBody>
+      </p:sp>
+      <p:sp>
+        <p:nvSpPr>
+          <p:cNvPr id="11" name="Rectangle 10"/>
           <p:cNvSpPr/>
           <p:nvPr/>
         </p:nvSpPr>
         <p:spPr>
           <a:xfrm>
-            <a:off x="4389120" y="1481328"/>
-            <a:ext cx="1143000" cy="274320"/>
+            <a:off x="4160520" y="1435608"/>
+            <a:ext cx="1371600" cy="256032"/>
           </a:xfrm>
           <a:prstGeom prst="rect">
             <a:avLst/>
@@ -6537,14 +9897,14 @@
       </p:sp>
       <p:sp>
         <p:nvSpPr>
-          <p:cNvPr id="9" name="TextBox 8"/>
+          <p:cNvPr id="12" name="TextBox 11"/>
           <p:cNvSpPr txBox="1"/>
           <p:nvPr/>
         </p:nvSpPr>
         <p:spPr>
           <a:xfrm>
-            <a:off x="4398264" y="1490472"/>
-            <a:ext cx="1124712" cy="246888"/>
+            <a:off x="4178808" y="1444752"/>
+            <a:ext cx="1335024" cy="219456"/>
           </a:xfrm>
           <a:prstGeom prst="rect">
             <a:avLst/>
@@ -6559,26 +9919,26 @@
           <a:p>
             <a:pPr algn="ctr"/>
             <a:r>
-              <a:rPr sz="1000" b="1" i="0">
+              <a:rPr sz="900" b="1" i="0">
                 <a:solidFill>
                   <a:srgbClr val="FFFFFF"/>
                 </a:solidFill>
               </a:rPr>
-              <a:t>COMPLETE</a:t>
-            </a:r>
-          </a:p>
-        </p:txBody>
-      </p:sp>
-      <p:sp>
-        <p:nvSpPr>
-          <p:cNvPr id="10" name="TextBox 9"/>
+              <a:t>✅  COMPLETE</a:t>
+            </a:r>
+          </a:p>
+        </p:txBody>
+      </p:sp>
+      <p:sp>
+        <p:nvSpPr>
+          <p:cNvPr id="13" name="TextBox 12"/>
           <p:cNvSpPr txBox="1"/>
           <p:nvPr/>
         </p:nvSpPr>
         <p:spPr>
           <a:xfrm>
-            <a:off x="548640" y="1828800"/>
-            <a:ext cx="4937760" cy="1024128"/>
+            <a:off x="548640" y="1801368"/>
+            <a:ext cx="4983480" cy="1188720"/>
           </a:xfrm>
           <a:prstGeom prst="rect">
             <a:avLst/>
@@ -6593,66 +9953,81 @@
           <a:p>
             <a:pPr>
               <a:spcBef>
-                <a:spcPts val="300"/>
+                <a:spcPts val="400"/>
               </a:spcBef>
             </a:pPr>
             <a:r>
-              <a:rPr sz="1100">
+              <a:rPr sz="1000">
                 <a:solidFill>
                   <a:srgbClr val="1A1A1A"/>
                 </a:solidFill>
               </a:rPr>
-              <a:t>•  Multiple siRNA/shRNA gene perturbagens tested at 40 ng/well in MCF7 cells</a:t>
+              <a:t>•  Multiple gene perturbagens tested at 40 ng/well</a:t>
             </a:r>
           </a:p>
           <a:p>
             <a:pPr>
               <a:spcBef>
-                <a:spcPts val="300"/>
+                <a:spcPts val="400"/>
               </a:spcBef>
             </a:pPr>
             <a:r>
-              <a:rPr sz="1100">
+              <a:rPr sz="1000">
                 <a:solidFill>
                   <a:srgbClr val="1A1A1A"/>
                 </a:solidFill>
               </a:rPr>
-              <a:t>•  Normalised confluency computed per perturbagen relative to control</a:t>
+              <a:t>•  Normalised confluency reported relative to non-targeting control</a:t>
             </a:r>
           </a:p>
           <a:p>
             <a:pPr>
               <a:spcBef>
-                <a:spcPts val="300"/>
+                <a:spcPts val="400"/>
               </a:spcBef>
             </a:pPr>
             <a:r>
-              <a:rPr sz="1100">
+              <a:rPr sz="1000">
                 <a:solidFill>
                   <a:srgbClr val="1A1A1A"/>
                 </a:solidFill>
               </a:rPr>
-              <a:t>•  Single endpoint readout (48 h) — no dose-response, binary knockdown effect</a:t>
-            </a:r>
-          </a:p>
-        </p:txBody>
-      </p:sp>
-      <p:sp>
-        <p:nvSpPr>
-          <p:cNvPr id="11" name="Rectangle 10"/>
+              <a:t>•  Identifies knockdowns that inhibit or enhance cell growth</a:t>
+            </a:r>
+          </a:p>
+          <a:p>
+            <a:pPr>
+              <a:spcBef>
+                <a:spcPts val="400"/>
+              </a:spcBef>
+            </a:pPr>
+            <a:r>
+              <a:rPr sz="1000">
+                <a:solidFill>
+                  <a:srgbClr val="1A1A1A"/>
+                </a:solidFill>
+              </a:rPr>
+              <a:t>•  Binary readout — no dose-response fitting applied</a:t>
+            </a:r>
+          </a:p>
+        </p:txBody>
+      </p:sp>
+      <p:sp>
+        <p:nvSpPr>
+          <p:cNvPr id="14" name="Rectangle 13"/>
           <p:cNvSpPr/>
           <p:nvPr/>
         </p:nvSpPr>
         <p:spPr>
           <a:xfrm>
-            <a:off x="411480" y="2999232"/>
-            <a:ext cx="5212080" cy="1874519"/>
+            <a:off x="411480" y="3200400"/>
+            <a:ext cx="5257800" cy="1664208"/>
           </a:xfrm>
           <a:prstGeom prst="rect">
             <a:avLst/>
           </a:prstGeom>
           <a:solidFill>
-            <a:srgbClr val="F0F7FF"/>
+            <a:srgbClr val="FFFFFF"/>
           </a:solidFill>
           <a:ln w="10160">
             <a:solidFill>
@@ -6684,14 +10059,57 @@
       </p:sp>
       <p:sp>
         <p:nvSpPr>
-          <p:cNvPr id="12" name="TextBox 11"/>
+          <p:cNvPr id="15" name="Rectangle 14"/>
+          <p:cNvSpPr/>
+          <p:nvPr/>
+        </p:nvSpPr>
+        <p:spPr>
+          <a:xfrm>
+            <a:off x="411480" y="3200400"/>
+            <a:ext cx="5257800" cy="347472"/>
+          </a:xfrm>
+          <a:prstGeom prst="rect">
+            <a:avLst/>
+          </a:prstGeom>
+          <a:solidFill>
+            <a:srgbClr val="2E75B6"/>
+          </a:solidFill>
+          <a:ln>
+            <a:noFill/>
+          </a:ln>
+        </p:spPr>
+        <p:style>
+          <a:lnRef idx="1">
+            <a:schemeClr val="accent1"/>
+          </a:lnRef>
+          <a:fillRef idx="3">
+            <a:schemeClr val="accent1"/>
+          </a:fillRef>
+          <a:effectRef idx="2">
+            <a:schemeClr val="accent1"/>
+          </a:effectRef>
+          <a:fontRef idx="minor">
+            <a:schemeClr val="lt1"/>
+          </a:fontRef>
+        </p:style>
+        <p:txBody>
+          <a:bodyPr rtlCol="0" anchor="ctr"/>
+          <a:lstStyle/>
+          <a:p>
+            <a:pPr algn="ctr"/>
+          </a:p>
+        </p:txBody>
+      </p:sp>
+      <p:sp>
+        <p:nvSpPr>
+          <p:cNvPr id="16" name="TextBox 15"/>
           <p:cNvSpPr txBox="1"/>
           <p:nvPr/>
         </p:nvSpPr>
         <p:spPr>
           <a:xfrm>
-            <a:off x="548640" y="3063240"/>
-            <a:ext cx="3657600" cy="274320"/>
+            <a:off x="548640" y="3246120"/>
+            <a:ext cx="3931920" cy="274320"/>
           </a:xfrm>
           <a:prstGeom prst="rect">
             <a:avLst/>
@@ -6706,26 +10124,26 @@
           <a:p>
             <a:pPr algn="l"/>
             <a:r>
-              <a:rPr sz="1300" b="1" i="0">
-                <a:solidFill>
-                  <a:srgbClr val="1A375E"/>
-                </a:solidFill>
-              </a:rPr>
-              <a:t>Several Time Points  |  Multiple Controls</a:t>
-            </a:r>
-          </a:p>
-        </p:txBody>
-      </p:sp>
-      <p:sp>
-        <p:nvSpPr>
-          <p:cNvPr id="13" name="Rectangle 12"/>
+              <a:rPr sz="1200" b="1" i="0">
+                <a:solidFill>
+                  <a:srgbClr val="FFFFFF"/>
+                </a:solidFill>
+              </a:rPr>
+              <a:t>Several Time Points  |  Multiple Controls  (23 TP, 3 h interval)</a:t>
+            </a:r>
+          </a:p>
+        </p:txBody>
+      </p:sp>
+      <p:sp>
+        <p:nvSpPr>
+          <p:cNvPr id="17" name="Rectangle 16"/>
           <p:cNvSpPr/>
           <p:nvPr/>
         </p:nvSpPr>
         <p:spPr>
           <a:xfrm>
-            <a:off x="4389120" y="3063240"/>
-            <a:ext cx="1143000" cy="274320"/>
+            <a:off x="4160520" y="3246120"/>
+            <a:ext cx="1371600" cy="256032"/>
           </a:xfrm>
           <a:prstGeom prst="rect">
             <a:avLst/>
@@ -6761,14 +10179,14 @@
       </p:sp>
       <p:sp>
         <p:nvSpPr>
-          <p:cNvPr id="14" name="TextBox 13"/>
+          <p:cNvPr id="18" name="TextBox 17"/>
           <p:cNvSpPr txBox="1"/>
           <p:nvPr/>
         </p:nvSpPr>
         <p:spPr>
           <a:xfrm>
-            <a:off x="4398264" y="3072384"/>
-            <a:ext cx="1124712" cy="246888"/>
+            <a:off x="4178808" y="3255264"/>
+            <a:ext cx="1335024" cy="219456"/>
           </a:xfrm>
           <a:prstGeom prst="rect">
             <a:avLst/>
@@ -6783,26 +10201,26 @@
           <a:p>
             <a:pPr algn="ctr"/>
             <a:r>
-              <a:rPr sz="1000" b="1" i="0">
+              <a:rPr sz="900" b="1" i="0">
                 <a:solidFill>
                   <a:srgbClr val="FFFFFF"/>
                 </a:solidFill>
               </a:rPr>
-              <a:t>COMPLETE</a:t>
-            </a:r>
-          </a:p>
-        </p:txBody>
-      </p:sp>
-      <p:sp>
-        <p:nvSpPr>
-          <p:cNvPr id="15" name="TextBox 14"/>
+              <a:t>✅  COMPLETE</a:t>
+            </a:r>
+          </a:p>
+        </p:txBody>
+      </p:sp>
+      <p:sp>
+        <p:nvSpPr>
+          <p:cNvPr id="19" name="TextBox 18"/>
           <p:cNvSpPr txBox="1"/>
           <p:nvPr/>
         </p:nvSpPr>
         <p:spPr>
           <a:xfrm>
-            <a:off x="548640" y="3401568"/>
-            <a:ext cx="4937760" cy="1371600"/>
+            <a:off x="548640" y="3611880"/>
+            <a:ext cx="4983480" cy="1188720"/>
           </a:xfrm>
           <a:prstGeom prst="rect">
             <a:avLst/>
@@ -6817,75 +10235,75 @@
           <a:p>
             <a:pPr>
               <a:spcBef>
-                <a:spcPts val="300"/>
+                <a:spcPts val="400"/>
               </a:spcBef>
             </a:pPr>
             <a:r>
-              <a:rPr sz="1100">
+              <a:rPr sz="1000">
                 <a:solidFill>
                   <a:srgbClr val="1A1A1A"/>
                 </a:solidFill>
               </a:rPr>
-              <a:t>•  23 time points over ~69 h (3 h intervals) with multiple control groups</a:t>
+              <a:t>•  Growth rate computed at every time point for each perturbagen</a:t>
             </a:r>
           </a:p>
           <a:p>
             <a:pPr>
               <a:spcBef>
-                <a:spcPts val="300"/>
+                <a:spcPts val="400"/>
               </a:spcBef>
             </a:pPr>
             <a:r>
-              <a:rPr sz="1100">
+              <a:rPr sz="1000">
                 <a:solidFill>
                   <a:srgbClr val="1A1A1A"/>
                 </a:solidFill>
               </a:rPr>
-              <a:t>•  Growth rate computed at each time point for every perturbagen</a:t>
+              <a:t>•  Growth rate ratio &gt; 1.0 = faster than control (possible growth suppressor released)</a:t>
             </a:r>
           </a:p>
           <a:p>
             <a:pPr>
               <a:spcBef>
-                <a:spcPts val="300"/>
+                <a:spcPts val="400"/>
               </a:spcBef>
             </a:pPr>
             <a:r>
-              <a:rPr sz="1100">
+              <a:rPr sz="1000">
                 <a:solidFill>
                   <a:srgbClr val="1A1A1A"/>
                 </a:solidFill>
               </a:rPr>
-              <a:t>•  Growth rate ratios close to 1.0 = no effect; &lt;1 = inhibition; &gt;1 = enhanced growth</a:t>
+              <a:t>•  Growth rate ratio &lt; 1.0 = slower than control (growth inhibition)</a:t>
             </a:r>
           </a:p>
           <a:p>
             <a:pPr>
               <a:spcBef>
-                <a:spcPts val="300"/>
+                <a:spcPts val="400"/>
               </a:spcBef>
             </a:pPr>
             <a:r>
-              <a:rPr sz="1100">
+              <a:rPr sz="1000">
                 <a:solidFill>
                   <a:srgbClr val="1A1A1A"/>
                 </a:solidFill>
               </a:rPr>
-              <a:t>•  Allows identification of perturbagens with time-dependent effects</a:t>
-            </a:r>
-          </a:p>
-        </p:txBody>
-      </p:sp>
-      <p:sp>
-        <p:nvSpPr>
-          <p:cNvPr id="16" name="Rectangle 15"/>
+              <a:t>•  Multiple control groups allow robust normalisation across the plate</a:t>
+            </a:r>
+          </a:p>
+        </p:txBody>
+      </p:sp>
+      <p:sp>
+        <p:nvSpPr>
+          <p:cNvPr id="20" name="Rectangle 19"/>
           <p:cNvSpPr/>
           <p:nvPr/>
         </p:nvSpPr>
         <p:spPr>
           <a:xfrm>
-            <a:off x="411480" y="4956048"/>
-            <a:ext cx="5212080" cy="1143000"/>
+            <a:off x="411480" y="4919472"/>
+            <a:ext cx="5257800" cy="1298448"/>
           </a:xfrm>
           <a:prstGeom prst="rect">
             <a:avLst/>
@@ -6923,14 +10341,14 @@
       </p:sp>
       <p:sp>
         <p:nvSpPr>
-          <p:cNvPr id="17" name="TextBox 16"/>
+          <p:cNvPr id="21" name="TextBox 20"/>
           <p:cNvSpPr txBox="1"/>
           <p:nvPr/>
         </p:nvSpPr>
         <p:spPr>
           <a:xfrm>
-            <a:off x="548640" y="5010912"/>
-            <a:ext cx="4846320" cy="274320"/>
+            <a:off x="548640" y="4974336"/>
+            <a:ext cx="4937760" cy="274320"/>
           </a:xfrm>
           <a:prstGeom prst="rect">
             <a:avLst/>
@@ -6957,14 +10375,14 @@
       </p:sp>
       <p:sp>
         <p:nvSpPr>
-          <p:cNvPr id="18" name="TextBox 17"/>
+          <p:cNvPr id="22" name="TextBox 21"/>
           <p:cNvSpPr txBox="1"/>
           <p:nvPr/>
         </p:nvSpPr>
         <p:spPr>
           <a:xfrm>
-            <a:off x="548640" y="5321808"/>
-            <a:ext cx="4937760" cy="685800"/>
+            <a:off x="548640" y="5285232"/>
+            <a:ext cx="5029200" cy="914400"/>
           </a:xfrm>
           <a:prstGeom prst="rect">
             <a:avLst/>
@@ -6984,21 +10402,21 @@
                   <a:srgbClr val="1A1A1A"/>
                 </a:solidFill>
               </a:rPr>
-              <a:t>Example datasets encountered a known HTSplotter compatibility issue with unequal cell-line condition counts. All other experiment types (drug, drug combination, genetic) ran successfully.</a:t>
-            </a:r>
-          </a:p>
-        </p:txBody>
-      </p:sp>
-      <p:sp>
-        <p:nvSpPr>
-          <p:cNvPr id="19" name="Rectangle 18"/>
+              <a:t>Combines gene knockdown with drug treatment. HTSplotter supports this experiment type, but the example datasets encountered a known array-dimension mismatch in the installed version. All other three experiment types ran successfully.</a:t>
+            </a:r>
+          </a:p>
+        </p:txBody>
+      </p:sp>
+      <p:sp>
+        <p:nvSpPr>
+          <p:cNvPr id="23" name="Rectangle 22"/>
           <p:cNvSpPr/>
           <p:nvPr/>
         </p:nvSpPr>
         <p:spPr>
           <a:xfrm>
             <a:off x="6172200" y="914400"/>
-            <a:ext cx="5715000" cy="5349240"/>
+            <a:ext cx="5715000" cy="5532120"/>
           </a:xfrm>
           <a:prstGeom prst="rect">
             <a:avLst/>
@@ -7036,14 +10454,14 @@
       </p:sp>
       <p:sp>
         <p:nvSpPr>
-          <p:cNvPr id="20" name="TextBox 19"/>
+          <p:cNvPr id="24" name="TextBox 23"/>
           <p:cNvSpPr txBox="1"/>
           <p:nvPr/>
         </p:nvSpPr>
         <p:spPr>
           <a:xfrm>
-            <a:off x="6355080" y="987552"/>
-            <a:ext cx="5349240" cy="365760"/>
+            <a:off x="6327648" y="978408"/>
+            <a:ext cx="5376672" cy="347472"/>
           </a:xfrm>
           <a:prstGeom prst="rect">
             <a:avLst/>
@@ -7058,26 +10476,26 @@
           <a:p>
             <a:pPr algn="l"/>
             <a:r>
-              <a:rPr sz="1500" b="1" i="0">
+              <a:rPr sz="1400" b="1" i="0">
                 <a:solidFill>
                   <a:srgbClr val="1A375E"/>
                 </a:solidFill>
               </a:rPr>
-              <a:t>🤖  AI-Assisted Results Interpretation</a:t>
-            </a:r>
-          </a:p>
-        </p:txBody>
-      </p:sp>
-      <p:sp>
-        <p:nvSpPr>
-          <p:cNvPr id="21" name="TextBox 20"/>
+              <a:t>🤖  AI-Assisted Results Chat</a:t>
+            </a:r>
+          </a:p>
+        </p:txBody>
+      </p:sp>
+      <p:sp>
+        <p:nvSpPr>
+          <p:cNvPr id="25" name="TextBox 24"/>
           <p:cNvSpPr txBox="1"/>
           <p:nvPr/>
         </p:nvSpPr>
         <p:spPr>
           <a:xfrm>
-            <a:off x="6355080" y="1426464"/>
-            <a:ext cx="5349240" cy="868680"/>
+            <a:off x="6327648" y="1389888"/>
+            <a:ext cx="5376672" cy="658368"/>
           </a:xfrm>
           <a:prstGeom prst="rect">
             <a:avLst/>
@@ -7092,26 +10510,26 @@
           <a:p>
             <a:pPr algn="l"/>
             <a:r>
-              <a:rPr sz="1200" b="0" i="0">
+              <a:rPr sz="1100" b="0" i="0">
                 <a:solidFill>
                   <a:srgbClr val="1A1A1A"/>
                 </a:solidFill>
               </a:rPr>
-              <a:t>An interactive chat interface built on top of HTSplotter using the Anthropic Claude API. After any analysis, researchers can ask plain-English questions about their results — IC values, synergy, curve fit, or biological context.</a:t>
-            </a:r>
-          </a:p>
-        </p:txBody>
-      </p:sp>
-      <p:sp>
-        <p:nvSpPr>
-          <p:cNvPr id="22" name="Rectangle 21"/>
+              <a:t>An interactive chat interface built on top of HTSplotter using the Anthropic Claude API. Load any results folder and ask plain-English questions — no bioinformatics expertise required.</a:t>
+            </a:r>
+          </a:p>
+        </p:txBody>
+      </p:sp>
+      <p:sp>
+        <p:nvSpPr>
+          <p:cNvPr id="26" name="Rectangle 25"/>
           <p:cNvSpPr/>
           <p:nvPr/>
         </p:nvSpPr>
         <p:spPr>
           <a:xfrm>
-            <a:off x="6400800" y="2395728"/>
-            <a:ext cx="5303520" cy="475488"/>
+            <a:off x="6400800" y="2148840"/>
+            <a:ext cx="5257800" cy="457200"/>
           </a:xfrm>
           <a:prstGeom prst="rect">
             <a:avLst/>
@@ -7149,14 +10567,14 @@
       </p:sp>
       <p:sp>
         <p:nvSpPr>
-          <p:cNvPr id="23" name="TextBox 22"/>
+          <p:cNvPr id="27" name="TextBox 26"/>
           <p:cNvSpPr txBox="1"/>
           <p:nvPr/>
         </p:nvSpPr>
         <p:spPr>
           <a:xfrm>
-            <a:off x="6492240" y="2450592"/>
-            <a:ext cx="5166360" cy="384048"/>
+            <a:off x="6492240" y="2203704"/>
+            <a:ext cx="5120640" cy="365760"/>
           </a:xfrm>
           <a:prstGeom prst="rect">
             <a:avLst/>
@@ -7183,14 +10601,14 @@
       </p:sp>
       <p:sp>
         <p:nvSpPr>
-          <p:cNvPr id="24" name="Rectangle 23"/>
+          <p:cNvPr id="28" name="Rectangle 27"/>
           <p:cNvSpPr/>
           <p:nvPr/>
         </p:nvSpPr>
         <p:spPr>
           <a:xfrm>
-            <a:off x="6400800" y="2944368"/>
-            <a:ext cx="5303520" cy="475488"/>
+            <a:off x="6400800" y="2679192"/>
+            <a:ext cx="5257800" cy="457200"/>
           </a:xfrm>
           <a:prstGeom prst="rect">
             <a:avLst/>
@@ -7228,14 +10646,14 @@
       </p:sp>
       <p:sp>
         <p:nvSpPr>
-          <p:cNvPr id="25" name="TextBox 24"/>
+          <p:cNvPr id="29" name="TextBox 28"/>
           <p:cNvSpPr txBox="1"/>
           <p:nvPr/>
         </p:nvSpPr>
         <p:spPr>
           <a:xfrm>
-            <a:off x="6492240" y="2999232"/>
-            <a:ext cx="5166360" cy="384048"/>
+            <a:off x="6492240" y="2734056"/>
+            <a:ext cx="5120640" cy="365760"/>
           </a:xfrm>
           <a:prstGeom prst="rect">
             <a:avLst/>
@@ -7262,14 +10680,14 @@
       </p:sp>
       <p:sp>
         <p:nvSpPr>
-          <p:cNvPr id="26" name="Rectangle 25"/>
+          <p:cNvPr id="30" name="Rectangle 29"/>
           <p:cNvSpPr/>
           <p:nvPr/>
         </p:nvSpPr>
         <p:spPr>
           <a:xfrm>
-            <a:off x="6400800" y="3493008"/>
-            <a:ext cx="5303520" cy="475488"/>
+            <a:off x="6400800" y="3209544"/>
+            <a:ext cx="5257800" cy="457200"/>
           </a:xfrm>
           <a:prstGeom prst="rect">
             <a:avLst/>
@@ -7307,14 +10725,14 @@
       </p:sp>
       <p:sp>
         <p:nvSpPr>
-          <p:cNvPr id="27" name="TextBox 26"/>
+          <p:cNvPr id="31" name="TextBox 30"/>
           <p:cNvSpPr txBox="1"/>
           <p:nvPr/>
         </p:nvSpPr>
         <p:spPr>
           <a:xfrm>
-            <a:off x="6492240" y="3547872"/>
-            <a:ext cx="5166360" cy="384048"/>
+            <a:off x="6492240" y="3264408"/>
+            <a:ext cx="5120640" cy="365760"/>
           </a:xfrm>
           <a:prstGeom prst="rect">
             <a:avLst/>
@@ -7341,14 +10759,14 @@
       </p:sp>
       <p:sp>
         <p:nvSpPr>
-          <p:cNvPr id="28" name="Rectangle 27"/>
+          <p:cNvPr id="32" name="Rectangle 31"/>
           <p:cNvSpPr/>
           <p:nvPr/>
         </p:nvSpPr>
         <p:spPr>
           <a:xfrm>
-            <a:off x="6400800" y="4041648"/>
-            <a:ext cx="5303520" cy="475488"/>
+            <a:off x="6400800" y="3739896"/>
+            <a:ext cx="5257800" cy="457200"/>
           </a:xfrm>
           <a:prstGeom prst="rect">
             <a:avLst/>
@@ -7386,14 +10804,14 @@
       </p:sp>
       <p:sp>
         <p:nvSpPr>
-          <p:cNvPr id="29" name="TextBox 28"/>
+          <p:cNvPr id="33" name="TextBox 32"/>
           <p:cNvSpPr txBox="1"/>
           <p:nvPr/>
         </p:nvSpPr>
         <p:spPr>
           <a:xfrm>
-            <a:off x="6492240" y="4096511"/>
-            <a:ext cx="5166360" cy="384048"/>
+            <a:off x="6492240" y="3794759"/>
+            <a:ext cx="5120640" cy="365760"/>
           </a:xfrm>
           <a:prstGeom prst="rect">
             <a:avLst/>
@@ -7414,21 +10832,21 @@
                 </a:solidFill>
               </a:rPr>
               <a:t>Claude:  Yes — Bliss scores up to +0.56. Strongest at mid-range
-MK-1775 doses combined with low Prexasertib.</a:t>
-            </a:r>
-          </a:p>
-        </p:txBody>
-      </p:sp>
-      <p:sp>
-        <p:nvSpPr>
-          <p:cNvPr id="30" name="Rectangle 29"/>
+MK-1775 with low Prexasertib doses.</a:t>
+            </a:r>
+          </a:p>
+        </p:txBody>
+      </p:sp>
+      <p:sp>
+        <p:nvSpPr>
+          <p:cNvPr id="34" name="Rectangle 33"/>
           <p:cNvSpPr/>
           <p:nvPr/>
         </p:nvSpPr>
         <p:spPr>
           <a:xfrm>
-            <a:off x="6400800" y="4663440"/>
-            <a:ext cx="5303520" cy="475488"/>
+            <a:off x="6400800" y="4343400"/>
+            <a:ext cx="5257800" cy="457200"/>
           </a:xfrm>
           <a:prstGeom prst="rect">
             <a:avLst/>
@@ -7466,14 +10884,14 @@
       </p:sp>
       <p:sp>
         <p:nvSpPr>
-          <p:cNvPr id="31" name="TextBox 30"/>
+          <p:cNvPr id="35" name="TextBox 34"/>
           <p:cNvSpPr txBox="1"/>
           <p:nvPr/>
         </p:nvSpPr>
         <p:spPr>
           <a:xfrm>
-            <a:off x="6492240" y="4718303"/>
-            <a:ext cx="5166360" cy="384048"/>
+            <a:off x="6492240" y="4398264"/>
+            <a:ext cx="5120640" cy="365760"/>
           </a:xfrm>
           <a:prstGeom prst="rect">
             <a:avLst/>
@@ -7500,14 +10918,14 @@
       </p:sp>
       <p:sp>
         <p:nvSpPr>
-          <p:cNvPr id="32" name="Rectangle 31"/>
+          <p:cNvPr id="36" name="Rectangle 35"/>
           <p:cNvSpPr/>
           <p:nvPr/>
         </p:nvSpPr>
         <p:spPr>
           <a:xfrm>
-            <a:off x="6400800" y="5212080"/>
-            <a:ext cx="5303520" cy="475488"/>
+            <a:off x="6400800" y="4873752"/>
+            <a:ext cx="5257800" cy="457200"/>
           </a:xfrm>
           <a:prstGeom prst="rect">
             <a:avLst/>
@@ -7545,14 +10963,14 @@
       </p:sp>
       <p:sp>
         <p:nvSpPr>
-          <p:cNvPr id="33" name="TextBox 32"/>
+          <p:cNvPr id="37" name="TextBox 36"/>
           <p:cNvSpPr txBox="1"/>
           <p:nvPr/>
         </p:nvSpPr>
         <p:spPr>
           <a:xfrm>
-            <a:off x="6492240" y="5266944"/>
-            <a:ext cx="5166360" cy="384048"/>
+            <a:off x="6492240" y="4928616"/>
+            <a:ext cx="5120640" cy="365760"/>
           </a:xfrm>
           <a:prstGeom prst="rect">
             <a:avLst/>
@@ -7572,22 +10990,22 @@
                   <a:srgbClr val="1A1A1A"/>
                 </a:solidFill>
               </a:rPr>
-              <a:t>Claude:  Growth rate &gt; 1 means cells grew faster than control —
-a perturbagen may be releasing a growth brake.</a:t>
-            </a:r>
-          </a:p>
-        </p:txBody>
-      </p:sp>
-      <p:sp>
-        <p:nvSpPr>
-          <p:cNvPr id="34" name="Rectangle 33"/>
+              <a:t>Claude:  The knockdown is growing faster than control — it may
+have silenced a tumour suppressor or growth brake.</a:t>
+            </a:r>
+          </a:p>
+        </p:txBody>
+      </p:sp>
+      <p:sp>
+        <p:nvSpPr>
+          <p:cNvPr id="38" name="Rectangle 37"/>
           <p:cNvSpPr/>
           <p:nvPr/>
         </p:nvSpPr>
         <p:spPr>
           <a:xfrm>
-            <a:off x="6263640" y="5852160"/>
-            <a:ext cx="5577840" cy="320040"/>
+            <a:off x="6263640" y="5650992"/>
+            <a:ext cx="5577840" cy="566928"/>
           </a:xfrm>
           <a:prstGeom prst="rect">
             <a:avLst/>
@@ -7623,14 +11041,14 @@
       </p:sp>
       <p:sp>
         <p:nvSpPr>
-          <p:cNvPr id="35" name="TextBox 34"/>
+          <p:cNvPr id="39" name="TextBox 38"/>
           <p:cNvSpPr txBox="1"/>
           <p:nvPr/>
         </p:nvSpPr>
         <p:spPr>
           <a:xfrm>
-            <a:off x="6309360" y="5870448"/>
-            <a:ext cx="5394960" cy="256032"/>
+            <a:off x="6400800" y="5687568"/>
+            <a:ext cx="1828800" cy="228600"/>
           </a:xfrm>
           <a:prstGeom prst="rect">
             <a:avLst/>
@@ -7650,21 +11068,123 @@
                   <a:srgbClr val="BDD7EE"/>
                 </a:solidFill>
               </a:rPr>
-              <a:t>github.com/aaronwils246/HTSplotter-chat  |  python chat_results.py  [results_dir]</a:t>
-            </a:r>
-          </a:p>
-        </p:txBody>
-      </p:sp>
-      <p:sp>
-        <p:nvSpPr>
-          <p:cNvPr id="36" name="Rectangle 35"/>
+              <a:t>How to use</a:t>
+            </a:r>
+          </a:p>
+        </p:txBody>
+      </p:sp>
+      <p:sp>
+        <p:nvSpPr>
+          <p:cNvPr id="40" name="TextBox 39"/>
+          <p:cNvSpPr txBox="1"/>
+          <p:nvPr/>
+        </p:nvSpPr>
+        <p:spPr>
+          <a:xfrm>
+            <a:off x="6400800" y="5907024"/>
+            <a:ext cx="5303520" cy="201168"/>
+          </a:xfrm>
+          <a:prstGeom prst="rect">
+            <a:avLst/>
+          </a:prstGeom>
+          <a:noFill/>
+        </p:spPr>
+        <p:txBody>
+          <a:bodyPr wrap="square">
+            <a:spAutoFit/>
+          </a:bodyPr>
+          <a:lstStyle/>
+          <a:p>
+            <a:pPr algn="l"/>
+            <a:r>
+              <a:rPr sz="900" b="1" i="0">
+                <a:solidFill>
+                  <a:srgbClr val="BDD7EE"/>
+                </a:solidFill>
+              </a:rPr>
+              <a:t>export ANTHROPIC_API_KEY='sk-ant-...'</a:t>
+            </a:r>
+          </a:p>
+        </p:txBody>
+      </p:sp>
+      <p:sp>
+        <p:nvSpPr>
+          <p:cNvPr id="41" name="TextBox 40"/>
+          <p:cNvSpPr txBox="1"/>
+          <p:nvPr/>
+        </p:nvSpPr>
+        <p:spPr>
+          <a:xfrm>
+            <a:off x="6400800" y="6080760"/>
+            <a:ext cx="5303520" cy="201168"/>
+          </a:xfrm>
+          <a:prstGeom prst="rect">
+            <a:avLst/>
+          </a:prstGeom>
+          <a:noFill/>
+        </p:spPr>
+        <p:txBody>
+          <a:bodyPr wrap="square">
+            <a:spAutoFit/>
+          </a:bodyPr>
+          <a:lstStyle/>
+          <a:p>
+            <a:pPr algn="l"/>
+            <a:r>
+              <a:rPr sz="900" b="1" i="0">
+                <a:solidFill>
+                  <a:srgbClr val="BDD7EE"/>
+                </a:solidFill>
+              </a:rPr>
+              <a:t>python chat_results.py  [path/to/output_results/]</a:t>
+            </a:r>
+          </a:p>
+        </p:txBody>
+      </p:sp>
+      <p:sp>
+        <p:nvSpPr>
+          <p:cNvPr id="42" name="TextBox 41"/>
+          <p:cNvSpPr txBox="1"/>
+          <p:nvPr/>
+        </p:nvSpPr>
+        <p:spPr>
+          <a:xfrm>
+            <a:off x="8961120" y="5687568"/>
+            <a:ext cx="2651760" cy="228600"/>
+          </a:xfrm>
+          <a:prstGeom prst="rect">
+            <a:avLst/>
+          </a:prstGeom>
+          <a:noFill/>
+        </p:spPr>
+        <p:txBody>
+          <a:bodyPr wrap="square">
+            <a:spAutoFit/>
+          </a:bodyPr>
+          <a:lstStyle/>
+          <a:p>
+            <a:pPr algn="r"/>
+            <a:r>
+              <a:rPr sz="900" b="0" i="0">
+                <a:solidFill>
+                  <a:srgbClr val="88BBE0"/>
+                </a:solidFill>
+              </a:rPr>
+              <a:t>github.com/aaronwils246/HTSplotter-chat</a:t>
+            </a:r>
+          </a:p>
+        </p:txBody>
+      </p:sp>
+      <p:sp>
+        <p:nvSpPr>
+          <p:cNvPr id="43" name="Rectangle 42"/>
           <p:cNvSpPr/>
           <p:nvPr/>
         </p:nvSpPr>
         <p:spPr>
           <a:xfrm>
-            <a:off x="0" y="6675120"/>
-            <a:ext cx="12188952" cy="182880"/>
+            <a:off x="0" y="6656832"/>
+            <a:ext cx="12188952" cy="201168"/>
           </a:xfrm>
           <a:prstGeom prst="rect">
             <a:avLst/>
@@ -7700,7 +11220,7 @@
       </p:sp>
       <p:sp>
         <p:nvSpPr>
-          <p:cNvPr id="37" name="TextBox 36"/>
+          <p:cNvPr id="44" name="TextBox 43"/>
           <p:cNvSpPr txBox="1"/>
           <p:nvPr/>
         </p:nvSpPr>
@@ -7727,7 +11247,41 @@
                   <a:srgbClr val="FFFFFF"/>
                 </a:solidFill>
               </a:rPr>
-              <a:t>Slide 3 of 3</a:t>
+              <a:t>Slide 5 of 5</a:t>
+            </a:r>
+          </a:p>
+        </p:txBody>
+      </p:sp>
+      <p:sp>
+        <p:nvSpPr>
+          <p:cNvPr id="45" name="TextBox 44"/>
+          <p:cNvSpPr txBox="1"/>
+          <p:nvPr/>
+        </p:nvSpPr>
+        <p:spPr>
+          <a:xfrm>
+            <a:off x="228600" y="6675120"/>
+            <a:ext cx="9144000" cy="182880"/>
+          </a:xfrm>
+          <a:prstGeom prst="rect">
+            <a:avLst/>
+          </a:prstGeom>
+          <a:noFill/>
+        </p:spPr>
+        <p:txBody>
+          <a:bodyPr wrap="square">
+            <a:spAutoFit/>
+          </a:bodyPr>
+          <a:lstStyle/>
+          <a:p>
+            <a:pPr algn="l"/>
+            <a:r>
+              <a:rPr sz="900" b="0" i="0">
+                <a:solidFill>
+                  <a:srgbClr val="BDD7EE"/>
+                </a:solidFill>
+              </a:rPr>
+              <a:t>HTSplotter  |  Nunes et al., PLoS One 2024  |  DOI: 10.1371/journal.pone.0296322</a:t>
             </a:r>
           </a:p>
         </p:txBody>

--- a/HTSplotter_Summary.pptx
+++ b/HTSplotter_Summary.pptx
@@ -10,6 +10,7 @@
     <p:sldId id="258" r:id="rId9"/>
     <p:sldId id="259" r:id="rId10"/>
     <p:sldId id="260" r:id="rId11"/>
+    <p:sldId id="261" r:id="rId12"/>
   </p:sldIdLst>
   <p:sldSz cx="12188952" cy="6858000" type="screen4x3"/>
   <p:notesSz cx="6858000" cy="9144000"/>
@@ -3778,7 +3779,7 @@
                   <a:srgbClr val="FFFFFF"/>
                 </a:solidFill>
               </a:rPr>
-              <a:t>Slide 1 of 5</a:t>
+              <a:t>Slide 1 of 6</a:t>
             </a:r>
           </a:p>
         </p:txBody>
@@ -5787,7 +5788,7 @@
                   <a:srgbClr val="FFFFFF"/>
                 </a:solidFill>
               </a:rPr>
-              <a:t>Slide 2 of 5</a:t>
+              <a:t>Slide 2 of 6</a:t>
             </a:r>
           </a:p>
         </p:txBody>
@@ -8272,7 +8273,7 @@
                   <a:srgbClr val="FFFFFF"/>
                 </a:solidFill>
               </a:rPr>
-              <a:t>Slide 3 of 5</a:t>
+              <a:t>Slide 3 of 6</a:t>
             </a:r>
           </a:p>
         </p:txBody>
@@ -9432,7 +9433,7 @@
                   <a:srgbClr val="FFFFFF"/>
                 </a:solidFill>
               </a:rPr>
-              <a:t>Slide 4 of 5</a:t>
+              <a:t>Slide 4 of 6</a:t>
             </a:r>
           </a:p>
         </p:txBody>
@@ -9612,7 +9613,7 @@
                   <a:srgbClr val="FFFFFF"/>
                 </a:solidFill>
               </a:rPr>
-              <a:t>Genetic Perturbagen Screens &amp; AI-Assisted Interpretation</a:t>
+              <a:t>Genetic Perturbagen Screen Results</a:t>
             </a:r>
           </a:p>
         </p:txBody>
@@ -9659,8 +9660,8 @@
         </p:nvSpPr>
         <p:spPr>
           <a:xfrm>
-            <a:off x="274320" y="914400"/>
-            <a:ext cx="5577840" cy="5532120"/>
+            <a:off x="274320" y="987552"/>
+            <a:ext cx="11640312" cy="2633472"/>
           </a:xfrm>
           <a:prstGeom prst="rect">
             <a:avLst/>
@@ -9698,14 +9699,57 @@
       </p:sp>
       <p:sp>
         <p:nvSpPr>
-          <p:cNvPr id="7" name="TextBox 6"/>
-          <p:cNvSpPr txBox="1"/>
-          <p:nvPr/>
-        </p:nvSpPr>
-        <p:spPr>
-          <a:xfrm>
-            <a:off x="457200" y="978408"/>
-            <a:ext cx="5212080" cy="347472"/>
+          <p:cNvPr id="7" name="Rectangle 6"/>
+          <p:cNvSpPr/>
+          <p:nvPr/>
+        </p:nvSpPr>
+        <p:spPr>
+          <a:xfrm>
+            <a:off x="274320" y="987552"/>
+            <a:ext cx="11640312" cy="475488"/>
+          </a:xfrm>
+          <a:prstGeom prst="rect">
+            <a:avLst/>
+          </a:prstGeom>
+          <a:solidFill>
+            <a:srgbClr val="2E75B6"/>
+          </a:solidFill>
+          <a:ln>
+            <a:noFill/>
+          </a:ln>
+        </p:spPr>
+        <p:style>
+          <a:lnRef idx="1">
+            <a:schemeClr val="accent1"/>
+          </a:lnRef>
+          <a:fillRef idx="3">
+            <a:schemeClr val="accent1"/>
+          </a:fillRef>
+          <a:effectRef idx="2">
+            <a:schemeClr val="accent1"/>
+          </a:effectRef>
+          <a:fontRef idx="minor">
+            <a:schemeClr val="lt1"/>
+          </a:fontRef>
+        </p:style>
+        <p:txBody>
+          <a:bodyPr rtlCol="0" anchor="ctr"/>
+          <a:lstStyle/>
+          <a:p>
+            <a:pPr algn="ctr"/>
+          </a:p>
+        </p:txBody>
+      </p:sp>
+      <p:sp>
+        <p:nvSpPr>
+          <p:cNvPr id="8" name="TextBox 7"/>
+          <p:cNvSpPr txBox="1"/>
+          <p:nvPr/>
+        </p:nvSpPr>
+        <p:spPr>
+          <a:xfrm>
+            <a:off x="457200" y="1060704"/>
+            <a:ext cx="8686800" cy="329184"/>
           </a:xfrm>
           <a:prstGeom prst="rect">
             <a:avLst/>
@@ -9722,24 +9766,233 @@
             <a:r>
               <a:rPr sz="1400" b="1" i="0">
                 <a:solidFill>
+                  <a:srgbClr val="FFFFFF"/>
+                </a:solidFill>
+              </a:rPr>
+              <a:t>1 Time Point  |  1 Control  (48 h endpoint)</a:t>
+            </a:r>
+          </a:p>
+        </p:txBody>
+      </p:sp>
+      <p:sp>
+        <p:nvSpPr>
+          <p:cNvPr id="9" name="Rectangle 8"/>
+          <p:cNvSpPr/>
+          <p:nvPr/>
+        </p:nvSpPr>
+        <p:spPr>
+          <a:xfrm>
+            <a:off x="9601200" y="1078992"/>
+            <a:ext cx="2148840" cy="292608"/>
+          </a:xfrm>
+          <a:prstGeom prst="rect">
+            <a:avLst/>
+          </a:prstGeom>
+          <a:solidFill>
+            <a:srgbClr val="1F8678"/>
+          </a:solidFill>
+          <a:ln>
+            <a:noFill/>
+          </a:ln>
+        </p:spPr>
+        <p:style>
+          <a:lnRef idx="1">
+            <a:schemeClr val="accent1"/>
+          </a:lnRef>
+          <a:fillRef idx="3">
+            <a:schemeClr val="accent1"/>
+          </a:fillRef>
+          <a:effectRef idx="2">
+            <a:schemeClr val="accent1"/>
+          </a:effectRef>
+          <a:fontRef idx="minor">
+            <a:schemeClr val="lt1"/>
+          </a:fontRef>
+        </p:style>
+        <p:txBody>
+          <a:bodyPr rtlCol="0" anchor="ctr"/>
+          <a:lstStyle/>
+          <a:p>
+            <a:pPr algn="ctr"/>
+          </a:p>
+        </p:txBody>
+      </p:sp>
+      <p:sp>
+        <p:nvSpPr>
+          <p:cNvPr id="10" name="TextBox 9"/>
+          <p:cNvSpPr txBox="1"/>
+          <p:nvPr/>
+        </p:nvSpPr>
+        <p:spPr>
+          <a:xfrm>
+            <a:off x="9619488" y="1088136"/>
+            <a:ext cx="2112264" cy="256032"/>
+          </a:xfrm>
+          <a:prstGeom prst="rect">
+            <a:avLst/>
+          </a:prstGeom>
+          <a:noFill/>
+        </p:spPr>
+        <p:txBody>
+          <a:bodyPr wrap="square">
+            <a:spAutoFit/>
+          </a:bodyPr>
+          <a:lstStyle/>
+          <a:p>
+            <a:pPr algn="ctr"/>
+            <a:r>
+              <a:rPr sz="1100" b="1" i="0">
+                <a:solidFill>
+                  <a:srgbClr val="FFFFFF"/>
+                </a:solidFill>
+              </a:rPr>
+              <a:t>✅  COMPLETE</a:t>
+            </a:r>
+          </a:p>
+        </p:txBody>
+      </p:sp>
+      <p:sp>
+        <p:nvSpPr>
+          <p:cNvPr id="11" name="TextBox 10"/>
+          <p:cNvSpPr txBox="1"/>
+          <p:nvPr/>
+        </p:nvSpPr>
+        <p:spPr>
+          <a:xfrm>
+            <a:off x="457200" y="1536192"/>
+            <a:ext cx="11338560" cy="292608"/>
+          </a:xfrm>
+          <a:prstGeom prst="rect">
+            <a:avLst/>
+          </a:prstGeom>
+          <a:noFill/>
+        </p:spPr>
+        <p:txBody>
+          <a:bodyPr wrap="square">
+            <a:spAutoFit/>
+          </a:bodyPr>
+          <a:lstStyle/>
+          <a:p>
+            <a:pPr algn="l"/>
+            <a:r>
+              <a:rPr sz="1100" b="0" i="1">
+                <a:solidFill>
                   <a:srgbClr val="1A375E"/>
                 </a:solidFill>
               </a:rPr>
-              <a:t>Genetic Perturbagen Screen Results</a:t>
-            </a:r>
-          </a:p>
-        </p:txBody>
-      </p:sp>
-      <p:sp>
-        <p:nvSpPr>
-          <p:cNvPr id="8" name="Rectangle 7"/>
+              <a:t>Gene perturbagens tested at 40 ng/well in MCF7 cells (12K/well seeding density)</a:t>
+            </a:r>
+          </a:p>
+        </p:txBody>
+      </p:sp>
+      <p:sp>
+        <p:nvSpPr>
+          <p:cNvPr id="12" name="TextBox 11"/>
+          <p:cNvSpPr txBox="1"/>
+          <p:nvPr/>
+        </p:nvSpPr>
+        <p:spPr>
+          <a:xfrm>
+            <a:off x="457200" y="1883664"/>
+            <a:ext cx="7772400" cy="1600200"/>
+          </a:xfrm>
+          <a:prstGeom prst="rect">
+            <a:avLst/>
+          </a:prstGeom>
+          <a:noFill/>
+        </p:spPr>
+        <p:txBody>
+          <a:bodyPr wrap="square">
+            <a:spAutoFit/>
+          </a:bodyPr>
+          <a:lstStyle/>
+          <a:p>
+            <a:pPr>
+              <a:spcBef>
+                <a:spcPts val="400"/>
+              </a:spcBef>
+            </a:pPr>
+            <a:r>
+              <a:rPr sz="1100">
+                <a:solidFill>
+                  <a:srgbClr val="1A1A1A"/>
+                </a:solidFill>
+              </a:rPr>
+              <a:t>•  Multiple siRNA/shRNA constructs screened in a single endpoint confluency assay</a:t>
+            </a:r>
+          </a:p>
+          <a:p>
+            <a:pPr>
+              <a:spcBef>
+                <a:spcPts val="400"/>
+              </a:spcBef>
+            </a:pPr>
+            <a:r>
+              <a:rPr sz="1100">
+                <a:solidFill>
+                  <a:srgbClr val="1A1A1A"/>
+                </a:solidFill>
+              </a:rPr>
+              <a:t>•  Normalised confluency (%) reported per perturbagen relative to non-targeting control (set to 100%)</a:t>
+            </a:r>
+          </a:p>
+          <a:p>
+            <a:pPr>
+              <a:spcBef>
+                <a:spcPts val="400"/>
+              </a:spcBef>
+            </a:pPr>
+            <a:r>
+              <a:rPr sz="1100">
+                <a:solidFill>
+                  <a:srgbClr val="1A1A1A"/>
+                </a:solidFill>
+              </a:rPr>
+              <a:t>•  Values above 100% indicate enhanced growth; below 100% indicate growth inhibition</a:t>
+            </a:r>
+          </a:p>
+          <a:p>
+            <a:pPr>
+              <a:spcBef>
+                <a:spcPts val="400"/>
+              </a:spcBef>
+            </a:pPr>
+            <a:r>
+              <a:rPr sz="1100">
+                <a:solidFill>
+                  <a:srgbClr val="1A1A1A"/>
+                </a:solidFill>
+              </a:rPr>
+              <a:t>•  Single-timepoint readout — captures cumulative effect but not kinetics</a:t>
+            </a:r>
+          </a:p>
+          <a:p>
+            <a:pPr>
+              <a:spcBef>
+                <a:spcPts val="400"/>
+              </a:spcBef>
+            </a:pPr>
+            <a:r>
+              <a:rPr sz="1100">
+                <a:solidFill>
+                  <a:srgbClr val="1A1A1A"/>
+                </a:solidFill>
+              </a:rPr>
+              <a:t>•  Identifies candidate genes whose knockdown significantly alters cell proliferation</a:t>
+            </a:r>
+          </a:p>
+        </p:txBody>
+      </p:sp>
+      <p:sp>
+        <p:nvSpPr>
+          <p:cNvPr id="13" name="Rectangle 12"/>
           <p:cNvSpPr/>
           <p:nvPr/>
         </p:nvSpPr>
         <p:spPr>
           <a:xfrm>
-            <a:off x="411480" y="1389888"/>
-            <a:ext cx="5257800" cy="1664208"/>
+            <a:off x="8412480" y="1856232"/>
+            <a:ext cx="3337560" cy="1664208"/>
           </a:xfrm>
           <a:prstGeom prst="rect">
             <a:avLst/>
@@ -9777,14 +10030,127 @@
       </p:sp>
       <p:sp>
         <p:nvSpPr>
-          <p:cNvPr id="9" name="Rectangle 8"/>
+          <p:cNvPr id="14" name="TextBox 13"/>
+          <p:cNvSpPr txBox="1"/>
+          <p:nvPr/>
+        </p:nvSpPr>
+        <p:spPr>
+          <a:xfrm>
+            <a:off x="8549640" y="1901952"/>
+            <a:ext cx="3108960" cy="256032"/>
+          </a:xfrm>
+          <a:prstGeom prst="rect">
+            <a:avLst/>
+          </a:prstGeom>
+          <a:noFill/>
+        </p:spPr>
+        <p:txBody>
+          <a:bodyPr wrap="square">
+            <a:spAutoFit/>
+          </a:bodyPr>
+          <a:lstStyle/>
+          <a:p>
+            <a:pPr algn="l"/>
+            <a:r>
+              <a:rPr sz="1000" b="1" i="0">
+                <a:solidFill>
+                  <a:srgbClr val="2E75B6"/>
+                </a:solidFill>
+              </a:rPr>
+              <a:t>Interpretation</a:t>
+            </a:r>
+          </a:p>
+        </p:txBody>
+      </p:sp>
+      <p:sp>
+        <p:nvSpPr>
+          <p:cNvPr id="15" name="TextBox 14"/>
+          <p:cNvSpPr txBox="1"/>
+          <p:nvPr/>
+        </p:nvSpPr>
+        <p:spPr>
+          <a:xfrm>
+            <a:off x="8549640" y="2194560"/>
+            <a:ext cx="3108960" cy="1261872"/>
+          </a:xfrm>
+          <a:prstGeom prst="rect">
+            <a:avLst/>
+          </a:prstGeom>
+          <a:noFill/>
+        </p:spPr>
+        <p:txBody>
+          <a:bodyPr wrap="square">
+            <a:spAutoFit/>
+          </a:bodyPr>
+          <a:lstStyle/>
+          <a:p>
+            <a:pPr algn="l"/>
+            <a:r>
+              <a:rPr sz="1000" b="0" i="1">
+                <a:solidFill>
+                  <a:srgbClr val="1A1A1A"/>
+                </a:solidFill>
+              </a:rPr>
+              <a:t>A straightforward binary screen: each perturbagen either hits or misses a growth phenotype. Genes showing strong deviation from 100% are prioritised for follow-up validation.</a:t>
+            </a:r>
+          </a:p>
+        </p:txBody>
+      </p:sp>
+      <p:sp>
+        <p:nvSpPr>
+          <p:cNvPr id="16" name="Rectangle 15"/>
           <p:cNvSpPr/>
           <p:nvPr/>
         </p:nvSpPr>
         <p:spPr>
           <a:xfrm>
-            <a:off x="411480" y="1389888"/>
-            <a:ext cx="5257800" cy="347472"/>
+            <a:off x="274320" y="3840480"/>
+            <a:ext cx="11640312" cy="2633472"/>
+          </a:xfrm>
+          <a:prstGeom prst="rect">
+            <a:avLst/>
+          </a:prstGeom>
+          <a:solidFill>
+            <a:srgbClr val="F5F9FF"/>
+          </a:solidFill>
+          <a:ln w="12700">
+            <a:solidFill>
+              <a:srgbClr val="2E75B6"/>
+            </a:solidFill>
+          </a:ln>
+        </p:spPr>
+        <p:style>
+          <a:lnRef idx="1">
+            <a:schemeClr val="accent1"/>
+          </a:lnRef>
+          <a:fillRef idx="3">
+            <a:schemeClr val="accent1"/>
+          </a:fillRef>
+          <a:effectRef idx="2">
+            <a:schemeClr val="accent1"/>
+          </a:effectRef>
+          <a:fontRef idx="minor">
+            <a:schemeClr val="lt1"/>
+          </a:fontRef>
+        </p:style>
+        <p:txBody>
+          <a:bodyPr rtlCol="0" anchor="ctr"/>
+          <a:lstStyle/>
+          <a:p>
+            <a:pPr algn="ctr"/>
+          </a:p>
+        </p:txBody>
+      </p:sp>
+      <p:sp>
+        <p:nvSpPr>
+          <p:cNvPr id="17" name="Rectangle 16"/>
+          <p:cNvSpPr/>
+          <p:nvPr/>
+        </p:nvSpPr>
+        <p:spPr>
+          <a:xfrm>
+            <a:off x="274320" y="3840480"/>
+            <a:ext cx="11640312" cy="475488"/>
           </a:xfrm>
           <a:prstGeom prst="rect">
             <a:avLst/>
@@ -9820,14 +10186,14 @@
       </p:sp>
       <p:sp>
         <p:nvSpPr>
-          <p:cNvPr id="10" name="TextBox 9"/>
-          <p:cNvSpPr txBox="1"/>
-          <p:nvPr/>
-        </p:nvSpPr>
-        <p:spPr>
-          <a:xfrm>
-            <a:off x="548640" y="1435608"/>
-            <a:ext cx="3931920" cy="274320"/>
+          <p:cNvPr id="18" name="TextBox 17"/>
+          <p:cNvSpPr txBox="1"/>
+          <p:nvPr/>
+        </p:nvSpPr>
+        <p:spPr>
+          <a:xfrm>
+            <a:off x="457200" y="3913632"/>
+            <a:ext cx="8686800" cy="329184"/>
           </a:xfrm>
           <a:prstGeom prst="rect">
             <a:avLst/>
@@ -9842,26 +10208,26 @@
           <a:p>
             <a:pPr algn="l"/>
             <a:r>
-              <a:rPr sz="1200" b="1" i="0">
+              <a:rPr sz="1400" b="1" i="0">
                 <a:solidFill>
                   <a:srgbClr val="FFFFFF"/>
                 </a:solidFill>
               </a:rPr>
-              <a:t>1 Time Point  |  1 Control  (48 h)</a:t>
-            </a:r>
-          </a:p>
-        </p:txBody>
-      </p:sp>
-      <p:sp>
-        <p:nvSpPr>
-          <p:cNvPr id="11" name="Rectangle 10"/>
+              <a:t>Several Time Points  |  Multiple Controls  (23 time points, 3 h intervals, ~69 h total)</a:t>
+            </a:r>
+          </a:p>
+        </p:txBody>
+      </p:sp>
+      <p:sp>
+        <p:nvSpPr>
+          <p:cNvPr id="19" name="Rectangle 18"/>
           <p:cNvSpPr/>
           <p:nvPr/>
         </p:nvSpPr>
         <p:spPr>
           <a:xfrm>
-            <a:off x="4160520" y="1435608"/>
-            <a:ext cx="1371600" cy="256032"/>
+            <a:off x="9601200" y="3931920"/>
+            <a:ext cx="2148840" cy="292608"/>
           </a:xfrm>
           <a:prstGeom prst="rect">
             <a:avLst/>
@@ -9897,14 +10263,14 @@
       </p:sp>
       <p:sp>
         <p:nvSpPr>
-          <p:cNvPr id="12" name="TextBox 11"/>
-          <p:cNvSpPr txBox="1"/>
-          <p:nvPr/>
-        </p:nvSpPr>
-        <p:spPr>
-          <a:xfrm>
-            <a:off x="4178808" y="1444752"/>
-            <a:ext cx="1335024" cy="219456"/>
+          <p:cNvPr id="20" name="TextBox 19"/>
+          <p:cNvSpPr txBox="1"/>
+          <p:nvPr/>
+        </p:nvSpPr>
+        <p:spPr>
+          <a:xfrm>
+            <a:off x="9619488" y="3941064"/>
+            <a:ext cx="2112264" cy="256032"/>
           </a:xfrm>
           <a:prstGeom prst="rect">
             <a:avLst/>
@@ -9919,7 +10285,7 @@
           <a:p>
             <a:pPr algn="ctr"/>
             <a:r>
-              <a:rPr sz="900" b="1" i="0">
+              <a:rPr sz="1100" b="1" i="0">
                 <a:solidFill>
                   <a:srgbClr val="FFFFFF"/>
                 </a:solidFill>
@@ -9931,14 +10297,48 @@
       </p:sp>
       <p:sp>
         <p:nvSpPr>
-          <p:cNvPr id="13" name="TextBox 12"/>
-          <p:cNvSpPr txBox="1"/>
-          <p:nvPr/>
-        </p:nvSpPr>
-        <p:spPr>
-          <a:xfrm>
-            <a:off x="548640" y="1801368"/>
-            <a:ext cx="4983480" cy="1188720"/>
+          <p:cNvPr id="21" name="TextBox 20"/>
+          <p:cNvSpPr txBox="1"/>
+          <p:nvPr/>
+        </p:nvSpPr>
+        <p:spPr>
+          <a:xfrm>
+            <a:off x="457200" y="4389120"/>
+            <a:ext cx="11338560" cy="292608"/>
+          </a:xfrm>
+          <a:prstGeom prst="rect">
+            <a:avLst/>
+          </a:prstGeom>
+          <a:noFill/>
+        </p:spPr>
+        <p:txBody>
+          <a:bodyPr wrap="square">
+            <a:spAutoFit/>
+          </a:bodyPr>
+          <a:lstStyle/>
+          <a:p>
+            <a:pPr algn="l"/>
+            <a:r>
+              <a:rPr sz="1100" b="0" i="1">
+                <a:solidFill>
+                  <a:srgbClr val="1A375E"/>
+                </a:solidFill>
+              </a:rPr>
+              <a:t>Same perturbagens measured across time, enabling growth kinetics and rate calculations</a:t>
+            </a:r>
+          </a:p>
+        </p:txBody>
+      </p:sp>
+      <p:sp>
+        <p:nvSpPr>
+          <p:cNvPr id="22" name="TextBox 21"/>
+          <p:cNvSpPr txBox="1"/>
+          <p:nvPr/>
+        </p:nvSpPr>
+        <p:spPr>
+          <a:xfrm>
+            <a:off x="457200" y="4736592"/>
+            <a:ext cx="7772400" cy="1600200"/>
           </a:xfrm>
           <a:prstGeom prst="rect">
             <a:avLst/>
@@ -9957,12 +10357,12 @@
               </a:spcBef>
             </a:pPr>
             <a:r>
-              <a:rPr sz="1000">
+              <a:rPr sz="1100">
                 <a:solidFill>
                   <a:srgbClr val="1A1A1A"/>
                 </a:solidFill>
               </a:rPr>
-              <a:t>•  Multiple gene perturbagens tested at 40 ng/well</a:t>
+              <a:t>•  Growth rate computed at each time point as a ratio to the matched control group</a:t>
             </a:r>
           </a:p>
           <a:p>
@@ -9972,12 +10372,12 @@
               </a:spcBef>
             </a:pPr>
             <a:r>
-              <a:rPr sz="1000">
+              <a:rPr sz="1100">
                 <a:solidFill>
                   <a:srgbClr val="1A1A1A"/>
                 </a:solidFill>
               </a:rPr>
-              <a:t>•  Normalised confluency reported relative to non-targeting control</a:t>
+              <a:t>•  Growth rate &gt; 1.0 — cells proliferating faster than control (possible tumour suppressor knockdown)</a:t>
             </a:r>
           </a:p>
           <a:p>
@@ -9987,12 +10387,12 @@
               </a:spcBef>
             </a:pPr>
             <a:r>
-              <a:rPr sz="1000">
+              <a:rPr sz="1100">
                 <a:solidFill>
                   <a:srgbClr val="1A1A1A"/>
                 </a:solidFill>
               </a:rPr>
-              <a:t>•  Identifies knockdowns that inhibit or enhance cell growth</a:t>
+              <a:t>•  Growth rate &lt; 1.0 — cells proliferating slower than control (growth-promoting gene silenced)</a:t>
             </a:r>
           </a:p>
           <a:p>
@@ -10002,26 +10402,41 @@
               </a:spcBef>
             </a:pPr>
             <a:r>
-              <a:rPr sz="1000">
+              <a:rPr sz="1100">
                 <a:solidFill>
                   <a:srgbClr val="1A1A1A"/>
                 </a:solidFill>
               </a:rPr>
-              <a:t>•  Binary readout — no dose-response fitting applied</a:t>
-            </a:r>
-          </a:p>
-        </p:txBody>
-      </p:sp>
-      <p:sp>
-        <p:nvSpPr>
-          <p:cNvPr id="14" name="Rectangle 13"/>
+              <a:t>•  Multiple independent control groups enable robust plate-wide normalisation</a:t>
+            </a:r>
+          </a:p>
+          <a:p>
+            <a:pPr>
+              <a:spcBef>
+                <a:spcPts val="400"/>
+              </a:spcBef>
+            </a:pPr>
+            <a:r>
+              <a:rPr sz="1100">
+                <a:solidFill>
+                  <a:srgbClr val="1A1A1A"/>
+                </a:solidFill>
+              </a:rPr>
+              <a:t>•  Time-resolved data reveals whether effects are immediate, delayed, or transient</a:t>
+            </a:r>
+          </a:p>
+        </p:txBody>
+      </p:sp>
+      <p:sp>
+        <p:nvSpPr>
+          <p:cNvPr id="23" name="Rectangle 22"/>
           <p:cNvSpPr/>
           <p:nvPr/>
         </p:nvSpPr>
         <p:spPr>
           <a:xfrm>
-            <a:off x="411480" y="3200400"/>
-            <a:ext cx="5257800" cy="1664208"/>
+            <a:off x="8412480" y="4709160"/>
+            <a:ext cx="3337560" cy="1664208"/>
           </a:xfrm>
           <a:prstGeom prst="rect">
             <a:avLst/>
@@ -10059,14 +10474,344 @@
       </p:sp>
       <p:sp>
         <p:nvSpPr>
-          <p:cNvPr id="15" name="Rectangle 14"/>
+          <p:cNvPr id="24" name="TextBox 23"/>
+          <p:cNvSpPr txBox="1"/>
+          <p:nvPr/>
+        </p:nvSpPr>
+        <p:spPr>
+          <a:xfrm>
+            <a:off x="8549640" y="4754880"/>
+            <a:ext cx="3108960" cy="256032"/>
+          </a:xfrm>
+          <a:prstGeom prst="rect">
+            <a:avLst/>
+          </a:prstGeom>
+          <a:noFill/>
+        </p:spPr>
+        <p:txBody>
+          <a:bodyPr wrap="square">
+            <a:spAutoFit/>
+          </a:bodyPr>
+          <a:lstStyle/>
+          <a:p>
+            <a:pPr algn="l"/>
+            <a:r>
+              <a:rPr sz="1000" b="1" i="0">
+                <a:solidFill>
+                  <a:srgbClr val="2E75B6"/>
+                </a:solidFill>
+              </a:rPr>
+              <a:t>Interpretation</a:t>
+            </a:r>
+          </a:p>
+        </p:txBody>
+      </p:sp>
+      <p:sp>
+        <p:nvSpPr>
+          <p:cNvPr id="25" name="TextBox 24"/>
+          <p:cNvSpPr txBox="1"/>
+          <p:nvPr/>
+        </p:nvSpPr>
+        <p:spPr>
+          <a:xfrm>
+            <a:off x="8549640" y="5047488"/>
+            <a:ext cx="3108960" cy="1261872"/>
+          </a:xfrm>
+          <a:prstGeom prst="rect">
+            <a:avLst/>
+          </a:prstGeom>
+          <a:noFill/>
+        </p:spPr>
+        <p:txBody>
+          <a:bodyPr wrap="square">
+            <a:spAutoFit/>
+          </a:bodyPr>
+          <a:lstStyle/>
+          <a:p>
+            <a:pPr algn="l"/>
+            <a:r>
+              <a:rPr sz="1000" b="0" i="1">
+                <a:solidFill>
+                  <a:srgbClr val="1A1A1A"/>
+                </a:solidFill>
+              </a:rPr>
+              <a:t>Time-course data provides richer biological insight than endpoint alone — a perturbagen with a delayed growth rate change may reflect an indirect or adaptive cellular response.</a:t>
+            </a:r>
+          </a:p>
+        </p:txBody>
+      </p:sp>
+      <p:sp>
+        <p:nvSpPr>
+          <p:cNvPr id="26" name="Rectangle 25"/>
           <p:cNvSpPr/>
           <p:nvPr/>
         </p:nvSpPr>
         <p:spPr>
           <a:xfrm>
-            <a:off x="411480" y="3200400"/>
-            <a:ext cx="5257800" cy="347472"/>
+            <a:off x="274320" y="6473952"/>
+            <a:ext cx="11640312" cy="0"/>
+          </a:xfrm>
+          <a:prstGeom prst="rect">
+            <a:avLst/>
+          </a:prstGeom>
+          <a:noFill/>
+          <a:ln>
+            <a:noFill/>
+          </a:ln>
+        </p:spPr>
+        <p:style>
+          <a:lnRef idx="1">
+            <a:schemeClr val="accent1"/>
+          </a:lnRef>
+          <a:fillRef idx="3">
+            <a:schemeClr val="accent1"/>
+          </a:fillRef>
+          <a:effectRef idx="2">
+            <a:schemeClr val="accent1"/>
+          </a:effectRef>
+          <a:fontRef idx="minor">
+            <a:schemeClr val="lt1"/>
+          </a:fontRef>
+        </p:style>
+        <p:txBody>
+          <a:bodyPr rtlCol="0" anchor="ctr"/>
+          <a:lstStyle/>
+          <a:p>
+            <a:pPr algn="ctr"/>
+          </a:p>
+        </p:txBody>
+      </p:sp>
+      <p:sp>
+        <p:nvSpPr>
+          <p:cNvPr id="27" name="Rectangle 26"/>
+          <p:cNvSpPr/>
+          <p:nvPr/>
+        </p:nvSpPr>
+        <p:spPr>
+          <a:xfrm>
+            <a:off x="274320" y="6473952"/>
+            <a:ext cx="6400800" cy="0"/>
+          </a:xfrm>
+          <a:prstGeom prst="rect">
+            <a:avLst/>
+          </a:prstGeom>
+          <a:noFill/>
+          <a:ln>
+            <a:noFill/>
+          </a:ln>
+        </p:spPr>
+        <p:style>
+          <a:lnRef idx="1">
+            <a:schemeClr val="accent1"/>
+          </a:lnRef>
+          <a:fillRef idx="3">
+            <a:schemeClr val="accent1"/>
+          </a:fillRef>
+          <a:effectRef idx="2">
+            <a:schemeClr val="accent1"/>
+          </a:effectRef>
+          <a:fontRef idx="minor">
+            <a:schemeClr val="lt1"/>
+          </a:fontRef>
+        </p:style>
+        <p:txBody>
+          <a:bodyPr rtlCol="0" anchor="ctr"/>
+          <a:lstStyle/>
+          <a:p>
+            <a:pPr algn="ctr"/>
+          </a:p>
+        </p:txBody>
+      </p:sp>
+      <p:sp>
+        <p:nvSpPr>
+          <p:cNvPr id="28" name="Rectangle 27"/>
+          <p:cNvSpPr/>
+          <p:nvPr/>
+        </p:nvSpPr>
+        <p:spPr>
+          <a:xfrm>
+            <a:off x="0" y="6656832"/>
+            <a:ext cx="12188952" cy="201168"/>
+          </a:xfrm>
+          <a:prstGeom prst="rect">
+            <a:avLst/>
+          </a:prstGeom>
+          <a:solidFill>
+            <a:srgbClr val="1A375E"/>
+          </a:solidFill>
+          <a:ln>
+            <a:noFill/>
+          </a:ln>
+        </p:spPr>
+        <p:style>
+          <a:lnRef idx="1">
+            <a:schemeClr val="accent1"/>
+          </a:lnRef>
+          <a:fillRef idx="3">
+            <a:schemeClr val="accent1"/>
+          </a:fillRef>
+          <a:effectRef idx="2">
+            <a:schemeClr val="accent1"/>
+          </a:effectRef>
+          <a:fontRef idx="minor">
+            <a:schemeClr val="lt1"/>
+          </a:fontRef>
+        </p:style>
+        <p:txBody>
+          <a:bodyPr rtlCol="0" anchor="ctr"/>
+          <a:lstStyle/>
+          <a:p>
+            <a:pPr algn="ctr"/>
+          </a:p>
+        </p:txBody>
+      </p:sp>
+      <p:sp>
+        <p:nvSpPr>
+          <p:cNvPr id="29" name="TextBox 28"/>
+          <p:cNvSpPr txBox="1"/>
+          <p:nvPr/>
+        </p:nvSpPr>
+        <p:spPr>
+          <a:xfrm>
+            <a:off x="10515600" y="6675120"/>
+            <a:ext cx="1554480" cy="182880"/>
+          </a:xfrm>
+          <a:prstGeom prst="rect">
+            <a:avLst/>
+          </a:prstGeom>
+          <a:noFill/>
+        </p:spPr>
+        <p:txBody>
+          <a:bodyPr wrap="square">
+            <a:spAutoFit/>
+          </a:bodyPr>
+          <a:lstStyle/>
+          <a:p>
+            <a:pPr algn="r"/>
+            <a:r>
+              <a:rPr sz="900" b="0" i="0">
+                <a:solidFill>
+                  <a:srgbClr val="FFFFFF"/>
+                </a:solidFill>
+              </a:rPr>
+              <a:t>Slide 5 of 6</a:t>
+            </a:r>
+          </a:p>
+        </p:txBody>
+      </p:sp>
+      <p:sp>
+        <p:nvSpPr>
+          <p:cNvPr id="30" name="TextBox 29"/>
+          <p:cNvSpPr txBox="1"/>
+          <p:nvPr/>
+        </p:nvSpPr>
+        <p:spPr>
+          <a:xfrm>
+            <a:off x="228600" y="6675120"/>
+            <a:ext cx="9144000" cy="182880"/>
+          </a:xfrm>
+          <a:prstGeom prst="rect">
+            <a:avLst/>
+          </a:prstGeom>
+          <a:noFill/>
+        </p:spPr>
+        <p:txBody>
+          <a:bodyPr wrap="square">
+            <a:spAutoFit/>
+          </a:bodyPr>
+          <a:lstStyle/>
+          <a:p>
+            <a:pPr algn="l"/>
+            <a:r>
+              <a:rPr sz="900" b="0" i="0">
+                <a:solidFill>
+                  <a:srgbClr val="BDD7EE"/>
+                </a:solidFill>
+              </a:rPr>
+              <a:t>HTSplotter  |  Nunes et al., PLoS One 2024  |  DOI: 10.1371/journal.pone.0296322</a:t>
+            </a:r>
+          </a:p>
+        </p:txBody>
+      </p:sp>
+    </p:spTree>
+  </p:cSld>
+  <p:clrMapOvr>
+    <a:masterClrMapping/>
+  </p:clrMapOvr>
+</p:sld>
+</file>
+
+<file path=ppt/slides/slide6.xml><?xml version="1.0" encoding="utf-8"?>
+<p:sld xmlns:a="http://schemas.openxmlformats.org/drawingml/2006/main" xmlns:p="http://schemas.openxmlformats.org/presentationml/2006/main" xmlns:r="http://schemas.openxmlformats.org/officeDocument/2006/relationships">
+  <p:cSld>
+    <p:bg>
+      <p:bgPr>
+        <a:solidFill>
+          <a:srgbClr val="FFFFFF"/>
+        </a:solidFill>
+        <a:effectLst/>
+      </p:bgPr>
+    </p:bg>
+    <p:spTree>
+      <p:nvGrpSpPr>
+        <p:cNvPr id="1" name=""/>
+        <p:cNvGrpSpPr/>
+        <p:nvPr/>
+      </p:nvGrpSpPr>
+      <p:grpSpPr/>
+      <p:sp>
+        <p:nvSpPr>
+          <p:cNvPr id="2" name="Rectangle 1"/>
+          <p:cNvSpPr/>
+          <p:nvPr/>
+        </p:nvSpPr>
+        <p:spPr>
+          <a:xfrm>
+            <a:off x="0" y="0"/>
+            <a:ext cx="12188952" cy="804672"/>
+          </a:xfrm>
+          <a:prstGeom prst="rect">
+            <a:avLst/>
+          </a:prstGeom>
+          <a:solidFill>
+            <a:srgbClr val="1A375E"/>
+          </a:solidFill>
+          <a:ln>
+            <a:noFill/>
+          </a:ln>
+        </p:spPr>
+        <p:style>
+          <a:lnRef idx="1">
+            <a:schemeClr val="accent1"/>
+          </a:lnRef>
+          <a:fillRef idx="3">
+            <a:schemeClr val="accent1"/>
+          </a:fillRef>
+          <a:effectRef idx="2">
+            <a:schemeClr val="accent1"/>
+          </a:effectRef>
+          <a:fontRef idx="minor">
+            <a:schemeClr val="lt1"/>
+          </a:fontRef>
+        </p:style>
+        <p:txBody>
+          <a:bodyPr rtlCol="0" anchor="ctr"/>
+          <a:lstStyle/>
+          <a:p>
+            <a:pPr algn="ctr"/>
+          </a:p>
+        </p:txBody>
+      </p:sp>
+      <p:sp>
+        <p:nvSpPr>
+          <p:cNvPr id="3" name="Rectangle 2"/>
+          <p:cNvSpPr/>
+          <p:nvPr/>
+        </p:nvSpPr>
+        <p:spPr>
+          <a:xfrm>
+            <a:off x="0" y="0"/>
+            <a:ext cx="73152" cy="804672"/>
           </a:xfrm>
           <a:prstGeom prst="rect">
             <a:avLst/>
@@ -10102,14 +10847,14 @@
       </p:sp>
       <p:sp>
         <p:nvSpPr>
-          <p:cNvPr id="16" name="TextBox 15"/>
-          <p:cNvSpPr txBox="1"/>
-          <p:nvPr/>
-        </p:nvSpPr>
-        <p:spPr>
-          <a:xfrm>
-            <a:off x="548640" y="3246120"/>
-            <a:ext cx="3931920" cy="274320"/>
+          <p:cNvPr id="4" name="TextBox 3"/>
+          <p:cNvSpPr txBox="1"/>
+          <p:nvPr/>
+        </p:nvSpPr>
+        <p:spPr>
+          <a:xfrm>
+            <a:off x="228600" y="91440"/>
+            <a:ext cx="11704320" cy="502920"/>
           </a:xfrm>
           <a:prstGeom prst="rect">
             <a:avLst/>
@@ -10124,35 +10869,71 @@
           <a:p>
             <a:pPr algn="l"/>
             <a:r>
-              <a:rPr sz="1200" b="1" i="0">
+              <a:rPr sz="2600" b="1" i="0">
                 <a:solidFill>
                   <a:srgbClr val="FFFFFF"/>
                 </a:solidFill>
               </a:rPr>
-              <a:t>Several Time Points  |  Multiple Controls  (23 TP, 3 h interval)</a:t>
-            </a:r>
-          </a:p>
-        </p:txBody>
-      </p:sp>
-      <p:sp>
-        <p:nvSpPr>
-          <p:cNvPr id="17" name="Rectangle 16"/>
+              <a:t>AI-Assisted Results Interpretation</a:t>
+            </a:r>
+          </a:p>
+        </p:txBody>
+      </p:sp>
+      <p:sp>
+        <p:nvSpPr>
+          <p:cNvPr id="5" name="TextBox 4"/>
+          <p:cNvSpPr txBox="1"/>
+          <p:nvPr/>
+        </p:nvSpPr>
+        <p:spPr>
+          <a:xfrm>
+            <a:off x="228600" y="548640"/>
+            <a:ext cx="11704320" cy="228600"/>
+          </a:xfrm>
+          <a:prstGeom prst="rect">
+            <a:avLst/>
+          </a:prstGeom>
+          <a:noFill/>
+        </p:spPr>
+        <p:txBody>
+          <a:bodyPr wrap="square">
+            <a:spAutoFit/>
+          </a:bodyPr>
+          <a:lstStyle/>
+          <a:p>
+            <a:pPr algn="l"/>
+            <a:r>
+              <a:rPr sz="1200" b="0" i="0">
+                <a:solidFill>
+                  <a:srgbClr val="BDD7EE"/>
+                </a:solidFill>
+              </a:rPr>
+              <a:t>Interactive Claude-powered chat interface built on top of HTSplotter</a:t>
+            </a:r>
+          </a:p>
+        </p:txBody>
+      </p:sp>
+      <p:sp>
+        <p:nvSpPr>
+          <p:cNvPr id="6" name="Rectangle 5"/>
           <p:cNvSpPr/>
           <p:nvPr/>
         </p:nvSpPr>
         <p:spPr>
           <a:xfrm>
-            <a:off x="4160520" y="3246120"/>
-            <a:ext cx="1371600" cy="256032"/>
+            <a:off x="274320" y="914400"/>
+            <a:ext cx="11640312" cy="658368"/>
           </a:xfrm>
           <a:prstGeom prst="rect">
             <a:avLst/>
           </a:prstGeom>
           <a:solidFill>
-            <a:srgbClr val="1F8678"/>
+            <a:srgbClr val="EFF4FB"/>
           </a:solidFill>
-          <a:ln>
-            <a:noFill/>
+          <a:ln w="12700">
+            <a:solidFill>
+              <a:srgbClr val="2E75B6"/>
+            </a:solidFill>
           </a:ln>
         </p:spPr>
         <p:style>
@@ -10179,141 +10960,58 @@
       </p:sp>
       <p:sp>
         <p:nvSpPr>
-          <p:cNvPr id="18" name="TextBox 17"/>
-          <p:cNvSpPr txBox="1"/>
-          <p:nvPr/>
-        </p:nvSpPr>
-        <p:spPr>
-          <a:xfrm>
-            <a:off x="4178808" y="3255264"/>
-            <a:ext cx="1335024" cy="219456"/>
-          </a:xfrm>
-          <a:prstGeom prst="rect">
-            <a:avLst/>
-          </a:prstGeom>
-          <a:noFill/>
-        </p:spPr>
-        <p:txBody>
-          <a:bodyPr wrap="square">
-            <a:spAutoFit/>
-          </a:bodyPr>
-          <a:lstStyle/>
-          <a:p>
-            <a:pPr algn="ctr"/>
-            <a:r>
-              <a:rPr sz="900" b="1" i="0">
-                <a:solidFill>
-                  <a:srgbClr val="FFFFFF"/>
-                </a:solidFill>
-              </a:rPr>
-              <a:t>✅  COMPLETE</a:t>
-            </a:r>
-          </a:p>
-        </p:txBody>
-      </p:sp>
-      <p:sp>
-        <p:nvSpPr>
-          <p:cNvPr id="19" name="TextBox 18"/>
-          <p:cNvSpPr txBox="1"/>
-          <p:nvPr/>
-        </p:nvSpPr>
-        <p:spPr>
-          <a:xfrm>
-            <a:off x="548640" y="3611880"/>
-            <a:ext cx="4983480" cy="1188720"/>
-          </a:xfrm>
-          <a:prstGeom prst="rect">
-            <a:avLst/>
-          </a:prstGeom>
-          <a:noFill/>
-        </p:spPr>
-        <p:txBody>
-          <a:bodyPr wrap="square">
-            <a:spAutoFit/>
-          </a:bodyPr>
-          <a:lstStyle/>
-          <a:p>
-            <a:pPr>
-              <a:spcBef>
-                <a:spcPts val="400"/>
-              </a:spcBef>
-            </a:pPr>
-            <a:r>
-              <a:rPr sz="1000">
-                <a:solidFill>
-                  <a:srgbClr val="1A1A1A"/>
-                </a:solidFill>
-              </a:rPr>
-              <a:t>•  Growth rate computed at every time point for each perturbagen</a:t>
-            </a:r>
-          </a:p>
-          <a:p>
-            <a:pPr>
-              <a:spcBef>
-                <a:spcPts val="400"/>
-              </a:spcBef>
-            </a:pPr>
-            <a:r>
-              <a:rPr sz="1000">
-                <a:solidFill>
-                  <a:srgbClr val="1A1A1A"/>
-                </a:solidFill>
-              </a:rPr>
-              <a:t>•  Growth rate ratio &gt; 1.0 = faster than control (possible growth suppressor released)</a:t>
-            </a:r>
-          </a:p>
-          <a:p>
-            <a:pPr>
-              <a:spcBef>
-                <a:spcPts val="400"/>
-              </a:spcBef>
-            </a:pPr>
-            <a:r>
-              <a:rPr sz="1000">
-                <a:solidFill>
-                  <a:srgbClr val="1A1A1A"/>
-                </a:solidFill>
-              </a:rPr>
-              <a:t>•  Growth rate ratio &lt; 1.0 = slower than control (growth inhibition)</a:t>
-            </a:r>
-          </a:p>
-          <a:p>
-            <a:pPr>
-              <a:spcBef>
-                <a:spcPts val="400"/>
-              </a:spcBef>
-            </a:pPr>
-            <a:r>
-              <a:rPr sz="1000">
-                <a:solidFill>
-                  <a:srgbClr val="1A1A1A"/>
-                </a:solidFill>
-              </a:rPr>
-              <a:t>•  Multiple control groups allow robust normalisation across the plate</a:t>
-            </a:r>
-          </a:p>
-        </p:txBody>
-      </p:sp>
-      <p:sp>
-        <p:nvSpPr>
-          <p:cNvPr id="20" name="Rectangle 19"/>
+          <p:cNvPr id="7" name="TextBox 6"/>
+          <p:cNvSpPr txBox="1"/>
+          <p:nvPr/>
+        </p:nvSpPr>
+        <p:spPr>
+          <a:xfrm>
+            <a:off x="457200" y="978408"/>
+            <a:ext cx="11247120" cy="530352"/>
+          </a:xfrm>
+          <a:prstGeom prst="rect">
+            <a:avLst/>
+          </a:prstGeom>
+          <a:noFill/>
+        </p:spPr>
+        <p:txBody>
+          <a:bodyPr wrap="square">
+            <a:spAutoFit/>
+          </a:bodyPr>
+          <a:lstStyle/>
+          <a:p>
+            <a:pPr algn="l"/>
+            <a:r>
+              <a:rPr sz="1200" b="0" i="0">
+                <a:solidFill>
+                  <a:srgbClr val="1A375E"/>
+                </a:solidFill>
+              </a:rPr>
+              <a:t>After running any HTSplotter analysis, researchers can ask plain-English questions about their results using an AI chat interface powered by the Anthropic Claude API (claude-opus-4-7). No bioinformatics expertise required — just type your question.</a:t>
+            </a:r>
+          </a:p>
+        </p:txBody>
+      </p:sp>
+      <p:sp>
+        <p:nvSpPr>
+          <p:cNvPr id="8" name="Rectangle 7"/>
           <p:cNvSpPr/>
           <p:nvPr/>
         </p:nvSpPr>
         <p:spPr>
           <a:xfrm>
-            <a:off x="411480" y="4919472"/>
-            <a:ext cx="5257800" cy="1298448"/>
+            <a:off x="274320" y="1664208"/>
+            <a:ext cx="5394960" cy="4782312"/>
           </a:xfrm>
           <a:prstGeom prst="rect">
             <a:avLst/>
           </a:prstGeom>
           <a:solidFill>
-            <a:srgbClr val="FFF8E1"/>
+            <a:srgbClr val="F5F9FF"/>
           </a:solidFill>
           <a:ln w="12700">
             <a:solidFill>
-              <a:srgbClr val="C55A11"/>
+              <a:srgbClr val="2E75B6"/>
             </a:solidFill>
           </a:ln>
         </p:spPr>
@@ -10341,14 +11039,449 @@
       </p:sp>
       <p:sp>
         <p:nvSpPr>
+          <p:cNvPr id="9" name="TextBox 8"/>
+          <p:cNvSpPr txBox="1"/>
+          <p:nvPr/>
+        </p:nvSpPr>
+        <p:spPr>
+          <a:xfrm>
+            <a:off x="457200" y="1737360"/>
+            <a:ext cx="5029200" cy="347472"/>
+          </a:xfrm>
+          <a:prstGeom prst="rect">
+            <a:avLst/>
+          </a:prstGeom>
+          <a:noFill/>
+        </p:spPr>
+        <p:txBody>
+          <a:bodyPr wrap="square">
+            <a:spAutoFit/>
+          </a:bodyPr>
+          <a:lstStyle/>
+          <a:p>
+            <a:pPr algn="l"/>
+            <a:r>
+              <a:rPr sz="1500" b="1" i="0">
+                <a:solidFill>
+                  <a:srgbClr val="1A375E"/>
+                </a:solidFill>
+              </a:rPr>
+              <a:t>How It Works</a:t>
+            </a:r>
+          </a:p>
+        </p:txBody>
+      </p:sp>
+      <p:sp>
+        <p:nvSpPr>
+          <p:cNvPr id="10" name="Rectangle 9"/>
+          <p:cNvSpPr/>
+          <p:nvPr/>
+        </p:nvSpPr>
+        <p:spPr>
+          <a:xfrm>
+            <a:off x="384048" y="2176272"/>
+            <a:ext cx="475488" cy="475488"/>
+          </a:xfrm>
+          <a:prstGeom prst="rect">
+            <a:avLst/>
+          </a:prstGeom>
+          <a:solidFill>
+            <a:srgbClr val="2E75B6"/>
+          </a:solidFill>
+          <a:ln>
+            <a:noFill/>
+          </a:ln>
+        </p:spPr>
+        <p:style>
+          <a:lnRef idx="1">
+            <a:schemeClr val="accent1"/>
+          </a:lnRef>
+          <a:fillRef idx="3">
+            <a:schemeClr val="accent1"/>
+          </a:fillRef>
+          <a:effectRef idx="2">
+            <a:schemeClr val="accent1"/>
+          </a:effectRef>
+          <a:fontRef idx="minor">
+            <a:schemeClr val="lt1"/>
+          </a:fontRef>
+        </p:style>
+        <p:txBody>
+          <a:bodyPr rtlCol="0" anchor="ctr"/>
+          <a:lstStyle/>
+          <a:p>
+            <a:pPr algn="ctr"/>
+          </a:p>
+        </p:txBody>
+      </p:sp>
+      <p:sp>
+        <p:nvSpPr>
+          <p:cNvPr id="11" name="TextBox 10"/>
+          <p:cNvSpPr txBox="1"/>
+          <p:nvPr/>
+        </p:nvSpPr>
+        <p:spPr>
+          <a:xfrm>
+            <a:off x="402336" y="2249424"/>
+            <a:ext cx="438912" cy="329184"/>
+          </a:xfrm>
+          <a:prstGeom prst="rect">
+            <a:avLst/>
+          </a:prstGeom>
+          <a:noFill/>
+        </p:spPr>
+        <p:txBody>
+          <a:bodyPr wrap="square">
+            <a:spAutoFit/>
+          </a:bodyPr>
+          <a:lstStyle/>
+          <a:p>
+            <a:pPr algn="ctr"/>
+            <a:r>
+              <a:rPr sz="1600" b="1" i="0">
+                <a:solidFill>
+                  <a:srgbClr val="FFFFFF"/>
+                </a:solidFill>
+              </a:rPr>
+              <a:t>1</a:t>
+            </a:r>
+          </a:p>
+        </p:txBody>
+      </p:sp>
+      <p:sp>
+        <p:nvSpPr>
+          <p:cNvPr id="12" name="TextBox 11"/>
+          <p:cNvSpPr txBox="1"/>
+          <p:nvPr/>
+        </p:nvSpPr>
+        <p:spPr>
+          <a:xfrm>
+            <a:off x="960120" y="2194560"/>
+            <a:ext cx="4526280" cy="237744"/>
+          </a:xfrm>
+          <a:prstGeom prst="rect">
+            <a:avLst/>
+          </a:prstGeom>
+          <a:noFill/>
+        </p:spPr>
+        <p:txBody>
+          <a:bodyPr wrap="square">
+            <a:spAutoFit/>
+          </a:bodyPr>
+          <a:lstStyle/>
+          <a:p>
+            <a:pPr algn="l"/>
+            <a:r>
+              <a:rPr sz="1100" b="1" i="0">
+                <a:solidFill>
+                  <a:srgbClr val="1A375E"/>
+                </a:solidFill>
+              </a:rPr>
+              <a:t>Run HTSplotter</a:t>
+            </a:r>
+          </a:p>
+        </p:txBody>
+      </p:sp>
+      <p:sp>
+        <p:nvSpPr>
+          <p:cNvPr id="13" name="TextBox 12"/>
+          <p:cNvSpPr txBox="1"/>
+          <p:nvPr/>
+        </p:nvSpPr>
+        <p:spPr>
+          <a:xfrm>
+            <a:off x="960120" y="2423160"/>
+            <a:ext cx="4526280" cy="548640"/>
+          </a:xfrm>
+          <a:prstGeom prst="rect">
+            <a:avLst/>
+          </a:prstGeom>
+          <a:noFill/>
+        </p:spPr>
+        <p:txBody>
+          <a:bodyPr wrap="square">
+            <a:spAutoFit/>
+          </a:bodyPr>
+          <a:lstStyle/>
+          <a:p>
+            <a:pPr algn="l"/>
+            <a:r>
+              <a:rPr sz="1000" b="0" i="0">
+                <a:solidFill>
+                  <a:srgbClr val="1A1A1A"/>
+                </a:solidFill>
+              </a:rPr>
+              <a:t>Execute any analysis (drug screen, combination, genetic). Results are saved as .txt files in the output_results/ folder.</a:t>
+            </a:r>
+          </a:p>
+        </p:txBody>
+      </p:sp>
+      <p:sp>
+        <p:nvSpPr>
+          <p:cNvPr id="14" name="Rectangle 13"/>
+          <p:cNvSpPr/>
+          <p:nvPr/>
+        </p:nvSpPr>
+        <p:spPr>
+          <a:xfrm>
+            <a:off x="384048" y="3026664"/>
+            <a:ext cx="475488" cy="475488"/>
+          </a:xfrm>
+          <a:prstGeom prst="rect">
+            <a:avLst/>
+          </a:prstGeom>
+          <a:solidFill>
+            <a:srgbClr val="2E75B6"/>
+          </a:solidFill>
+          <a:ln>
+            <a:noFill/>
+          </a:ln>
+        </p:spPr>
+        <p:style>
+          <a:lnRef idx="1">
+            <a:schemeClr val="accent1"/>
+          </a:lnRef>
+          <a:fillRef idx="3">
+            <a:schemeClr val="accent1"/>
+          </a:fillRef>
+          <a:effectRef idx="2">
+            <a:schemeClr val="accent1"/>
+          </a:effectRef>
+          <a:fontRef idx="minor">
+            <a:schemeClr val="lt1"/>
+          </a:fontRef>
+        </p:style>
+        <p:txBody>
+          <a:bodyPr rtlCol="0" anchor="ctr"/>
+          <a:lstStyle/>
+          <a:p>
+            <a:pPr algn="ctr"/>
+          </a:p>
+        </p:txBody>
+      </p:sp>
+      <p:sp>
+        <p:nvSpPr>
+          <p:cNvPr id="15" name="TextBox 14"/>
+          <p:cNvSpPr txBox="1"/>
+          <p:nvPr/>
+        </p:nvSpPr>
+        <p:spPr>
+          <a:xfrm>
+            <a:off x="402336" y="3099816"/>
+            <a:ext cx="438912" cy="329184"/>
+          </a:xfrm>
+          <a:prstGeom prst="rect">
+            <a:avLst/>
+          </a:prstGeom>
+          <a:noFill/>
+        </p:spPr>
+        <p:txBody>
+          <a:bodyPr wrap="square">
+            <a:spAutoFit/>
+          </a:bodyPr>
+          <a:lstStyle/>
+          <a:p>
+            <a:pPr algn="ctr"/>
+            <a:r>
+              <a:rPr sz="1600" b="1" i="0">
+                <a:solidFill>
+                  <a:srgbClr val="FFFFFF"/>
+                </a:solidFill>
+              </a:rPr>
+              <a:t>2</a:t>
+            </a:r>
+          </a:p>
+        </p:txBody>
+      </p:sp>
+      <p:sp>
+        <p:nvSpPr>
+          <p:cNvPr id="16" name="TextBox 15"/>
+          <p:cNvSpPr txBox="1"/>
+          <p:nvPr/>
+        </p:nvSpPr>
+        <p:spPr>
+          <a:xfrm>
+            <a:off x="960120" y="3044952"/>
+            <a:ext cx="4526280" cy="237744"/>
+          </a:xfrm>
+          <a:prstGeom prst="rect">
+            <a:avLst/>
+          </a:prstGeom>
+          <a:noFill/>
+        </p:spPr>
+        <p:txBody>
+          <a:bodyPr wrap="square">
+            <a:spAutoFit/>
+          </a:bodyPr>
+          <a:lstStyle/>
+          <a:p>
+            <a:pPr algn="l"/>
+            <a:r>
+              <a:rPr sz="1100" b="1" i="0">
+                <a:solidFill>
+                  <a:srgbClr val="1A375E"/>
+                </a:solidFill>
+              </a:rPr>
+              <a:t>Set your API key</a:t>
+            </a:r>
+          </a:p>
+        </p:txBody>
+      </p:sp>
+      <p:sp>
+        <p:nvSpPr>
+          <p:cNvPr id="17" name="TextBox 16"/>
+          <p:cNvSpPr txBox="1"/>
+          <p:nvPr/>
+        </p:nvSpPr>
+        <p:spPr>
+          <a:xfrm>
+            <a:off x="960120" y="3273552"/>
+            <a:ext cx="4526280" cy="548640"/>
+          </a:xfrm>
+          <a:prstGeom prst="rect">
+            <a:avLst/>
+          </a:prstGeom>
+          <a:noFill/>
+        </p:spPr>
+        <p:txBody>
+          <a:bodyPr wrap="square">
+            <a:spAutoFit/>
+          </a:bodyPr>
+          <a:lstStyle/>
+          <a:p>
+            <a:pPr algn="l"/>
+            <a:r>
+              <a:rPr sz="1000" b="0" i="0">
+                <a:solidFill>
+                  <a:srgbClr val="1A1A1A"/>
+                </a:solidFill>
+              </a:rPr>
+              <a:t>Get a free API key from console.anthropic.com. Set it once: export ANTHROPIC_API_KEY='sk-ant-...'</a:t>
+            </a:r>
+          </a:p>
+        </p:txBody>
+      </p:sp>
+      <p:sp>
+        <p:nvSpPr>
+          <p:cNvPr id="18" name="Rectangle 17"/>
+          <p:cNvSpPr/>
+          <p:nvPr/>
+        </p:nvSpPr>
+        <p:spPr>
+          <a:xfrm>
+            <a:off x="384048" y="3877056"/>
+            <a:ext cx="475488" cy="475488"/>
+          </a:xfrm>
+          <a:prstGeom prst="rect">
+            <a:avLst/>
+          </a:prstGeom>
+          <a:solidFill>
+            <a:srgbClr val="2E75B6"/>
+          </a:solidFill>
+          <a:ln>
+            <a:noFill/>
+          </a:ln>
+        </p:spPr>
+        <p:style>
+          <a:lnRef idx="1">
+            <a:schemeClr val="accent1"/>
+          </a:lnRef>
+          <a:fillRef idx="3">
+            <a:schemeClr val="accent1"/>
+          </a:fillRef>
+          <a:effectRef idx="2">
+            <a:schemeClr val="accent1"/>
+          </a:effectRef>
+          <a:fontRef idx="minor">
+            <a:schemeClr val="lt1"/>
+          </a:fontRef>
+        </p:style>
+        <p:txBody>
+          <a:bodyPr rtlCol="0" anchor="ctr"/>
+          <a:lstStyle/>
+          <a:p>
+            <a:pPr algn="ctr"/>
+          </a:p>
+        </p:txBody>
+      </p:sp>
+      <p:sp>
+        <p:nvSpPr>
+          <p:cNvPr id="19" name="TextBox 18"/>
+          <p:cNvSpPr txBox="1"/>
+          <p:nvPr/>
+        </p:nvSpPr>
+        <p:spPr>
+          <a:xfrm>
+            <a:off x="402336" y="3950208"/>
+            <a:ext cx="438912" cy="329184"/>
+          </a:xfrm>
+          <a:prstGeom prst="rect">
+            <a:avLst/>
+          </a:prstGeom>
+          <a:noFill/>
+        </p:spPr>
+        <p:txBody>
+          <a:bodyPr wrap="square">
+            <a:spAutoFit/>
+          </a:bodyPr>
+          <a:lstStyle/>
+          <a:p>
+            <a:pPr algn="ctr"/>
+            <a:r>
+              <a:rPr sz="1600" b="1" i="0">
+                <a:solidFill>
+                  <a:srgbClr val="FFFFFF"/>
+                </a:solidFill>
+              </a:rPr>
+              <a:t>3</a:t>
+            </a:r>
+          </a:p>
+        </p:txBody>
+      </p:sp>
+      <p:sp>
+        <p:nvSpPr>
+          <p:cNvPr id="20" name="TextBox 19"/>
+          <p:cNvSpPr txBox="1"/>
+          <p:nvPr/>
+        </p:nvSpPr>
+        <p:spPr>
+          <a:xfrm>
+            <a:off x="960120" y="3895344"/>
+            <a:ext cx="4526280" cy="237744"/>
+          </a:xfrm>
+          <a:prstGeom prst="rect">
+            <a:avLst/>
+          </a:prstGeom>
+          <a:noFill/>
+        </p:spPr>
+        <p:txBody>
+          <a:bodyPr wrap="square">
+            <a:spAutoFit/>
+          </a:bodyPr>
+          <a:lstStyle/>
+          <a:p>
+            <a:pPr algn="l"/>
+            <a:r>
+              <a:rPr sz="1100" b="1" i="0">
+                <a:solidFill>
+                  <a:srgbClr val="1A375E"/>
+                </a:solidFill>
+              </a:rPr>
+              <a:t>Launch the chat</a:t>
+            </a:r>
+          </a:p>
+        </p:txBody>
+      </p:sp>
+      <p:sp>
+        <p:nvSpPr>
           <p:cNvPr id="21" name="TextBox 20"/>
           <p:cNvSpPr txBox="1"/>
           <p:nvPr/>
         </p:nvSpPr>
         <p:spPr>
           <a:xfrm>
-            <a:off x="548640" y="4974336"/>
-            <a:ext cx="4937760" cy="274320"/>
+            <a:off x="960120" y="4123944"/>
+            <a:ext cx="4526280" cy="548640"/>
           </a:xfrm>
           <a:prstGeom prst="rect">
             <a:avLst/>
@@ -10363,26 +11496,104 @@
           <a:p>
             <a:pPr algn="l"/>
             <a:r>
-              <a:rPr sz="1200" b="1" i="0">
-                <a:solidFill>
-                  <a:srgbClr val="C55A11"/>
-                </a:solidFill>
-              </a:rPr>
-              <a:t>⚠  Genetic-Chemical Perturbagen</a:t>
-            </a:r>
-          </a:p>
-        </p:txBody>
-      </p:sp>
-      <p:sp>
-        <p:nvSpPr>
-          <p:cNvPr id="22" name="TextBox 21"/>
-          <p:cNvSpPr txBox="1"/>
-          <p:nvPr/>
-        </p:nvSpPr>
-        <p:spPr>
-          <a:xfrm>
-            <a:off x="548640" y="5285232"/>
-            <a:ext cx="5029200" cy="914400"/>
+              <a:rPr sz="1000" b="0" i="0">
+                <a:solidFill>
+                  <a:srgbClr val="1A1A1A"/>
+                </a:solidFill>
+              </a:rPr>
+              <a:t>Run:  python chat_results.py  [results_dir]
+The script loads all result files automatically and caches them for efficiency.</a:t>
+            </a:r>
+          </a:p>
+        </p:txBody>
+      </p:sp>
+      <p:sp>
+        <p:nvSpPr>
+          <p:cNvPr id="22" name="Rectangle 21"/>
+          <p:cNvSpPr/>
+          <p:nvPr/>
+        </p:nvSpPr>
+        <p:spPr>
+          <a:xfrm>
+            <a:off x="384048" y="4727448"/>
+            <a:ext cx="475488" cy="475488"/>
+          </a:xfrm>
+          <a:prstGeom prst="rect">
+            <a:avLst/>
+          </a:prstGeom>
+          <a:solidFill>
+            <a:srgbClr val="2E75B6"/>
+          </a:solidFill>
+          <a:ln>
+            <a:noFill/>
+          </a:ln>
+        </p:spPr>
+        <p:style>
+          <a:lnRef idx="1">
+            <a:schemeClr val="accent1"/>
+          </a:lnRef>
+          <a:fillRef idx="3">
+            <a:schemeClr val="accent1"/>
+          </a:fillRef>
+          <a:effectRef idx="2">
+            <a:schemeClr val="accent1"/>
+          </a:effectRef>
+          <a:fontRef idx="minor">
+            <a:schemeClr val="lt1"/>
+          </a:fontRef>
+        </p:style>
+        <p:txBody>
+          <a:bodyPr rtlCol="0" anchor="ctr"/>
+          <a:lstStyle/>
+          <a:p>
+            <a:pPr algn="ctr"/>
+          </a:p>
+        </p:txBody>
+      </p:sp>
+      <p:sp>
+        <p:nvSpPr>
+          <p:cNvPr id="23" name="TextBox 22"/>
+          <p:cNvSpPr txBox="1"/>
+          <p:nvPr/>
+        </p:nvSpPr>
+        <p:spPr>
+          <a:xfrm>
+            <a:off x="402336" y="4800600"/>
+            <a:ext cx="438912" cy="329184"/>
+          </a:xfrm>
+          <a:prstGeom prst="rect">
+            <a:avLst/>
+          </a:prstGeom>
+          <a:noFill/>
+        </p:spPr>
+        <p:txBody>
+          <a:bodyPr wrap="square">
+            <a:spAutoFit/>
+          </a:bodyPr>
+          <a:lstStyle/>
+          <a:p>
+            <a:pPr algn="ctr"/>
+            <a:r>
+              <a:rPr sz="1600" b="1" i="0">
+                <a:solidFill>
+                  <a:srgbClr val="FFFFFF"/>
+                </a:solidFill>
+              </a:rPr>
+              <a:t>4</a:t>
+            </a:r>
+          </a:p>
+        </p:txBody>
+      </p:sp>
+      <p:sp>
+        <p:nvSpPr>
+          <p:cNvPr id="24" name="TextBox 23"/>
+          <p:cNvSpPr txBox="1"/>
+          <p:nvPr/>
+        </p:nvSpPr>
+        <p:spPr>
+          <a:xfrm>
+            <a:off x="960120" y="4745736"/>
+            <a:ext cx="4526280" cy="237744"/>
           </a:xfrm>
           <a:prstGeom prst="rect">
             <a:avLst/>
@@ -10397,26 +11608,205 @@
           <a:p>
             <a:pPr algn="l"/>
             <a:r>
+              <a:rPr sz="1100" b="1" i="0">
+                <a:solidFill>
+                  <a:srgbClr val="1A375E"/>
+                </a:solidFill>
+              </a:rPr>
+              <a:t>Ask questions</a:t>
+            </a:r>
+          </a:p>
+        </p:txBody>
+      </p:sp>
+      <p:sp>
+        <p:nvSpPr>
+          <p:cNvPr id="25" name="TextBox 24"/>
+          <p:cNvSpPr txBox="1"/>
+          <p:nvPr/>
+        </p:nvSpPr>
+        <p:spPr>
+          <a:xfrm>
+            <a:off x="960120" y="4974336"/>
+            <a:ext cx="4526280" cy="548640"/>
+          </a:xfrm>
+          <a:prstGeom prst="rect">
+            <a:avLst/>
+          </a:prstGeom>
+          <a:noFill/>
+        </p:spPr>
+        <p:txBody>
+          <a:bodyPr wrap="square">
+            <a:spAutoFit/>
+          </a:bodyPr>
+          <a:lstStyle/>
+          <a:p>
+            <a:pPr algn="l"/>
+            <a:r>
               <a:rPr sz="1000" b="0" i="0">
                 <a:solidFill>
                   <a:srgbClr val="1A1A1A"/>
                 </a:solidFill>
               </a:rPr>
-              <a:t>Combines gene knockdown with drug treatment. HTSplotter supports this experiment type, but the example datasets encountered a known array-dimension mismatch in the installed version. All other three experiment types ran successfully.</a:t>
-            </a:r>
-          </a:p>
-        </p:txBody>
-      </p:sp>
-      <p:sp>
-        <p:nvSpPr>
-          <p:cNvPr id="23" name="Rectangle 22"/>
+              <a:t>Type any question about your data. The chat maintains conversation history so you can ask follow-ups.</a:t>
+            </a:r>
+          </a:p>
+        </p:txBody>
+      </p:sp>
+      <p:sp>
+        <p:nvSpPr>
+          <p:cNvPr id="26" name="Rectangle 25"/>
           <p:cNvSpPr/>
           <p:nvPr/>
         </p:nvSpPr>
         <p:spPr>
           <a:xfrm>
-            <a:off x="6172200" y="914400"/>
-            <a:ext cx="5715000" cy="5532120"/>
+            <a:off x="384048" y="5577840"/>
+            <a:ext cx="475488" cy="475488"/>
+          </a:xfrm>
+          <a:prstGeom prst="rect">
+            <a:avLst/>
+          </a:prstGeom>
+          <a:solidFill>
+            <a:srgbClr val="2E75B6"/>
+          </a:solidFill>
+          <a:ln>
+            <a:noFill/>
+          </a:ln>
+        </p:spPr>
+        <p:style>
+          <a:lnRef idx="1">
+            <a:schemeClr val="accent1"/>
+          </a:lnRef>
+          <a:fillRef idx="3">
+            <a:schemeClr val="accent1"/>
+          </a:fillRef>
+          <a:effectRef idx="2">
+            <a:schemeClr val="accent1"/>
+          </a:effectRef>
+          <a:fontRef idx="minor">
+            <a:schemeClr val="lt1"/>
+          </a:fontRef>
+        </p:style>
+        <p:txBody>
+          <a:bodyPr rtlCol="0" anchor="ctr"/>
+          <a:lstStyle/>
+          <a:p>
+            <a:pPr algn="ctr"/>
+          </a:p>
+        </p:txBody>
+      </p:sp>
+      <p:sp>
+        <p:nvSpPr>
+          <p:cNvPr id="27" name="TextBox 26"/>
+          <p:cNvSpPr txBox="1"/>
+          <p:nvPr/>
+        </p:nvSpPr>
+        <p:spPr>
+          <a:xfrm>
+            <a:off x="402336" y="5650992"/>
+            <a:ext cx="438912" cy="329184"/>
+          </a:xfrm>
+          <a:prstGeom prst="rect">
+            <a:avLst/>
+          </a:prstGeom>
+          <a:noFill/>
+        </p:spPr>
+        <p:txBody>
+          <a:bodyPr wrap="square">
+            <a:spAutoFit/>
+          </a:bodyPr>
+          <a:lstStyle/>
+          <a:p>
+            <a:pPr algn="ctr"/>
+            <a:r>
+              <a:rPr sz="1600" b="1" i="0">
+                <a:solidFill>
+                  <a:srgbClr val="FFFFFF"/>
+                </a:solidFill>
+              </a:rPr>
+              <a:t>5</a:t>
+            </a:r>
+          </a:p>
+        </p:txBody>
+      </p:sp>
+      <p:sp>
+        <p:nvSpPr>
+          <p:cNvPr id="28" name="TextBox 27"/>
+          <p:cNvSpPr txBox="1"/>
+          <p:nvPr/>
+        </p:nvSpPr>
+        <p:spPr>
+          <a:xfrm>
+            <a:off x="960120" y="5596127"/>
+            <a:ext cx="4526280" cy="237744"/>
+          </a:xfrm>
+          <a:prstGeom prst="rect">
+            <a:avLst/>
+          </a:prstGeom>
+          <a:noFill/>
+        </p:spPr>
+        <p:txBody>
+          <a:bodyPr wrap="square">
+            <a:spAutoFit/>
+          </a:bodyPr>
+          <a:lstStyle/>
+          <a:p>
+            <a:pPr algn="l"/>
+            <a:r>
+              <a:rPr sz="1100" b="1" i="0">
+                <a:solidFill>
+                  <a:srgbClr val="1A375E"/>
+                </a:solidFill>
+              </a:rPr>
+              <a:t>Exit anytime</a:t>
+            </a:r>
+          </a:p>
+        </p:txBody>
+      </p:sp>
+      <p:sp>
+        <p:nvSpPr>
+          <p:cNvPr id="29" name="TextBox 28"/>
+          <p:cNvSpPr txBox="1"/>
+          <p:nvPr/>
+        </p:nvSpPr>
+        <p:spPr>
+          <a:xfrm>
+            <a:off x="960120" y="5824727"/>
+            <a:ext cx="4526280" cy="548640"/>
+          </a:xfrm>
+          <a:prstGeom prst="rect">
+            <a:avLst/>
+          </a:prstGeom>
+          <a:noFill/>
+        </p:spPr>
+        <p:txBody>
+          <a:bodyPr wrap="square">
+            <a:spAutoFit/>
+          </a:bodyPr>
+          <a:lstStyle/>
+          <a:p>
+            <a:pPr algn="l"/>
+            <a:r>
+              <a:rPr sz="1000" b="0" i="0">
+                <a:solidFill>
+                  <a:srgbClr val="1A1A1A"/>
+                </a:solidFill>
+              </a:rPr>
+              <a:t>Type quit, exit, or press Ctrl+C to stop.</a:t>
+            </a:r>
+          </a:p>
+        </p:txBody>
+      </p:sp>
+      <p:sp>
+        <p:nvSpPr>
+          <p:cNvPr id="30" name="Rectangle 29"/>
+          <p:cNvSpPr/>
+          <p:nvPr/>
+        </p:nvSpPr>
+        <p:spPr>
+          <a:xfrm>
+            <a:off x="5943600" y="1664208"/>
+            <a:ext cx="5971032" cy="4782312"/>
           </a:xfrm>
           <a:prstGeom prst="rect">
             <a:avLst/>
@@ -10454,14 +11844,14 @@
       </p:sp>
       <p:sp>
         <p:nvSpPr>
-          <p:cNvPr id="24" name="TextBox 23"/>
-          <p:cNvSpPr txBox="1"/>
-          <p:nvPr/>
-        </p:nvSpPr>
-        <p:spPr>
-          <a:xfrm>
-            <a:off x="6327648" y="978408"/>
-            <a:ext cx="5376672" cy="347472"/>
+          <p:cNvPr id="31" name="TextBox 30"/>
+          <p:cNvSpPr txBox="1"/>
+          <p:nvPr/>
+        </p:nvSpPr>
+        <p:spPr>
+          <a:xfrm>
+            <a:off x="6126480" y="1737360"/>
+            <a:ext cx="5577840" cy="347472"/>
           </a:xfrm>
           <a:prstGeom prst="rect">
             <a:avLst/>
@@ -10476,60 +11866,26 @@
           <a:p>
             <a:pPr algn="l"/>
             <a:r>
-              <a:rPr sz="1400" b="1" i="0">
+              <a:rPr sz="1500" b="1" i="0">
                 <a:solidFill>
                   <a:srgbClr val="1A375E"/>
                 </a:solidFill>
               </a:rPr>
-              <a:t>🤖  AI-Assisted Results Chat</a:t>
-            </a:r>
-          </a:p>
-        </p:txBody>
-      </p:sp>
-      <p:sp>
-        <p:nvSpPr>
-          <p:cNvPr id="25" name="TextBox 24"/>
-          <p:cNvSpPr txBox="1"/>
-          <p:nvPr/>
-        </p:nvSpPr>
-        <p:spPr>
-          <a:xfrm>
-            <a:off x="6327648" y="1389888"/>
-            <a:ext cx="5376672" cy="658368"/>
-          </a:xfrm>
-          <a:prstGeom prst="rect">
-            <a:avLst/>
-          </a:prstGeom>
-          <a:noFill/>
-        </p:spPr>
-        <p:txBody>
-          <a:bodyPr wrap="square">
-            <a:spAutoFit/>
-          </a:bodyPr>
-          <a:lstStyle/>
-          <a:p>
-            <a:pPr algn="l"/>
-            <a:r>
-              <a:rPr sz="1100" b="0" i="0">
-                <a:solidFill>
-                  <a:srgbClr val="1A1A1A"/>
-                </a:solidFill>
-              </a:rPr>
-              <a:t>An interactive chat interface built on top of HTSplotter using the Anthropic Claude API. Load any results folder and ask plain-English questions — no bioinformatics expertise required.</a:t>
-            </a:r>
-          </a:p>
-        </p:txBody>
-      </p:sp>
-      <p:sp>
-        <p:nvSpPr>
-          <p:cNvPr id="26" name="Rectangle 25"/>
+              <a:t>Example Conversation</a:t>
+            </a:r>
+          </a:p>
+        </p:txBody>
+      </p:sp>
+      <p:sp>
+        <p:nvSpPr>
+          <p:cNvPr id="32" name="Rectangle 31"/>
           <p:cNvSpPr/>
           <p:nvPr/>
         </p:nvSpPr>
         <p:spPr>
           <a:xfrm>
-            <a:off x="6400800" y="2148840"/>
-            <a:ext cx="5257800" cy="457200"/>
+            <a:off x="6035040" y="2194560"/>
+            <a:ext cx="5577840" cy="457200"/>
           </a:xfrm>
           <a:prstGeom prst="rect">
             <a:avLst/>
@@ -10567,14 +11923,14 @@
       </p:sp>
       <p:sp>
         <p:nvSpPr>
-          <p:cNvPr id="27" name="TextBox 26"/>
-          <p:cNvSpPr txBox="1"/>
-          <p:nvPr/>
-        </p:nvSpPr>
-        <p:spPr>
-          <a:xfrm>
-            <a:off x="6492240" y="2203704"/>
-            <a:ext cx="5120640" cy="365760"/>
+          <p:cNvPr id="33" name="TextBox 32"/>
+          <p:cNvSpPr txBox="1"/>
+          <p:nvPr/>
+        </p:nvSpPr>
+        <p:spPr>
+          <a:xfrm>
+            <a:off x="6144768" y="2249424"/>
+            <a:ext cx="5413248" cy="365760"/>
           </a:xfrm>
           <a:prstGeom prst="rect">
             <a:avLst/>
@@ -10601,14 +11957,14 @@
       </p:sp>
       <p:sp>
         <p:nvSpPr>
-          <p:cNvPr id="28" name="Rectangle 27"/>
+          <p:cNvPr id="34" name="Rectangle 33"/>
           <p:cNvSpPr/>
           <p:nvPr/>
         </p:nvSpPr>
         <p:spPr>
           <a:xfrm>
-            <a:off x="6400800" y="2679192"/>
-            <a:ext cx="5257800" cy="457200"/>
+            <a:off x="6035040" y="2743200"/>
+            <a:ext cx="5577840" cy="457200"/>
           </a:xfrm>
           <a:prstGeom prst="rect">
             <a:avLst/>
@@ -10646,14 +12002,14 @@
       </p:sp>
       <p:sp>
         <p:nvSpPr>
-          <p:cNvPr id="29" name="TextBox 28"/>
-          <p:cNvSpPr txBox="1"/>
-          <p:nvPr/>
-        </p:nvSpPr>
-        <p:spPr>
-          <a:xfrm>
-            <a:off x="6492240" y="2734056"/>
-            <a:ext cx="5120640" cy="365760"/>
+          <p:cNvPr id="35" name="TextBox 34"/>
+          <p:cNvSpPr txBox="1"/>
+          <p:nvPr/>
+        </p:nvSpPr>
+        <p:spPr>
+          <a:xfrm>
+            <a:off x="6144768" y="2798064"/>
+            <a:ext cx="5413248" cy="365760"/>
           </a:xfrm>
           <a:prstGeom prst="rect">
             <a:avLst/>
@@ -10673,21 +12029,21 @@
                   <a:srgbClr val="1A1A1A"/>
                 </a:solidFill>
               </a:rPr>
-              <a:t>Claude:  Prexasertib — IC₅₀ ≈ 10 nM, ~66× more potent than MK-1775.</a:t>
-            </a:r>
-          </a:p>
-        </p:txBody>
-      </p:sp>
-      <p:sp>
-        <p:nvSpPr>
-          <p:cNvPr id="30" name="Rectangle 29"/>
+              <a:t>Claude:  Prexasertib — IC₅₀ ≈ 10 nM. That's ~27× more potent than BAY1895344 and ~66× more potent than MK-1775 in MCF7 cells.</a:t>
+            </a:r>
+          </a:p>
+        </p:txBody>
+      </p:sp>
+      <p:sp>
+        <p:nvSpPr>
+          <p:cNvPr id="36" name="Rectangle 35"/>
           <p:cNvSpPr/>
           <p:nvPr/>
         </p:nvSpPr>
         <p:spPr>
           <a:xfrm>
-            <a:off x="6400800" y="3209544"/>
-            <a:ext cx="5257800" cy="457200"/>
+            <a:off x="6035040" y="3291840"/>
+            <a:ext cx="5577840" cy="457200"/>
           </a:xfrm>
           <a:prstGeom prst="rect">
             <a:avLst/>
@@ -10725,14 +12081,14 @@
       </p:sp>
       <p:sp>
         <p:nvSpPr>
-          <p:cNvPr id="31" name="TextBox 30"/>
-          <p:cNvSpPr txBox="1"/>
-          <p:nvPr/>
-        </p:nvSpPr>
-        <p:spPr>
-          <a:xfrm>
-            <a:off x="6492240" y="3264408"/>
-            <a:ext cx="5120640" cy="365760"/>
+          <p:cNvPr id="37" name="TextBox 36"/>
+          <p:cNvSpPr txBox="1"/>
+          <p:nvPr/>
+        </p:nvSpPr>
+        <p:spPr>
+          <a:xfrm>
+            <a:off x="6144768" y="3346704"/>
+            <a:ext cx="5413248" cy="365760"/>
           </a:xfrm>
           <a:prstGeom prst="rect">
             <a:avLst/>
@@ -10759,14 +12115,14 @@
       </p:sp>
       <p:sp>
         <p:nvSpPr>
-          <p:cNvPr id="32" name="Rectangle 31"/>
+          <p:cNvPr id="38" name="Rectangle 37"/>
           <p:cNvSpPr/>
           <p:nvPr/>
         </p:nvSpPr>
         <p:spPr>
           <a:xfrm>
-            <a:off x="6400800" y="3739896"/>
-            <a:ext cx="5257800" cy="457200"/>
+            <a:off x="6035040" y="3840479"/>
+            <a:ext cx="5577840" cy="640080"/>
           </a:xfrm>
           <a:prstGeom prst="rect">
             <a:avLst/>
@@ -10804,14 +12160,14 @@
       </p:sp>
       <p:sp>
         <p:nvSpPr>
-          <p:cNvPr id="33" name="TextBox 32"/>
-          <p:cNvSpPr txBox="1"/>
-          <p:nvPr/>
-        </p:nvSpPr>
-        <p:spPr>
-          <a:xfrm>
-            <a:off x="6492240" y="3794759"/>
-            <a:ext cx="5120640" cy="365760"/>
+          <p:cNvPr id="39" name="TextBox 38"/>
+          <p:cNvSpPr txBox="1"/>
+          <p:nvPr/>
+        </p:nvSpPr>
+        <p:spPr>
+          <a:xfrm>
+            <a:off x="6144768" y="3895343"/>
+            <a:ext cx="5413248" cy="548640"/>
           </a:xfrm>
           <a:prstGeom prst="rect">
             <a:avLst/>
@@ -10831,22 +12187,21 @@
                   <a:srgbClr val="1A1A1A"/>
                 </a:solidFill>
               </a:rPr>
-              <a:t>Claude:  Yes — Bliss scores up to +0.56. Strongest at mid-range
-MK-1775 with low Prexasertib doses.</a:t>
-            </a:r>
-          </a:p>
-        </p:txBody>
-      </p:sp>
-      <p:sp>
-        <p:nvSpPr>
-          <p:cNvPr id="34" name="Rectangle 33"/>
+              <a:t>Claude:  Yes — Bliss scores reach +0.56, indicating clear synergy. The strongest effect occurs at mid-range MK-1775 (137–1,235 nM) combined with low Prexasertib doses (1.4–7.1 nM).</a:t>
+            </a:r>
+          </a:p>
+        </p:txBody>
+      </p:sp>
+      <p:sp>
+        <p:nvSpPr>
+          <p:cNvPr id="40" name="Rectangle 39"/>
           <p:cNvSpPr/>
           <p:nvPr/>
         </p:nvSpPr>
         <p:spPr>
           <a:xfrm>
-            <a:off x="6400800" y="4343400"/>
-            <a:ext cx="5257800" cy="457200"/>
+            <a:off x="6035040" y="4571999"/>
+            <a:ext cx="5577840" cy="457200"/>
           </a:xfrm>
           <a:prstGeom prst="rect">
             <a:avLst/>
@@ -10884,14 +12239,14 @@
       </p:sp>
       <p:sp>
         <p:nvSpPr>
-          <p:cNvPr id="35" name="TextBox 34"/>
-          <p:cNvSpPr txBox="1"/>
-          <p:nvPr/>
-        </p:nvSpPr>
-        <p:spPr>
-          <a:xfrm>
-            <a:off x="6492240" y="4398264"/>
-            <a:ext cx="5120640" cy="365760"/>
+          <p:cNvPr id="41" name="TextBox 40"/>
+          <p:cNvSpPr txBox="1"/>
+          <p:nvPr/>
+        </p:nvSpPr>
+        <p:spPr>
+          <a:xfrm>
+            <a:off x="6144768" y="4626863"/>
+            <a:ext cx="5413248" cy="365760"/>
           </a:xfrm>
           <a:prstGeom prst="rect">
             <a:avLst/>
@@ -10918,14 +12273,14 @@
       </p:sp>
       <p:sp>
         <p:nvSpPr>
-          <p:cNvPr id="36" name="Rectangle 35"/>
+          <p:cNvPr id="42" name="Rectangle 41"/>
           <p:cNvSpPr/>
           <p:nvPr/>
         </p:nvSpPr>
         <p:spPr>
           <a:xfrm>
-            <a:off x="6400800" y="4873752"/>
-            <a:ext cx="5257800" cy="457200"/>
+            <a:off x="6035040" y="5120639"/>
+            <a:ext cx="5577840" cy="640080"/>
           </a:xfrm>
           <a:prstGeom prst="rect">
             <a:avLst/>
@@ -10963,14 +12318,14 @@
       </p:sp>
       <p:sp>
         <p:nvSpPr>
-          <p:cNvPr id="37" name="TextBox 36"/>
-          <p:cNvSpPr txBox="1"/>
-          <p:nvPr/>
-        </p:nvSpPr>
-        <p:spPr>
-          <a:xfrm>
-            <a:off x="6492240" y="4928616"/>
-            <a:ext cx="5120640" cy="365760"/>
+          <p:cNvPr id="43" name="TextBox 42"/>
+          <p:cNvSpPr txBox="1"/>
+          <p:nvPr/>
+        </p:nvSpPr>
+        <p:spPr>
+          <a:xfrm>
+            <a:off x="6144768" y="5175503"/>
+            <a:ext cx="5413248" cy="548640"/>
           </a:xfrm>
           <a:prstGeom prst="rect">
             <a:avLst/>
@@ -10990,22 +12345,62 @@
                   <a:srgbClr val="1A1A1A"/>
                 </a:solidFill>
               </a:rPr>
-              <a:t>Claude:  The knockdown is growing faster than control — it may
-have silenced a tumour suppressor or growth brake.</a:t>
-            </a:r>
-          </a:p>
-        </p:txBody>
-      </p:sp>
-      <p:sp>
-        <p:nvSpPr>
-          <p:cNvPr id="38" name="Rectangle 37"/>
+              <a:t>Claude:  A growth rate &gt; 1 means those cells grew faster than the control. This could indicate the knockdown silenced a growth-suppressing gene, effectively releasing a brake on proliferation.</a:t>
+            </a:r>
+          </a:p>
+        </p:txBody>
+      </p:sp>
+      <p:sp>
+        <p:nvSpPr>
+          <p:cNvPr id="44" name="Rectangle 43"/>
           <p:cNvSpPr/>
           <p:nvPr/>
         </p:nvSpPr>
         <p:spPr>
           <a:xfrm>
-            <a:off x="6263640" y="5650992"/>
-            <a:ext cx="5577840" cy="566928"/>
+            <a:off x="274320" y="6473952"/>
+            <a:ext cx="11640312" cy="0"/>
+          </a:xfrm>
+          <a:prstGeom prst="rect">
+            <a:avLst/>
+          </a:prstGeom>
+          <a:noFill/>
+          <a:ln>
+            <a:noFill/>
+          </a:ln>
+        </p:spPr>
+        <p:style>
+          <a:lnRef idx="1">
+            <a:schemeClr val="accent1"/>
+          </a:lnRef>
+          <a:fillRef idx="3">
+            <a:schemeClr val="accent1"/>
+          </a:fillRef>
+          <a:effectRef idx="2">
+            <a:schemeClr val="accent1"/>
+          </a:effectRef>
+          <a:fontRef idx="minor">
+            <a:schemeClr val="lt1"/>
+          </a:fontRef>
+        </p:style>
+        <p:txBody>
+          <a:bodyPr rtlCol="0" anchor="ctr"/>
+          <a:lstStyle/>
+          <a:p>
+            <a:pPr algn="ctr"/>
+          </a:p>
+        </p:txBody>
+      </p:sp>
+      <p:sp>
+        <p:nvSpPr>
+          <p:cNvPr id="45" name="Rectangle 44"/>
+          <p:cNvSpPr/>
+          <p:nvPr/>
+        </p:nvSpPr>
+        <p:spPr>
+          <a:xfrm>
+            <a:off x="274320" y="6291072"/>
+            <a:ext cx="11640312" cy="201168"/>
           </a:xfrm>
           <a:prstGeom prst="rect">
             <a:avLst/>
@@ -11041,14 +12436,14 @@
       </p:sp>
       <p:sp>
         <p:nvSpPr>
-          <p:cNvPr id="39" name="TextBox 38"/>
-          <p:cNvSpPr txBox="1"/>
-          <p:nvPr/>
-        </p:nvSpPr>
-        <p:spPr>
-          <a:xfrm>
-            <a:off x="6400800" y="5687568"/>
-            <a:ext cx="1828800" cy="228600"/>
+          <p:cNvPr id="46" name="TextBox 45"/>
+          <p:cNvSpPr txBox="1"/>
+          <p:nvPr/>
+        </p:nvSpPr>
+        <p:spPr>
+          <a:xfrm>
+            <a:off x="365760" y="6309360"/>
+            <a:ext cx="11430000" cy="164592"/>
           </a:xfrm>
           <a:prstGeom prst="rect">
             <a:avLst/>
@@ -11063,121 +12458,19 @@
           <a:p>
             <a:pPr algn="l"/>
             <a:r>
-              <a:rPr sz="1000" b="1" i="0">
+              <a:rPr sz="900" b="1" i="0">
                 <a:solidFill>
                   <a:srgbClr val="BDD7EE"/>
                 </a:solidFill>
               </a:rPr>
-              <a:t>How to use</a:t>
-            </a:r>
-          </a:p>
-        </p:txBody>
-      </p:sp>
-      <p:sp>
-        <p:nvSpPr>
-          <p:cNvPr id="40" name="TextBox 39"/>
-          <p:cNvSpPr txBox="1"/>
-          <p:nvPr/>
-        </p:nvSpPr>
-        <p:spPr>
-          <a:xfrm>
-            <a:off x="6400800" y="5907024"/>
-            <a:ext cx="5303520" cy="201168"/>
-          </a:xfrm>
-          <a:prstGeom prst="rect">
-            <a:avLst/>
-          </a:prstGeom>
-          <a:noFill/>
-        </p:spPr>
-        <p:txBody>
-          <a:bodyPr wrap="square">
-            <a:spAutoFit/>
-          </a:bodyPr>
-          <a:lstStyle/>
-          <a:p>
-            <a:pPr algn="l"/>
-            <a:r>
-              <a:rPr sz="900" b="1" i="0">
-                <a:solidFill>
-                  <a:srgbClr val="BDD7EE"/>
-                </a:solidFill>
-              </a:rPr>
-              <a:t>export ANTHROPIC_API_KEY='sk-ant-...'</a:t>
-            </a:r>
-          </a:p>
-        </p:txBody>
-      </p:sp>
-      <p:sp>
-        <p:nvSpPr>
-          <p:cNvPr id="41" name="TextBox 40"/>
-          <p:cNvSpPr txBox="1"/>
-          <p:nvPr/>
-        </p:nvSpPr>
-        <p:spPr>
-          <a:xfrm>
-            <a:off x="6400800" y="6080760"/>
-            <a:ext cx="5303520" cy="201168"/>
-          </a:xfrm>
-          <a:prstGeom prst="rect">
-            <a:avLst/>
-          </a:prstGeom>
-          <a:noFill/>
-        </p:spPr>
-        <p:txBody>
-          <a:bodyPr wrap="square">
-            <a:spAutoFit/>
-          </a:bodyPr>
-          <a:lstStyle/>
-          <a:p>
-            <a:pPr algn="l"/>
-            <a:r>
-              <a:rPr sz="900" b="1" i="0">
-                <a:solidFill>
-                  <a:srgbClr val="BDD7EE"/>
-                </a:solidFill>
-              </a:rPr>
-              <a:t>python chat_results.py  [path/to/output_results/]</a:t>
-            </a:r>
-          </a:p>
-        </p:txBody>
-      </p:sp>
-      <p:sp>
-        <p:nvSpPr>
-          <p:cNvPr id="42" name="TextBox 41"/>
-          <p:cNvSpPr txBox="1"/>
-          <p:nvPr/>
-        </p:nvSpPr>
-        <p:spPr>
-          <a:xfrm>
-            <a:off x="8961120" y="5687568"/>
-            <a:ext cx="2651760" cy="228600"/>
-          </a:xfrm>
-          <a:prstGeom prst="rect">
-            <a:avLst/>
-          </a:prstGeom>
-          <a:noFill/>
-        </p:spPr>
-        <p:txBody>
-          <a:bodyPr wrap="square">
-            <a:spAutoFit/>
-          </a:bodyPr>
-          <a:lstStyle/>
-          <a:p>
-            <a:pPr algn="r"/>
-            <a:r>
-              <a:rPr sz="900" b="0" i="0">
-                <a:solidFill>
-                  <a:srgbClr val="88BBE0"/>
-                </a:solidFill>
-              </a:rPr>
-              <a:t>github.com/aaronwils246/HTSplotter-chat</a:t>
-            </a:r>
-          </a:p>
-        </p:txBody>
-      </p:sp>
-      <p:sp>
-        <p:nvSpPr>
-          <p:cNvPr id="43" name="Rectangle 42"/>
+              <a:t>Model: claude-opus-4-7  ·  Streaming responses  ·  Prompt caching (cost-efficient)  ·  Full conversation history  ·  Works with any HTSplotter output folder  ·  github.com/aaronwils246/HTSplotter-chat</a:t>
+            </a:r>
+          </a:p>
+        </p:txBody>
+      </p:sp>
+      <p:sp>
+        <p:nvSpPr>
+          <p:cNvPr id="47" name="Rectangle 46"/>
           <p:cNvSpPr/>
           <p:nvPr/>
         </p:nvSpPr>
@@ -11220,7 +12513,7 @@
       </p:sp>
       <p:sp>
         <p:nvSpPr>
-          <p:cNvPr id="44" name="TextBox 43"/>
+          <p:cNvPr id="48" name="TextBox 47"/>
           <p:cNvSpPr txBox="1"/>
           <p:nvPr/>
         </p:nvSpPr>
@@ -11247,14 +12540,14 @@
                   <a:srgbClr val="FFFFFF"/>
                 </a:solidFill>
               </a:rPr>
-              <a:t>Slide 5 of 5</a:t>
-            </a:r>
-          </a:p>
-        </p:txBody>
-      </p:sp>
-      <p:sp>
-        <p:nvSpPr>
-          <p:cNvPr id="45" name="TextBox 44"/>
+              <a:t>Slide 6 of 6</a:t>
+            </a:r>
+          </a:p>
+        </p:txBody>
+      </p:sp>
+      <p:sp>
+        <p:nvSpPr>
+          <p:cNvPr id="49" name="TextBox 48"/>
           <p:cNvSpPr txBox="1"/>
           <p:nvPr/>
         </p:nvSpPr>

--- a/HTSplotter_Summary.pptx
+++ b/HTSplotter_Summary.pptx
@@ -9769,7 +9769,7 @@
                   <a:srgbClr val="FFFFFF"/>
                 </a:solidFill>
               </a:rPr>
-              <a:t>1 Time Point  |  1 Control  (48 h endpoint)</a:t>
+              <a:t>1 Time Point  |  1 Control  (48 h endpoint)  —  75 perturbagens screened</a:t>
             </a:r>
           </a:p>
         </p:txBody>
@@ -9860,7 +9860,7 @@
         <p:spPr>
           <a:xfrm>
             <a:off x="457200" y="1536192"/>
-            <a:ext cx="11338560" cy="292608"/>
+            <a:ext cx="11247120" cy="292608"/>
           </a:xfrm>
           <a:prstGeom prst="rect">
             <a:avLst/>
@@ -9880,7 +9880,7 @@
                   <a:srgbClr val="1A375E"/>
                 </a:solidFill>
               </a:rPr>
-              <a:t>Gene perturbagens tested at 40 ng/well in MCF7 cells (12K/well seeding density)</a:t>
+              <a:t>Gene perturbagens tested at 40 ng/well in MCF7 cells (12K/well). Normalised confluency relative to non-targeting control (100%). Note: gene names are anonymized in the HTSplotter public example dataset.</a:t>
             </a:r>
           </a:p>
         </p:txBody>
@@ -9894,7 +9894,7 @@
         <p:spPr>
           <a:xfrm>
             <a:off x="457200" y="1883664"/>
-            <a:ext cx="7772400" cy="1600200"/>
+            <a:ext cx="5029200" cy="1627632"/>
           </a:xfrm>
           <a:prstGeom prst="rect">
             <a:avLst/>
@@ -9918,7 +9918,7 @@
                   <a:srgbClr val="1A1A1A"/>
                 </a:solidFill>
               </a:rPr>
-              <a:t>•  Multiple siRNA/shRNA constructs screened in a single endpoint confluency assay</a:t>
+              <a:t>•  75 perturbagens screened in a single endpoint confluency assay</a:t>
             </a:r>
           </a:p>
           <a:p>
@@ -9933,7 +9933,7 @@
                   <a:srgbClr val="1A1A1A"/>
                 </a:solidFill>
               </a:rPr>
-              <a:t>•  Normalised confluency (%) reported per perturbagen relative to non-targeting control (set to 100%)</a:t>
+              <a:t>•  Values above 100% = enhanced growth; below 100% = growth inhibition</a:t>
             </a:r>
           </a:p>
           <a:p>
@@ -9948,9 +9948,1952 @@
                   <a:srgbClr val="1A1A1A"/>
                 </a:solidFill>
               </a:rPr>
-              <a:t>•  Values above 100% indicate enhanced growth; below 100% indicate growth inhibition</a:t>
-            </a:r>
-          </a:p>
+              <a:t>•  Identifies candidate genes whose knockdown significantly alters cell proliferation</a:t>
+            </a:r>
+          </a:p>
+        </p:txBody>
+      </p:sp>
+      <p:sp>
+        <p:nvSpPr>
+          <p:cNvPr id="13" name="TextBox 12"/>
+          <p:cNvSpPr txBox="1"/>
+          <p:nvPr/>
+        </p:nvSpPr>
+        <p:spPr>
+          <a:xfrm>
+            <a:off x="5669280" y="1883664"/>
+            <a:ext cx="5989320" cy="256032"/>
+          </a:xfrm>
+          <a:prstGeom prst="rect">
+            <a:avLst/>
+          </a:prstGeom>
+          <a:noFill/>
+        </p:spPr>
+        <p:txBody>
+          <a:bodyPr wrap="square">
+            <a:spAutoFit/>
+          </a:bodyPr>
+          <a:lstStyle/>
+          <a:p>
+            <a:pPr algn="l"/>
+            <a:r>
+              <a:rPr sz="1100" b="1" i="0">
+                <a:solidFill>
+                  <a:srgbClr val="1A375E"/>
+                </a:solidFill>
+              </a:rPr>
+              <a:t>Notable Hits  (48 h confluency vs. control)</a:t>
+            </a:r>
+          </a:p>
+        </p:txBody>
+      </p:sp>
+      <p:sp>
+        <p:nvSpPr>
+          <p:cNvPr id="14" name="Rectangle 13"/>
+          <p:cNvSpPr/>
+          <p:nvPr/>
+        </p:nvSpPr>
+        <p:spPr>
+          <a:xfrm>
+            <a:off x="5669280" y="2176272"/>
+            <a:ext cx="1463040" cy="274320"/>
+          </a:xfrm>
+          <a:prstGeom prst="rect">
+            <a:avLst/>
+          </a:prstGeom>
+          <a:solidFill>
+            <a:srgbClr val="1A375E"/>
+          </a:solidFill>
+          <a:ln>
+            <a:noFill/>
+          </a:ln>
+        </p:spPr>
+        <p:style>
+          <a:lnRef idx="1">
+            <a:schemeClr val="accent1"/>
+          </a:lnRef>
+          <a:fillRef idx="3">
+            <a:schemeClr val="accent1"/>
+          </a:fillRef>
+          <a:effectRef idx="2">
+            <a:schemeClr val="accent1"/>
+          </a:effectRef>
+          <a:fontRef idx="minor">
+            <a:schemeClr val="lt1"/>
+          </a:fontRef>
+        </p:style>
+        <p:txBody>
+          <a:bodyPr rtlCol="0" anchor="ctr"/>
+          <a:lstStyle/>
+          <a:p>
+            <a:pPr algn="ctr"/>
+          </a:p>
+        </p:txBody>
+      </p:sp>
+      <p:sp>
+        <p:nvSpPr>
+          <p:cNvPr id="15" name="TextBox 14"/>
+          <p:cNvSpPr txBox="1"/>
+          <p:nvPr/>
+        </p:nvSpPr>
+        <p:spPr>
+          <a:xfrm>
+            <a:off x="5715000" y="2203704"/>
+            <a:ext cx="1389888" cy="219456"/>
+          </a:xfrm>
+          <a:prstGeom prst="rect">
+            <a:avLst/>
+          </a:prstGeom>
+          <a:noFill/>
+        </p:spPr>
+        <p:txBody>
+          <a:bodyPr wrap="square">
+            <a:spAutoFit/>
+          </a:bodyPr>
+          <a:lstStyle/>
+          <a:p>
+            <a:pPr algn="ctr"/>
+            <a:r>
+              <a:rPr sz="1000" b="1" i="0">
+                <a:solidFill>
+                  <a:srgbClr val="FFFFFF"/>
+                </a:solidFill>
+              </a:rPr>
+              <a:t>Target</a:t>
+            </a:r>
+          </a:p>
+        </p:txBody>
+      </p:sp>
+      <p:sp>
+        <p:nvSpPr>
+          <p:cNvPr id="16" name="Rectangle 15"/>
+          <p:cNvSpPr/>
+          <p:nvPr/>
+        </p:nvSpPr>
+        <p:spPr>
+          <a:xfrm>
+            <a:off x="7150608" y="2176272"/>
+            <a:ext cx="1554480" cy="274320"/>
+          </a:xfrm>
+          <a:prstGeom prst="rect">
+            <a:avLst/>
+          </a:prstGeom>
+          <a:solidFill>
+            <a:srgbClr val="1A375E"/>
+          </a:solidFill>
+          <a:ln>
+            <a:noFill/>
+          </a:ln>
+        </p:spPr>
+        <p:style>
+          <a:lnRef idx="1">
+            <a:schemeClr val="accent1"/>
+          </a:lnRef>
+          <a:fillRef idx="3">
+            <a:schemeClr val="accent1"/>
+          </a:fillRef>
+          <a:effectRef idx="2">
+            <a:schemeClr val="accent1"/>
+          </a:effectRef>
+          <a:fontRef idx="minor">
+            <a:schemeClr val="lt1"/>
+          </a:fontRef>
+        </p:style>
+        <p:txBody>
+          <a:bodyPr rtlCol="0" anchor="ctr"/>
+          <a:lstStyle/>
+          <a:p>
+            <a:pPr algn="ctr"/>
+          </a:p>
+        </p:txBody>
+      </p:sp>
+      <p:sp>
+        <p:nvSpPr>
+          <p:cNvPr id="17" name="TextBox 16"/>
+          <p:cNvSpPr txBox="1"/>
+          <p:nvPr/>
+        </p:nvSpPr>
+        <p:spPr>
+          <a:xfrm>
+            <a:off x="7196328" y="2203704"/>
+            <a:ext cx="1481328" cy="219456"/>
+          </a:xfrm>
+          <a:prstGeom prst="rect">
+            <a:avLst/>
+          </a:prstGeom>
+          <a:noFill/>
+        </p:spPr>
+        <p:txBody>
+          <a:bodyPr wrap="square">
+            <a:spAutoFit/>
+          </a:bodyPr>
+          <a:lstStyle/>
+          <a:p>
+            <a:pPr algn="ctr"/>
+            <a:r>
+              <a:rPr sz="1000" b="1" i="0">
+                <a:solidFill>
+                  <a:srgbClr val="FFFFFF"/>
+                </a:solidFill>
+              </a:rPr>
+              <a:t>Confluency %</a:t>
+            </a:r>
+          </a:p>
+        </p:txBody>
+      </p:sp>
+      <p:sp>
+        <p:nvSpPr>
+          <p:cNvPr id="18" name="Rectangle 17"/>
+          <p:cNvSpPr/>
+          <p:nvPr/>
+        </p:nvSpPr>
+        <p:spPr>
+          <a:xfrm>
+            <a:off x="8723376" y="2176272"/>
+            <a:ext cx="2606040" cy="274320"/>
+          </a:xfrm>
+          <a:prstGeom prst="rect">
+            <a:avLst/>
+          </a:prstGeom>
+          <a:solidFill>
+            <a:srgbClr val="1A375E"/>
+          </a:solidFill>
+          <a:ln>
+            <a:noFill/>
+          </a:ln>
+        </p:spPr>
+        <p:style>
+          <a:lnRef idx="1">
+            <a:schemeClr val="accent1"/>
+          </a:lnRef>
+          <a:fillRef idx="3">
+            <a:schemeClr val="accent1"/>
+          </a:fillRef>
+          <a:effectRef idx="2">
+            <a:schemeClr val="accent1"/>
+          </a:effectRef>
+          <a:fontRef idx="minor">
+            <a:schemeClr val="lt1"/>
+          </a:fontRef>
+        </p:style>
+        <p:txBody>
+          <a:bodyPr rtlCol="0" anchor="ctr"/>
+          <a:lstStyle/>
+          <a:p>
+            <a:pPr algn="ctr"/>
+          </a:p>
+        </p:txBody>
+      </p:sp>
+      <p:sp>
+        <p:nvSpPr>
+          <p:cNvPr id="19" name="TextBox 18"/>
+          <p:cNvSpPr txBox="1"/>
+          <p:nvPr/>
+        </p:nvSpPr>
+        <p:spPr>
+          <a:xfrm>
+            <a:off x="8769096" y="2203704"/>
+            <a:ext cx="2532888" cy="219456"/>
+          </a:xfrm>
+          <a:prstGeom prst="rect">
+            <a:avLst/>
+          </a:prstGeom>
+          <a:noFill/>
+        </p:spPr>
+        <p:txBody>
+          <a:bodyPr wrap="square">
+            <a:spAutoFit/>
+          </a:bodyPr>
+          <a:lstStyle/>
+          <a:p>
+            <a:pPr algn="ctr"/>
+            <a:r>
+              <a:rPr sz="1000" b="1" i="0">
+                <a:solidFill>
+                  <a:srgbClr val="FFFFFF"/>
+                </a:solidFill>
+              </a:rPr>
+              <a:t>Effect</a:t>
+            </a:r>
+          </a:p>
+        </p:txBody>
+      </p:sp>
+      <p:sp>
+        <p:nvSpPr>
+          <p:cNvPr id="20" name="Rectangle 19"/>
+          <p:cNvSpPr/>
+          <p:nvPr/>
+        </p:nvSpPr>
+        <p:spPr>
+          <a:xfrm>
+            <a:off x="5669280" y="2450592"/>
+            <a:ext cx="1463040" cy="292608"/>
+          </a:xfrm>
+          <a:prstGeom prst="rect">
+            <a:avLst/>
+          </a:prstGeom>
+          <a:solidFill>
+            <a:srgbClr val="E2EFDA"/>
+          </a:solidFill>
+          <a:ln w="5080">
+            <a:solidFill>
+              <a:srgbClr val="CCCCCC"/>
+            </a:solidFill>
+          </a:ln>
+        </p:spPr>
+        <p:style>
+          <a:lnRef idx="1">
+            <a:schemeClr val="accent1"/>
+          </a:lnRef>
+          <a:fillRef idx="3">
+            <a:schemeClr val="accent1"/>
+          </a:fillRef>
+          <a:effectRef idx="2">
+            <a:schemeClr val="accent1"/>
+          </a:effectRef>
+          <a:fontRef idx="minor">
+            <a:schemeClr val="lt1"/>
+          </a:fontRef>
+        </p:style>
+        <p:txBody>
+          <a:bodyPr rtlCol="0" anchor="ctr"/>
+          <a:lstStyle/>
+          <a:p>
+            <a:pPr algn="ctr"/>
+          </a:p>
+        </p:txBody>
+      </p:sp>
+      <p:sp>
+        <p:nvSpPr>
+          <p:cNvPr id="21" name="TextBox 20"/>
+          <p:cNvSpPr txBox="1"/>
+          <p:nvPr/>
+        </p:nvSpPr>
+        <p:spPr>
+          <a:xfrm>
+            <a:off x="5715000" y="2496312"/>
+            <a:ext cx="1389888" cy="219456"/>
+          </a:xfrm>
+          <a:prstGeom prst="rect">
+            <a:avLst/>
+          </a:prstGeom>
+          <a:noFill/>
+        </p:spPr>
+        <p:txBody>
+          <a:bodyPr wrap="square">
+            <a:spAutoFit/>
+          </a:bodyPr>
+          <a:lstStyle/>
+          <a:p>
+            <a:pPr algn="l"/>
+            <a:r>
+              <a:rPr sz="1000" b="1" i="0">
+                <a:solidFill>
+                  <a:srgbClr val="379637"/>
+                </a:solidFill>
+              </a:rPr>
+              <a:t>GeneBK</a:t>
+            </a:r>
+          </a:p>
+        </p:txBody>
+      </p:sp>
+      <p:sp>
+        <p:nvSpPr>
+          <p:cNvPr id="22" name="Rectangle 21"/>
+          <p:cNvSpPr/>
+          <p:nvPr/>
+        </p:nvSpPr>
+        <p:spPr>
+          <a:xfrm>
+            <a:off x="7150608" y="2450592"/>
+            <a:ext cx="1554480" cy="292608"/>
+          </a:xfrm>
+          <a:prstGeom prst="rect">
+            <a:avLst/>
+          </a:prstGeom>
+          <a:solidFill>
+            <a:srgbClr val="E2EFDA"/>
+          </a:solidFill>
+          <a:ln w="5080">
+            <a:solidFill>
+              <a:srgbClr val="CCCCCC"/>
+            </a:solidFill>
+          </a:ln>
+        </p:spPr>
+        <p:style>
+          <a:lnRef idx="1">
+            <a:schemeClr val="accent1"/>
+          </a:lnRef>
+          <a:fillRef idx="3">
+            <a:schemeClr val="accent1"/>
+          </a:fillRef>
+          <a:effectRef idx="2">
+            <a:schemeClr val="accent1"/>
+          </a:effectRef>
+          <a:fontRef idx="minor">
+            <a:schemeClr val="lt1"/>
+          </a:fontRef>
+        </p:style>
+        <p:txBody>
+          <a:bodyPr rtlCol="0" anchor="ctr"/>
+          <a:lstStyle/>
+          <a:p>
+            <a:pPr algn="ctr"/>
+          </a:p>
+        </p:txBody>
+      </p:sp>
+      <p:sp>
+        <p:nvSpPr>
+          <p:cNvPr id="23" name="TextBox 22"/>
+          <p:cNvSpPr txBox="1"/>
+          <p:nvPr/>
+        </p:nvSpPr>
+        <p:spPr>
+          <a:xfrm>
+            <a:off x="7196328" y="2496312"/>
+            <a:ext cx="1481328" cy="219456"/>
+          </a:xfrm>
+          <a:prstGeom prst="rect">
+            <a:avLst/>
+          </a:prstGeom>
+          <a:noFill/>
+        </p:spPr>
+        <p:txBody>
+          <a:bodyPr wrap="square">
+            <a:spAutoFit/>
+          </a:bodyPr>
+          <a:lstStyle/>
+          <a:p>
+            <a:pPr algn="ctr"/>
+            <a:r>
+              <a:rPr sz="1000" b="0" i="0">
+                <a:solidFill>
+                  <a:srgbClr val="379637"/>
+                </a:solidFill>
+              </a:rPr>
+              <a:t>65.2%</a:t>
+            </a:r>
+          </a:p>
+        </p:txBody>
+      </p:sp>
+      <p:sp>
+        <p:nvSpPr>
+          <p:cNvPr id="24" name="Rectangle 23"/>
+          <p:cNvSpPr/>
+          <p:nvPr/>
+        </p:nvSpPr>
+        <p:spPr>
+          <a:xfrm>
+            <a:off x="8723376" y="2450592"/>
+            <a:ext cx="2606040" cy="292608"/>
+          </a:xfrm>
+          <a:prstGeom prst="rect">
+            <a:avLst/>
+          </a:prstGeom>
+          <a:solidFill>
+            <a:srgbClr val="E2EFDA"/>
+          </a:solidFill>
+          <a:ln w="5080">
+            <a:solidFill>
+              <a:srgbClr val="CCCCCC"/>
+            </a:solidFill>
+          </a:ln>
+        </p:spPr>
+        <p:style>
+          <a:lnRef idx="1">
+            <a:schemeClr val="accent1"/>
+          </a:lnRef>
+          <a:fillRef idx="3">
+            <a:schemeClr val="accent1"/>
+          </a:fillRef>
+          <a:effectRef idx="2">
+            <a:schemeClr val="accent1"/>
+          </a:effectRef>
+          <a:fontRef idx="minor">
+            <a:schemeClr val="lt1"/>
+          </a:fontRef>
+        </p:style>
+        <p:txBody>
+          <a:bodyPr rtlCol="0" anchor="ctr"/>
+          <a:lstStyle/>
+          <a:p>
+            <a:pPr algn="ctr"/>
+          </a:p>
+        </p:txBody>
+      </p:sp>
+      <p:sp>
+        <p:nvSpPr>
+          <p:cNvPr id="25" name="TextBox 24"/>
+          <p:cNvSpPr txBox="1"/>
+          <p:nvPr/>
+        </p:nvSpPr>
+        <p:spPr>
+          <a:xfrm>
+            <a:off x="8769096" y="2496312"/>
+            <a:ext cx="2532888" cy="219456"/>
+          </a:xfrm>
+          <a:prstGeom prst="rect">
+            <a:avLst/>
+          </a:prstGeom>
+          <a:noFill/>
+        </p:spPr>
+        <p:txBody>
+          <a:bodyPr wrap="square">
+            <a:spAutoFit/>
+          </a:bodyPr>
+          <a:lstStyle/>
+          <a:p>
+            <a:pPr algn="l"/>
+            <a:r>
+              <a:rPr sz="1000" b="0" i="0">
+                <a:solidFill>
+                  <a:srgbClr val="1A1A1A"/>
+                </a:solidFill>
+              </a:rPr>
+              <a:t>↓ Growth inhibition</a:t>
+            </a:r>
+          </a:p>
+        </p:txBody>
+      </p:sp>
+      <p:sp>
+        <p:nvSpPr>
+          <p:cNvPr id="26" name="Rectangle 25"/>
+          <p:cNvSpPr/>
+          <p:nvPr/>
+        </p:nvSpPr>
+        <p:spPr>
+          <a:xfrm>
+            <a:off x="5669280" y="2761488"/>
+            <a:ext cx="1463040" cy="292608"/>
+          </a:xfrm>
+          <a:prstGeom prst="rect">
+            <a:avLst/>
+          </a:prstGeom>
+          <a:solidFill>
+            <a:srgbClr val="FFFFFF"/>
+          </a:solidFill>
+          <a:ln w="5080">
+            <a:solidFill>
+              <a:srgbClr val="CCCCCC"/>
+            </a:solidFill>
+          </a:ln>
+        </p:spPr>
+        <p:style>
+          <a:lnRef idx="1">
+            <a:schemeClr val="accent1"/>
+          </a:lnRef>
+          <a:fillRef idx="3">
+            <a:schemeClr val="accent1"/>
+          </a:fillRef>
+          <a:effectRef idx="2">
+            <a:schemeClr val="accent1"/>
+          </a:effectRef>
+          <a:fontRef idx="minor">
+            <a:schemeClr val="lt1"/>
+          </a:fontRef>
+        </p:style>
+        <p:txBody>
+          <a:bodyPr rtlCol="0" anchor="ctr"/>
+          <a:lstStyle/>
+          <a:p>
+            <a:pPr algn="ctr"/>
+          </a:p>
+        </p:txBody>
+      </p:sp>
+      <p:sp>
+        <p:nvSpPr>
+          <p:cNvPr id="27" name="TextBox 26"/>
+          <p:cNvSpPr txBox="1"/>
+          <p:nvPr/>
+        </p:nvSpPr>
+        <p:spPr>
+          <a:xfrm>
+            <a:off x="5715000" y="2807208"/>
+            <a:ext cx="1389888" cy="219456"/>
+          </a:xfrm>
+          <a:prstGeom prst="rect">
+            <a:avLst/>
+          </a:prstGeom>
+          <a:noFill/>
+        </p:spPr>
+        <p:txBody>
+          <a:bodyPr wrap="square">
+            <a:spAutoFit/>
+          </a:bodyPr>
+          <a:lstStyle/>
+          <a:p>
+            <a:pPr algn="l"/>
+            <a:r>
+              <a:rPr sz="1000" b="1" i="0">
+                <a:solidFill>
+                  <a:srgbClr val="379637"/>
+                </a:solidFill>
+              </a:rPr>
+              <a:t>GeneBI</a:t>
+            </a:r>
+          </a:p>
+        </p:txBody>
+      </p:sp>
+      <p:sp>
+        <p:nvSpPr>
+          <p:cNvPr id="28" name="Rectangle 27"/>
+          <p:cNvSpPr/>
+          <p:nvPr/>
+        </p:nvSpPr>
+        <p:spPr>
+          <a:xfrm>
+            <a:off x="7150608" y="2761488"/>
+            <a:ext cx="1554480" cy="292608"/>
+          </a:xfrm>
+          <a:prstGeom prst="rect">
+            <a:avLst/>
+          </a:prstGeom>
+          <a:solidFill>
+            <a:srgbClr val="FFFFFF"/>
+          </a:solidFill>
+          <a:ln w="5080">
+            <a:solidFill>
+              <a:srgbClr val="CCCCCC"/>
+            </a:solidFill>
+          </a:ln>
+        </p:spPr>
+        <p:style>
+          <a:lnRef idx="1">
+            <a:schemeClr val="accent1"/>
+          </a:lnRef>
+          <a:fillRef idx="3">
+            <a:schemeClr val="accent1"/>
+          </a:fillRef>
+          <a:effectRef idx="2">
+            <a:schemeClr val="accent1"/>
+          </a:effectRef>
+          <a:fontRef idx="minor">
+            <a:schemeClr val="lt1"/>
+          </a:fontRef>
+        </p:style>
+        <p:txBody>
+          <a:bodyPr rtlCol="0" anchor="ctr"/>
+          <a:lstStyle/>
+          <a:p>
+            <a:pPr algn="ctr"/>
+          </a:p>
+        </p:txBody>
+      </p:sp>
+      <p:sp>
+        <p:nvSpPr>
+          <p:cNvPr id="29" name="TextBox 28"/>
+          <p:cNvSpPr txBox="1"/>
+          <p:nvPr/>
+        </p:nvSpPr>
+        <p:spPr>
+          <a:xfrm>
+            <a:off x="7196328" y="2807208"/>
+            <a:ext cx="1481328" cy="219456"/>
+          </a:xfrm>
+          <a:prstGeom prst="rect">
+            <a:avLst/>
+          </a:prstGeom>
+          <a:noFill/>
+        </p:spPr>
+        <p:txBody>
+          <a:bodyPr wrap="square">
+            <a:spAutoFit/>
+          </a:bodyPr>
+          <a:lstStyle/>
+          <a:p>
+            <a:pPr algn="ctr"/>
+            <a:r>
+              <a:rPr sz="1000" b="0" i="0">
+                <a:solidFill>
+                  <a:srgbClr val="379637"/>
+                </a:solidFill>
+              </a:rPr>
+              <a:t>79.1%</a:t>
+            </a:r>
+          </a:p>
+        </p:txBody>
+      </p:sp>
+      <p:sp>
+        <p:nvSpPr>
+          <p:cNvPr id="30" name="Rectangle 29"/>
+          <p:cNvSpPr/>
+          <p:nvPr/>
+        </p:nvSpPr>
+        <p:spPr>
+          <a:xfrm>
+            <a:off x="8723376" y="2761488"/>
+            <a:ext cx="2606040" cy="292608"/>
+          </a:xfrm>
+          <a:prstGeom prst="rect">
+            <a:avLst/>
+          </a:prstGeom>
+          <a:solidFill>
+            <a:srgbClr val="FFFFFF"/>
+          </a:solidFill>
+          <a:ln w="5080">
+            <a:solidFill>
+              <a:srgbClr val="CCCCCC"/>
+            </a:solidFill>
+          </a:ln>
+        </p:spPr>
+        <p:style>
+          <a:lnRef idx="1">
+            <a:schemeClr val="accent1"/>
+          </a:lnRef>
+          <a:fillRef idx="3">
+            <a:schemeClr val="accent1"/>
+          </a:fillRef>
+          <a:effectRef idx="2">
+            <a:schemeClr val="accent1"/>
+          </a:effectRef>
+          <a:fontRef idx="minor">
+            <a:schemeClr val="lt1"/>
+          </a:fontRef>
+        </p:style>
+        <p:txBody>
+          <a:bodyPr rtlCol="0" anchor="ctr"/>
+          <a:lstStyle/>
+          <a:p>
+            <a:pPr algn="ctr"/>
+          </a:p>
+        </p:txBody>
+      </p:sp>
+      <p:sp>
+        <p:nvSpPr>
+          <p:cNvPr id="31" name="TextBox 30"/>
+          <p:cNvSpPr txBox="1"/>
+          <p:nvPr/>
+        </p:nvSpPr>
+        <p:spPr>
+          <a:xfrm>
+            <a:off x="8769096" y="2807208"/>
+            <a:ext cx="2532888" cy="219456"/>
+          </a:xfrm>
+          <a:prstGeom prst="rect">
+            <a:avLst/>
+          </a:prstGeom>
+          <a:noFill/>
+        </p:spPr>
+        <p:txBody>
+          <a:bodyPr wrap="square">
+            <a:spAutoFit/>
+          </a:bodyPr>
+          <a:lstStyle/>
+          <a:p>
+            <a:pPr algn="l"/>
+            <a:r>
+              <a:rPr sz="1000" b="0" i="0">
+                <a:solidFill>
+                  <a:srgbClr val="1A1A1A"/>
+                </a:solidFill>
+              </a:rPr>
+              <a:t>↓ Growth inhibition</a:t>
+            </a:r>
+          </a:p>
+        </p:txBody>
+      </p:sp>
+      <p:sp>
+        <p:nvSpPr>
+          <p:cNvPr id="32" name="Rectangle 31"/>
+          <p:cNvSpPr/>
+          <p:nvPr/>
+        </p:nvSpPr>
+        <p:spPr>
+          <a:xfrm>
+            <a:off x="5669280" y="3072384"/>
+            <a:ext cx="1463040" cy="292608"/>
+          </a:xfrm>
+          <a:prstGeom prst="rect">
+            <a:avLst/>
+          </a:prstGeom>
+          <a:solidFill>
+            <a:srgbClr val="E2EFDA"/>
+          </a:solidFill>
+          <a:ln w="5080">
+            <a:solidFill>
+              <a:srgbClr val="CCCCCC"/>
+            </a:solidFill>
+          </a:ln>
+        </p:spPr>
+        <p:style>
+          <a:lnRef idx="1">
+            <a:schemeClr val="accent1"/>
+          </a:lnRef>
+          <a:fillRef idx="3">
+            <a:schemeClr val="accent1"/>
+          </a:fillRef>
+          <a:effectRef idx="2">
+            <a:schemeClr val="accent1"/>
+          </a:effectRef>
+          <a:fontRef idx="minor">
+            <a:schemeClr val="lt1"/>
+          </a:fontRef>
+        </p:style>
+        <p:txBody>
+          <a:bodyPr rtlCol="0" anchor="ctr"/>
+          <a:lstStyle/>
+          <a:p>
+            <a:pPr algn="ctr"/>
+          </a:p>
+        </p:txBody>
+      </p:sp>
+      <p:sp>
+        <p:nvSpPr>
+          <p:cNvPr id="33" name="TextBox 32"/>
+          <p:cNvSpPr txBox="1"/>
+          <p:nvPr/>
+        </p:nvSpPr>
+        <p:spPr>
+          <a:xfrm>
+            <a:off x="5715000" y="3118104"/>
+            <a:ext cx="1389888" cy="219456"/>
+          </a:xfrm>
+          <a:prstGeom prst="rect">
+            <a:avLst/>
+          </a:prstGeom>
+          <a:noFill/>
+        </p:spPr>
+        <p:txBody>
+          <a:bodyPr wrap="square">
+            <a:spAutoFit/>
+          </a:bodyPr>
+          <a:lstStyle/>
+          <a:p>
+            <a:pPr algn="l"/>
+            <a:r>
+              <a:rPr sz="1000" b="1" i="0">
+                <a:solidFill>
+                  <a:srgbClr val="379637"/>
+                </a:solidFill>
+              </a:rPr>
+              <a:t>GeneAG</a:t>
+            </a:r>
+          </a:p>
+        </p:txBody>
+      </p:sp>
+      <p:sp>
+        <p:nvSpPr>
+          <p:cNvPr id="34" name="Rectangle 33"/>
+          <p:cNvSpPr/>
+          <p:nvPr/>
+        </p:nvSpPr>
+        <p:spPr>
+          <a:xfrm>
+            <a:off x="7150608" y="3072384"/>
+            <a:ext cx="1554480" cy="292608"/>
+          </a:xfrm>
+          <a:prstGeom prst="rect">
+            <a:avLst/>
+          </a:prstGeom>
+          <a:solidFill>
+            <a:srgbClr val="E2EFDA"/>
+          </a:solidFill>
+          <a:ln w="5080">
+            <a:solidFill>
+              <a:srgbClr val="CCCCCC"/>
+            </a:solidFill>
+          </a:ln>
+        </p:spPr>
+        <p:style>
+          <a:lnRef idx="1">
+            <a:schemeClr val="accent1"/>
+          </a:lnRef>
+          <a:fillRef idx="3">
+            <a:schemeClr val="accent1"/>
+          </a:fillRef>
+          <a:effectRef idx="2">
+            <a:schemeClr val="accent1"/>
+          </a:effectRef>
+          <a:fontRef idx="minor">
+            <a:schemeClr val="lt1"/>
+          </a:fontRef>
+        </p:style>
+        <p:txBody>
+          <a:bodyPr rtlCol="0" anchor="ctr"/>
+          <a:lstStyle/>
+          <a:p>
+            <a:pPr algn="ctr"/>
+          </a:p>
+        </p:txBody>
+      </p:sp>
+      <p:sp>
+        <p:nvSpPr>
+          <p:cNvPr id="35" name="TextBox 34"/>
+          <p:cNvSpPr txBox="1"/>
+          <p:nvPr/>
+        </p:nvSpPr>
+        <p:spPr>
+          <a:xfrm>
+            <a:off x="7196328" y="3118104"/>
+            <a:ext cx="1481328" cy="219456"/>
+          </a:xfrm>
+          <a:prstGeom prst="rect">
+            <a:avLst/>
+          </a:prstGeom>
+          <a:noFill/>
+        </p:spPr>
+        <p:txBody>
+          <a:bodyPr wrap="square">
+            <a:spAutoFit/>
+          </a:bodyPr>
+          <a:lstStyle/>
+          <a:p>
+            <a:pPr algn="ctr"/>
+            <a:r>
+              <a:rPr sz="1000" b="0" i="0">
+                <a:solidFill>
+                  <a:srgbClr val="379637"/>
+                </a:solidFill>
+              </a:rPr>
+              <a:t>79.9%</a:t>
+            </a:r>
+          </a:p>
+        </p:txBody>
+      </p:sp>
+      <p:sp>
+        <p:nvSpPr>
+          <p:cNvPr id="36" name="Rectangle 35"/>
+          <p:cNvSpPr/>
+          <p:nvPr/>
+        </p:nvSpPr>
+        <p:spPr>
+          <a:xfrm>
+            <a:off x="8723376" y="3072384"/>
+            <a:ext cx="2606040" cy="292608"/>
+          </a:xfrm>
+          <a:prstGeom prst="rect">
+            <a:avLst/>
+          </a:prstGeom>
+          <a:solidFill>
+            <a:srgbClr val="E2EFDA"/>
+          </a:solidFill>
+          <a:ln w="5080">
+            <a:solidFill>
+              <a:srgbClr val="CCCCCC"/>
+            </a:solidFill>
+          </a:ln>
+        </p:spPr>
+        <p:style>
+          <a:lnRef idx="1">
+            <a:schemeClr val="accent1"/>
+          </a:lnRef>
+          <a:fillRef idx="3">
+            <a:schemeClr val="accent1"/>
+          </a:fillRef>
+          <a:effectRef idx="2">
+            <a:schemeClr val="accent1"/>
+          </a:effectRef>
+          <a:fontRef idx="minor">
+            <a:schemeClr val="lt1"/>
+          </a:fontRef>
+        </p:style>
+        <p:txBody>
+          <a:bodyPr rtlCol="0" anchor="ctr"/>
+          <a:lstStyle/>
+          <a:p>
+            <a:pPr algn="ctr"/>
+          </a:p>
+        </p:txBody>
+      </p:sp>
+      <p:sp>
+        <p:nvSpPr>
+          <p:cNvPr id="37" name="TextBox 36"/>
+          <p:cNvSpPr txBox="1"/>
+          <p:nvPr/>
+        </p:nvSpPr>
+        <p:spPr>
+          <a:xfrm>
+            <a:off x="8769096" y="3118104"/>
+            <a:ext cx="2532888" cy="219456"/>
+          </a:xfrm>
+          <a:prstGeom prst="rect">
+            <a:avLst/>
+          </a:prstGeom>
+          <a:noFill/>
+        </p:spPr>
+        <p:txBody>
+          <a:bodyPr wrap="square">
+            <a:spAutoFit/>
+          </a:bodyPr>
+          <a:lstStyle/>
+          <a:p>
+            <a:pPr algn="l"/>
+            <a:r>
+              <a:rPr sz="1000" b="0" i="0">
+                <a:solidFill>
+                  <a:srgbClr val="1A1A1A"/>
+                </a:solidFill>
+              </a:rPr>
+              <a:t>↓ Growth inhibition</a:t>
+            </a:r>
+          </a:p>
+        </p:txBody>
+      </p:sp>
+      <p:sp>
+        <p:nvSpPr>
+          <p:cNvPr id="38" name="Rectangle 37"/>
+          <p:cNvSpPr/>
+          <p:nvPr/>
+        </p:nvSpPr>
+        <p:spPr>
+          <a:xfrm>
+            <a:off x="5669280" y="3383280"/>
+            <a:ext cx="1463040" cy="292608"/>
+          </a:xfrm>
+          <a:prstGeom prst="rect">
+            <a:avLst/>
+          </a:prstGeom>
+          <a:solidFill>
+            <a:srgbClr val="FFF3E8"/>
+          </a:solidFill>
+          <a:ln w="5080">
+            <a:solidFill>
+              <a:srgbClr val="CCCCCC"/>
+            </a:solidFill>
+          </a:ln>
+        </p:spPr>
+        <p:style>
+          <a:lnRef idx="1">
+            <a:schemeClr val="accent1"/>
+          </a:lnRef>
+          <a:fillRef idx="3">
+            <a:schemeClr val="accent1"/>
+          </a:fillRef>
+          <a:effectRef idx="2">
+            <a:schemeClr val="accent1"/>
+          </a:effectRef>
+          <a:fontRef idx="minor">
+            <a:schemeClr val="lt1"/>
+          </a:fontRef>
+        </p:style>
+        <p:txBody>
+          <a:bodyPr rtlCol="0" anchor="ctr"/>
+          <a:lstStyle/>
+          <a:p>
+            <a:pPr algn="ctr"/>
+          </a:p>
+        </p:txBody>
+      </p:sp>
+      <p:sp>
+        <p:nvSpPr>
+          <p:cNvPr id="39" name="TextBox 38"/>
+          <p:cNvSpPr txBox="1"/>
+          <p:nvPr/>
+        </p:nvSpPr>
+        <p:spPr>
+          <a:xfrm>
+            <a:off x="5715000" y="3429000"/>
+            <a:ext cx="1389888" cy="219456"/>
+          </a:xfrm>
+          <a:prstGeom prst="rect">
+            <a:avLst/>
+          </a:prstGeom>
+          <a:noFill/>
+        </p:spPr>
+        <p:txBody>
+          <a:bodyPr wrap="square">
+            <a:spAutoFit/>
+          </a:bodyPr>
+          <a:lstStyle/>
+          <a:p>
+            <a:pPr algn="l"/>
+            <a:r>
+              <a:rPr sz="1000" b="1" i="0">
+                <a:solidFill>
+                  <a:srgbClr val="C55A11"/>
+                </a:solidFill>
+              </a:rPr>
+              <a:t>GeneAC</a:t>
+            </a:r>
+          </a:p>
+        </p:txBody>
+      </p:sp>
+      <p:sp>
+        <p:nvSpPr>
+          <p:cNvPr id="40" name="Rectangle 39"/>
+          <p:cNvSpPr/>
+          <p:nvPr/>
+        </p:nvSpPr>
+        <p:spPr>
+          <a:xfrm>
+            <a:off x="7150608" y="3383280"/>
+            <a:ext cx="1554480" cy="292608"/>
+          </a:xfrm>
+          <a:prstGeom prst="rect">
+            <a:avLst/>
+          </a:prstGeom>
+          <a:solidFill>
+            <a:srgbClr val="FFF3E8"/>
+          </a:solidFill>
+          <a:ln w="5080">
+            <a:solidFill>
+              <a:srgbClr val="CCCCCC"/>
+            </a:solidFill>
+          </a:ln>
+        </p:spPr>
+        <p:style>
+          <a:lnRef idx="1">
+            <a:schemeClr val="accent1"/>
+          </a:lnRef>
+          <a:fillRef idx="3">
+            <a:schemeClr val="accent1"/>
+          </a:fillRef>
+          <a:effectRef idx="2">
+            <a:schemeClr val="accent1"/>
+          </a:effectRef>
+          <a:fontRef idx="minor">
+            <a:schemeClr val="lt1"/>
+          </a:fontRef>
+        </p:style>
+        <p:txBody>
+          <a:bodyPr rtlCol="0" anchor="ctr"/>
+          <a:lstStyle/>
+          <a:p>
+            <a:pPr algn="ctr"/>
+          </a:p>
+        </p:txBody>
+      </p:sp>
+      <p:sp>
+        <p:nvSpPr>
+          <p:cNvPr id="41" name="TextBox 40"/>
+          <p:cNvSpPr txBox="1"/>
+          <p:nvPr/>
+        </p:nvSpPr>
+        <p:spPr>
+          <a:xfrm>
+            <a:off x="7196328" y="3429000"/>
+            <a:ext cx="1481328" cy="219456"/>
+          </a:xfrm>
+          <a:prstGeom prst="rect">
+            <a:avLst/>
+          </a:prstGeom>
+          <a:noFill/>
+        </p:spPr>
+        <p:txBody>
+          <a:bodyPr wrap="square">
+            <a:spAutoFit/>
+          </a:bodyPr>
+          <a:lstStyle/>
+          <a:p>
+            <a:pPr algn="ctr"/>
+            <a:r>
+              <a:rPr sz="1000" b="0" i="0">
+                <a:solidFill>
+                  <a:srgbClr val="C55A11"/>
+                </a:solidFill>
+              </a:rPr>
+              <a:t>126.1%</a:t>
+            </a:r>
+          </a:p>
+        </p:txBody>
+      </p:sp>
+      <p:sp>
+        <p:nvSpPr>
+          <p:cNvPr id="42" name="Rectangle 41"/>
+          <p:cNvSpPr/>
+          <p:nvPr/>
+        </p:nvSpPr>
+        <p:spPr>
+          <a:xfrm>
+            <a:off x="8723376" y="3383280"/>
+            <a:ext cx="2606040" cy="292608"/>
+          </a:xfrm>
+          <a:prstGeom prst="rect">
+            <a:avLst/>
+          </a:prstGeom>
+          <a:solidFill>
+            <a:srgbClr val="FFF3E8"/>
+          </a:solidFill>
+          <a:ln w="5080">
+            <a:solidFill>
+              <a:srgbClr val="CCCCCC"/>
+            </a:solidFill>
+          </a:ln>
+        </p:spPr>
+        <p:style>
+          <a:lnRef idx="1">
+            <a:schemeClr val="accent1"/>
+          </a:lnRef>
+          <a:fillRef idx="3">
+            <a:schemeClr val="accent1"/>
+          </a:fillRef>
+          <a:effectRef idx="2">
+            <a:schemeClr val="accent1"/>
+          </a:effectRef>
+          <a:fontRef idx="minor">
+            <a:schemeClr val="lt1"/>
+          </a:fontRef>
+        </p:style>
+        <p:txBody>
+          <a:bodyPr rtlCol="0" anchor="ctr"/>
+          <a:lstStyle/>
+          <a:p>
+            <a:pPr algn="ctr"/>
+          </a:p>
+        </p:txBody>
+      </p:sp>
+      <p:sp>
+        <p:nvSpPr>
+          <p:cNvPr id="43" name="TextBox 42"/>
+          <p:cNvSpPr txBox="1"/>
+          <p:nvPr/>
+        </p:nvSpPr>
+        <p:spPr>
+          <a:xfrm>
+            <a:off x="8769096" y="3429000"/>
+            <a:ext cx="2532888" cy="219456"/>
+          </a:xfrm>
+          <a:prstGeom prst="rect">
+            <a:avLst/>
+          </a:prstGeom>
+          <a:noFill/>
+        </p:spPr>
+        <p:txBody>
+          <a:bodyPr wrap="square">
+            <a:spAutoFit/>
+          </a:bodyPr>
+          <a:lstStyle/>
+          <a:p>
+            <a:pPr algn="l"/>
+            <a:r>
+              <a:rPr sz="1000" b="0" i="0">
+                <a:solidFill>
+                  <a:srgbClr val="1A1A1A"/>
+                </a:solidFill>
+              </a:rPr>
+              <a:t>↑ Enhanced growth</a:t>
+            </a:r>
+          </a:p>
+        </p:txBody>
+      </p:sp>
+      <p:sp>
+        <p:nvSpPr>
+          <p:cNvPr id="44" name="Rectangle 43"/>
+          <p:cNvSpPr/>
+          <p:nvPr/>
+        </p:nvSpPr>
+        <p:spPr>
+          <a:xfrm>
+            <a:off x="5669280" y="3694176"/>
+            <a:ext cx="1463040" cy="292608"/>
+          </a:xfrm>
+          <a:prstGeom prst="rect">
+            <a:avLst/>
+          </a:prstGeom>
+          <a:solidFill>
+            <a:srgbClr val="FFFFFF"/>
+          </a:solidFill>
+          <a:ln w="5080">
+            <a:solidFill>
+              <a:srgbClr val="CCCCCC"/>
+            </a:solidFill>
+          </a:ln>
+        </p:spPr>
+        <p:style>
+          <a:lnRef idx="1">
+            <a:schemeClr val="accent1"/>
+          </a:lnRef>
+          <a:fillRef idx="3">
+            <a:schemeClr val="accent1"/>
+          </a:fillRef>
+          <a:effectRef idx="2">
+            <a:schemeClr val="accent1"/>
+          </a:effectRef>
+          <a:fontRef idx="minor">
+            <a:schemeClr val="lt1"/>
+          </a:fontRef>
+        </p:style>
+        <p:txBody>
+          <a:bodyPr rtlCol="0" anchor="ctr"/>
+          <a:lstStyle/>
+          <a:p>
+            <a:pPr algn="ctr"/>
+          </a:p>
+        </p:txBody>
+      </p:sp>
+      <p:sp>
+        <p:nvSpPr>
+          <p:cNvPr id="45" name="TextBox 44"/>
+          <p:cNvSpPr txBox="1"/>
+          <p:nvPr/>
+        </p:nvSpPr>
+        <p:spPr>
+          <a:xfrm>
+            <a:off x="5715000" y="3739896"/>
+            <a:ext cx="1389888" cy="219456"/>
+          </a:xfrm>
+          <a:prstGeom prst="rect">
+            <a:avLst/>
+          </a:prstGeom>
+          <a:noFill/>
+        </p:spPr>
+        <p:txBody>
+          <a:bodyPr wrap="square">
+            <a:spAutoFit/>
+          </a:bodyPr>
+          <a:lstStyle/>
+          <a:p>
+            <a:pPr algn="l"/>
+            <a:r>
+              <a:rPr sz="1000" b="1" i="0">
+                <a:solidFill>
+                  <a:srgbClr val="C55A11"/>
+                </a:solidFill>
+              </a:rPr>
+              <a:t>GeneX</a:t>
+            </a:r>
+          </a:p>
+        </p:txBody>
+      </p:sp>
+      <p:sp>
+        <p:nvSpPr>
+          <p:cNvPr id="46" name="Rectangle 45"/>
+          <p:cNvSpPr/>
+          <p:nvPr/>
+        </p:nvSpPr>
+        <p:spPr>
+          <a:xfrm>
+            <a:off x="7150608" y="3694176"/>
+            <a:ext cx="1554480" cy="292608"/>
+          </a:xfrm>
+          <a:prstGeom prst="rect">
+            <a:avLst/>
+          </a:prstGeom>
+          <a:solidFill>
+            <a:srgbClr val="FFFFFF"/>
+          </a:solidFill>
+          <a:ln w="5080">
+            <a:solidFill>
+              <a:srgbClr val="CCCCCC"/>
+            </a:solidFill>
+          </a:ln>
+        </p:spPr>
+        <p:style>
+          <a:lnRef idx="1">
+            <a:schemeClr val="accent1"/>
+          </a:lnRef>
+          <a:fillRef idx="3">
+            <a:schemeClr val="accent1"/>
+          </a:fillRef>
+          <a:effectRef idx="2">
+            <a:schemeClr val="accent1"/>
+          </a:effectRef>
+          <a:fontRef idx="minor">
+            <a:schemeClr val="lt1"/>
+          </a:fontRef>
+        </p:style>
+        <p:txBody>
+          <a:bodyPr rtlCol="0" anchor="ctr"/>
+          <a:lstStyle/>
+          <a:p>
+            <a:pPr algn="ctr"/>
+          </a:p>
+        </p:txBody>
+      </p:sp>
+      <p:sp>
+        <p:nvSpPr>
+          <p:cNvPr id="47" name="TextBox 46"/>
+          <p:cNvSpPr txBox="1"/>
+          <p:nvPr/>
+        </p:nvSpPr>
+        <p:spPr>
+          <a:xfrm>
+            <a:off x="7196328" y="3739896"/>
+            <a:ext cx="1481328" cy="219456"/>
+          </a:xfrm>
+          <a:prstGeom prst="rect">
+            <a:avLst/>
+          </a:prstGeom>
+          <a:noFill/>
+        </p:spPr>
+        <p:txBody>
+          <a:bodyPr wrap="square">
+            <a:spAutoFit/>
+          </a:bodyPr>
+          <a:lstStyle/>
+          <a:p>
+            <a:pPr algn="ctr"/>
+            <a:r>
+              <a:rPr sz="1000" b="0" i="0">
+                <a:solidFill>
+                  <a:srgbClr val="C55A11"/>
+                </a:solidFill>
+              </a:rPr>
+              <a:t>124.5%</a:t>
+            </a:r>
+          </a:p>
+        </p:txBody>
+      </p:sp>
+      <p:sp>
+        <p:nvSpPr>
+          <p:cNvPr id="48" name="Rectangle 47"/>
+          <p:cNvSpPr/>
+          <p:nvPr/>
+        </p:nvSpPr>
+        <p:spPr>
+          <a:xfrm>
+            <a:off x="8723376" y="3694176"/>
+            <a:ext cx="2606040" cy="292608"/>
+          </a:xfrm>
+          <a:prstGeom prst="rect">
+            <a:avLst/>
+          </a:prstGeom>
+          <a:solidFill>
+            <a:srgbClr val="FFFFFF"/>
+          </a:solidFill>
+          <a:ln w="5080">
+            <a:solidFill>
+              <a:srgbClr val="CCCCCC"/>
+            </a:solidFill>
+          </a:ln>
+        </p:spPr>
+        <p:style>
+          <a:lnRef idx="1">
+            <a:schemeClr val="accent1"/>
+          </a:lnRef>
+          <a:fillRef idx="3">
+            <a:schemeClr val="accent1"/>
+          </a:fillRef>
+          <a:effectRef idx="2">
+            <a:schemeClr val="accent1"/>
+          </a:effectRef>
+          <a:fontRef idx="minor">
+            <a:schemeClr val="lt1"/>
+          </a:fontRef>
+        </p:style>
+        <p:txBody>
+          <a:bodyPr rtlCol="0" anchor="ctr"/>
+          <a:lstStyle/>
+          <a:p>
+            <a:pPr algn="ctr"/>
+          </a:p>
+        </p:txBody>
+      </p:sp>
+      <p:sp>
+        <p:nvSpPr>
+          <p:cNvPr id="49" name="TextBox 48"/>
+          <p:cNvSpPr txBox="1"/>
+          <p:nvPr/>
+        </p:nvSpPr>
+        <p:spPr>
+          <a:xfrm>
+            <a:off x="8769096" y="3739896"/>
+            <a:ext cx="2532888" cy="219456"/>
+          </a:xfrm>
+          <a:prstGeom prst="rect">
+            <a:avLst/>
+          </a:prstGeom>
+          <a:noFill/>
+        </p:spPr>
+        <p:txBody>
+          <a:bodyPr wrap="square">
+            <a:spAutoFit/>
+          </a:bodyPr>
+          <a:lstStyle/>
+          <a:p>
+            <a:pPr algn="l"/>
+            <a:r>
+              <a:rPr sz="1000" b="0" i="0">
+                <a:solidFill>
+                  <a:srgbClr val="1A1A1A"/>
+                </a:solidFill>
+              </a:rPr>
+              <a:t>↑ Enhanced growth</a:t>
+            </a:r>
+          </a:p>
+        </p:txBody>
+      </p:sp>
+      <p:sp>
+        <p:nvSpPr>
+          <p:cNvPr id="50" name="Rectangle 49"/>
+          <p:cNvSpPr/>
+          <p:nvPr/>
+        </p:nvSpPr>
+        <p:spPr>
+          <a:xfrm>
+            <a:off x="5669280" y="4005072"/>
+            <a:ext cx="1463040" cy="292608"/>
+          </a:xfrm>
+          <a:prstGeom prst="rect">
+            <a:avLst/>
+          </a:prstGeom>
+          <a:solidFill>
+            <a:srgbClr val="FFF3E8"/>
+          </a:solidFill>
+          <a:ln w="5080">
+            <a:solidFill>
+              <a:srgbClr val="CCCCCC"/>
+            </a:solidFill>
+          </a:ln>
+        </p:spPr>
+        <p:style>
+          <a:lnRef idx="1">
+            <a:schemeClr val="accent1"/>
+          </a:lnRef>
+          <a:fillRef idx="3">
+            <a:schemeClr val="accent1"/>
+          </a:fillRef>
+          <a:effectRef idx="2">
+            <a:schemeClr val="accent1"/>
+          </a:effectRef>
+          <a:fontRef idx="minor">
+            <a:schemeClr val="lt1"/>
+          </a:fontRef>
+        </p:style>
+        <p:txBody>
+          <a:bodyPr rtlCol="0" anchor="ctr"/>
+          <a:lstStyle/>
+          <a:p>
+            <a:pPr algn="ctr"/>
+          </a:p>
+        </p:txBody>
+      </p:sp>
+      <p:sp>
+        <p:nvSpPr>
+          <p:cNvPr id="51" name="TextBox 50"/>
+          <p:cNvSpPr txBox="1"/>
+          <p:nvPr/>
+        </p:nvSpPr>
+        <p:spPr>
+          <a:xfrm>
+            <a:off x="5715000" y="4050792"/>
+            <a:ext cx="1389888" cy="219456"/>
+          </a:xfrm>
+          <a:prstGeom prst="rect">
+            <a:avLst/>
+          </a:prstGeom>
+          <a:noFill/>
+        </p:spPr>
+        <p:txBody>
+          <a:bodyPr wrap="square">
+            <a:spAutoFit/>
+          </a:bodyPr>
+          <a:lstStyle/>
+          <a:p>
+            <a:pPr algn="l"/>
+            <a:r>
+              <a:rPr sz="1000" b="1" i="0">
+                <a:solidFill>
+                  <a:srgbClr val="C55A11"/>
+                </a:solidFill>
+              </a:rPr>
+              <a:t>GeneE</a:t>
+            </a:r>
+          </a:p>
+        </p:txBody>
+      </p:sp>
+      <p:sp>
+        <p:nvSpPr>
+          <p:cNvPr id="52" name="Rectangle 51"/>
+          <p:cNvSpPr/>
+          <p:nvPr/>
+        </p:nvSpPr>
+        <p:spPr>
+          <a:xfrm>
+            <a:off x="7150608" y="4005072"/>
+            <a:ext cx="1554480" cy="292608"/>
+          </a:xfrm>
+          <a:prstGeom prst="rect">
+            <a:avLst/>
+          </a:prstGeom>
+          <a:solidFill>
+            <a:srgbClr val="FFF3E8"/>
+          </a:solidFill>
+          <a:ln w="5080">
+            <a:solidFill>
+              <a:srgbClr val="CCCCCC"/>
+            </a:solidFill>
+          </a:ln>
+        </p:spPr>
+        <p:style>
+          <a:lnRef idx="1">
+            <a:schemeClr val="accent1"/>
+          </a:lnRef>
+          <a:fillRef idx="3">
+            <a:schemeClr val="accent1"/>
+          </a:fillRef>
+          <a:effectRef idx="2">
+            <a:schemeClr val="accent1"/>
+          </a:effectRef>
+          <a:fontRef idx="minor">
+            <a:schemeClr val="lt1"/>
+          </a:fontRef>
+        </p:style>
+        <p:txBody>
+          <a:bodyPr rtlCol="0" anchor="ctr"/>
+          <a:lstStyle/>
+          <a:p>
+            <a:pPr algn="ctr"/>
+          </a:p>
+        </p:txBody>
+      </p:sp>
+      <p:sp>
+        <p:nvSpPr>
+          <p:cNvPr id="53" name="TextBox 52"/>
+          <p:cNvSpPr txBox="1"/>
+          <p:nvPr/>
+        </p:nvSpPr>
+        <p:spPr>
+          <a:xfrm>
+            <a:off x="7196328" y="4050792"/>
+            <a:ext cx="1481328" cy="219456"/>
+          </a:xfrm>
+          <a:prstGeom prst="rect">
+            <a:avLst/>
+          </a:prstGeom>
+          <a:noFill/>
+        </p:spPr>
+        <p:txBody>
+          <a:bodyPr wrap="square">
+            <a:spAutoFit/>
+          </a:bodyPr>
+          <a:lstStyle/>
+          <a:p>
+            <a:pPr algn="ctr"/>
+            <a:r>
+              <a:rPr sz="1000" b="0" i="0">
+                <a:solidFill>
+                  <a:srgbClr val="C55A11"/>
+                </a:solidFill>
+              </a:rPr>
+              <a:t>124.0%</a:t>
+            </a:r>
+          </a:p>
+        </p:txBody>
+      </p:sp>
+      <p:sp>
+        <p:nvSpPr>
+          <p:cNvPr id="54" name="Rectangle 53"/>
+          <p:cNvSpPr/>
+          <p:nvPr/>
+        </p:nvSpPr>
+        <p:spPr>
+          <a:xfrm>
+            <a:off x="8723376" y="4005072"/>
+            <a:ext cx="2606040" cy="292608"/>
+          </a:xfrm>
+          <a:prstGeom prst="rect">
+            <a:avLst/>
+          </a:prstGeom>
+          <a:solidFill>
+            <a:srgbClr val="FFF3E8"/>
+          </a:solidFill>
+          <a:ln w="5080">
+            <a:solidFill>
+              <a:srgbClr val="CCCCCC"/>
+            </a:solidFill>
+          </a:ln>
+        </p:spPr>
+        <p:style>
+          <a:lnRef idx="1">
+            <a:schemeClr val="accent1"/>
+          </a:lnRef>
+          <a:fillRef idx="3">
+            <a:schemeClr val="accent1"/>
+          </a:fillRef>
+          <a:effectRef idx="2">
+            <a:schemeClr val="accent1"/>
+          </a:effectRef>
+          <a:fontRef idx="minor">
+            <a:schemeClr val="lt1"/>
+          </a:fontRef>
+        </p:style>
+        <p:txBody>
+          <a:bodyPr rtlCol="0" anchor="ctr"/>
+          <a:lstStyle/>
+          <a:p>
+            <a:pPr algn="ctr"/>
+          </a:p>
+        </p:txBody>
+      </p:sp>
+      <p:sp>
+        <p:nvSpPr>
+          <p:cNvPr id="55" name="TextBox 54"/>
+          <p:cNvSpPr txBox="1"/>
+          <p:nvPr/>
+        </p:nvSpPr>
+        <p:spPr>
+          <a:xfrm>
+            <a:off x="8769096" y="4050792"/>
+            <a:ext cx="2532888" cy="219456"/>
+          </a:xfrm>
+          <a:prstGeom prst="rect">
+            <a:avLst/>
+          </a:prstGeom>
+          <a:noFill/>
+        </p:spPr>
+        <p:txBody>
+          <a:bodyPr wrap="square">
+            <a:spAutoFit/>
+          </a:bodyPr>
+          <a:lstStyle/>
+          <a:p>
+            <a:pPr algn="l"/>
+            <a:r>
+              <a:rPr sz="1000" b="0" i="0">
+                <a:solidFill>
+                  <a:srgbClr val="1A1A1A"/>
+                </a:solidFill>
+              </a:rPr>
+              <a:t>↑ Enhanced growth</a:t>
+            </a:r>
+          </a:p>
+        </p:txBody>
+      </p:sp>
+      <p:sp>
+        <p:nvSpPr>
+          <p:cNvPr id="56" name="Rectangle 55"/>
+          <p:cNvSpPr/>
+          <p:nvPr/>
+        </p:nvSpPr>
+        <p:spPr>
+          <a:xfrm>
+            <a:off x="274320" y="3767328"/>
+            <a:ext cx="11640312" cy="2633472"/>
+          </a:xfrm>
+          <a:prstGeom prst="rect">
+            <a:avLst/>
+          </a:prstGeom>
+          <a:solidFill>
+            <a:srgbClr val="F5F9FF"/>
+          </a:solidFill>
+          <a:ln w="12700">
+            <a:solidFill>
+              <a:srgbClr val="2E75B6"/>
+            </a:solidFill>
+          </a:ln>
+        </p:spPr>
+        <p:style>
+          <a:lnRef idx="1">
+            <a:schemeClr val="accent1"/>
+          </a:lnRef>
+          <a:fillRef idx="3">
+            <a:schemeClr val="accent1"/>
+          </a:fillRef>
+          <a:effectRef idx="2">
+            <a:schemeClr val="accent1"/>
+          </a:effectRef>
+          <a:fontRef idx="minor">
+            <a:schemeClr val="lt1"/>
+          </a:fontRef>
+        </p:style>
+        <p:txBody>
+          <a:bodyPr rtlCol="0" anchor="ctr"/>
+          <a:lstStyle/>
+          <a:p>
+            <a:pPr algn="ctr"/>
+          </a:p>
+        </p:txBody>
+      </p:sp>
+      <p:sp>
+        <p:nvSpPr>
+          <p:cNvPr id="57" name="Rectangle 56"/>
+          <p:cNvSpPr/>
+          <p:nvPr/>
+        </p:nvSpPr>
+        <p:spPr>
+          <a:xfrm>
+            <a:off x="274320" y="3767328"/>
+            <a:ext cx="11640312" cy="475488"/>
+          </a:xfrm>
+          <a:prstGeom prst="rect">
+            <a:avLst/>
+          </a:prstGeom>
+          <a:solidFill>
+            <a:srgbClr val="2E75B6"/>
+          </a:solidFill>
+          <a:ln>
+            <a:noFill/>
+          </a:ln>
+        </p:spPr>
+        <p:style>
+          <a:lnRef idx="1">
+            <a:schemeClr val="accent1"/>
+          </a:lnRef>
+          <a:fillRef idx="3">
+            <a:schemeClr val="accent1"/>
+          </a:fillRef>
+          <a:effectRef idx="2">
+            <a:schemeClr val="accent1"/>
+          </a:effectRef>
+          <a:fontRef idx="minor">
+            <a:schemeClr val="lt1"/>
+          </a:fontRef>
+        </p:style>
+        <p:txBody>
+          <a:bodyPr rtlCol="0" anchor="ctr"/>
+          <a:lstStyle/>
+          <a:p>
+            <a:pPr algn="ctr"/>
+          </a:p>
+        </p:txBody>
+      </p:sp>
+      <p:sp>
+        <p:nvSpPr>
+          <p:cNvPr id="58" name="TextBox 57"/>
+          <p:cNvSpPr txBox="1"/>
+          <p:nvPr/>
+        </p:nvSpPr>
+        <p:spPr>
+          <a:xfrm>
+            <a:off x="457200" y="3840480"/>
+            <a:ext cx="8686800" cy="329184"/>
+          </a:xfrm>
+          <a:prstGeom prst="rect">
+            <a:avLst/>
+          </a:prstGeom>
+          <a:noFill/>
+        </p:spPr>
+        <p:txBody>
+          <a:bodyPr wrap="square">
+            <a:spAutoFit/>
+          </a:bodyPr>
+          <a:lstStyle/>
+          <a:p>
+            <a:pPr algn="l"/>
+            <a:r>
+              <a:rPr sz="1400" b="1" i="0">
+                <a:solidFill>
+                  <a:srgbClr val="FFFFFF"/>
+                </a:solidFill>
+              </a:rPr>
+              <a:t>Several Time Points  |  Multiple Controls  (23 time points, 3 h intervals, ~69 h total)</a:t>
+            </a:r>
+          </a:p>
+        </p:txBody>
+      </p:sp>
+      <p:sp>
+        <p:nvSpPr>
+          <p:cNvPr id="59" name="Rectangle 58"/>
+          <p:cNvSpPr/>
+          <p:nvPr/>
+        </p:nvSpPr>
+        <p:spPr>
+          <a:xfrm>
+            <a:off x="9601200" y="3858768"/>
+            <a:ext cx="2148840" cy="292608"/>
+          </a:xfrm>
+          <a:prstGeom prst="rect">
+            <a:avLst/>
+          </a:prstGeom>
+          <a:solidFill>
+            <a:srgbClr val="1F8678"/>
+          </a:solidFill>
+          <a:ln>
+            <a:noFill/>
+          </a:ln>
+        </p:spPr>
+        <p:style>
+          <a:lnRef idx="1">
+            <a:schemeClr val="accent1"/>
+          </a:lnRef>
+          <a:fillRef idx="3">
+            <a:schemeClr val="accent1"/>
+          </a:fillRef>
+          <a:effectRef idx="2">
+            <a:schemeClr val="accent1"/>
+          </a:effectRef>
+          <a:fontRef idx="minor">
+            <a:schemeClr val="lt1"/>
+          </a:fontRef>
+        </p:style>
+        <p:txBody>
+          <a:bodyPr rtlCol="0" anchor="ctr"/>
+          <a:lstStyle/>
+          <a:p>
+            <a:pPr algn="ctr"/>
+          </a:p>
+        </p:txBody>
+      </p:sp>
+      <p:sp>
+        <p:nvSpPr>
+          <p:cNvPr id="60" name="TextBox 59"/>
+          <p:cNvSpPr txBox="1"/>
+          <p:nvPr/>
+        </p:nvSpPr>
+        <p:spPr>
+          <a:xfrm>
+            <a:off x="9619488" y="3867912"/>
+            <a:ext cx="2112264" cy="256032"/>
+          </a:xfrm>
+          <a:prstGeom prst="rect">
+            <a:avLst/>
+          </a:prstGeom>
+          <a:noFill/>
+        </p:spPr>
+        <p:txBody>
+          <a:bodyPr wrap="square">
+            <a:spAutoFit/>
+          </a:bodyPr>
+          <a:lstStyle/>
+          <a:p>
+            <a:pPr algn="ctr"/>
+            <a:r>
+              <a:rPr sz="1100" b="1" i="0">
+                <a:solidFill>
+                  <a:srgbClr val="FFFFFF"/>
+                </a:solidFill>
+              </a:rPr>
+              <a:t>✅  COMPLETE</a:t>
+            </a:r>
+          </a:p>
+        </p:txBody>
+      </p:sp>
+      <p:sp>
+        <p:nvSpPr>
+          <p:cNvPr id="61" name="TextBox 60"/>
+          <p:cNvSpPr txBox="1"/>
+          <p:nvPr/>
+        </p:nvSpPr>
+        <p:spPr>
+          <a:xfrm>
+            <a:off x="457200" y="4315968"/>
+            <a:ext cx="11247120" cy="292608"/>
+          </a:xfrm>
+          <a:prstGeom prst="rect">
+            <a:avLst/>
+          </a:prstGeom>
+          <a:noFill/>
+        </p:spPr>
+        <p:txBody>
+          <a:bodyPr wrap="square">
+            <a:spAutoFit/>
+          </a:bodyPr>
+          <a:lstStyle/>
+          <a:p>
+            <a:pPr algn="l"/>
+            <a:r>
+              <a:rPr sz="1100" b="0" i="1">
+                <a:solidFill>
+                  <a:srgbClr val="1A375E"/>
+                </a:solidFill>
+              </a:rPr>
+              <a:t>Same perturbagens measured across time, enabling growth kinetics and rate calculations per target.</a:t>
+            </a:r>
+          </a:p>
+        </p:txBody>
+      </p:sp>
+      <p:sp>
+        <p:nvSpPr>
+          <p:cNvPr id="62" name="TextBox 61"/>
+          <p:cNvSpPr txBox="1"/>
+          <p:nvPr/>
+        </p:nvSpPr>
+        <p:spPr>
+          <a:xfrm>
+            <a:off x="457200" y="4663440"/>
+            <a:ext cx="7772400" cy="1627632"/>
+          </a:xfrm>
+          <a:prstGeom prst="rect">
+            <a:avLst/>
+          </a:prstGeom>
+          <a:noFill/>
+        </p:spPr>
+        <p:txBody>
+          <a:bodyPr wrap="square">
+            <a:spAutoFit/>
+          </a:bodyPr>
+          <a:lstStyle/>
           <a:p>
             <a:pPr>
               <a:spcBef>
@@ -9963,7 +11906,7 @@
                   <a:srgbClr val="1A1A1A"/>
                 </a:solidFill>
               </a:rPr>
-              <a:t>•  Single-timepoint readout — captures cumulative effect but not kinetics</a:t>
+              <a:t>•  Growth rate computed at each time point as a ratio to matched control</a:t>
             </a:r>
           </a:p>
           <a:p>
@@ -9978,20 +11921,65 @@
                   <a:srgbClr val="1A1A1A"/>
                 </a:solidFill>
               </a:rPr>
-              <a:t>•  Identifies candidate genes whose knockdown significantly alters cell proliferation</a:t>
-            </a:r>
-          </a:p>
-        </p:txBody>
-      </p:sp>
-      <p:sp>
-        <p:nvSpPr>
-          <p:cNvPr id="13" name="Rectangle 12"/>
+              <a:t>•  Growth rate &gt; 1.0 — cells proliferating faster (possible tumour suppressor knockdown)</a:t>
+            </a:r>
+          </a:p>
+          <a:p>
+            <a:pPr>
+              <a:spcBef>
+                <a:spcPts val="400"/>
+              </a:spcBef>
+            </a:pPr>
+            <a:r>
+              <a:rPr sz="1100">
+                <a:solidFill>
+                  <a:srgbClr val="1A1A1A"/>
+                </a:solidFill>
+              </a:rPr>
+              <a:t>•  Growth rate &lt; 1.0 — cells proliferating slower (growth-promoting gene silenced)</a:t>
+            </a:r>
+          </a:p>
+          <a:p>
+            <a:pPr>
+              <a:spcBef>
+                <a:spcPts val="400"/>
+              </a:spcBef>
+            </a:pPr>
+            <a:r>
+              <a:rPr sz="1100">
+                <a:solidFill>
+                  <a:srgbClr val="1A1A1A"/>
+                </a:solidFill>
+              </a:rPr>
+              <a:t>•  Multiple independent control groups enable robust plate-wide normalisation</a:t>
+            </a:r>
+          </a:p>
+          <a:p>
+            <a:pPr>
+              <a:spcBef>
+                <a:spcPts val="400"/>
+              </a:spcBef>
+            </a:pPr>
+            <a:r>
+              <a:rPr sz="1100">
+                <a:solidFill>
+                  <a:srgbClr val="1A1A1A"/>
+                </a:solidFill>
+              </a:rPr>
+              <a:t>•  Time-resolved data reveals whether effects are immediate, delayed, or transient</a:t>
+            </a:r>
+          </a:p>
+        </p:txBody>
+      </p:sp>
+      <p:sp>
+        <p:nvSpPr>
+          <p:cNvPr id="63" name="Rectangle 62"/>
           <p:cNvSpPr/>
           <p:nvPr/>
         </p:nvSpPr>
         <p:spPr>
           <a:xfrm>
-            <a:off x="8412480" y="1856232"/>
+            <a:off x="8412480" y="4636008"/>
             <a:ext cx="3337560" cy="1664208"/>
           </a:xfrm>
           <a:prstGeom prst="rect">
@@ -10030,13 +12018,13 @@
       </p:sp>
       <p:sp>
         <p:nvSpPr>
-          <p:cNvPr id="14" name="TextBox 13"/>
-          <p:cNvSpPr txBox="1"/>
-          <p:nvPr/>
-        </p:nvSpPr>
-        <p:spPr>
-          <a:xfrm>
-            <a:off x="8549640" y="1901952"/>
+          <p:cNvPr id="64" name="TextBox 63"/>
+          <p:cNvSpPr txBox="1"/>
+          <p:nvPr/>
+        </p:nvSpPr>
+        <p:spPr>
+          <a:xfrm>
+            <a:off x="8549640" y="4681728"/>
             <a:ext cx="3108960" cy="256032"/>
           </a:xfrm>
           <a:prstGeom prst="rect">
@@ -10064,13 +12052,13 @@
       </p:sp>
       <p:sp>
         <p:nvSpPr>
-          <p:cNvPr id="15" name="TextBox 14"/>
-          <p:cNvSpPr txBox="1"/>
-          <p:nvPr/>
-        </p:nvSpPr>
-        <p:spPr>
-          <a:xfrm>
-            <a:off x="8549640" y="2194560"/>
+          <p:cNvPr id="65" name="TextBox 64"/>
+          <p:cNvSpPr txBox="1"/>
+          <p:nvPr/>
+        </p:nvSpPr>
+        <p:spPr>
+          <a:xfrm>
+            <a:off x="8549640" y="4974336"/>
             <a:ext cx="3108960" cy="1261872"/>
           </a:xfrm>
           <a:prstGeom prst="rect">
@@ -10091,450 +12079,6 @@
                   <a:srgbClr val="1A1A1A"/>
                 </a:solidFill>
               </a:rPr>
-              <a:t>A straightforward binary screen: each perturbagen either hits or misses a growth phenotype. Genes showing strong deviation from 100% are prioritised for follow-up validation.</a:t>
-            </a:r>
-          </a:p>
-        </p:txBody>
-      </p:sp>
-      <p:sp>
-        <p:nvSpPr>
-          <p:cNvPr id="16" name="Rectangle 15"/>
-          <p:cNvSpPr/>
-          <p:nvPr/>
-        </p:nvSpPr>
-        <p:spPr>
-          <a:xfrm>
-            <a:off x="274320" y="3840480"/>
-            <a:ext cx="11640312" cy="2633472"/>
-          </a:xfrm>
-          <a:prstGeom prst="rect">
-            <a:avLst/>
-          </a:prstGeom>
-          <a:solidFill>
-            <a:srgbClr val="F5F9FF"/>
-          </a:solidFill>
-          <a:ln w="12700">
-            <a:solidFill>
-              <a:srgbClr val="2E75B6"/>
-            </a:solidFill>
-          </a:ln>
-        </p:spPr>
-        <p:style>
-          <a:lnRef idx="1">
-            <a:schemeClr val="accent1"/>
-          </a:lnRef>
-          <a:fillRef idx="3">
-            <a:schemeClr val="accent1"/>
-          </a:fillRef>
-          <a:effectRef idx="2">
-            <a:schemeClr val="accent1"/>
-          </a:effectRef>
-          <a:fontRef idx="minor">
-            <a:schemeClr val="lt1"/>
-          </a:fontRef>
-        </p:style>
-        <p:txBody>
-          <a:bodyPr rtlCol="0" anchor="ctr"/>
-          <a:lstStyle/>
-          <a:p>
-            <a:pPr algn="ctr"/>
-          </a:p>
-        </p:txBody>
-      </p:sp>
-      <p:sp>
-        <p:nvSpPr>
-          <p:cNvPr id="17" name="Rectangle 16"/>
-          <p:cNvSpPr/>
-          <p:nvPr/>
-        </p:nvSpPr>
-        <p:spPr>
-          <a:xfrm>
-            <a:off x="274320" y="3840480"/>
-            <a:ext cx="11640312" cy="475488"/>
-          </a:xfrm>
-          <a:prstGeom prst="rect">
-            <a:avLst/>
-          </a:prstGeom>
-          <a:solidFill>
-            <a:srgbClr val="2E75B6"/>
-          </a:solidFill>
-          <a:ln>
-            <a:noFill/>
-          </a:ln>
-        </p:spPr>
-        <p:style>
-          <a:lnRef idx="1">
-            <a:schemeClr val="accent1"/>
-          </a:lnRef>
-          <a:fillRef idx="3">
-            <a:schemeClr val="accent1"/>
-          </a:fillRef>
-          <a:effectRef idx="2">
-            <a:schemeClr val="accent1"/>
-          </a:effectRef>
-          <a:fontRef idx="minor">
-            <a:schemeClr val="lt1"/>
-          </a:fontRef>
-        </p:style>
-        <p:txBody>
-          <a:bodyPr rtlCol="0" anchor="ctr"/>
-          <a:lstStyle/>
-          <a:p>
-            <a:pPr algn="ctr"/>
-          </a:p>
-        </p:txBody>
-      </p:sp>
-      <p:sp>
-        <p:nvSpPr>
-          <p:cNvPr id="18" name="TextBox 17"/>
-          <p:cNvSpPr txBox="1"/>
-          <p:nvPr/>
-        </p:nvSpPr>
-        <p:spPr>
-          <a:xfrm>
-            <a:off x="457200" y="3913632"/>
-            <a:ext cx="8686800" cy="329184"/>
-          </a:xfrm>
-          <a:prstGeom prst="rect">
-            <a:avLst/>
-          </a:prstGeom>
-          <a:noFill/>
-        </p:spPr>
-        <p:txBody>
-          <a:bodyPr wrap="square">
-            <a:spAutoFit/>
-          </a:bodyPr>
-          <a:lstStyle/>
-          <a:p>
-            <a:pPr algn="l"/>
-            <a:r>
-              <a:rPr sz="1400" b="1" i="0">
-                <a:solidFill>
-                  <a:srgbClr val="FFFFFF"/>
-                </a:solidFill>
-              </a:rPr>
-              <a:t>Several Time Points  |  Multiple Controls  (23 time points, 3 h intervals, ~69 h total)</a:t>
-            </a:r>
-          </a:p>
-        </p:txBody>
-      </p:sp>
-      <p:sp>
-        <p:nvSpPr>
-          <p:cNvPr id="19" name="Rectangle 18"/>
-          <p:cNvSpPr/>
-          <p:nvPr/>
-        </p:nvSpPr>
-        <p:spPr>
-          <a:xfrm>
-            <a:off x="9601200" y="3931920"/>
-            <a:ext cx="2148840" cy="292608"/>
-          </a:xfrm>
-          <a:prstGeom prst="rect">
-            <a:avLst/>
-          </a:prstGeom>
-          <a:solidFill>
-            <a:srgbClr val="1F8678"/>
-          </a:solidFill>
-          <a:ln>
-            <a:noFill/>
-          </a:ln>
-        </p:spPr>
-        <p:style>
-          <a:lnRef idx="1">
-            <a:schemeClr val="accent1"/>
-          </a:lnRef>
-          <a:fillRef idx="3">
-            <a:schemeClr val="accent1"/>
-          </a:fillRef>
-          <a:effectRef idx="2">
-            <a:schemeClr val="accent1"/>
-          </a:effectRef>
-          <a:fontRef idx="minor">
-            <a:schemeClr val="lt1"/>
-          </a:fontRef>
-        </p:style>
-        <p:txBody>
-          <a:bodyPr rtlCol="0" anchor="ctr"/>
-          <a:lstStyle/>
-          <a:p>
-            <a:pPr algn="ctr"/>
-          </a:p>
-        </p:txBody>
-      </p:sp>
-      <p:sp>
-        <p:nvSpPr>
-          <p:cNvPr id="20" name="TextBox 19"/>
-          <p:cNvSpPr txBox="1"/>
-          <p:nvPr/>
-        </p:nvSpPr>
-        <p:spPr>
-          <a:xfrm>
-            <a:off x="9619488" y="3941064"/>
-            <a:ext cx="2112264" cy="256032"/>
-          </a:xfrm>
-          <a:prstGeom prst="rect">
-            <a:avLst/>
-          </a:prstGeom>
-          <a:noFill/>
-        </p:spPr>
-        <p:txBody>
-          <a:bodyPr wrap="square">
-            <a:spAutoFit/>
-          </a:bodyPr>
-          <a:lstStyle/>
-          <a:p>
-            <a:pPr algn="ctr"/>
-            <a:r>
-              <a:rPr sz="1100" b="1" i="0">
-                <a:solidFill>
-                  <a:srgbClr val="FFFFFF"/>
-                </a:solidFill>
-              </a:rPr>
-              <a:t>✅  COMPLETE</a:t>
-            </a:r>
-          </a:p>
-        </p:txBody>
-      </p:sp>
-      <p:sp>
-        <p:nvSpPr>
-          <p:cNvPr id="21" name="TextBox 20"/>
-          <p:cNvSpPr txBox="1"/>
-          <p:nvPr/>
-        </p:nvSpPr>
-        <p:spPr>
-          <a:xfrm>
-            <a:off x="457200" y="4389120"/>
-            <a:ext cx="11338560" cy="292608"/>
-          </a:xfrm>
-          <a:prstGeom prst="rect">
-            <a:avLst/>
-          </a:prstGeom>
-          <a:noFill/>
-        </p:spPr>
-        <p:txBody>
-          <a:bodyPr wrap="square">
-            <a:spAutoFit/>
-          </a:bodyPr>
-          <a:lstStyle/>
-          <a:p>
-            <a:pPr algn="l"/>
-            <a:r>
-              <a:rPr sz="1100" b="0" i="1">
-                <a:solidFill>
-                  <a:srgbClr val="1A375E"/>
-                </a:solidFill>
-              </a:rPr>
-              <a:t>Same perturbagens measured across time, enabling growth kinetics and rate calculations</a:t>
-            </a:r>
-          </a:p>
-        </p:txBody>
-      </p:sp>
-      <p:sp>
-        <p:nvSpPr>
-          <p:cNvPr id="22" name="TextBox 21"/>
-          <p:cNvSpPr txBox="1"/>
-          <p:nvPr/>
-        </p:nvSpPr>
-        <p:spPr>
-          <a:xfrm>
-            <a:off x="457200" y="4736592"/>
-            <a:ext cx="7772400" cy="1600200"/>
-          </a:xfrm>
-          <a:prstGeom prst="rect">
-            <a:avLst/>
-          </a:prstGeom>
-          <a:noFill/>
-        </p:spPr>
-        <p:txBody>
-          <a:bodyPr wrap="square">
-            <a:spAutoFit/>
-          </a:bodyPr>
-          <a:lstStyle/>
-          <a:p>
-            <a:pPr>
-              <a:spcBef>
-                <a:spcPts val="400"/>
-              </a:spcBef>
-            </a:pPr>
-            <a:r>
-              <a:rPr sz="1100">
-                <a:solidFill>
-                  <a:srgbClr val="1A1A1A"/>
-                </a:solidFill>
-              </a:rPr>
-              <a:t>•  Growth rate computed at each time point as a ratio to the matched control group</a:t>
-            </a:r>
-          </a:p>
-          <a:p>
-            <a:pPr>
-              <a:spcBef>
-                <a:spcPts val="400"/>
-              </a:spcBef>
-            </a:pPr>
-            <a:r>
-              <a:rPr sz="1100">
-                <a:solidFill>
-                  <a:srgbClr val="1A1A1A"/>
-                </a:solidFill>
-              </a:rPr>
-              <a:t>•  Growth rate &gt; 1.0 — cells proliferating faster than control (possible tumour suppressor knockdown)</a:t>
-            </a:r>
-          </a:p>
-          <a:p>
-            <a:pPr>
-              <a:spcBef>
-                <a:spcPts val="400"/>
-              </a:spcBef>
-            </a:pPr>
-            <a:r>
-              <a:rPr sz="1100">
-                <a:solidFill>
-                  <a:srgbClr val="1A1A1A"/>
-                </a:solidFill>
-              </a:rPr>
-              <a:t>•  Growth rate &lt; 1.0 — cells proliferating slower than control (growth-promoting gene silenced)</a:t>
-            </a:r>
-          </a:p>
-          <a:p>
-            <a:pPr>
-              <a:spcBef>
-                <a:spcPts val="400"/>
-              </a:spcBef>
-            </a:pPr>
-            <a:r>
-              <a:rPr sz="1100">
-                <a:solidFill>
-                  <a:srgbClr val="1A1A1A"/>
-                </a:solidFill>
-              </a:rPr>
-              <a:t>•  Multiple independent control groups enable robust plate-wide normalisation</a:t>
-            </a:r>
-          </a:p>
-          <a:p>
-            <a:pPr>
-              <a:spcBef>
-                <a:spcPts val="400"/>
-              </a:spcBef>
-            </a:pPr>
-            <a:r>
-              <a:rPr sz="1100">
-                <a:solidFill>
-                  <a:srgbClr val="1A1A1A"/>
-                </a:solidFill>
-              </a:rPr>
-              <a:t>•  Time-resolved data reveals whether effects are immediate, delayed, or transient</a:t>
-            </a:r>
-          </a:p>
-        </p:txBody>
-      </p:sp>
-      <p:sp>
-        <p:nvSpPr>
-          <p:cNvPr id="23" name="Rectangle 22"/>
-          <p:cNvSpPr/>
-          <p:nvPr/>
-        </p:nvSpPr>
-        <p:spPr>
-          <a:xfrm>
-            <a:off x="8412480" y="4709160"/>
-            <a:ext cx="3337560" cy="1664208"/>
-          </a:xfrm>
-          <a:prstGeom prst="rect">
-            <a:avLst/>
-          </a:prstGeom>
-          <a:solidFill>
-            <a:srgbClr val="FFFFFF"/>
-          </a:solidFill>
-          <a:ln w="10160">
-            <a:solidFill>
-              <a:srgbClr val="2E75B6"/>
-            </a:solidFill>
-          </a:ln>
-        </p:spPr>
-        <p:style>
-          <a:lnRef idx="1">
-            <a:schemeClr val="accent1"/>
-          </a:lnRef>
-          <a:fillRef idx="3">
-            <a:schemeClr val="accent1"/>
-          </a:fillRef>
-          <a:effectRef idx="2">
-            <a:schemeClr val="accent1"/>
-          </a:effectRef>
-          <a:fontRef idx="minor">
-            <a:schemeClr val="lt1"/>
-          </a:fontRef>
-        </p:style>
-        <p:txBody>
-          <a:bodyPr rtlCol="0" anchor="ctr"/>
-          <a:lstStyle/>
-          <a:p>
-            <a:pPr algn="ctr"/>
-          </a:p>
-        </p:txBody>
-      </p:sp>
-      <p:sp>
-        <p:nvSpPr>
-          <p:cNvPr id="24" name="TextBox 23"/>
-          <p:cNvSpPr txBox="1"/>
-          <p:nvPr/>
-        </p:nvSpPr>
-        <p:spPr>
-          <a:xfrm>
-            <a:off x="8549640" y="4754880"/>
-            <a:ext cx="3108960" cy="256032"/>
-          </a:xfrm>
-          <a:prstGeom prst="rect">
-            <a:avLst/>
-          </a:prstGeom>
-          <a:noFill/>
-        </p:spPr>
-        <p:txBody>
-          <a:bodyPr wrap="square">
-            <a:spAutoFit/>
-          </a:bodyPr>
-          <a:lstStyle/>
-          <a:p>
-            <a:pPr algn="l"/>
-            <a:r>
-              <a:rPr sz="1000" b="1" i="0">
-                <a:solidFill>
-                  <a:srgbClr val="2E75B6"/>
-                </a:solidFill>
-              </a:rPr>
-              <a:t>Interpretation</a:t>
-            </a:r>
-          </a:p>
-        </p:txBody>
-      </p:sp>
-      <p:sp>
-        <p:nvSpPr>
-          <p:cNvPr id="25" name="TextBox 24"/>
-          <p:cNvSpPr txBox="1"/>
-          <p:nvPr/>
-        </p:nvSpPr>
-        <p:spPr>
-          <a:xfrm>
-            <a:off x="8549640" y="5047488"/>
-            <a:ext cx="3108960" cy="1261872"/>
-          </a:xfrm>
-          <a:prstGeom prst="rect">
-            <a:avLst/>
-          </a:prstGeom>
-          <a:noFill/>
-        </p:spPr>
-        <p:txBody>
-          <a:bodyPr wrap="square">
-            <a:spAutoFit/>
-          </a:bodyPr>
-          <a:lstStyle/>
-          <a:p>
-            <a:pPr algn="l"/>
-            <a:r>
-              <a:rPr sz="1000" b="0" i="1">
-                <a:solidFill>
-                  <a:srgbClr val="1A1A1A"/>
-                </a:solidFill>
-              </a:rPr>
               <a:t>Time-course data provides richer biological insight than endpoint alone — a perturbagen with a delayed growth rate change may reflect an indirect or adaptive cellular response.</a:t>
             </a:r>
           </a:p>
@@ -10542,89 +12086,7 @@
       </p:sp>
       <p:sp>
         <p:nvSpPr>
-          <p:cNvPr id="26" name="Rectangle 25"/>
-          <p:cNvSpPr/>
-          <p:nvPr/>
-        </p:nvSpPr>
-        <p:spPr>
-          <a:xfrm>
-            <a:off x="274320" y="6473952"/>
-            <a:ext cx="11640312" cy="0"/>
-          </a:xfrm>
-          <a:prstGeom prst="rect">
-            <a:avLst/>
-          </a:prstGeom>
-          <a:noFill/>
-          <a:ln>
-            <a:noFill/>
-          </a:ln>
-        </p:spPr>
-        <p:style>
-          <a:lnRef idx="1">
-            <a:schemeClr val="accent1"/>
-          </a:lnRef>
-          <a:fillRef idx="3">
-            <a:schemeClr val="accent1"/>
-          </a:fillRef>
-          <a:effectRef idx="2">
-            <a:schemeClr val="accent1"/>
-          </a:effectRef>
-          <a:fontRef idx="minor">
-            <a:schemeClr val="lt1"/>
-          </a:fontRef>
-        </p:style>
-        <p:txBody>
-          <a:bodyPr rtlCol="0" anchor="ctr"/>
-          <a:lstStyle/>
-          <a:p>
-            <a:pPr algn="ctr"/>
-          </a:p>
-        </p:txBody>
-      </p:sp>
-      <p:sp>
-        <p:nvSpPr>
-          <p:cNvPr id="27" name="Rectangle 26"/>
-          <p:cNvSpPr/>
-          <p:nvPr/>
-        </p:nvSpPr>
-        <p:spPr>
-          <a:xfrm>
-            <a:off x="274320" y="6473952"/>
-            <a:ext cx="6400800" cy="0"/>
-          </a:xfrm>
-          <a:prstGeom prst="rect">
-            <a:avLst/>
-          </a:prstGeom>
-          <a:noFill/>
-          <a:ln>
-            <a:noFill/>
-          </a:ln>
-        </p:spPr>
-        <p:style>
-          <a:lnRef idx="1">
-            <a:schemeClr val="accent1"/>
-          </a:lnRef>
-          <a:fillRef idx="3">
-            <a:schemeClr val="accent1"/>
-          </a:fillRef>
-          <a:effectRef idx="2">
-            <a:schemeClr val="accent1"/>
-          </a:effectRef>
-          <a:fontRef idx="minor">
-            <a:schemeClr val="lt1"/>
-          </a:fontRef>
-        </p:style>
-        <p:txBody>
-          <a:bodyPr rtlCol="0" anchor="ctr"/>
-          <a:lstStyle/>
-          <a:p>
-            <a:pPr algn="ctr"/>
-          </a:p>
-        </p:txBody>
-      </p:sp>
-      <p:sp>
-        <p:nvSpPr>
-          <p:cNvPr id="28" name="Rectangle 27"/>
+          <p:cNvPr id="66" name="Rectangle 65"/>
           <p:cNvSpPr/>
           <p:nvPr/>
         </p:nvSpPr>
@@ -10667,7 +12129,7 @@
       </p:sp>
       <p:sp>
         <p:nvSpPr>
-          <p:cNvPr id="29" name="TextBox 28"/>
+          <p:cNvPr id="67" name="TextBox 66"/>
           <p:cNvSpPr txBox="1"/>
           <p:nvPr/>
         </p:nvSpPr>
@@ -10701,7 +12163,7 @@
       </p:sp>
       <p:sp>
         <p:nvSpPr>
-          <p:cNvPr id="30" name="TextBox 29"/>
+          <p:cNvPr id="68" name="TextBox 67"/>
           <p:cNvSpPr txBox="1"/>
           <p:nvPr/>
         </p:nvSpPr>

--- a/HTSplotter_Summary.pptx
+++ b/HTSplotter_Summary.pptx
@@ -11,6 +11,7 @@
     <p:sldId id="259" r:id="rId10"/>
     <p:sldId id="260" r:id="rId11"/>
     <p:sldId id="261" r:id="rId12"/>
+    <p:sldId id="262" r:id="rId13"/>
   </p:sldIdLst>
   <p:sldSz cx="12188952" cy="6858000" type="screen4x3"/>
   <p:notesSz cx="6858000" cy="9144000"/>
@@ -3779,7 +3780,7 @@
                   <a:srgbClr val="FFFFFF"/>
                 </a:solidFill>
               </a:rPr>
-              <a:t>Slide 1 of 6</a:t>
+              <a:t>Slide 1 of 7</a:t>
             </a:r>
           </a:p>
         </p:txBody>
@@ -5788,7 +5789,7 @@
                   <a:srgbClr val="FFFFFF"/>
                 </a:solidFill>
               </a:rPr>
-              <a:t>Slide 2 of 6</a:t>
+              <a:t>Slide 2 of 7</a:t>
             </a:r>
           </a:p>
         </p:txBody>
@@ -7738,7 +7739,84 @@
       </p:sp>
       <p:sp>
         <p:nvSpPr>
-          <p:cNvPr id="50" name="TextBox 49"/>
+          <p:cNvPr id="50" name="Rectangle 49"/>
+          <p:cNvSpPr/>
+          <p:nvPr/>
+        </p:nvSpPr>
+        <p:spPr>
+          <a:xfrm>
+            <a:off x="5120640" y="3200400"/>
+            <a:ext cx="2331720" cy="292608"/>
+          </a:xfrm>
+          <a:prstGeom prst="rect">
+            <a:avLst/>
+          </a:prstGeom>
+          <a:solidFill>
+            <a:srgbClr val="5B2D8E"/>
+          </a:solidFill>
+          <a:ln>
+            <a:noFill/>
+          </a:ln>
+        </p:spPr>
+        <p:style>
+          <a:lnRef idx="1">
+            <a:schemeClr val="accent1"/>
+          </a:lnRef>
+          <a:fillRef idx="3">
+            <a:schemeClr val="accent1"/>
+          </a:fillRef>
+          <a:effectRef idx="2">
+            <a:schemeClr val="accent1"/>
+          </a:effectRef>
+          <a:fontRef idx="minor">
+            <a:schemeClr val="lt1"/>
+          </a:fontRef>
+        </p:style>
+        <p:txBody>
+          <a:bodyPr rtlCol="0" anchor="ctr"/>
+          <a:lstStyle/>
+          <a:p>
+            <a:pPr algn="ctr"/>
+          </a:p>
+        </p:txBody>
+      </p:sp>
+      <p:sp>
+        <p:nvSpPr>
+          <p:cNvPr id="51" name="TextBox 50"/>
+          <p:cNvSpPr txBox="1"/>
+          <p:nvPr/>
+        </p:nvSpPr>
+        <p:spPr>
+          <a:xfrm>
+            <a:off x="5193792" y="3236976"/>
+            <a:ext cx="2221991" cy="237744"/>
+          </a:xfrm>
+          <a:prstGeom prst="rect">
+            <a:avLst/>
+          </a:prstGeom>
+          <a:noFill/>
+        </p:spPr>
+        <p:txBody>
+          <a:bodyPr wrap="square">
+            <a:spAutoFit/>
+          </a:bodyPr>
+          <a:lstStyle/>
+          <a:p>
+            <a:pPr algn="l"/>
+            <a:r>
+              <a:rPr sz="1000" b="1" i="0">
+                <a:solidFill>
+                  <a:srgbClr val="FFFFFF"/>
+                </a:solidFill>
+              </a:rPr>
+              <a:t>🤖  AI-Assisted Interpretation</a:t>
+            </a:r>
+          </a:p>
+        </p:txBody>
+      </p:sp>
+      <p:sp>
+        <p:nvSpPr>
+          <p:cNvPr id="52" name="TextBox 51"/>
           <p:cNvSpPr txBox="1"/>
           <p:nvPr/>
         </p:nvSpPr>
@@ -7836,7 +7914,7 @@
       </p:sp>
       <p:sp>
         <p:nvSpPr>
-          <p:cNvPr id="51" name="TextBox 50"/>
+          <p:cNvPr id="53" name="TextBox 52"/>
           <p:cNvSpPr txBox="1"/>
           <p:nvPr/>
         </p:nvSpPr>
@@ -7870,7 +7948,7 @@
       </p:sp>
       <p:sp>
         <p:nvSpPr>
-          <p:cNvPr id="52" name="TextBox 51"/>
+          <p:cNvPr id="54" name="TextBox 53"/>
           <p:cNvSpPr txBox="1"/>
           <p:nvPr/>
         </p:nvSpPr>
@@ -7904,7 +7982,7 @@
       </p:sp>
       <p:sp>
         <p:nvSpPr>
-          <p:cNvPr id="53" name="Rectangle 52"/>
+          <p:cNvPr id="55" name="Rectangle 54"/>
           <p:cNvSpPr/>
           <p:nvPr/>
         </p:nvSpPr>
@@ -7947,7 +8025,7 @@
       </p:sp>
       <p:sp>
         <p:nvSpPr>
-          <p:cNvPr id="54" name="TextBox 53"/>
+          <p:cNvPr id="56" name="TextBox 55"/>
           <p:cNvSpPr txBox="1"/>
           <p:nvPr/>
         </p:nvSpPr>
@@ -7981,7 +8059,7 @@
       </p:sp>
       <p:sp>
         <p:nvSpPr>
-          <p:cNvPr id="55" name="TextBox 54"/>
+          <p:cNvPr id="57" name="TextBox 56"/>
           <p:cNvSpPr txBox="1"/>
           <p:nvPr/>
         </p:nvSpPr>
@@ -8015,7 +8093,7 @@
       </p:sp>
       <p:sp>
         <p:nvSpPr>
-          <p:cNvPr id="56" name="Rectangle 55"/>
+          <p:cNvPr id="58" name="Rectangle 57"/>
           <p:cNvSpPr/>
           <p:nvPr/>
         </p:nvSpPr>
@@ -8058,7 +8136,7 @@
       </p:sp>
       <p:sp>
         <p:nvSpPr>
-          <p:cNvPr id="57" name="TextBox 56"/>
+          <p:cNvPr id="59" name="TextBox 58"/>
           <p:cNvSpPr txBox="1"/>
           <p:nvPr/>
         </p:nvSpPr>
@@ -8092,7 +8170,7 @@
       </p:sp>
       <p:sp>
         <p:nvSpPr>
-          <p:cNvPr id="58" name="TextBox 57"/>
+          <p:cNvPr id="60" name="TextBox 59"/>
           <p:cNvSpPr txBox="1"/>
           <p:nvPr/>
         </p:nvSpPr>
@@ -8126,7 +8204,7 @@
       </p:sp>
       <p:sp>
         <p:nvSpPr>
-          <p:cNvPr id="59" name="Rectangle 58"/>
+          <p:cNvPr id="61" name="Rectangle 60"/>
           <p:cNvSpPr/>
           <p:nvPr/>
         </p:nvSpPr>
@@ -8169,7 +8247,7 @@
       </p:sp>
       <p:sp>
         <p:nvSpPr>
-          <p:cNvPr id="60" name="TextBox 59"/>
+          <p:cNvPr id="62" name="TextBox 61"/>
           <p:cNvSpPr txBox="1"/>
           <p:nvPr/>
         </p:nvSpPr>
@@ -8203,7 +8281,7 @@
       </p:sp>
       <p:sp>
         <p:nvSpPr>
-          <p:cNvPr id="61" name="Rectangle 60"/>
+          <p:cNvPr id="63" name="Rectangle 62"/>
           <p:cNvSpPr/>
           <p:nvPr/>
         </p:nvSpPr>
@@ -8246,7 +8324,7 @@
       </p:sp>
       <p:sp>
         <p:nvSpPr>
-          <p:cNvPr id="62" name="TextBox 61"/>
+          <p:cNvPr id="64" name="TextBox 63"/>
           <p:cNvSpPr txBox="1"/>
           <p:nvPr/>
         </p:nvSpPr>
@@ -8273,14 +8351,14 @@
                   <a:srgbClr val="FFFFFF"/>
                 </a:solidFill>
               </a:rPr>
-              <a:t>Slide 3 of 6</a:t>
-            </a:r>
-          </a:p>
-        </p:txBody>
-      </p:sp>
-      <p:sp>
-        <p:nvSpPr>
-          <p:cNvPr id="63" name="TextBox 62"/>
+              <a:t>Slide 3 of 7</a:t>
+            </a:r>
+          </a:p>
+        </p:txBody>
+      </p:sp>
+      <p:sp>
+        <p:nvSpPr>
+          <p:cNvPr id="65" name="TextBox 64"/>
           <p:cNvSpPr txBox="1"/>
           <p:nvPr/>
         </p:nvSpPr>
@@ -8453,7 +8531,7 @@
                   <a:srgbClr val="FFFFFF"/>
                 </a:solidFill>
               </a:rPr>
-              <a:t>Drug Combination Synergy — Bliss Independence Model</a:t>
+              <a:t>Drug Combination: MK-1775 + Prexasertib — Bliss Independence Model</a:t>
             </a:r>
           </a:p>
         </p:txBody>
@@ -8487,7 +8565,7 @@
                   <a:srgbClr val="BDD7EE"/>
                 </a:solidFill>
               </a:rPr>
-              <a:t>MK-1775 combined with Prexasertib and BAY1895344  ·  MCF7 cells  ·  7×7 dose matrix  ·  72 h</a:t>
+              <a:t>WEE1 inhibitor + CHK1/2 inhibitor  ·  MCF7 cells  ·  7×7 dose matrix  ·  72 h</a:t>
             </a:r>
           </a:p>
         </p:txBody>
@@ -8501,7 +8579,7 @@
         <p:spPr>
           <a:xfrm>
             <a:off x="274320" y="914400"/>
-            <a:ext cx="11612880" cy="502920"/>
+            <a:ext cx="11640312" cy="457200"/>
           </a:xfrm>
           <a:prstGeom prst="rect">
             <a:avLst/>
@@ -8545,8 +8623,8 @@
         </p:nvSpPr>
         <p:spPr>
           <a:xfrm>
-            <a:off x="457200" y="969264"/>
-            <a:ext cx="11247120" cy="384048"/>
+            <a:off x="457200" y="987552"/>
+            <a:ext cx="11247120" cy="310896"/>
           </a:xfrm>
           <a:prstGeom prst="rect">
             <a:avLst/>
@@ -8566,7 +8644,7 @@
                   <a:srgbClr val="1A375E"/>
                 </a:solidFill>
               </a:rPr>
-              <a:t>Bliss independence assumes the two drugs act independently. A Bliss score &gt; 0 means the combination is more effective than predicted (synergy); &lt; 0 means less effective (antagonism); ≈ 0 means additive.</a:t>
+              <a:t>Bliss score &gt; 0 = synergy (combination exceeds predicted additive effect)  ·  = 0 = additive  ·  &lt; 0 = antagonism</a:t>
             </a:r>
           </a:p>
         </p:txBody>
@@ -8579,53 +8657,8 @@
         </p:nvSpPr>
         <p:spPr>
           <a:xfrm>
-            <a:off x="274320" y="1508760"/>
-            <a:ext cx="11612880" cy="2331720"/>
-          </a:xfrm>
-          <a:prstGeom prst="rect">
-            <a:avLst/>
-          </a:prstGeom>
-          <a:solidFill>
-            <a:srgbClr val="E8F5E9"/>
-          </a:solidFill>
-          <a:ln w="19050">
-            <a:solidFill>
-              <a:srgbClr val="379637"/>
-            </a:solidFill>
-          </a:ln>
-        </p:spPr>
-        <p:style>
-          <a:lnRef idx="1">
-            <a:schemeClr val="accent1"/>
-          </a:lnRef>
-          <a:fillRef idx="3">
-            <a:schemeClr val="accent1"/>
-          </a:fillRef>
-          <a:effectRef idx="2">
-            <a:schemeClr val="accent1"/>
-          </a:effectRef>
-          <a:fontRef idx="minor">
-            <a:schemeClr val="lt1"/>
-          </a:fontRef>
-        </p:style>
-        <p:txBody>
-          <a:bodyPr rtlCol="0" anchor="ctr"/>
-          <a:lstStyle/>
-          <a:p>
-            <a:pPr algn="ctr"/>
-          </a:p>
-        </p:txBody>
-      </p:sp>
-      <p:sp>
-        <p:nvSpPr>
-          <p:cNvPr id="9" name="Rectangle 8"/>
-          <p:cNvSpPr/>
-          <p:nvPr/>
-        </p:nvSpPr>
-        <p:spPr>
-          <a:xfrm>
-            <a:off x="274320" y="1508760"/>
-            <a:ext cx="11612880" cy="438912"/>
+            <a:off x="274320" y="1463040"/>
+            <a:ext cx="11640312" cy="530352"/>
           </a:xfrm>
           <a:prstGeom prst="rect">
             <a:avLst/>
@@ -8661,34 +8694,68 @@
       </p:sp>
       <p:sp>
         <p:nvSpPr>
+          <p:cNvPr id="9" name="TextBox 8"/>
+          <p:cNvSpPr txBox="1"/>
+          <p:nvPr/>
+        </p:nvSpPr>
+        <p:spPr>
+          <a:xfrm>
+            <a:off x="457200" y="1527048"/>
+            <a:ext cx="8229600" cy="384048"/>
+          </a:xfrm>
+          <a:prstGeom prst="rect">
+            <a:avLst/>
+          </a:prstGeom>
+          <a:noFill/>
+        </p:spPr>
+        <p:txBody>
+          <a:bodyPr wrap="square">
+            <a:spAutoFit/>
+          </a:bodyPr>
+          <a:lstStyle/>
+          <a:p>
+            <a:pPr algn="l"/>
+            <a:r>
+              <a:rPr sz="1800" b="1" i="0">
+                <a:solidFill>
+                  <a:srgbClr val="FFFFFF"/>
+                </a:solidFill>
+              </a:rPr>
+              <a:t>Result:  SYNERGISTIC  —  Max Bliss score +0.56</a:t>
+            </a:r>
+          </a:p>
+        </p:txBody>
+      </p:sp>
+      <p:sp>
+        <p:nvSpPr>
           <p:cNvPr id="10" name="TextBox 9"/>
           <p:cNvSpPr txBox="1"/>
           <p:nvPr/>
         </p:nvSpPr>
         <p:spPr>
           <a:xfrm>
-            <a:off x="457200" y="1572768"/>
-            <a:ext cx="7315200" cy="320040"/>
-          </a:xfrm>
-          <a:prstGeom prst="rect">
-            <a:avLst/>
-          </a:prstGeom>
-          <a:noFill/>
-        </p:spPr>
-        <p:txBody>
-          <a:bodyPr wrap="square">
-            <a:spAutoFit/>
-          </a:bodyPr>
-          <a:lstStyle/>
-          <a:p>
-            <a:pPr algn="l"/>
-            <a:r>
-              <a:rPr sz="1500" b="1" i="0">
+            <a:off x="10058400" y="1536192"/>
+            <a:ext cx="1691640" cy="347472"/>
+          </a:xfrm>
+          <a:prstGeom prst="rect">
+            <a:avLst/>
+          </a:prstGeom>
+          <a:noFill/>
+        </p:spPr>
+        <p:txBody>
+          <a:bodyPr wrap="square">
+            <a:spAutoFit/>
+          </a:bodyPr>
+          <a:lstStyle/>
+          <a:p>
+            <a:pPr algn="ctr"/>
+            <a:r>
+              <a:rPr sz="1300" b="1" i="0">
                 <a:solidFill>
                   <a:srgbClr val="FFFFFF"/>
                 </a:solidFill>
               </a:rPr>
-              <a:t>MK-1775  +  Prexasertib</a:t>
+              <a:t>✅ COMPLETE</a:t>
             </a:r>
           </a:p>
         </p:txBody>
@@ -8701,17 +8768,19 @@
         </p:nvSpPr>
         <p:spPr>
           <a:xfrm>
-            <a:off x="8869680" y="1572768"/>
-            <a:ext cx="2834640" cy="320040"/>
+            <a:off x="274320" y="2084831"/>
+            <a:ext cx="7132320" cy="4315968"/>
           </a:xfrm>
           <a:prstGeom prst="rect">
             <a:avLst/>
           </a:prstGeom>
           <a:solidFill>
-            <a:srgbClr val="FFFFFF"/>
+            <a:srgbClr val="E8F5E9"/>
           </a:solidFill>
-          <a:ln>
-            <a:noFill/>
+          <a:ln w="12700">
+            <a:solidFill>
+              <a:srgbClr val="379637"/>
+            </a:solidFill>
           </a:ln>
         </p:spPr>
         <p:style>
@@ -8744,28 +8813,28 @@
         </p:nvSpPr>
         <p:spPr>
           <a:xfrm>
-            <a:off x="8887968" y="1581912"/>
-            <a:ext cx="2798064" cy="274320"/>
-          </a:xfrm>
-          <a:prstGeom prst="rect">
-            <a:avLst/>
-          </a:prstGeom>
-          <a:noFill/>
-        </p:spPr>
-        <p:txBody>
-          <a:bodyPr wrap="square">
-            <a:spAutoFit/>
-          </a:bodyPr>
-          <a:lstStyle/>
-          <a:p>
-            <a:pPr algn="ctr"/>
-            <a:r>
-              <a:rPr sz="1200" b="1" i="0">
-                <a:solidFill>
-                  <a:srgbClr val="379637"/>
-                </a:solidFill>
-              </a:rPr>
-              <a:t>SYNERGISTIC</a:t>
+            <a:off x="457200" y="2157984"/>
+            <a:ext cx="4572000" cy="347472"/>
+          </a:xfrm>
+          <a:prstGeom prst="rect">
+            <a:avLst/>
+          </a:prstGeom>
+          <a:noFill/>
+        </p:spPr>
+        <p:txBody>
+          <a:bodyPr wrap="square">
+            <a:spAutoFit/>
+          </a:bodyPr>
+          <a:lstStyle/>
+          <a:p>
+            <a:pPr algn="l"/>
+            <a:r>
+              <a:rPr sz="1500" b="1" i="0">
+                <a:solidFill>
+                  <a:srgbClr val="1A375E"/>
+                </a:solidFill>
+              </a:rPr>
+              <a:t>Key Findings</a:t>
             </a:r>
           </a:p>
         </p:txBody>
@@ -8778,8 +8847,8 @@
         </p:nvSpPr>
         <p:spPr>
           <a:xfrm>
-            <a:off x="411480" y="2029967"/>
-            <a:ext cx="6858000" cy="1691640"/>
+            <a:off x="457200" y="2578608"/>
+            <a:ext cx="6675120" cy="3474720"/>
           </a:xfrm>
           <a:prstGeom prst="rect">
             <a:avLst/>
@@ -8798,12 +8867,12 @@
               </a:spcBef>
             </a:pPr>
             <a:r>
-              <a:rPr sz="1100">
+              <a:rPr sz="1200">
                 <a:solidFill>
                   <a:srgbClr val="1A1A1A"/>
                 </a:solidFill>
               </a:rPr>
-              <a:t>•  Max Bliss score: +0.56  (MK-1775 1,235 nM + Prexasertib 4.7 nM)</a:t>
+              <a:t>•  Max Bliss score: +0.56  at MK-1775 1,235 nM + Prexasertib 4.7 nM</a:t>
             </a:r>
           </a:p>
           <a:p>
@@ -8813,7 +8882,7 @@
               </a:spcBef>
             </a:pPr>
             <a:r>
-              <a:rPr sz="1100">
+              <a:rPr sz="1200">
                 <a:solidFill>
                   <a:srgbClr val="1A1A1A"/>
                 </a:solidFill>
@@ -8828,12 +8897,12 @@
               </a:spcBef>
             </a:pPr>
             <a:r>
-              <a:rPr sz="1100">
+              <a:rPr sz="1200">
                 <a:solidFill>
                   <a:srgbClr val="1A1A1A"/>
                 </a:solidFill>
               </a:rPr>
-              <a:t>•  Synergy diminishes at saturating MK-1775 concentrations (≥11,111 nM) — ceiling effect as single agent effect dominates</a:t>
+              <a:t>•  Synergy diminishes at saturating MK-1775 doses (≥11,111 nM) — ceiling effect as single-agent dominates</a:t>
             </a:r>
           </a:p>
           <a:p>
@@ -8843,36 +8912,100 @@
               </a:spcBef>
             </a:pPr>
             <a:r>
-              <a:rPr sz="1100">
+              <a:rPr sz="1200">
                 <a:solidFill>
                   <a:srgbClr val="1A1A1A"/>
                 </a:solidFill>
               </a:rPr>
-              <a:t>•  Pattern consistent across both 1-timepoint and multi-timepoint datasets</a:t>
-            </a:r>
-          </a:p>
-        </p:txBody>
-      </p:sp>
-      <p:sp>
-        <p:nvSpPr>
-          <p:cNvPr id="14" name="Rectangle 13"/>
+              <a:t>•  Pattern consistent across 1-timepoint and multi-timepoint (37 TP) datasets</a:t>
+            </a:r>
+          </a:p>
+          <a:p>
+            <a:pPr>
+              <a:spcBef>
+                <a:spcPts val="400"/>
+              </a:spcBef>
+            </a:pPr>
+            <a:r>
+              <a:rPr sz="1200">
+                <a:solidFill>
+                  <a:srgbClr val="1A1A1A"/>
+                </a:solidFill>
+              </a:rPr>
+              <a:t>•  MK-1775 IC₅₀ = 657 nM  |  Prexasertib IC₅₀ = 10 nM as single agents</a:t>
+            </a:r>
+          </a:p>
+          <a:p>
+            <a:pPr>
+              <a:spcBef>
+                <a:spcPts val="400"/>
+              </a:spcBef>
+            </a:pPr>
+            <a:r>
+              <a:rPr sz="1200">
+                <a:solidFill>
+                  <a:srgbClr val="1A1A1A"/>
+                </a:solidFill>
+              </a:rPr>
+              <a:t>•  Combination achieves greater inhibition at sub-IC₅₀ doses of both drugs</a:t>
+            </a:r>
+          </a:p>
+        </p:txBody>
+      </p:sp>
+      <p:sp>
+        <p:nvSpPr>
+          <p:cNvPr id="14" name="TextBox 13"/>
+          <p:cNvSpPr txBox="1"/>
+          <p:nvPr/>
+        </p:nvSpPr>
+        <p:spPr>
+          <a:xfrm>
+            <a:off x="457200" y="5486400"/>
+            <a:ext cx="3657600" cy="274320"/>
+          </a:xfrm>
+          <a:prstGeom prst="rect">
+            <a:avLst/>
+          </a:prstGeom>
+          <a:noFill/>
+        </p:spPr>
+        <p:txBody>
+          <a:bodyPr wrap="square">
+            <a:spAutoFit/>
+          </a:bodyPr>
+          <a:lstStyle/>
+          <a:p>
+            <a:pPr algn="l"/>
+            <a:r>
+              <a:rPr sz="1100" b="1" i="0">
+                <a:solidFill>
+                  <a:srgbClr val="1A375E"/>
+                </a:solidFill>
+              </a:rPr>
+              <a:t>Bliss Score Distribution</a:t>
+            </a:r>
+          </a:p>
+        </p:txBody>
+      </p:sp>
+      <p:sp>
+        <p:nvSpPr>
+          <p:cNvPr id="15" name="Rectangle 14"/>
           <p:cNvSpPr/>
           <p:nvPr/>
         </p:nvSpPr>
         <p:spPr>
           <a:xfrm>
-            <a:off x="7406640" y="2011680"/>
-            <a:ext cx="4343400" cy="1719072"/>
+            <a:off x="457200" y="5806440"/>
+            <a:ext cx="1280160" cy="502920"/>
           </a:xfrm>
           <a:prstGeom prst="rect">
             <a:avLst/>
           </a:prstGeom>
           <a:solidFill>
-            <a:srgbClr val="FFFFFF"/>
+            <a:srgbClr val="FFCC99"/>
           </a:solidFill>
-          <a:ln w="10160">
+          <a:ln w="6350">
             <a:solidFill>
-              <a:srgbClr val="379637"/>
+              <a:srgbClr val="AAAAAA"/>
             </a:solidFill>
           </a:ln>
         </p:spPr>
@@ -8900,92 +9033,24 @@
       </p:sp>
       <p:sp>
         <p:nvSpPr>
-          <p:cNvPr id="15" name="TextBox 14"/>
-          <p:cNvSpPr txBox="1"/>
-          <p:nvPr/>
-        </p:nvSpPr>
-        <p:spPr>
-          <a:xfrm>
-            <a:off x="7543800" y="2057400"/>
-            <a:ext cx="4023360" cy="256032"/>
-          </a:xfrm>
-          <a:prstGeom prst="rect">
-            <a:avLst/>
-          </a:prstGeom>
-          <a:noFill/>
-        </p:spPr>
-        <p:txBody>
-          <a:bodyPr wrap="square">
-            <a:spAutoFit/>
-          </a:bodyPr>
-          <a:lstStyle/>
-          <a:p>
-            <a:pPr algn="l"/>
-            <a:r>
-              <a:rPr sz="1000" b="1" i="0">
-                <a:solidFill>
-                  <a:srgbClr val="379637"/>
-                </a:solidFill>
-              </a:rPr>
-              <a:t>Interpretation</a:t>
-            </a:r>
-          </a:p>
-        </p:txBody>
-      </p:sp>
-      <p:sp>
-        <p:nvSpPr>
-          <p:cNvPr id="16" name="TextBox 15"/>
-          <p:cNvSpPr txBox="1"/>
-          <p:nvPr/>
-        </p:nvSpPr>
-        <p:spPr>
-          <a:xfrm>
-            <a:off x="7543800" y="2350008"/>
-            <a:ext cx="4069080" cy="1280160"/>
-          </a:xfrm>
-          <a:prstGeom prst="rect">
-            <a:avLst/>
-          </a:prstGeom>
-          <a:noFill/>
-        </p:spPr>
-        <p:txBody>
-          <a:bodyPr wrap="square">
-            <a:spAutoFit/>
-          </a:bodyPr>
-          <a:lstStyle/>
-          <a:p>
-            <a:pPr algn="l"/>
-            <a:r>
-              <a:rPr sz="1000" b="0" i="1">
-                <a:solidFill>
-                  <a:srgbClr val="1A1A1A"/>
-                </a:solidFill>
-              </a:rPr>
-              <a:t>These two checkpoint kinase inhibitors (WEE1 + CHK1/2) show clear synergy at clinically relevant dose combinations, supporting their combined use in MCF7 cells.</a:t>
-            </a:r>
-          </a:p>
-        </p:txBody>
-      </p:sp>
-      <p:sp>
-        <p:nvSpPr>
-          <p:cNvPr id="17" name="Rectangle 16"/>
+          <p:cNvPr id="16" name="Rectangle 15"/>
           <p:cNvSpPr/>
           <p:nvPr/>
         </p:nvSpPr>
         <p:spPr>
           <a:xfrm>
-            <a:off x="274320" y="4023360"/>
-            <a:ext cx="11612880" cy="2331720"/>
+            <a:off x="1737360" y="5806440"/>
+            <a:ext cx="1280160" cy="502920"/>
           </a:xfrm>
           <a:prstGeom prst="rect">
             <a:avLst/>
           </a:prstGeom>
           <a:solidFill>
-            <a:srgbClr val="FFF8F0"/>
+            <a:srgbClr val="F2F2F2"/>
           </a:solidFill>
-          <a:ln w="19050">
+          <a:ln w="6350">
             <a:solidFill>
-              <a:srgbClr val="C55A11"/>
+              <a:srgbClr val="AAAAAA"/>
             </a:solidFill>
           </a:ln>
         </p:spPr>
@@ -9013,23 +9078,25 @@
       </p:sp>
       <p:sp>
         <p:nvSpPr>
-          <p:cNvPr id="18" name="Rectangle 17"/>
+          <p:cNvPr id="17" name="Rectangle 16"/>
           <p:cNvSpPr/>
           <p:nvPr/>
         </p:nvSpPr>
         <p:spPr>
           <a:xfrm>
-            <a:off x="274320" y="4023360"/>
-            <a:ext cx="11612880" cy="438912"/>
+            <a:off x="3017520" y="5806440"/>
+            <a:ext cx="3931920" cy="502920"/>
           </a:xfrm>
           <a:prstGeom prst="rect">
             <a:avLst/>
           </a:prstGeom>
           <a:solidFill>
-            <a:srgbClr val="C55A11"/>
+            <a:srgbClr val="C8E6C9"/>
           </a:solidFill>
-          <a:ln>
-            <a:noFill/>
+          <a:ln w="6350">
+            <a:solidFill>
+              <a:srgbClr val="AAAAAA"/>
+            </a:solidFill>
           </a:ln>
         </p:spPr>
         <p:style>
@@ -9056,14 +9123,48 @@
       </p:sp>
       <p:sp>
         <p:nvSpPr>
+          <p:cNvPr id="18" name="TextBox 17"/>
+          <p:cNvSpPr txBox="1"/>
+          <p:nvPr/>
+        </p:nvSpPr>
+        <p:spPr>
+          <a:xfrm>
+            <a:off x="502920" y="5833872"/>
+            <a:ext cx="1188720" cy="438912"/>
+          </a:xfrm>
+          <a:prstGeom prst="rect">
+            <a:avLst/>
+          </a:prstGeom>
+          <a:noFill/>
+        </p:spPr>
+        <p:txBody>
+          <a:bodyPr wrap="square">
+            <a:spAutoFit/>
+          </a:bodyPr>
+          <a:lstStyle/>
+          <a:p>
+            <a:pPr algn="l"/>
+            <a:r>
+              <a:rPr sz="900" b="0" i="0">
+                <a:solidFill>
+                  <a:srgbClr val="C55A11"/>
+                </a:solidFill>
+              </a:rPr>
+              <a:t>Antagonism  &lt; 0</a:t>
+            </a:r>
+          </a:p>
+        </p:txBody>
+      </p:sp>
+      <p:sp>
+        <p:nvSpPr>
           <p:cNvPr id="19" name="TextBox 18"/>
           <p:cNvSpPr txBox="1"/>
           <p:nvPr/>
         </p:nvSpPr>
         <p:spPr>
           <a:xfrm>
-            <a:off x="457200" y="4087368"/>
-            <a:ext cx="7315200" cy="320040"/>
+            <a:off x="1783080" y="5833872"/>
+            <a:ext cx="1188720" cy="438912"/>
           </a:xfrm>
           <a:prstGeom prst="rect">
             <a:avLst/>
@@ -9078,35 +9179,71 @@
           <a:p>
             <a:pPr algn="l"/>
             <a:r>
-              <a:rPr sz="1500" b="1" i="0">
-                <a:solidFill>
-                  <a:srgbClr val="FFFFFF"/>
-                </a:solidFill>
-              </a:rPr>
-              <a:t>MK-1775  +  BAY1895344</a:t>
-            </a:r>
-          </a:p>
-        </p:txBody>
-      </p:sp>
-      <p:sp>
-        <p:nvSpPr>
-          <p:cNvPr id="20" name="Rectangle 19"/>
+              <a:rPr sz="900" b="0" i="0">
+                <a:solidFill>
+                  <a:srgbClr val="1A1A1A"/>
+                </a:solidFill>
+              </a:rPr>
+              <a:t>Additive  ≈ 0</a:t>
+            </a:r>
+          </a:p>
+        </p:txBody>
+      </p:sp>
+      <p:sp>
+        <p:nvSpPr>
+          <p:cNvPr id="20" name="TextBox 19"/>
+          <p:cNvSpPr txBox="1"/>
+          <p:nvPr/>
+        </p:nvSpPr>
+        <p:spPr>
+          <a:xfrm>
+            <a:off x="3063240" y="5833872"/>
+            <a:ext cx="3840480" cy="438912"/>
+          </a:xfrm>
+          <a:prstGeom prst="rect">
+            <a:avLst/>
+          </a:prstGeom>
+          <a:noFill/>
+        </p:spPr>
+        <p:txBody>
+          <a:bodyPr wrap="square">
+            <a:spAutoFit/>
+          </a:bodyPr>
+          <a:lstStyle/>
+          <a:p>
+            <a:pPr algn="l"/>
+            <a:r>
+              <a:rPr sz="900" b="1" i="0">
+                <a:solidFill>
+                  <a:srgbClr val="379637"/>
+                </a:solidFill>
+              </a:rPr>
+              <a:t>Synergy  0 → +0.56  ★ peak observed</a:t>
+            </a:r>
+          </a:p>
+        </p:txBody>
+      </p:sp>
+      <p:sp>
+        <p:nvSpPr>
+          <p:cNvPr id="21" name="Rectangle 20"/>
           <p:cNvSpPr/>
           <p:nvPr/>
         </p:nvSpPr>
         <p:spPr>
           <a:xfrm>
-            <a:off x="8869680" y="4087368"/>
-            <a:ext cx="2834640" cy="320040"/>
+            <a:off x="7680960" y="2084831"/>
+            <a:ext cx="4233672" cy="4315968"/>
           </a:xfrm>
           <a:prstGeom prst="rect">
             <a:avLst/>
           </a:prstGeom>
           <a:solidFill>
-            <a:srgbClr val="FFFFFF"/>
+            <a:srgbClr val="F3EEFA"/>
           </a:solidFill>
-          <a:ln>
-            <a:noFill/>
+          <a:ln w="19050">
+            <a:solidFill>
+              <a:srgbClr val="5B2D8E"/>
+            </a:solidFill>
           </a:ln>
         </p:spPr>
         <p:style>
@@ -9133,142 +9270,23 @@
       </p:sp>
       <p:sp>
         <p:nvSpPr>
-          <p:cNvPr id="21" name="TextBox 20"/>
-          <p:cNvSpPr txBox="1"/>
-          <p:nvPr/>
-        </p:nvSpPr>
-        <p:spPr>
-          <a:xfrm>
-            <a:off x="8887968" y="4096512"/>
-            <a:ext cx="2798064" cy="274320"/>
-          </a:xfrm>
-          <a:prstGeom prst="rect">
-            <a:avLst/>
-          </a:prstGeom>
-          <a:noFill/>
-        </p:spPr>
-        <p:txBody>
-          <a:bodyPr wrap="square">
-            <a:spAutoFit/>
-          </a:bodyPr>
-          <a:lstStyle/>
-          <a:p>
-            <a:pPr algn="ctr"/>
-            <a:r>
-              <a:rPr sz="1200" b="1" i="0">
-                <a:solidFill>
-                  <a:srgbClr val="C55A11"/>
-                </a:solidFill>
-              </a:rPr>
-              <a:t>WEAK / ADDITIVE</a:t>
-            </a:r>
-          </a:p>
-        </p:txBody>
-      </p:sp>
-      <p:sp>
-        <p:nvSpPr>
-          <p:cNvPr id="22" name="TextBox 21"/>
-          <p:cNvSpPr txBox="1"/>
-          <p:nvPr/>
-        </p:nvSpPr>
-        <p:spPr>
-          <a:xfrm>
-            <a:off x="411480" y="4544568"/>
-            <a:ext cx="6858000" cy="1691640"/>
-          </a:xfrm>
-          <a:prstGeom prst="rect">
-            <a:avLst/>
-          </a:prstGeom>
-          <a:noFill/>
-        </p:spPr>
-        <p:txBody>
-          <a:bodyPr wrap="square">
-            <a:spAutoFit/>
-          </a:bodyPr>
-          <a:lstStyle/>
-          <a:p>
-            <a:pPr>
-              <a:spcBef>
-                <a:spcPts val="400"/>
-              </a:spcBef>
-            </a:pPr>
-            <a:r>
-              <a:rPr sz="1100">
-                <a:solidFill>
-                  <a:srgbClr val="1A1A1A"/>
-                </a:solidFill>
-              </a:rPr>
-              <a:t>•  Max Bliss score: +0.42  (MK-1775 137 nM + BAY1895344 167 nM)</a:t>
-            </a:r>
-          </a:p>
-          <a:p>
-            <a:pPr>
-              <a:spcBef>
-                <a:spcPts val="400"/>
-              </a:spcBef>
-            </a:pPr>
-            <a:r>
-              <a:rPr sz="1100">
-                <a:solidFill>
-                  <a:srgbClr val="1A1A1A"/>
-                </a:solidFill>
-              </a:rPr>
-              <a:t>•  Majority of scores near zero — interaction is largely additive across the matrix</a:t>
-            </a:r>
-          </a:p>
-          <a:p>
-            <a:pPr>
-              <a:spcBef>
-                <a:spcPts val="400"/>
-              </a:spcBef>
-            </a:pPr>
-            <a:r>
-              <a:rPr sz="1100">
-                <a:solidFill>
-                  <a:srgbClr val="1A1A1A"/>
-                </a:solidFill>
-              </a:rPr>
-              <a:t>•  Occasional moderate synergy at specific dose pairs but no consistent pattern</a:t>
-            </a:r>
-          </a:p>
-          <a:p>
-            <a:pPr>
-              <a:spcBef>
-                <a:spcPts val="400"/>
-              </a:spcBef>
-            </a:pPr>
-            <a:r>
-              <a:rPr sz="1100">
-                <a:solidFill>
-                  <a:srgbClr val="1A1A1A"/>
-                </a:solidFill>
-              </a:rPr>
-              <a:t>•  Both 1-timepoint and multi-timepoint datasets show similar additive behaviour</a:t>
-            </a:r>
-          </a:p>
-        </p:txBody>
-      </p:sp>
-      <p:sp>
-        <p:nvSpPr>
-          <p:cNvPr id="23" name="Rectangle 22"/>
+          <p:cNvPr id="22" name="Rectangle 21"/>
           <p:cNvSpPr/>
           <p:nvPr/>
         </p:nvSpPr>
         <p:spPr>
           <a:xfrm>
-            <a:off x="7406640" y="4526280"/>
-            <a:ext cx="4343400" cy="1719072"/>
+            <a:off x="7818120" y="2157984"/>
+            <a:ext cx="2331720" cy="292608"/>
           </a:xfrm>
           <a:prstGeom prst="rect">
             <a:avLst/>
           </a:prstGeom>
           <a:solidFill>
-            <a:srgbClr val="FFFFFF"/>
+            <a:srgbClr val="5B2D8E"/>
           </a:solidFill>
-          <a:ln w="10160">
-            <a:solidFill>
-              <a:srgbClr val="C55A11"/>
-            </a:solidFill>
+          <a:ln>
+            <a:noFill/>
           </a:ln>
         </p:spPr>
         <p:style>
@@ -9295,14 +9313,48 @@
       </p:sp>
       <p:sp>
         <p:nvSpPr>
+          <p:cNvPr id="23" name="TextBox 22"/>
+          <p:cNvSpPr txBox="1"/>
+          <p:nvPr/>
+        </p:nvSpPr>
+        <p:spPr>
+          <a:xfrm>
+            <a:off x="7891272" y="2194560"/>
+            <a:ext cx="2221991" cy="237744"/>
+          </a:xfrm>
+          <a:prstGeom prst="rect">
+            <a:avLst/>
+          </a:prstGeom>
+          <a:noFill/>
+        </p:spPr>
+        <p:txBody>
+          <a:bodyPr wrap="square">
+            <a:spAutoFit/>
+          </a:bodyPr>
+          <a:lstStyle/>
+          <a:p>
+            <a:pPr algn="l"/>
+            <a:r>
+              <a:rPr sz="1000" b="1" i="0">
+                <a:solidFill>
+                  <a:srgbClr val="FFFFFF"/>
+                </a:solidFill>
+              </a:rPr>
+              <a:t>🤖  AI-Assisted Interpretation</a:t>
+            </a:r>
+          </a:p>
+        </p:txBody>
+      </p:sp>
+      <p:sp>
+        <p:nvSpPr>
           <p:cNvPr id="24" name="TextBox 23"/>
           <p:cNvSpPr txBox="1"/>
           <p:nvPr/>
         </p:nvSpPr>
         <p:spPr>
           <a:xfrm>
-            <a:off x="7543800" y="4572000"/>
-            <a:ext cx="4023360" cy="256032"/>
+            <a:off x="7818120" y="2514600"/>
+            <a:ext cx="3931920" cy="320040"/>
           </a:xfrm>
           <a:prstGeom prst="rect">
             <a:avLst/>
@@ -9317,9 +9369,9 @@
           <a:p>
             <a:pPr algn="l"/>
             <a:r>
-              <a:rPr sz="1000" b="1" i="0">
-                <a:solidFill>
-                  <a:srgbClr val="C55A11"/>
+              <a:rPr sz="1300" b="1" i="0">
+                <a:solidFill>
+                  <a:srgbClr val="5B2D8E"/>
                 </a:solidFill>
               </a:rPr>
               <a:t>Interpretation</a:t>
@@ -9335,8 +9387,8 @@
         </p:nvSpPr>
         <p:spPr>
           <a:xfrm>
-            <a:off x="7543800" y="4864608"/>
-            <a:ext cx="4069080" cy="1280160"/>
+            <a:off x="7818120" y="2907792"/>
+            <a:ext cx="3931920" cy="3337560"/>
           </a:xfrm>
           <a:prstGeom prst="rect">
             <a:avLst/>
@@ -9351,12 +9403,14 @@
           <a:p>
             <a:pPr algn="l"/>
             <a:r>
-              <a:rPr sz="1000" b="0" i="1">
+              <a:rPr sz="1050" b="0" i="0">
                 <a:solidFill>
                   <a:srgbClr val="1A1A1A"/>
                 </a:solidFill>
               </a:rPr>
-              <a:t>MK-1775 (WEE1i) and BAY1895344 (ATRi) do not demonstrate robust synergy in MCF7 cells at the concentrations tested — the combination does not exceed additive expectations.</a:t>
+              <a:t>MK-1775 (WEE1 inhibitor) and Prexasertib (CHK1/2 inhibitor) target complementary DNA damage checkpoint kinases. Blocking both simultaneously prevents cells from pausing replication at two independent checkpoints, forcing them into mitosis with unrepaired DNA — a mechanism consistent with the observed synergy.
+The synergy is strongest at mid-range MK-1775 doses where the WEE1 checkpoint is partially inhibited and Prexasertib can tip cells into catastrophic mitotic entry. At saturating MK-1775 doses, the WEE1 checkpoint is already fully ablated, so adding Prexasertib provides little additional benefit.
+These findings support the clinical rationale for combining WEE1 and CHK1/2 inhibitors in MCF7 breast cancer cells.</a:t>
             </a:r>
           </a:p>
         </p:txBody>
@@ -9433,7 +9487,7 @@
                   <a:srgbClr val="FFFFFF"/>
                 </a:solidFill>
               </a:rPr>
-              <a:t>Slide 4 of 6</a:t>
+              <a:t>Slide 4 of 7</a:t>
             </a:r>
           </a:p>
         </p:txBody>
@@ -9613,7 +9667,7 @@
                   <a:srgbClr val="FFFFFF"/>
                 </a:solidFill>
               </a:rPr>
-              <a:t>Genetic Perturbagen Screen Results</a:t>
+              <a:t>Drug Combination: MK-1775 + BAY1895344 — Bliss Independence Model</a:t>
             </a:r>
           </a:p>
         </p:txBody>
@@ -9647,7 +9701,7 @@
                   <a:srgbClr val="BDD7EE"/>
                 </a:solidFill>
               </a:rPr>
-              <a:t>siRNA/shRNA knockdown screens  ·  MCF7 cells  ·  1 and multi-timepoint datasets</a:t>
+              <a:t>WEE1 inhibitor + ATR inhibitor  ·  MCF7 cells  ·  7×7 dose matrix  ·  72 h</a:t>
             </a:r>
           </a:p>
         </p:txBody>
@@ -9660,14 +9714,14 @@
         </p:nvSpPr>
         <p:spPr>
           <a:xfrm>
-            <a:off x="274320" y="987552"/>
-            <a:ext cx="11640312" cy="2633472"/>
+            <a:off x="274320" y="914400"/>
+            <a:ext cx="11640312" cy="457200"/>
           </a:xfrm>
           <a:prstGeom prst="rect">
             <a:avLst/>
           </a:prstGeom>
           <a:solidFill>
-            <a:srgbClr val="F5F9FF"/>
+            <a:srgbClr val="EFF4FB"/>
           </a:solidFill>
           <a:ln w="12700">
             <a:solidFill>
@@ -9699,20 +9753,54 @@
       </p:sp>
       <p:sp>
         <p:nvSpPr>
-          <p:cNvPr id="7" name="Rectangle 6"/>
+          <p:cNvPr id="7" name="TextBox 6"/>
+          <p:cNvSpPr txBox="1"/>
+          <p:nvPr/>
+        </p:nvSpPr>
+        <p:spPr>
+          <a:xfrm>
+            <a:off x="457200" y="987552"/>
+            <a:ext cx="11247120" cy="310896"/>
+          </a:xfrm>
+          <a:prstGeom prst="rect">
+            <a:avLst/>
+          </a:prstGeom>
+          <a:noFill/>
+        </p:spPr>
+        <p:txBody>
+          <a:bodyPr wrap="square">
+            <a:spAutoFit/>
+          </a:bodyPr>
+          <a:lstStyle/>
+          <a:p>
+            <a:pPr algn="l"/>
+            <a:r>
+              <a:rPr sz="1100" b="0" i="0">
+                <a:solidFill>
+                  <a:srgbClr val="1A375E"/>
+                </a:solidFill>
+              </a:rPr>
+              <a:t>Bliss score &gt; 0 = synergy (combination exceeds predicted additive effect)  ·  = 0 = additive  ·  &lt; 0 = antagonism</a:t>
+            </a:r>
+          </a:p>
+        </p:txBody>
+      </p:sp>
+      <p:sp>
+        <p:nvSpPr>
+          <p:cNvPr id="8" name="Rectangle 7"/>
           <p:cNvSpPr/>
           <p:nvPr/>
         </p:nvSpPr>
         <p:spPr>
           <a:xfrm>
-            <a:off x="274320" y="987552"/>
-            <a:ext cx="11640312" cy="475488"/>
+            <a:off x="274320" y="1463040"/>
+            <a:ext cx="11640312" cy="530352"/>
           </a:xfrm>
           <a:prstGeom prst="rect">
             <a:avLst/>
           </a:prstGeom>
           <a:solidFill>
-            <a:srgbClr val="2E75B6"/>
+            <a:srgbClr val="C55A11"/>
           </a:solidFill>
           <a:ln>
             <a:noFill/>
@@ -9742,14 +9830,14 @@
       </p:sp>
       <p:sp>
         <p:nvSpPr>
-          <p:cNvPr id="8" name="TextBox 7"/>
-          <p:cNvSpPr txBox="1"/>
-          <p:nvPr/>
-        </p:nvSpPr>
-        <p:spPr>
-          <a:xfrm>
-            <a:off x="457200" y="1060704"/>
-            <a:ext cx="8686800" cy="329184"/>
+          <p:cNvPr id="9" name="TextBox 8"/>
+          <p:cNvSpPr txBox="1"/>
+          <p:nvPr/>
+        </p:nvSpPr>
+        <p:spPr>
+          <a:xfrm>
+            <a:off x="457200" y="1527048"/>
+            <a:ext cx="8229600" cy="384048"/>
           </a:xfrm>
           <a:prstGeom prst="rect">
             <a:avLst/>
@@ -9764,35 +9852,71 @@
           <a:p>
             <a:pPr algn="l"/>
             <a:r>
-              <a:rPr sz="1400" b="1" i="0">
+              <a:rPr sz="1800" b="1" i="0">
                 <a:solidFill>
                   <a:srgbClr val="FFFFFF"/>
                 </a:solidFill>
               </a:rPr>
-              <a:t>1 Time Point  |  1 Control  (48 h endpoint)  —  75 perturbagens screened</a:t>
-            </a:r>
-          </a:p>
-        </p:txBody>
-      </p:sp>
-      <p:sp>
-        <p:nvSpPr>
-          <p:cNvPr id="9" name="Rectangle 8"/>
+              <a:t>Result:  WEAK / ADDITIVE  —  Max Bliss score +0.42</a:t>
+            </a:r>
+          </a:p>
+        </p:txBody>
+      </p:sp>
+      <p:sp>
+        <p:nvSpPr>
+          <p:cNvPr id="10" name="TextBox 9"/>
+          <p:cNvSpPr txBox="1"/>
+          <p:nvPr/>
+        </p:nvSpPr>
+        <p:spPr>
+          <a:xfrm>
+            <a:off x="10058400" y="1536192"/>
+            <a:ext cx="1691640" cy="347472"/>
+          </a:xfrm>
+          <a:prstGeom prst="rect">
+            <a:avLst/>
+          </a:prstGeom>
+          <a:noFill/>
+        </p:spPr>
+        <p:txBody>
+          <a:bodyPr wrap="square">
+            <a:spAutoFit/>
+          </a:bodyPr>
+          <a:lstStyle/>
+          <a:p>
+            <a:pPr algn="ctr"/>
+            <a:r>
+              <a:rPr sz="1300" b="1" i="0">
+                <a:solidFill>
+                  <a:srgbClr val="FFFFFF"/>
+                </a:solidFill>
+              </a:rPr>
+              <a:t>✅ COMPLETE</a:t>
+            </a:r>
+          </a:p>
+        </p:txBody>
+      </p:sp>
+      <p:sp>
+        <p:nvSpPr>
+          <p:cNvPr id="11" name="Rectangle 10"/>
           <p:cNvSpPr/>
           <p:nvPr/>
         </p:nvSpPr>
         <p:spPr>
           <a:xfrm>
-            <a:off x="9601200" y="1078992"/>
-            <a:ext cx="2148840" cy="292608"/>
+            <a:off x="274320" y="2084831"/>
+            <a:ext cx="7132320" cy="4315968"/>
           </a:xfrm>
           <a:prstGeom prst="rect">
             <a:avLst/>
           </a:prstGeom>
           <a:solidFill>
-            <a:srgbClr val="1F8678"/>
+            <a:srgbClr val="FFF8F0"/>
           </a:solidFill>
-          <a:ln>
-            <a:noFill/>
+          <a:ln w="12700">
+            <a:solidFill>
+              <a:srgbClr val="C55A11"/>
+            </a:solidFill>
           </a:ln>
         </p:spPr>
         <p:style>
@@ -9819,48 +9943,14 @@
       </p:sp>
       <p:sp>
         <p:nvSpPr>
-          <p:cNvPr id="10" name="TextBox 9"/>
-          <p:cNvSpPr txBox="1"/>
-          <p:nvPr/>
-        </p:nvSpPr>
-        <p:spPr>
-          <a:xfrm>
-            <a:off x="9619488" y="1088136"/>
-            <a:ext cx="2112264" cy="256032"/>
-          </a:xfrm>
-          <a:prstGeom prst="rect">
-            <a:avLst/>
-          </a:prstGeom>
-          <a:noFill/>
-        </p:spPr>
-        <p:txBody>
-          <a:bodyPr wrap="square">
-            <a:spAutoFit/>
-          </a:bodyPr>
-          <a:lstStyle/>
-          <a:p>
-            <a:pPr algn="ctr"/>
-            <a:r>
-              <a:rPr sz="1100" b="1" i="0">
-                <a:solidFill>
-                  <a:srgbClr val="FFFFFF"/>
-                </a:solidFill>
-              </a:rPr>
-              <a:t>✅  COMPLETE</a:t>
-            </a:r>
-          </a:p>
-        </p:txBody>
-      </p:sp>
-      <p:sp>
-        <p:nvSpPr>
-          <p:cNvPr id="11" name="TextBox 10"/>
-          <p:cNvSpPr txBox="1"/>
-          <p:nvPr/>
-        </p:nvSpPr>
-        <p:spPr>
-          <a:xfrm>
-            <a:off x="457200" y="1536192"/>
-            <a:ext cx="11247120" cy="292608"/>
+          <p:cNvPr id="12" name="TextBox 11"/>
+          <p:cNvSpPr txBox="1"/>
+          <p:nvPr/>
+        </p:nvSpPr>
+        <p:spPr>
+          <a:xfrm>
+            <a:off x="457200" y="2157984"/>
+            <a:ext cx="4572000" cy="347472"/>
           </a:xfrm>
           <a:prstGeom prst="rect">
             <a:avLst/>
@@ -9875,26 +9965,26 @@
           <a:p>
             <a:pPr algn="l"/>
             <a:r>
-              <a:rPr sz="1100" b="0" i="1">
+              <a:rPr sz="1500" b="1" i="0">
                 <a:solidFill>
                   <a:srgbClr val="1A375E"/>
                 </a:solidFill>
               </a:rPr>
-              <a:t>Gene perturbagens tested at 40 ng/well in MCF7 cells (12K/well). Normalised confluency relative to non-targeting control (100%). Note: gene names are anonymized in the HTSplotter public example dataset.</a:t>
-            </a:r>
-          </a:p>
-        </p:txBody>
-      </p:sp>
-      <p:sp>
-        <p:nvSpPr>
-          <p:cNvPr id="12" name="TextBox 11"/>
-          <p:cNvSpPr txBox="1"/>
-          <p:nvPr/>
-        </p:nvSpPr>
-        <p:spPr>
-          <a:xfrm>
-            <a:off x="457200" y="1883664"/>
-            <a:ext cx="5029200" cy="1627632"/>
+              <a:t>Key Findings</a:t>
+            </a:r>
+          </a:p>
+        </p:txBody>
+      </p:sp>
+      <p:sp>
+        <p:nvSpPr>
+          <p:cNvPr id="13" name="TextBox 12"/>
+          <p:cNvSpPr txBox="1"/>
+          <p:nvPr/>
+        </p:nvSpPr>
+        <p:spPr>
+          <a:xfrm>
+            <a:off x="457200" y="2578608"/>
+            <a:ext cx="6675120" cy="3474720"/>
           </a:xfrm>
           <a:prstGeom prst="rect">
             <a:avLst/>
@@ -9913,12 +10003,12 @@
               </a:spcBef>
             </a:pPr>
             <a:r>
-              <a:rPr sz="1100">
+              <a:rPr sz="1200">
                 <a:solidFill>
                   <a:srgbClr val="1A1A1A"/>
                 </a:solidFill>
               </a:rPr>
-              <a:t>•  75 perturbagens screened in a single endpoint confluency assay</a:t>
+              <a:t>•  Max Bliss score: +0.42  at MK-1775 137 nM + BAY1895344 167 nM</a:t>
             </a:r>
           </a:p>
           <a:p>
@@ -9928,12 +10018,12 @@
               </a:spcBef>
             </a:pPr>
             <a:r>
-              <a:rPr sz="1100">
+              <a:rPr sz="1200">
                 <a:solidFill>
                   <a:srgbClr val="1A1A1A"/>
                 </a:solidFill>
               </a:rPr>
-              <a:t>•  Values above 100% = enhanced growth; below 100% = growth inhibition</a:t>
+              <a:t>•  Majority of scores near zero — interaction is largely additive across the 7×7 matrix</a:t>
             </a:r>
           </a:p>
           <a:p>
@@ -9943,26 +10033,71 @@
               </a:spcBef>
             </a:pPr>
             <a:r>
-              <a:rPr sz="1100">
+              <a:rPr sz="1200">
                 <a:solidFill>
                   <a:srgbClr val="1A1A1A"/>
                 </a:solidFill>
               </a:rPr>
-              <a:t>•  Identifies candidate genes whose knockdown significantly alters cell proliferation</a:t>
-            </a:r>
-          </a:p>
-        </p:txBody>
-      </p:sp>
-      <p:sp>
-        <p:nvSpPr>
-          <p:cNvPr id="13" name="TextBox 12"/>
-          <p:cNvSpPr txBox="1"/>
-          <p:nvPr/>
-        </p:nvSpPr>
-        <p:spPr>
-          <a:xfrm>
-            <a:off x="5669280" y="1883664"/>
-            <a:ext cx="5989320" cy="256032"/>
+              <a:t>•  Occasional moderate synergy at specific dose pairs but no consistent pattern</a:t>
+            </a:r>
+          </a:p>
+          <a:p>
+            <a:pPr>
+              <a:spcBef>
+                <a:spcPts val="400"/>
+              </a:spcBef>
+            </a:pPr>
+            <a:r>
+              <a:rPr sz="1200">
+                <a:solidFill>
+                  <a:srgbClr val="1A1A1A"/>
+                </a:solidFill>
+              </a:rPr>
+              <a:t>•  Both 1-timepoint and multi-timepoint (37 TP) datasets show similar additive behaviour</a:t>
+            </a:r>
+          </a:p>
+          <a:p>
+            <a:pPr>
+              <a:spcBef>
+                <a:spcPts val="400"/>
+              </a:spcBef>
+            </a:pPr>
+            <a:r>
+              <a:rPr sz="1200">
+                <a:solidFill>
+                  <a:srgbClr val="1A1A1A"/>
+                </a:solidFill>
+              </a:rPr>
+              <a:t>•  MK-1775 IC₅₀ = 657 nM  |  BAY1895344 IC₅₀ = 273 nM as single agents</a:t>
+            </a:r>
+          </a:p>
+          <a:p>
+            <a:pPr>
+              <a:spcBef>
+                <a:spcPts val="400"/>
+              </a:spcBef>
+            </a:pPr>
+            <a:r>
+              <a:rPr sz="1200">
+                <a:solidFill>
+                  <a:srgbClr val="1A1A1A"/>
+                </a:solidFill>
+              </a:rPr>
+              <a:t>•  No dose region shows sustained, reproducible synergy above +0.3</a:t>
+            </a:r>
+          </a:p>
+        </p:txBody>
+      </p:sp>
+      <p:sp>
+        <p:nvSpPr>
+          <p:cNvPr id="14" name="TextBox 13"/>
+          <p:cNvSpPr txBox="1"/>
+          <p:nvPr/>
+        </p:nvSpPr>
+        <p:spPr>
+          <a:xfrm>
+            <a:off x="457200" y="5486400"/>
+            <a:ext cx="3657600" cy="274320"/>
           </a:xfrm>
           <a:prstGeom prst="rect">
             <a:avLst/>
@@ -9982,21 +10117,450 @@
                   <a:srgbClr val="1A375E"/>
                 </a:solidFill>
               </a:rPr>
-              <a:t>Notable Hits  (48 h confluency vs. control)</a:t>
-            </a:r>
-          </a:p>
-        </p:txBody>
-      </p:sp>
-      <p:sp>
-        <p:nvSpPr>
-          <p:cNvPr id="14" name="Rectangle 13"/>
+              <a:t>Bliss Score Distribution</a:t>
+            </a:r>
+          </a:p>
+        </p:txBody>
+      </p:sp>
+      <p:sp>
+        <p:nvSpPr>
+          <p:cNvPr id="15" name="Rectangle 14"/>
           <p:cNvSpPr/>
           <p:nvPr/>
         </p:nvSpPr>
         <p:spPr>
           <a:xfrm>
-            <a:off x="5669280" y="2176272"/>
-            <a:ext cx="1463040" cy="274320"/>
+            <a:off x="457200" y="5806440"/>
+            <a:ext cx="1280160" cy="502920"/>
+          </a:xfrm>
+          <a:prstGeom prst="rect">
+            <a:avLst/>
+          </a:prstGeom>
+          <a:solidFill>
+            <a:srgbClr val="FFCC99"/>
+          </a:solidFill>
+          <a:ln w="6350">
+            <a:solidFill>
+              <a:srgbClr val="AAAAAA"/>
+            </a:solidFill>
+          </a:ln>
+        </p:spPr>
+        <p:style>
+          <a:lnRef idx="1">
+            <a:schemeClr val="accent1"/>
+          </a:lnRef>
+          <a:fillRef idx="3">
+            <a:schemeClr val="accent1"/>
+          </a:fillRef>
+          <a:effectRef idx="2">
+            <a:schemeClr val="accent1"/>
+          </a:effectRef>
+          <a:fontRef idx="minor">
+            <a:schemeClr val="lt1"/>
+          </a:fontRef>
+        </p:style>
+        <p:txBody>
+          <a:bodyPr rtlCol="0" anchor="ctr"/>
+          <a:lstStyle/>
+          <a:p>
+            <a:pPr algn="ctr"/>
+          </a:p>
+        </p:txBody>
+      </p:sp>
+      <p:sp>
+        <p:nvSpPr>
+          <p:cNvPr id="16" name="Rectangle 15"/>
+          <p:cNvSpPr/>
+          <p:nvPr/>
+        </p:nvSpPr>
+        <p:spPr>
+          <a:xfrm>
+            <a:off x="1737360" y="5806440"/>
+            <a:ext cx="3200400" cy="502920"/>
+          </a:xfrm>
+          <a:prstGeom prst="rect">
+            <a:avLst/>
+          </a:prstGeom>
+          <a:solidFill>
+            <a:srgbClr val="F2F2F2"/>
+          </a:solidFill>
+          <a:ln w="6350">
+            <a:solidFill>
+              <a:srgbClr val="AAAAAA"/>
+            </a:solidFill>
+          </a:ln>
+        </p:spPr>
+        <p:style>
+          <a:lnRef idx="1">
+            <a:schemeClr val="accent1"/>
+          </a:lnRef>
+          <a:fillRef idx="3">
+            <a:schemeClr val="accent1"/>
+          </a:fillRef>
+          <a:effectRef idx="2">
+            <a:schemeClr val="accent1"/>
+          </a:effectRef>
+          <a:fontRef idx="minor">
+            <a:schemeClr val="lt1"/>
+          </a:fontRef>
+        </p:style>
+        <p:txBody>
+          <a:bodyPr rtlCol="0" anchor="ctr"/>
+          <a:lstStyle/>
+          <a:p>
+            <a:pPr algn="ctr"/>
+          </a:p>
+        </p:txBody>
+      </p:sp>
+      <p:sp>
+        <p:nvSpPr>
+          <p:cNvPr id="17" name="Rectangle 16"/>
+          <p:cNvSpPr/>
+          <p:nvPr/>
+        </p:nvSpPr>
+        <p:spPr>
+          <a:xfrm>
+            <a:off x="4937760" y="5806440"/>
+            <a:ext cx="1783080" cy="502920"/>
+          </a:xfrm>
+          <a:prstGeom prst="rect">
+            <a:avLst/>
+          </a:prstGeom>
+          <a:solidFill>
+            <a:srgbClr val="C8E6C9"/>
+          </a:solidFill>
+          <a:ln w="6350">
+            <a:solidFill>
+              <a:srgbClr val="AAAAAA"/>
+            </a:solidFill>
+          </a:ln>
+        </p:spPr>
+        <p:style>
+          <a:lnRef idx="1">
+            <a:schemeClr val="accent1"/>
+          </a:lnRef>
+          <a:fillRef idx="3">
+            <a:schemeClr val="accent1"/>
+          </a:fillRef>
+          <a:effectRef idx="2">
+            <a:schemeClr val="accent1"/>
+          </a:effectRef>
+          <a:fontRef idx="minor">
+            <a:schemeClr val="lt1"/>
+          </a:fontRef>
+        </p:style>
+        <p:txBody>
+          <a:bodyPr rtlCol="0" anchor="ctr"/>
+          <a:lstStyle/>
+          <a:p>
+            <a:pPr algn="ctr"/>
+          </a:p>
+        </p:txBody>
+      </p:sp>
+      <p:sp>
+        <p:nvSpPr>
+          <p:cNvPr id="18" name="TextBox 17"/>
+          <p:cNvSpPr txBox="1"/>
+          <p:nvPr/>
+        </p:nvSpPr>
+        <p:spPr>
+          <a:xfrm>
+            <a:off x="502920" y="5833872"/>
+            <a:ext cx="1188720" cy="438912"/>
+          </a:xfrm>
+          <a:prstGeom prst="rect">
+            <a:avLst/>
+          </a:prstGeom>
+          <a:noFill/>
+        </p:spPr>
+        <p:txBody>
+          <a:bodyPr wrap="square">
+            <a:spAutoFit/>
+          </a:bodyPr>
+          <a:lstStyle/>
+          <a:p>
+            <a:pPr algn="l"/>
+            <a:r>
+              <a:rPr sz="900" b="0" i="0">
+                <a:solidFill>
+                  <a:srgbClr val="C55A11"/>
+                </a:solidFill>
+              </a:rPr>
+              <a:t>Antagonism &lt; 0</a:t>
+            </a:r>
+          </a:p>
+        </p:txBody>
+      </p:sp>
+      <p:sp>
+        <p:nvSpPr>
+          <p:cNvPr id="19" name="TextBox 18"/>
+          <p:cNvSpPr txBox="1"/>
+          <p:nvPr/>
+        </p:nvSpPr>
+        <p:spPr>
+          <a:xfrm>
+            <a:off x="1783080" y="5833872"/>
+            <a:ext cx="3108960" cy="438912"/>
+          </a:xfrm>
+          <a:prstGeom prst="rect">
+            <a:avLst/>
+          </a:prstGeom>
+          <a:noFill/>
+        </p:spPr>
+        <p:txBody>
+          <a:bodyPr wrap="square">
+            <a:spAutoFit/>
+          </a:bodyPr>
+          <a:lstStyle/>
+          <a:p>
+            <a:pPr algn="l"/>
+            <a:r>
+              <a:rPr sz="900" b="0" i="0">
+                <a:solidFill>
+                  <a:srgbClr val="1A1A1A"/>
+                </a:solidFill>
+              </a:rPr>
+              <a:t>Mostly additive  (bulk of scores)</a:t>
+            </a:r>
+          </a:p>
+        </p:txBody>
+      </p:sp>
+      <p:sp>
+        <p:nvSpPr>
+          <p:cNvPr id="20" name="TextBox 19"/>
+          <p:cNvSpPr txBox="1"/>
+          <p:nvPr/>
+        </p:nvSpPr>
+        <p:spPr>
+          <a:xfrm>
+            <a:off x="4983480" y="5833872"/>
+            <a:ext cx="1691640" cy="438912"/>
+          </a:xfrm>
+          <a:prstGeom prst="rect">
+            <a:avLst/>
+          </a:prstGeom>
+          <a:noFill/>
+        </p:spPr>
+        <p:txBody>
+          <a:bodyPr wrap="square">
+            <a:spAutoFit/>
+          </a:bodyPr>
+          <a:lstStyle/>
+          <a:p>
+            <a:pPr algn="l"/>
+            <a:r>
+              <a:rPr sz="900" b="1" i="0">
+                <a:solidFill>
+                  <a:srgbClr val="379637"/>
+                </a:solidFill>
+              </a:rPr>
+              <a:t>Weak synergy  → +0.42</a:t>
+            </a:r>
+          </a:p>
+        </p:txBody>
+      </p:sp>
+      <p:sp>
+        <p:nvSpPr>
+          <p:cNvPr id="21" name="Rectangle 20"/>
+          <p:cNvSpPr/>
+          <p:nvPr/>
+        </p:nvSpPr>
+        <p:spPr>
+          <a:xfrm>
+            <a:off x="7680960" y="2084831"/>
+            <a:ext cx="4233672" cy="4315968"/>
+          </a:xfrm>
+          <a:prstGeom prst="rect">
+            <a:avLst/>
+          </a:prstGeom>
+          <a:solidFill>
+            <a:srgbClr val="F3EEFA"/>
+          </a:solidFill>
+          <a:ln w="19050">
+            <a:solidFill>
+              <a:srgbClr val="5B2D8E"/>
+            </a:solidFill>
+          </a:ln>
+        </p:spPr>
+        <p:style>
+          <a:lnRef idx="1">
+            <a:schemeClr val="accent1"/>
+          </a:lnRef>
+          <a:fillRef idx="3">
+            <a:schemeClr val="accent1"/>
+          </a:fillRef>
+          <a:effectRef idx="2">
+            <a:schemeClr val="accent1"/>
+          </a:effectRef>
+          <a:fontRef idx="minor">
+            <a:schemeClr val="lt1"/>
+          </a:fontRef>
+        </p:style>
+        <p:txBody>
+          <a:bodyPr rtlCol="0" anchor="ctr"/>
+          <a:lstStyle/>
+          <a:p>
+            <a:pPr algn="ctr"/>
+          </a:p>
+        </p:txBody>
+      </p:sp>
+      <p:sp>
+        <p:nvSpPr>
+          <p:cNvPr id="22" name="Rectangle 21"/>
+          <p:cNvSpPr/>
+          <p:nvPr/>
+        </p:nvSpPr>
+        <p:spPr>
+          <a:xfrm>
+            <a:off x="7818120" y="2157984"/>
+            <a:ext cx="2331720" cy="292608"/>
+          </a:xfrm>
+          <a:prstGeom prst="rect">
+            <a:avLst/>
+          </a:prstGeom>
+          <a:solidFill>
+            <a:srgbClr val="5B2D8E"/>
+          </a:solidFill>
+          <a:ln>
+            <a:noFill/>
+          </a:ln>
+        </p:spPr>
+        <p:style>
+          <a:lnRef idx="1">
+            <a:schemeClr val="accent1"/>
+          </a:lnRef>
+          <a:fillRef idx="3">
+            <a:schemeClr val="accent1"/>
+          </a:fillRef>
+          <a:effectRef idx="2">
+            <a:schemeClr val="accent1"/>
+          </a:effectRef>
+          <a:fontRef idx="minor">
+            <a:schemeClr val="lt1"/>
+          </a:fontRef>
+        </p:style>
+        <p:txBody>
+          <a:bodyPr rtlCol="0" anchor="ctr"/>
+          <a:lstStyle/>
+          <a:p>
+            <a:pPr algn="ctr"/>
+          </a:p>
+        </p:txBody>
+      </p:sp>
+      <p:sp>
+        <p:nvSpPr>
+          <p:cNvPr id="23" name="TextBox 22"/>
+          <p:cNvSpPr txBox="1"/>
+          <p:nvPr/>
+        </p:nvSpPr>
+        <p:spPr>
+          <a:xfrm>
+            <a:off x="7891272" y="2194560"/>
+            <a:ext cx="2221991" cy="237744"/>
+          </a:xfrm>
+          <a:prstGeom prst="rect">
+            <a:avLst/>
+          </a:prstGeom>
+          <a:noFill/>
+        </p:spPr>
+        <p:txBody>
+          <a:bodyPr wrap="square">
+            <a:spAutoFit/>
+          </a:bodyPr>
+          <a:lstStyle/>
+          <a:p>
+            <a:pPr algn="l"/>
+            <a:r>
+              <a:rPr sz="1000" b="1" i="0">
+                <a:solidFill>
+                  <a:srgbClr val="FFFFFF"/>
+                </a:solidFill>
+              </a:rPr>
+              <a:t>🤖  AI-Assisted Interpretation</a:t>
+            </a:r>
+          </a:p>
+        </p:txBody>
+      </p:sp>
+      <p:sp>
+        <p:nvSpPr>
+          <p:cNvPr id="24" name="TextBox 23"/>
+          <p:cNvSpPr txBox="1"/>
+          <p:nvPr/>
+        </p:nvSpPr>
+        <p:spPr>
+          <a:xfrm>
+            <a:off x="7818120" y="2514600"/>
+            <a:ext cx="3931920" cy="320040"/>
+          </a:xfrm>
+          <a:prstGeom prst="rect">
+            <a:avLst/>
+          </a:prstGeom>
+          <a:noFill/>
+        </p:spPr>
+        <p:txBody>
+          <a:bodyPr wrap="square">
+            <a:spAutoFit/>
+          </a:bodyPr>
+          <a:lstStyle/>
+          <a:p>
+            <a:pPr algn="l"/>
+            <a:r>
+              <a:rPr sz="1300" b="1" i="0">
+                <a:solidFill>
+                  <a:srgbClr val="5B2D8E"/>
+                </a:solidFill>
+              </a:rPr>
+              <a:t>Interpretation</a:t>
+            </a:r>
+          </a:p>
+        </p:txBody>
+      </p:sp>
+      <p:sp>
+        <p:nvSpPr>
+          <p:cNvPr id="25" name="TextBox 24"/>
+          <p:cNvSpPr txBox="1"/>
+          <p:nvPr/>
+        </p:nvSpPr>
+        <p:spPr>
+          <a:xfrm>
+            <a:off x="7818120" y="2907792"/>
+            <a:ext cx="3931920" cy="3337560"/>
+          </a:xfrm>
+          <a:prstGeom prst="rect">
+            <a:avLst/>
+          </a:prstGeom>
+          <a:noFill/>
+        </p:spPr>
+        <p:txBody>
+          <a:bodyPr wrap="square">
+            <a:spAutoFit/>
+          </a:bodyPr>
+          <a:lstStyle/>
+          <a:p>
+            <a:pPr algn="l"/>
+            <a:r>
+              <a:rPr sz="1050" b="0" i="0">
+                <a:solidFill>
+                  <a:srgbClr val="1A1A1A"/>
+                </a:solidFill>
+              </a:rPr>
+              <a:t>MK-1775 (WEE1i) and BAY1895344 (ATRi) both target the replication stress response, but through overlapping rather than complementary mechanisms. WEE1 and ATR both regulate CDK1/2 activity and S-phase checkpoint signalling — inhibiting both may not provide substantially more replication fork collapse than either agent alone.
+The largely additive Bliss scores suggest the two drugs are not cooperating beyond their individual effects in MCF7 cells under these conditions. The isolated peak at +0.42 (MK-1775 137 nM + BAY1895344 167 nM) is near the IC₅₀ of both agents and could reflect a narrow window of partial checkpoint co-inhibition rather than true biological synergy.
+Contrast with MK-1775 + Prexasertib (Slide 4), where broader synergy was observed — suggesting CHK1/2 inhibition is a more effective partner for WEE1 inhibition than ATR inhibition in this model.</a:t>
+            </a:r>
+          </a:p>
+        </p:txBody>
+      </p:sp>
+      <p:sp>
+        <p:nvSpPr>
+          <p:cNvPr id="26" name="Rectangle 25"/>
+          <p:cNvSpPr/>
+          <p:nvPr/>
+        </p:nvSpPr>
+        <p:spPr>
+          <a:xfrm>
+            <a:off x="0" y="6656832"/>
+            <a:ext cx="12188952" cy="201168"/>
           </a:xfrm>
           <a:prstGeom prst="rect">
             <a:avLst/>
@@ -10032,2104 +10596,7 @@
       </p:sp>
       <p:sp>
         <p:nvSpPr>
-          <p:cNvPr id="15" name="TextBox 14"/>
-          <p:cNvSpPr txBox="1"/>
-          <p:nvPr/>
-        </p:nvSpPr>
-        <p:spPr>
-          <a:xfrm>
-            <a:off x="5715000" y="2203704"/>
-            <a:ext cx="1389888" cy="219456"/>
-          </a:xfrm>
-          <a:prstGeom prst="rect">
-            <a:avLst/>
-          </a:prstGeom>
-          <a:noFill/>
-        </p:spPr>
-        <p:txBody>
-          <a:bodyPr wrap="square">
-            <a:spAutoFit/>
-          </a:bodyPr>
-          <a:lstStyle/>
-          <a:p>
-            <a:pPr algn="ctr"/>
-            <a:r>
-              <a:rPr sz="1000" b="1" i="0">
-                <a:solidFill>
-                  <a:srgbClr val="FFFFFF"/>
-                </a:solidFill>
-              </a:rPr>
-              <a:t>Target</a:t>
-            </a:r>
-          </a:p>
-        </p:txBody>
-      </p:sp>
-      <p:sp>
-        <p:nvSpPr>
-          <p:cNvPr id="16" name="Rectangle 15"/>
-          <p:cNvSpPr/>
-          <p:nvPr/>
-        </p:nvSpPr>
-        <p:spPr>
-          <a:xfrm>
-            <a:off x="7150608" y="2176272"/>
-            <a:ext cx="1554480" cy="274320"/>
-          </a:xfrm>
-          <a:prstGeom prst="rect">
-            <a:avLst/>
-          </a:prstGeom>
-          <a:solidFill>
-            <a:srgbClr val="1A375E"/>
-          </a:solidFill>
-          <a:ln>
-            <a:noFill/>
-          </a:ln>
-        </p:spPr>
-        <p:style>
-          <a:lnRef idx="1">
-            <a:schemeClr val="accent1"/>
-          </a:lnRef>
-          <a:fillRef idx="3">
-            <a:schemeClr val="accent1"/>
-          </a:fillRef>
-          <a:effectRef idx="2">
-            <a:schemeClr val="accent1"/>
-          </a:effectRef>
-          <a:fontRef idx="minor">
-            <a:schemeClr val="lt1"/>
-          </a:fontRef>
-        </p:style>
-        <p:txBody>
-          <a:bodyPr rtlCol="0" anchor="ctr"/>
-          <a:lstStyle/>
-          <a:p>
-            <a:pPr algn="ctr"/>
-          </a:p>
-        </p:txBody>
-      </p:sp>
-      <p:sp>
-        <p:nvSpPr>
-          <p:cNvPr id="17" name="TextBox 16"/>
-          <p:cNvSpPr txBox="1"/>
-          <p:nvPr/>
-        </p:nvSpPr>
-        <p:spPr>
-          <a:xfrm>
-            <a:off x="7196328" y="2203704"/>
-            <a:ext cx="1481328" cy="219456"/>
-          </a:xfrm>
-          <a:prstGeom prst="rect">
-            <a:avLst/>
-          </a:prstGeom>
-          <a:noFill/>
-        </p:spPr>
-        <p:txBody>
-          <a:bodyPr wrap="square">
-            <a:spAutoFit/>
-          </a:bodyPr>
-          <a:lstStyle/>
-          <a:p>
-            <a:pPr algn="ctr"/>
-            <a:r>
-              <a:rPr sz="1000" b="1" i="0">
-                <a:solidFill>
-                  <a:srgbClr val="FFFFFF"/>
-                </a:solidFill>
-              </a:rPr>
-              <a:t>Confluency %</a:t>
-            </a:r>
-          </a:p>
-        </p:txBody>
-      </p:sp>
-      <p:sp>
-        <p:nvSpPr>
-          <p:cNvPr id="18" name="Rectangle 17"/>
-          <p:cNvSpPr/>
-          <p:nvPr/>
-        </p:nvSpPr>
-        <p:spPr>
-          <a:xfrm>
-            <a:off x="8723376" y="2176272"/>
-            <a:ext cx="2606040" cy="274320"/>
-          </a:xfrm>
-          <a:prstGeom prst="rect">
-            <a:avLst/>
-          </a:prstGeom>
-          <a:solidFill>
-            <a:srgbClr val="1A375E"/>
-          </a:solidFill>
-          <a:ln>
-            <a:noFill/>
-          </a:ln>
-        </p:spPr>
-        <p:style>
-          <a:lnRef idx="1">
-            <a:schemeClr val="accent1"/>
-          </a:lnRef>
-          <a:fillRef idx="3">
-            <a:schemeClr val="accent1"/>
-          </a:fillRef>
-          <a:effectRef idx="2">
-            <a:schemeClr val="accent1"/>
-          </a:effectRef>
-          <a:fontRef idx="minor">
-            <a:schemeClr val="lt1"/>
-          </a:fontRef>
-        </p:style>
-        <p:txBody>
-          <a:bodyPr rtlCol="0" anchor="ctr"/>
-          <a:lstStyle/>
-          <a:p>
-            <a:pPr algn="ctr"/>
-          </a:p>
-        </p:txBody>
-      </p:sp>
-      <p:sp>
-        <p:nvSpPr>
-          <p:cNvPr id="19" name="TextBox 18"/>
-          <p:cNvSpPr txBox="1"/>
-          <p:nvPr/>
-        </p:nvSpPr>
-        <p:spPr>
-          <a:xfrm>
-            <a:off x="8769096" y="2203704"/>
-            <a:ext cx="2532888" cy="219456"/>
-          </a:xfrm>
-          <a:prstGeom prst="rect">
-            <a:avLst/>
-          </a:prstGeom>
-          <a:noFill/>
-        </p:spPr>
-        <p:txBody>
-          <a:bodyPr wrap="square">
-            <a:spAutoFit/>
-          </a:bodyPr>
-          <a:lstStyle/>
-          <a:p>
-            <a:pPr algn="ctr"/>
-            <a:r>
-              <a:rPr sz="1000" b="1" i="0">
-                <a:solidFill>
-                  <a:srgbClr val="FFFFFF"/>
-                </a:solidFill>
-              </a:rPr>
-              <a:t>Effect</a:t>
-            </a:r>
-          </a:p>
-        </p:txBody>
-      </p:sp>
-      <p:sp>
-        <p:nvSpPr>
-          <p:cNvPr id="20" name="Rectangle 19"/>
-          <p:cNvSpPr/>
-          <p:nvPr/>
-        </p:nvSpPr>
-        <p:spPr>
-          <a:xfrm>
-            <a:off x="5669280" y="2450592"/>
-            <a:ext cx="1463040" cy="292608"/>
-          </a:xfrm>
-          <a:prstGeom prst="rect">
-            <a:avLst/>
-          </a:prstGeom>
-          <a:solidFill>
-            <a:srgbClr val="E2EFDA"/>
-          </a:solidFill>
-          <a:ln w="5080">
-            <a:solidFill>
-              <a:srgbClr val="CCCCCC"/>
-            </a:solidFill>
-          </a:ln>
-        </p:spPr>
-        <p:style>
-          <a:lnRef idx="1">
-            <a:schemeClr val="accent1"/>
-          </a:lnRef>
-          <a:fillRef idx="3">
-            <a:schemeClr val="accent1"/>
-          </a:fillRef>
-          <a:effectRef idx="2">
-            <a:schemeClr val="accent1"/>
-          </a:effectRef>
-          <a:fontRef idx="minor">
-            <a:schemeClr val="lt1"/>
-          </a:fontRef>
-        </p:style>
-        <p:txBody>
-          <a:bodyPr rtlCol="0" anchor="ctr"/>
-          <a:lstStyle/>
-          <a:p>
-            <a:pPr algn="ctr"/>
-          </a:p>
-        </p:txBody>
-      </p:sp>
-      <p:sp>
-        <p:nvSpPr>
-          <p:cNvPr id="21" name="TextBox 20"/>
-          <p:cNvSpPr txBox="1"/>
-          <p:nvPr/>
-        </p:nvSpPr>
-        <p:spPr>
-          <a:xfrm>
-            <a:off x="5715000" y="2496312"/>
-            <a:ext cx="1389888" cy="219456"/>
-          </a:xfrm>
-          <a:prstGeom prst="rect">
-            <a:avLst/>
-          </a:prstGeom>
-          <a:noFill/>
-        </p:spPr>
-        <p:txBody>
-          <a:bodyPr wrap="square">
-            <a:spAutoFit/>
-          </a:bodyPr>
-          <a:lstStyle/>
-          <a:p>
-            <a:pPr algn="l"/>
-            <a:r>
-              <a:rPr sz="1000" b="1" i="0">
-                <a:solidFill>
-                  <a:srgbClr val="379637"/>
-                </a:solidFill>
-              </a:rPr>
-              <a:t>GeneBK</a:t>
-            </a:r>
-          </a:p>
-        </p:txBody>
-      </p:sp>
-      <p:sp>
-        <p:nvSpPr>
-          <p:cNvPr id="22" name="Rectangle 21"/>
-          <p:cNvSpPr/>
-          <p:nvPr/>
-        </p:nvSpPr>
-        <p:spPr>
-          <a:xfrm>
-            <a:off x="7150608" y="2450592"/>
-            <a:ext cx="1554480" cy="292608"/>
-          </a:xfrm>
-          <a:prstGeom prst="rect">
-            <a:avLst/>
-          </a:prstGeom>
-          <a:solidFill>
-            <a:srgbClr val="E2EFDA"/>
-          </a:solidFill>
-          <a:ln w="5080">
-            <a:solidFill>
-              <a:srgbClr val="CCCCCC"/>
-            </a:solidFill>
-          </a:ln>
-        </p:spPr>
-        <p:style>
-          <a:lnRef idx="1">
-            <a:schemeClr val="accent1"/>
-          </a:lnRef>
-          <a:fillRef idx="3">
-            <a:schemeClr val="accent1"/>
-          </a:fillRef>
-          <a:effectRef idx="2">
-            <a:schemeClr val="accent1"/>
-          </a:effectRef>
-          <a:fontRef idx="minor">
-            <a:schemeClr val="lt1"/>
-          </a:fontRef>
-        </p:style>
-        <p:txBody>
-          <a:bodyPr rtlCol="0" anchor="ctr"/>
-          <a:lstStyle/>
-          <a:p>
-            <a:pPr algn="ctr"/>
-          </a:p>
-        </p:txBody>
-      </p:sp>
-      <p:sp>
-        <p:nvSpPr>
-          <p:cNvPr id="23" name="TextBox 22"/>
-          <p:cNvSpPr txBox="1"/>
-          <p:nvPr/>
-        </p:nvSpPr>
-        <p:spPr>
-          <a:xfrm>
-            <a:off x="7196328" y="2496312"/>
-            <a:ext cx="1481328" cy="219456"/>
-          </a:xfrm>
-          <a:prstGeom prst="rect">
-            <a:avLst/>
-          </a:prstGeom>
-          <a:noFill/>
-        </p:spPr>
-        <p:txBody>
-          <a:bodyPr wrap="square">
-            <a:spAutoFit/>
-          </a:bodyPr>
-          <a:lstStyle/>
-          <a:p>
-            <a:pPr algn="ctr"/>
-            <a:r>
-              <a:rPr sz="1000" b="0" i="0">
-                <a:solidFill>
-                  <a:srgbClr val="379637"/>
-                </a:solidFill>
-              </a:rPr>
-              <a:t>65.2%</a:t>
-            </a:r>
-          </a:p>
-        </p:txBody>
-      </p:sp>
-      <p:sp>
-        <p:nvSpPr>
-          <p:cNvPr id="24" name="Rectangle 23"/>
-          <p:cNvSpPr/>
-          <p:nvPr/>
-        </p:nvSpPr>
-        <p:spPr>
-          <a:xfrm>
-            <a:off x="8723376" y="2450592"/>
-            <a:ext cx="2606040" cy="292608"/>
-          </a:xfrm>
-          <a:prstGeom prst="rect">
-            <a:avLst/>
-          </a:prstGeom>
-          <a:solidFill>
-            <a:srgbClr val="E2EFDA"/>
-          </a:solidFill>
-          <a:ln w="5080">
-            <a:solidFill>
-              <a:srgbClr val="CCCCCC"/>
-            </a:solidFill>
-          </a:ln>
-        </p:spPr>
-        <p:style>
-          <a:lnRef idx="1">
-            <a:schemeClr val="accent1"/>
-          </a:lnRef>
-          <a:fillRef idx="3">
-            <a:schemeClr val="accent1"/>
-          </a:fillRef>
-          <a:effectRef idx="2">
-            <a:schemeClr val="accent1"/>
-          </a:effectRef>
-          <a:fontRef idx="minor">
-            <a:schemeClr val="lt1"/>
-          </a:fontRef>
-        </p:style>
-        <p:txBody>
-          <a:bodyPr rtlCol="0" anchor="ctr"/>
-          <a:lstStyle/>
-          <a:p>
-            <a:pPr algn="ctr"/>
-          </a:p>
-        </p:txBody>
-      </p:sp>
-      <p:sp>
-        <p:nvSpPr>
-          <p:cNvPr id="25" name="TextBox 24"/>
-          <p:cNvSpPr txBox="1"/>
-          <p:nvPr/>
-        </p:nvSpPr>
-        <p:spPr>
-          <a:xfrm>
-            <a:off x="8769096" y="2496312"/>
-            <a:ext cx="2532888" cy="219456"/>
-          </a:xfrm>
-          <a:prstGeom prst="rect">
-            <a:avLst/>
-          </a:prstGeom>
-          <a:noFill/>
-        </p:spPr>
-        <p:txBody>
-          <a:bodyPr wrap="square">
-            <a:spAutoFit/>
-          </a:bodyPr>
-          <a:lstStyle/>
-          <a:p>
-            <a:pPr algn="l"/>
-            <a:r>
-              <a:rPr sz="1000" b="0" i="0">
-                <a:solidFill>
-                  <a:srgbClr val="1A1A1A"/>
-                </a:solidFill>
-              </a:rPr>
-              <a:t>↓ Growth inhibition</a:t>
-            </a:r>
-          </a:p>
-        </p:txBody>
-      </p:sp>
-      <p:sp>
-        <p:nvSpPr>
-          <p:cNvPr id="26" name="Rectangle 25"/>
-          <p:cNvSpPr/>
-          <p:nvPr/>
-        </p:nvSpPr>
-        <p:spPr>
-          <a:xfrm>
-            <a:off x="5669280" y="2761488"/>
-            <a:ext cx="1463040" cy="292608"/>
-          </a:xfrm>
-          <a:prstGeom prst="rect">
-            <a:avLst/>
-          </a:prstGeom>
-          <a:solidFill>
-            <a:srgbClr val="FFFFFF"/>
-          </a:solidFill>
-          <a:ln w="5080">
-            <a:solidFill>
-              <a:srgbClr val="CCCCCC"/>
-            </a:solidFill>
-          </a:ln>
-        </p:spPr>
-        <p:style>
-          <a:lnRef idx="1">
-            <a:schemeClr val="accent1"/>
-          </a:lnRef>
-          <a:fillRef idx="3">
-            <a:schemeClr val="accent1"/>
-          </a:fillRef>
-          <a:effectRef idx="2">
-            <a:schemeClr val="accent1"/>
-          </a:effectRef>
-          <a:fontRef idx="minor">
-            <a:schemeClr val="lt1"/>
-          </a:fontRef>
-        </p:style>
-        <p:txBody>
-          <a:bodyPr rtlCol="0" anchor="ctr"/>
-          <a:lstStyle/>
-          <a:p>
-            <a:pPr algn="ctr"/>
-          </a:p>
-        </p:txBody>
-      </p:sp>
-      <p:sp>
-        <p:nvSpPr>
           <p:cNvPr id="27" name="TextBox 26"/>
-          <p:cNvSpPr txBox="1"/>
-          <p:nvPr/>
-        </p:nvSpPr>
-        <p:spPr>
-          <a:xfrm>
-            <a:off x="5715000" y="2807208"/>
-            <a:ext cx="1389888" cy="219456"/>
-          </a:xfrm>
-          <a:prstGeom prst="rect">
-            <a:avLst/>
-          </a:prstGeom>
-          <a:noFill/>
-        </p:spPr>
-        <p:txBody>
-          <a:bodyPr wrap="square">
-            <a:spAutoFit/>
-          </a:bodyPr>
-          <a:lstStyle/>
-          <a:p>
-            <a:pPr algn="l"/>
-            <a:r>
-              <a:rPr sz="1000" b="1" i="0">
-                <a:solidFill>
-                  <a:srgbClr val="379637"/>
-                </a:solidFill>
-              </a:rPr>
-              <a:t>GeneBI</a:t>
-            </a:r>
-          </a:p>
-        </p:txBody>
-      </p:sp>
-      <p:sp>
-        <p:nvSpPr>
-          <p:cNvPr id="28" name="Rectangle 27"/>
-          <p:cNvSpPr/>
-          <p:nvPr/>
-        </p:nvSpPr>
-        <p:spPr>
-          <a:xfrm>
-            <a:off x="7150608" y="2761488"/>
-            <a:ext cx="1554480" cy="292608"/>
-          </a:xfrm>
-          <a:prstGeom prst="rect">
-            <a:avLst/>
-          </a:prstGeom>
-          <a:solidFill>
-            <a:srgbClr val="FFFFFF"/>
-          </a:solidFill>
-          <a:ln w="5080">
-            <a:solidFill>
-              <a:srgbClr val="CCCCCC"/>
-            </a:solidFill>
-          </a:ln>
-        </p:spPr>
-        <p:style>
-          <a:lnRef idx="1">
-            <a:schemeClr val="accent1"/>
-          </a:lnRef>
-          <a:fillRef idx="3">
-            <a:schemeClr val="accent1"/>
-          </a:fillRef>
-          <a:effectRef idx="2">
-            <a:schemeClr val="accent1"/>
-          </a:effectRef>
-          <a:fontRef idx="minor">
-            <a:schemeClr val="lt1"/>
-          </a:fontRef>
-        </p:style>
-        <p:txBody>
-          <a:bodyPr rtlCol="0" anchor="ctr"/>
-          <a:lstStyle/>
-          <a:p>
-            <a:pPr algn="ctr"/>
-          </a:p>
-        </p:txBody>
-      </p:sp>
-      <p:sp>
-        <p:nvSpPr>
-          <p:cNvPr id="29" name="TextBox 28"/>
-          <p:cNvSpPr txBox="1"/>
-          <p:nvPr/>
-        </p:nvSpPr>
-        <p:spPr>
-          <a:xfrm>
-            <a:off x="7196328" y="2807208"/>
-            <a:ext cx="1481328" cy="219456"/>
-          </a:xfrm>
-          <a:prstGeom prst="rect">
-            <a:avLst/>
-          </a:prstGeom>
-          <a:noFill/>
-        </p:spPr>
-        <p:txBody>
-          <a:bodyPr wrap="square">
-            <a:spAutoFit/>
-          </a:bodyPr>
-          <a:lstStyle/>
-          <a:p>
-            <a:pPr algn="ctr"/>
-            <a:r>
-              <a:rPr sz="1000" b="0" i="0">
-                <a:solidFill>
-                  <a:srgbClr val="379637"/>
-                </a:solidFill>
-              </a:rPr>
-              <a:t>79.1%</a:t>
-            </a:r>
-          </a:p>
-        </p:txBody>
-      </p:sp>
-      <p:sp>
-        <p:nvSpPr>
-          <p:cNvPr id="30" name="Rectangle 29"/>
-          <p:cNvSpPr/>
-          <p:nvPr/>
-        </p:nvSpPr>
-        <p:spPr>
-          <a:xfrm>
-            <a:off x="8723376" y="2761488"/>
-            <a:ext cx="2606040" cy="292608"/>
-          </a:xfrm>
-          <a:prstGeom prst="rect">
-            <a:avLst/>
-          </a:prstGeom>
-          <a:solidFill>
-            <a:srgbClr val="FFFFFF"/>
-          </a:solidFill>
-          <a:ln w="5080">
-            <a:solidFill>
-              <a:srgbClr val="CCCCCC"/>
-            </a:solidFill>
-          </a:ln>
-        </p:spPr>
-        <p:style>
-          <a:lnRef idx="1">
-            <a:schemeClr val="accent1"/>
-          </a:lnRef>
-          <a:fillRef idx="3">
-            <a:schemeClr val="accent1"/>
-          </a:fillRef>
-          <a:effectRef idx="2">
-            <a:schemeClr val="accent1"/>
-          </a:effectRef>
-          <a:fontRef idx="minor">
-            <a:schemeClr val="lt1"/>
-          </a:fontRef>
-        </p:style>
-        <p:txBody>
-          <a:bodyPr rtlCol="0" anchor="ctr"/>
-          <a:lstStyle/>
-          <a:p>
-            <a:pPr algn="ctr"/>
-          </a:p>
-        </p:txBody>
-      </p:sp>
-      <p:sp>
-        <p:nvSpPr>
-          <p:cNvPr id="31" name="TextBox 30"/>
-          <p:cNvSpPr txBox="1"/>
-          <p:nvPr/>
-        </p:nvSpPr>
-        <p:spPr>
-          <a:xfrm>
-            <a:off x="8769096" y="2807208"/>
-            <a:ext cx="2532888" cy="219456"/>
-          </a:xfrm>
-          <a:prstGeom prst="rect">
-            <a:avLst/>
-          </a:prstGeom>
-          <a:noFill/>
-        </p:spPr>
-        <p:txBody>
-          <a:bodyPr wrap="square">
-            <a:spAutoFit/>
-          </a:bodyPr>
-          <a:lstStyle/>
-          <a:p>
-            <a:pPr algn="l"/>
-            <a:r>
-              <a:rPr sz="1000" b="0" i="0">
-                <a:solidFill>
-                  <a:srgbClr val="1A1A1A"/>
-                </a:solidFill>
-              </a:rPr>
-              <a:t>↓ Growth inhibition</a:t>
-            </a:r>
-          </a:p>
-        </p:txBody>
-      </p:sp>
-      <p:sp>
-        <p:nvSpPr>
-          <p:cNvPr id="32" name="Rectangle 31"/>
-          <p:cNvSpPr/>
-          <p:nvPr/>
-        </p:nvSpPr>
-        <p:spPr>
-          <a:xfrm>
-            <a:off x="5669280" y="3072384"/>
-            <a:ext cx="1463040" cy="292608"/>
-          </a:xfrm>
-          <a:prstGeom prst="rect">
-            <a:avLst/>
-          </a:prstGeom>
-          <a:solidFill>
-            <a:srgbClr val="E2EFDA"/>
-          </a:solidFill>
-          <a:ln w="5080">
-            <a:solidFill>
-              <a:srgbClr val="CCCCCC"/>
-            </a:solidFill>
-          </a:ln>
-        </p:spPr>
-        <p:style>
-          <a:lnRef idx="1">
-            <a:schemeClr val="accent1"/>
-          </a:lnRef>
-          <a:fillRef idx="3">
-            <a:schemeClr val="accent1"/>
-          </a:fillRef>
-          <a:effectRef idx="2">
-            <a:schemeClr val="accent1"/>
-          </a:effectRef>
-          <a:fontRef idx="minor">
-            <a:schemeClr val="lt1"/>
-          </a:fontRef>
-        </p:style>
-        <p:txBody>
-          <a:bodyPr rtlCol="0" anchor="ctr"/>
-          <a:lstStyle/>
-          <a:p>
-            <a:pPr algn="ctr"/>
-          </a:p>
-        </p:txBody>
-      </p:sp>
-      <p:sp>
-        <p:nvSpPr>
-          <p:cNvPr id="33" name="TextBox 32"/>
-          <p:cNvSpPr txBox="1"/>
-          <p:nvPr/>
-        </p:nvSpPr>
-        <p:spPr>
-          <a:xfrm>
-            <a:off x="5715000" y="3118104"/>
-            <a:ext cx="1389888" cy="219456"/>
-          </a:xfrm>
-          <a:prstGeom prst="rect">
-            <a:avLst/>
-          </a:prstGeom>
-          <a:noFill/>
-        </p:spPr>
-        <p:txBody>
-          <a:bodyPr wrap="square">
-            <a:spAutoFit/>
-          </a:bodyPr>
-          <a:lstStyle/>
-          <a:p>
-            <a:pPr algn="l"/>
-            <a:r>
-              <a:rPr sz="1000" b="1" i="0">
-                <a:solidFill>
-                  <a:srgbClr val="379637"/>
-                </a:solidFill>
-              </a:rPr>
-              <a:t>GeneAG</a:t>
-            </a:r>
-          </a:p>
-        </p:txBody>
-      </p:sp>
-      <p:sp>
-        <p:nvSpPr>
-          <p:cNvPr id="34" name="Rectangle 33"/>
-          <p:cNvSpPr/>
-          <p:nvPr/>
-        </p:nvSpPr>
-        <p:spPr>
-          <a:xfrm>
-            <a:off x="7150608" y="3072384"/>
-            <a:ext cx="1554480" cy="292608"/>
-          </a:xfrm>
-          <a:prstGeom prst="rect">
-            <a:avLst/>
-          </a:prstGeom>
-          <a:solidFill>
-            <a:srgbClr val="E2EFDA"/>
-          </a:solidFill>
-          <a:ln w="5080">
-            <a:solidFill>
-              <a:srgbClr val="CCCCCC"/>
-            </a:solidFill>
-          </a:ln>
-        </p:spPr>
-        <p:style>
-          <a:lnRef idx="1">
-            <a:schemeClr val="accent1"/>
-          </a:lnRef>
-          <a:fillRef idx="3">
-            <a:schemeClr val="accent1"/>
-          </a:fillRef>
-          <a:effectRef idx="2">
-            <a:schemeClr val="accent1"/>
-          </a:effectRef>
-          <a:fontRef idx="minor">
-            <a:schemeClr val="lt1"/>
-          </a:fontRef>
-        </p:style>
-        <p:txBody>
-          <a:bodyPr rtlCol="0" anchor="ctr"/>
-          <a:lstStyle/>
-          <a:p>
-            <a:pPr algn="ctr"/>
-          </a:p>
-        </p:txBody>
-      </p:sp>
-      <p:sp>
-        <p:nvSpPr>
-          <p:cNvPr id="35" name="TextBox 34"/>
-          <p:cNvSpPr txBox="1"/>
-          <p:nvPr/>
-        </p:nvSpPr>
-        <p:spPr>
-          <a:xfrm>
-            <a:off x="7196328" y="3118104"/>
-            <a:ext cx="1481328" cy="219456"/>
-          </a:xfrm>
-          <a:prstGeom prst="rect">
-            <a:avLst/>
-          </a:prstGeom>
-          <a:noFill/>
-        </p:spPr>
-        <p:txBody>
-          <a:bodyPr wrap="square">
-            <a:spAutoFit/>
-          </a:bodyPr>
-          <a:lstStyle/>
-          <a:p>
-            <a:pPr algn="ctr"/>
-            <a:r>
-              <a:rPr sz="1000" b="0" i="0">
-                <a:solidFill>
-                  <a:srgbClr val="379637"/>
-                </a:solidFill>
-              </a:rPr>
-              <a:t>79.9%</a:t>
-            </a:r>
-          </a:p>
-        </p:txBody>
-      </p:sp>
-      <p:sp>
-        <p:nvSpPr>
-          <p:cNvPr id="36" name="Rectangle 35"/>
-          <p:cNvSpPr/>
-          <p:nvPr/>
-        </p:nvSpPr>
-        <p:spPr>
-          <a:xfrm>
-            <a:off x="8723376" y="3072384"/>
-            <a:ext cx="2606040" cy="292608"/>
-          </a:xfrm>
-          <a:prstGeom prst="rect">
-            <a:avLst/>
-          </a:prstGeom>
-          <a:solidFill>
-            <a:srgbClr val="E2EFDA"/>
-          </a:solidFill>
-          <a:ln w="5080">
-            <a:solidFill>
-              <a:srgbClr val="CCCCCC"/>
-            </a:solidFill>
-          </a:ln>
-        </p:spPr>
-        <p:style>
-          <a:lnRef idx="1">
-            <a:schemeClr val="accent1"/>
-          </a:lnRef>
-          <a:fillRef idx="3">
-            <a:schemeClr val="accent1"/>
-          </a:fillRef>
-          <a:effectRef idx="2">
-            <a:schemeClr val="accent1"/>
-          </a:effectRef>
-          <a:fontRef idx="minor">
-            <a:schemeClr val="lt1"/>
-          </a:fontRef>
-        </p:style>
-        <p:txBody>
-          <a:bodyPr rtlCol="0" anchor="ctr"/>
-          <a:lstStyle/>
-          <a:p>
-            <a:pPr algn="ctr"/>
-          </a:p>
-        </p:txBody>
-      </p:sp>
-      <p:sp>
-        <p:nvSpPr>
-          <p:cNvPr id="37" name="TextBox 36"/>
-          <p:cNvSpPr txBox="1"/>
-          <p:nvPr/>
-        </p:nvSpPr>
-        <p:spPr>
-          <a:xfrm>
-            <a:off x="8769096" y="3118104"/>
-            <a:ext cx="2532888" cy="219456"/>
-          </a:xfrm>
-          <a:prstGeom prst="rect">
-            <a:avLst/>
-          </a:prstGeom>
-          <a:noFill/>
-        </p:spPr>
-        <p:txBody>
-          <a:bodyPr wrap="square">
-            <a:spAutoFit/>
-          </a:bodyPr>
-          <a:lstStyle/>
-          <a:p>
-            <a:pPr algn="l"/>
-            <a:r>
-              <a:rPr sz="1000" b="0" i="0">
-                <a:solidFill>
-                  <a:srgbClr val="1A1A1A"/>
-                </a:solidFill>
-              </a:rPr>
-              <a:t>↓ Growth inhibition</a:t>
-            </a:r>
-          </a:p>
-        </p:txBody>
-      </p:sp>
-      <p:sp>
-        <p:nvSpPr>
-          <p:cNvPr id="38" name="Rectangle 37"/>
-          <p:cNvSpPr/>
-          <p:nvPr/>
-        </p:nvSpPr>
-        <p:spPr>
-          <a:xfrm>
-            <a:off x="5669280" y="3383280"/>
-            <a:ext cx="1463040" cy="292608"/>
-          </a:xfrm>
-          <a:prstGeom prst="rect">
-            <a:avLst/>
-          </a:prstGeom>
-          <a:solidFill>
-            <a:srgbClr val="FFF3E8"/>
-          </a:solidFill>
-          <a:ln w="5080">
-            <a:solidFill>
-              <a:srgbClr val="CCCCCC"/>
-            </a:solidFill>
-          </a:ln>
-        </p:spPr>
-        <p:style>
-          <a:lnRef idx="1">
-            <a:schemeClr val="accent1"/>
-          </a:lnRef>
-          <a:fillRef idx="3">
-            <a:schemeClr val="accent1"/>
-          </a:fillRef>
-          <a:effectRef idx="2">
-            <a:schemeClr val="accent1"/>
-          </a:effectRef>
-          <a:fontRef idx="minor">
-            <a:schemeClr val="lt1"/>
-          </a:fontRef>
-        </p:style>
-        <p:txBody>
-          <a:bodyPr rtlCol="0" anchor="ctr"/>
-          <a:lstStyle/>
-          <a:p>
-            <a:pPr algn="ctr"/>
-          </a:p>
-        </p:txBody>
-      </p:sp>
-      <p:sp>
-        <p:nvSpPr>
-          <p:cNvPr id="39" name="TextBox 38"/>
-          <p:cNvSpPr txBox="1"/>
-          <p:nvPr/>
-        </p:nvSpPr>
-        <p:spPr>
-          <a:xfrm>
-            <a:off x="5715000" y="3429000"/>
-            <a:ext cx="1389888" cy="219456"/>
-          </a:xfrm>
-          <a:prstGeom prst="rect">
-            <a:avLst/>
-          </a:prstGeom>
-          <a:noFill/>
-        </p:spPr>
-        <p:txBody>
-          <a:bodyPr wrap="square">
-            <a:spAutoFit/>
-          </a:bodyPr>
-          <a:lstStyle/>
-          <a:p>
-            <a:pPr algn="l"/>
-            <a:r>
-              <a:rPr sz="1000" b="1" i="0">
-                <a:solidFill>
-                  <a:srgbClr val="C55A11"/>
-                </a:solidFill>
-              </a:rPr>
-              <a:t>GeneAC</a:t>
-            </a:r>
-          </a:p>
-        </p:txBody>
-      </p:sp>
-      <p:sp>
-        <p:nvSpPr>
-          <p:cNvPr id="40" name="Rectangle 39"/>
-          <p:cNvSpPr/>
-          <p:nvPr/>
-        </p:nvSpPr>
-        <p:spPr>
-          <a:xfrm>
-            <a:off x="7150608" y="3383280"/>
-            <a:ext cx="1554480" cy="292608"/>
-          </a:xfrm>
-          <a:prstGeom prst="rect">
-            <a:avLst/>
-          </a:prstGeom>
-          <a:solidFill>
-            <a:srgbClr val="FFF3E8"/>
-          </a:solidFill>
-          <a:ln w="5080">
-            <a:solidFill>
-              <a:srgbClr val="CCCCCC"/>
-            </a:solidFill>
-          </a:ln>
-        </p:spPr>
-        <p:style>
-          <a:lnRef idx="1">
-            <a:schemeClr val="accent1"/>
-          </a:lnRef>
-          <a:fillRef idx="3">
-            <a:schemeClr val="accent1"/>
-          </a:fillRef>
-          <a:effectRef idx="2">
-            <a:schemeClr val="accent1"/>
-          </a:effectRef>
-          <a:fontRef idx="minor">
-            <a:schemeClr val="lt1"/>
-          </a:fontRef>
-        </p:style>
-        <p:txBody>
-          <a:bodyPr rtlCol="0" anchor="ctr"/>
-          <a:lstStyle/>
-          <a:p>
-            <a:pPr algn="ctr"/>
-          </a:p>
-        </p:txBody>
-      </p:sp>
-      <p:sp>
-        <p:nvSpPr>
-          <p:cNvPr id="41" name="TextBox 40"/>
-          <p:cNvSpPr txBox="1"/>
-          <p:nvPr/>
-        </p:nvSpPr>
-        <p:spPr>
-          <a:xfrm>
-            <a:off x="7196328" y="3429000"/>
-            <a:ext cx="1481328" cy="219456"/>
-          </a:xfrm>
-          <a:prstGeom prst="rect">
-            <a:avLst/>
-          </a:prstGeom>
-          <a:noFill/>
-        </p:spPr>
-        <p:txBody>
-          <a:bodyPr wrap="square">
-            <a:spAutoFit/>
-          </a:bodyPr>
-          <a:lstStyle/>
-          <a:p>
-            <a:pPr algn="ctr"/>
-            <a:r>
-              <a:rPr sz="1000" b="0" i="0">
-                <a:solidFill>
-                  <a:srgbClr val="C55A11"/>
-                </a:solidFill>
-              </a:rPr>
-              <a:t>126.1%</a:t>
-            </a:r>
-          </a:p>
-        </p:txBody>
-      </p:sp>
-      <p:sp>
-        <p:nvSpPr>
-          <p:cNvPr id="42" name="Rectangle 41"/>
-          <p:cNvSpPr/>
-          <p:nvPr/>
-        </p:nvSpPr>
-        <p:spPr>
-          <a:xfrm>
-            <a:off x="8723376" y="3383280"/>
-            <a:ext cx="2606040" cy="292608"/>
-          </a:xfrm>
-          <a:prstGeom prst="rect">
-            <a:avLst/>
-          </a:prstGeom>
-          <a:solidFill>
-            <a:srgbClr val="FFF3E8"/>
-          </a:solidFill>
-          <a:ln w="5080">
-            <a:solidFill>
-              <a:srgbClr val="CCCCCC"/>
-            </a:solidFill>
-          </a:ln>
-        </p:spPr>
-        <p:style>
-          <a:lnRef idx="1">
-            <a:schemeClr val="accent1"/>
-          </a:lnRef>
-          <a:fillRef idx="3">
-            <a:schemeClr val="accent1"/>
-          </a:fillRef>
-          <a:effectRef idx="2">
-            <a:schemeClr val="accent1"/>
-          </a:effectRef>
-          <a:fontRef idx="minor">
-            <a:schemeClr val="lt1"/>
-          </a:fontRef>
-        </p:style>
-        <p:txBody>
-          <a:bodyPr rtlCol="0" anchor="ctr"/>
-          <a:lstStyle/>
-          <a:p>
-            <a:pPr algn="ctr"/>
-          </a:p>
-        </p:txBody>
-      </p:sp>
-      <p:sp>
-        <p:nvSpPr>
-          <p:cNvPr id="43" name="TextBox 42"/>
-          <p:cNvSpPr txBox="1"/>
-          <p:nvPr/>
-        </p:nvSpPr>
-        <p:spPr>
-          <a:xfrm>
-            <a:off x="8769096" y="3429000"/>
-            <a:ext cx="2532888" cy="219456"/>
-          </a:xfrm>
-          <a:prstGeom prst="rect">
-            <a:avLst/>
-          </a:prstGeom>
-          <a:noFill/>
-        </p:spPr>
-        <p:txBody>
-          <a:bodyPr wrap="square">
-            <a:spAutoFit/>
-          </a:bodyPr>
-          <a:lstStyle/>
-          <a:p>
-            <a:pPr algn="l"/>
-            <a:r>
-              <a:rPr sz="1000" b="0" i="0">
-                <a:solidFill>
-                  <a:srgbClr val="1A1A1A"/>
-                </a:solidFill>
-              </a:rPr>
-              <a:t>↑ Enhanced growth</a:t>
-            </a:r>
-          </a:p>
-        </p:txBody>
-      </p:sp>
-      <p:sp>
-        <p:nvSpPr>
-          <p:cNvPr id="44" name="Rectangle 43"/>
-          <p:cNvSpPr/>
-          <p:nvPr/>
-        </p:nvSpPr>
-        <p:spPr>
-          <a:xfrm>
-            <a:off x="5669280" y="3694176"/>
-            <a:ext cx="1463040" cy="292608"/>
-          </a:xfrm>
-          <a:prstGeom prst="rect">
-            <a:avLst/>
-          </a:prstGeom>
-          <a:solidFill>
-            <a:srgbClr val="FFFFFF"/>
-          </a:solidFill>
-          <a:ln w="5080">
-            <a:solidFill>
-              <a:srgbClr val="CCCCCC"/>
-            </a:solidFill>
-          </a:ln>
-        </p:spPr>
-        <p:style>
-          <a:lnRef idx="1">
-            <a:schemeClr val="accent1"/>
-          </a:lnRef>
-          <a:fillRef idx="3">
-            <a:schemeClr val="accent1"/>
-          </a:fillRef>
-          <a:effectRef idx="2">
-            <a:schemeClr val="accent1"/>
-          </a:effectRef>
-          <a:fontRef idx="minor">
-            <a:schemeClr val="lt1"/>
-          </a:fontRef>
-        </p:style>
-        <p:txBody>
-          <a:bodyPr rtlCol="0" anchor="ctr"/>
-          <a:lstStyle/>
-          <a:p>
-            <a:pPr algn="ctr"/>
-          </a:p>
-        </p:txBody>
-      </p:sp>
-      <p:sp>
-        <p:nvSpPr>
-          <p:cNvPr id="45" name="TextBox 44"/>
-          <p:cNvSpPr txBox="1"/>
-          <p:nvPr/>
-        </p:nvSpPr>
-        <p:spPr>
-          <a:xfrm>
-            <a:off x="5715000" y="3739896"/>
-            <a:ext cx="1389888" cy="219456"/>
-          </a:xfrm>
-          <a:prstGeom prst="rect">
-            <a:avLst/>
-          </a:prstGeom>
-          <a:noFill/>
-        </p:spPr>
-        <p:txBody>
-          <a:bodyPr wrap="square">
-            <a:spAutoFit/>
-          </a:bodyPr>
-          <a:lstStyle/>
-          <a:p>
-            <a:pPr algn="l"/>
-            <a:r>
-              <a:rPr sz="1000" b="1" i="0">
-                <a:solidFill>
-                  <a:srgbClr val="C55A11"/>
-                </a:solidFill>
-              </a:rPr>
-              <a:t>GeneX</a:t>
-            </a:r>
-          </a:p>
-        </p:txBody>
-      </p:sp>
-      <p:sp>
-        <p:nvSpPr>
-          <p:cNvPr id="46" name="Rectangle 45"/>
-          <p:cNvSpPr/>
-          <p:nvPr/>
-        </p:nvSpPr>
-        <p:spPr>
-          <a:xfrm>
-            <a:off x="7150608" y="3694176"/>
-            <a:ext cx="1554480" cy="292608"/>
-          </a:xfrm>
-          <a:prstGeom prst="rect">
-            <a:avLst/>
-          </a:prstGeom>
-          <a:solidFill>
-            <a:srgbClr val="FFFFFF"/>
-          </a:solidFill>
-          <a:ln w="5080">
-            <a:solidFill>
-              <a:srgbClr val="CCCCCC"/>
-            </a:solidFill>
-          </a:ln>
-        </p:spPr>
-        <p:style>
-          <a:lnRef idx="1">
-            <a:schemeClr val="accent1"/>
-          </a:lnRef>
-          <a:fillRef idx="3">
-            <a:schemeClr val="accent1"/>
-          </a:fillRef>
-          <a:effectRef idx="2">
-            <a:schemeClr val="accent1"/>
-          </a:effectRef>
-          <a:fontRef idx="minor">
-            <a:schemeClr val="lt1"/>
-          </a:fontRef>
-        </p:style>
-        <p:txBody>
-          <a:bodyPr rtlCol="0" anchor="ctr"/>
-          <a:lstStyle/>
-          <a:p>
-            <a:pPr algn="ctr"/>
-          </a:p>
-        </p:txBody>
-      </p:sp>
-      <p:sp>
-        <p:nvSpPr>
-          <p:cNvPr id="47" name="TextBox 46"/>
-          <p:cNvSpPr txBox="1"/>
-          <p:nvPr/>
-        </p:nvSpPr>
-        <p:spPr>
-          <a:xfrm>
-            <a:off x="7196328" y="3739896"/>
-            <a:ext cx="1481328" cy="219456"/>
-          </a:xfrm>
-          <a:prstGeom prst="rect">
-            <a:avLst/>
-          </a:prstGeom>
-          <a:noFill/>
-        </p:spPr>
-        <p:txBody>
-          <a:bodyPr wrap="square">
-            <a:spAutoFit/>
-          </a:bodyPr>
-          <a:lstStyle/>
-          <a:p>
-            <a:pPr algn="ctr"/>
-            <a:r>
-              <a:rPr sz="1000" b="0" i="0">
-                <a:solidFill>
-                  <a:srgbClr val="C55A11"/>
-                </a:solidFill>
-              </a:rPr>
-              <a:t>124.5%</a:t>
-            </a:r>
-          </a:p>
-        </p:txBody>
-      </p:sp>
-      <p:sp>
-        <p:nvSpPr>
-          <p:cNvPr id="48" name="Rectangle 47"/>
-          <p:cNvSpPr/>
-          <p:nvPr/>
-        </p:nvSpPr>
-        <p:spPr>
-          <a:xfrm>
-            <a:off x="8723376" y="3694176"/>
-            <a:ext cx="2606040" cy="292608"/>
-          </a:xfrm>
-          <a:prstGeom prst="rect">
-            <a:avLst/>
-          </a:prstGeom>
-          <a:solidFill>
-            <a:srgbClr val="FFFFFF"/>
-          </a:solidFill>
-          <a:ln w="5080">
-            <a:solidFill>
-              <a:srgbClr val="CCCCCC"/>
-            </a:solidFill>
-          </a:ln>
-        </p:spPr>
-        <p:style>
-          <a:lnRef idx="1">
-            <a:schemeClr val="accent1"/>
-          </a:lnRef>
-          <a:fillRef idx="3">
-            <a:schemeClr val="accent1"/>
-          </a:fillRef>
-          <a:effectRef idx="2">
-            <a:schemeClr val="accent1"/>
-          </a:effectRef>
-          <a:fontRef idx="minor">
-            <a:schemeClr val="lt1"/>
-          </a:fontRef>
-        </p:style>
-        <p:txBody>
-          <a:bodyPr rtlCol="0" anchor="ctr"/>
-          <a:lstStyle/>
-          <a:p>
-            <a:pPr algn="ctr"/>
-          </a:p>
-        </p:txBody>
-      </p:sp>
-      <p:sp>
-        <p:nvSpPr>
-          <p:cNvPr id="49" name="TextBox 48"/>
-          <p:cNvSpPr txBox="1"/>
-          <p:nvPr/>
-        </p:nvSpPr>
-        <p:spPr>
-          <a:xfrm>
-            <a:off x="8769096" y="3739896"/>
-            <a:ext cx="2532888" cy="219456"/>
-          </a:xfrm>
-          <a:prstGeom prst="rect">
-            <a:avLst/>
-          </a:prstGeom>
-          <a:noFill/>
-        </p:spPr>
-        <p:txBody>
-          <a:bodyPr wrap="square">
-            <a:spAutoFit/>
-          </a:bodyPr>
-          <a:lstStyle/>
-          <a:p>
-            <a:pPr algn="l"/>
-            <a:r>
-              <a:rPr sz="1000" b="0" i="0">
-                <a:solidFill>
-                  <a:srgbClr val="1A1A1A"/>
-                </a:solidFill>
-              </a:rPr>
-              <a:t>↑ Enhanced growth</a:t>
-            </a:r>
-          </a:p>
-        </p:txBody>
-      </p:sp>
-      <p:sp>
-        <p:nvSpPr>
-          <p:cNvPr id="50" name="Rectangle 49"/>
-          <p:cNvSpPr/>
-          <p:nvPr/>
-        </p:nvSpPr>
-        <p:spPr>
-          <a:xfrm>
-            <a:off x="5669280" y="4005072"/>
-            <a:ext cx="1463040" cy="292608"/>
-          </a:xfrm>
-          <a:prstGeom prst="rect">
-            <a:avLst/>
-          </a:prstGeom>
-          <a:solidFill>
-            <a:srgbClr val="FFF3E8"/>
-          </a:solidFill>
-          <a:ln w="5080">
-            <a:solidFill>
-              <a:srgbClr val="CCCCCC"/>
-            </a:solidFill>
-          </a:ln>
-        </p:spPr>
-        <p:style>
-          <a:lnRef idx="1">
-            <a:schemeClr val="accent1"/>
-          </a:lnRef>
-          <a:fillRef idx="3">
-            <a:schemeClr val="accent1"/>
-          </a:fillRef>
-          <a:effectRef idx="2">
-            <a:schemeClr val="accent1"/>
-          </a:effectRef>
-          <a:fontRef idx="minor">
-            <a:schemeClr val="lt1"/>
-          </a:fontRef>
-        </p:style>
-        <p:txBody>
-          <a:bodyPr rtlCol="0" anchor="ctr"/>
-          <a:lstStyle/>
-          <a:p>
-            <a:pPr algn="ctr"/>
-          </a:p>
-        </p:txBody>
-      </p:sp>
-      <p:sp>
-        <p:nvSpPr>
-          <p:cNvPr id="51" name="TextBox 50"/>
-          <p:cNvSpPr txBox="1"/>
-          <p:nvPr/>
-        </p:nvSpPr>
-        <p:spPr>
-          <a:xfrm>
-            <a:off x="5715000" y="4050792"/>
-            <a:ext cx="1389888" cy="219456"/>
-          </a:xfrm>
-          <a:prstGeom prst="rect">
-            <a:avLst/>
-          </a:prstGeom>
-          <a:noFill/>
-        </p:spPr>
-        <p:txBody>
-          <a:bodyPr wrap="square">
-            <a:spAutoFit/>
-          </a:bodyPr>
-          <a:lstStyle/>
-          <a:p>
-            <a:pPr algn="l"/>
-            <a:r>
-              <a:rPr sz="1000" b="1" i="0">
-                <a:solidFill>
-                  <a:srgbClr val="C55A11"/>
-                </a:solidFill>
-              </a:rPr>
-              <a:t>GeneE</a:t>
-            </a:r>
-          </a:p>
-        </p:txBody>
-      </p:sp>
-      <p:sp>
-        <p:nvSpPr>
-          <p:cNvPr id="52" name="Rectangle 51"/>
-          <p:cNvSpPr/>
-          <p:nvPr/>
-        </p:nvSpPr>
-        <p:spPr>
-          <a:xfrm>
-            <a:off x="7150608" y="4005072"/>
-            <a:ext cx="1554480" cy="292608"/>
-          </a:xfrm>
-          <a:prstGeom prst="rect">
-            <a:avLst/>
-          </a:prstGeom>
-          <a:solidFill>
-            <a:srgbClr val="FFF3E8"/>
-          </a:solidFill>
-          <a:ln w="5080">
-            <a:solidFill>
-              <a:srgbClr val="CCCCCC"/>
-            </a:solidFill>
-          </a:ln>
-        </p:spPr>
-        <p:style>
-          <a:lnRef idx="1">
-            <a:schemeClr val="accent1"/>
-          </a:lnRef>
-          <a:fillRef idx="3">
-            <a:schemeClr val="accent1"/>
-          </a:fillRef>
-          <a:effectRef idx="2">
-            <a:schemeClr val="accent1"/>
-          </a:effectRef>
-          <a:fontRef idx="minor">
-            <a:schemeClr val="lt1"/>
-          </a:fontRef>
-        </p:style>
-        <p:txBody>
-          <a:bodyPr rtlCol="0" anchor="ctr"/>
-          <a:lstStyle/>
-          <a:p>
-            <a:pPr algn="ctr"/>
-          </a:p>
-        </p:txBody>
-      </p:sp>
-      <p:sp>
-        <p:nvSpPr>
-          <p:cNvPr id="53" name="TextBox 52"/>
-          <p:cNvSpPr txBox="1"/>
-          <p:nvPr/>
-        </p:nvSpPr>
-        <p:spPr>
-          <a:xfrm>
-            <a:off x="7196328" y="4050792"/>
-            <a:ext cx="1481328" cy="219456"/>
-          </a:xfrm>
-          <a:prstGeom prst="rect">
-            <a:avLst/>
-          </a:prstGeom>
-          <a:noFill/>
-        </p:spPr>
-        <p:txBody>
-          <a:bodyPr wrap="square">
-            <a:spAutoFit/>
-          </a:bodyPr>
-          <a:lstStyle/>
-          <a:p>
-            <a:pPr algn="ctr"/>
-            <a:r>
-              <a:rPr sz="1000" b="0" i="0">
-                <a:solidFill>
-                  <a:srgbClr val="C55A11"/>
-                </a:solidFill>
-              </a:rPr>
-              <a:t>124.0%</a:t>
-            </a:r>
-          </a:p>
-        </p:txBody>
-      </p:sp>
-      <p:sp>
-        <p:nvSpPr>
-          <p:cNvPr id="54" name="Rectangle 53"/>
-          <p:cNvSpPr/>
-          <p:nvPr/>
-        </p:nvSpPr>
-        <p:spPr>
-          <a:xfrm>
-            <a:off x="8723376" y="4005072"/>
-            <a:ext cx="2606040" cy="292608"/>
-          </a:xfrm>
-          <a:prstGeom prst="rect">
-            <a:avLst/>
-          </a:prstGeom>
-          <a:solidFill>
-            <a:srgbClr val="FFF3E8"/>
-          </a:solidFill>
-          <a:ln w="5080">
-            <a:solidFill>
-              <a:srgbClr val="CCCCCC"/>
-            </a:solidFill>
-          </a:ln>
-        </p:spPr>
-        <p:style>
-          <a:lnRef idx="1">
-            <a:schemeClr val="accent1"/>
-          </a:lnRef>
-          <a:fillRef idx="3">
-            <a:schemeClr val="accent1"/>
-          </a:fillRef>
-          <a:effectRef idx="2">
-            <a:schemeClr val="accent1"/>
-          </a:effectRef>
-          <a:fontRef idx="minor">
-            <a:schemeClr val="lt1"/>
-          </a:fontRef>
-        </p:style>
-        <p:txBody>
-          <a:bodyPr rtlCol="0" anchor="ctr"/>
-          <a:lstStyle/>
-          <a:p>
-            <a:pPr algn="ctr"/>
-          </a:p>
-        </p:txBody>
-      </p:sp>
-      <p:sp>
-        <p:nvSpPr>
-          <p:cNvPr id="55" name="TextBox 54"/>
-          <p:cNvSpPr txBox="1"/>
-          <p:nvPr/>
-        </p:nvSpPr>
-        <p:spPr>
-          <a:xfrm>
-            <a:off x="8769096" y="4050792"/>
-            <a:ext cx="2532888" cy="219456"/>
-          </a:xfrm>
-          <a:prstGeom prst="rect">
-            <a:avLst/>
-          </a:prstGeom>
-          <a:noFill/>
-        </p:spPr>
-        <p:txBody>
-          <a:bodyPr wrap="square">
-            <a:spAutoFit/>
-          </a:bodyPr>
-          <a:lstStyle/>
-          <a:p>
-            <a:pPr algn="l"/>
-            <a:r>
-              <a:rPr sz="1000" b="0" i="0">
-                <a:solidFill>
-                  <a:srgbClr val="1A1A1A"/>
-                </a:solidFill>
-              </a:rPr>
-              <a:t>↑ Enhanced growth</a:t>
-            </a:r>
-          </a:p>
-        </p:txBody>
-      </p:sp>
-      <p:sp>
-        <p:nvSpPr>
-          <p:cNvPr id="56" name="Rectangle 55"/>
-          <p:cNvSpPr/>
-          <p:nvPr/>
-        </p:nvSpPr>
-        <p:spPr>
-          <a:xfrm>
-            <a:off x="274320" y="3767328"/>
-            <a:ext cx="11640312" cy="2633472"/>
-          </a:xfrm>
-          <a:prstGeom prst="rect">
-            <a:avLst/>
-          </a:prstGeom>
-          <a:solidFill>
-            <a:srgbClr val="F5F9FF"/>
-          </a:solidFill>
-          <a:ln w="12700">
-            <a:solidFill>
-              <a:srgbClr val="2E75B6"/>
-            </a:solidFill>
-          </a:ln>
-        </p:spPr>
-        <p:style>
-          <a:lnRef idx="1">
-            <a:schemeClr val="accent1"/>
-          </a:lnRef>
-          <a:fillRef idx="3">
-            <a:schemeClr val="accent1"/>
-          </a:fillRef>
-          <a:effectRef idx="2">
-            <a:schemeClr val="accent1"/>
-          </a:effectRef>
-          <a:fontRef idx="minor">
-            <a:schemeClr val="lt1"/>
-          </a:fontRef>
-        </p:style>
-        <p:txBody>
-          <a:bodyPr rtlCol="0" anchor="ctr"/>
-          <a:lstStyle/>
-          <a:p>
-            <a:pPr algn="ctr"/>
-          </a:p>
-        </p:txBody>
-      </p:sp>
-      <p:sp>
-        <p:nvSpPr>
-          <p:cNvPr id="57" name="Rectangle 56"/>
-          <p:cNvSpPr/>
-          <p:nvPr/>
-        </p:nvSpPr>
-        <p:spPr>
-          <a:xfrm>
-            <a:off x="274320" y="3767328"/>
-            <a:ext cx="11640312" cy="475488"/>
-          </a:xfrm>
-          <a:prstGeom prst="rect">
-            <a:avLst/>
-          </a:prstGeom>
-          <a:solidFill>
-            <a:srgbClr val="2E75B6"/>
-          </a:solidFill>
-          <a:ln>
-            <a:noFill/>
-          </a:ln>
-        </p:spPr>
-        <p:style>
-          <a:lnRef idx="1">
-            <a:schemeClr val="accent1"/>
-          </a:lnRef>
-          <a:fillRef idx="3">
-            <a:schemeClr val="accent1"/>
-          </a:fillRef>
-          <a:effectRef idx="2">
-            <a:schemeClr val="accent1"/>
-          </a:effectRef>
-          <a:fontRef idx="minor">
-            <a:schemeClr val="lt1"/>
-          </a:fontRef>
-        </p:style>
-        <p:txBody>
-          <a:bodyPr rtlCol="0" anchor="ctr"/>
-          <a:lstStyle/>
-          <a:p>
-            <a:pPr algn="ctr"/>
-          </a:p>
-        </p:txBody>
-      </p:sp>
-      <p:sp>
-        <p:nvSpPr>
-          <p:cNvPr id="58" name="TextBox 57"/>
-          <p:cNvSpPr txBox="1"/>
-          <p:nvPr/>
-        </p:nvSpPr>
-        <p:spPr>
-          <a:xfrm>
-            <a:off x="457200" y="3840480"/>
-            <a:ext cx="8686800" cy="329184"/>
-          </a:xfrm>
-          <a:prstGeom prst="rect">
-            <a:avLst/>
-          </a:prstGeom>
-          <a:noFill/>
-        </p:spPr>
-        <p:txBody>
-          <a:bodyPr wrap="square">
-            <a:spAutoFit/>
-          </a:bodyPr>
-          <a:lstStyle/>
-          <a:p>
-            <a:pPr algn="l"/>
-            <a:r>
-              <a:rPr sz="1400" b="1" i="0">
-                <a:solidFill>
-                  <a:srgbClr val="FFFFFF"/>
-                </a:solidFill>
-              </a:rPr>
-              <a:t>Several Time Points  |  Multiple Controls  (23 time points, 3 h intervals, ~69 h total)</a:t>
-            </a:r>
-          </a:p>
-        </p:txBody>
-      </p:sp>
-      <p:sp>
-        <p:nvSpPr>
-          <p:cNvPr id="59" name="Rectangle 58"/>
-          <p:cNvSpPr/>
-          <p:nvPr/>
-        </p:nvSpPr>
-        <p:spPr>
-          <a:xfrm>
-            <a:off x="9601200" y="3858768"/>
-            <a:ext cx="2148840" cy="292608"/>
-          </a:xfrm>
-          <a:prstGeom prst="rect">
-            <a:avLst/>
-          </a:prstGeom>
-          <a:solidFill>
-            <a:srgbClr val="1F8678"/>
-          </a:solidFill>
-          <a:ln>
-            <a:noFill/>
-          </a:ln>
-        </p:spPr>
-        <p:style>
-          <a:lnRef idx="1">
-            <a:schemeClr val="accent1"/>
-          </a:lnRef>
-          <a:fillRef idx="3">
-            <a:schemeClr val="accent1"/>
-          </a:fillRef>
-          <a:effectRef idx="2">
-            <a:schemeClr val="accent1"/>
-          </a:effectRef>
-          <a:fontRef idx="minor">
-            <a:schemeClr val="lt1"/>
-          </a:fontRef>
-        </p:style>
-        <p:txBody>
-          <a:bodyPr rtlCol="0" anchor="ctr"/>
-          <a:lstStyle/>
-          <a:p>
-            <a:pPr algn="ctr"/>
-          </a:p>
-        </p:txBody>
-      </p:sp>
-      <p:sp>
-        <p:nvSpPr>
-          <p:cNvPr id="60" name="TextBox 59"/>
-          <p:cNvSpPr txBox="1"/>
-          <p:nvPr/>
-        </p:nvSpPr>
-        <p:spPr>
-          <a:xfrm>
-            <a:off x="9619488" y="3867912"/>
-            <a:ext cx="2112264" cy="256032"/>
-          </a:xfrm>
-          <a:prstGeom prst="rect">
-            <a:avLst/>
-          </a:prstGeom>
-          <a:noFill/>
-        </p:spPr>
-        <p:txBody>
-          <a:bodyPr wrap="square">
-            <a:spAutoFit/>
-          </a:bodyPr>
-          <a:lstStyle/>
-          <a:p>
-            <a:pPr algn="ctr"/>
-            <a:r>
-              <a:rPr sz="1100" b="1" i="0">
-                <a:solidFill>
-                  <a:srgbClr val="FFFFFF"/>
-                </a:solidFill>
-              </a:rPr>
-              <a:t>✅  COMPLETE</a:t>
-            </a:r>
-          </a:p>
-        </p:txBody>
-      </p:sp>
-      <p:sp>
-        <p:nvSpPr>
-          <p:cNvPr id="61" name="TextBox 60"/>
-          <p:cNvSpPr txBox="1"/>
-          <p:nvPr/>
-        </p:nvSpPr>
-        <p:spPr>
-          <a:xfrm>
-            <a:off x="457200" y="4315968"/>
-            <a:ext cx="11247120" cy="292608"/>
-          </a:xfrm>
-          <a:prstGeom prst="rect">
-            <a:avLst/>
-          </a:prstGeom>
-          <a:noFill/>
-        </p:spPr>
-        <p:txBody>
-          <a:bodyPr wrap="square">
-            <a:spAutoFit/>
-          </a:bodyPr>
-          <a:lstStyle/>
-          <a:p>
-            <a:pPr algn="l"/>
-            <a:r>
-              <a:rPr sz="1100" b="0" i="1">
-                <a:solidFill>
-                  <a:srgbClr val="1A375E"/>
-                </a:solidFill>
-              </a:rPr>
-              <a:t>Same perturbagens measured across time, enabling growth kinetics and rate calculations per target.</a:t>
-            </a:r>
-          </a:p>
-        </p:txBody>
-      </p:sp>
-      <p:sp>
-        <p:nvSpPr>
-          <p:cNvPr id="62" name="TextBox 61"/>
-          <p:cNvSpPr txBox="1"/>
-          <p:nvPr/>
-        </p:nvSpPr>
-        <p:spPr>
-          <a:xfrm>
-            <a:off x="457200" y="4663440"/>
-            <a:ext cx="7772400" cy="1627632"/>
-          </a:xfrm>
-          <a:prstGeom prst="rect">
-            <a:avLst/>
-          </a:prstGeom>
-          <a:noFill/>
-        </p:spPr>
-        <p:txBody>
-          <a:bodyPr wrap="square">
-            <a:spAutoFit/>
-          </a:bodyPr>
-          <a:lstStyle/>
-          <a:p>
-            <a:pPr>
-              <a:spcBef>
-                <a:spcPts val="400"/>
-              </a:spcBef>
-            </a:pPr>
-            <a:r>
-              <a:rPr sz="1100">
-                <a:solidFill>
-                  <a:srgbClr val="1A1A1A"/>
-                </a:solidFill>
-              </a:rPr>
-              <a:t>•  Growth rate computed at each time point as a ratio to matched control</a:t>
-            </a:r>
-          </a:p>
-          <a:p>
-            <a:pPr>
-              <a:spcBef>
-                <a:spcPts val="400"/>
-              </a:spcBef>
-            </a:pPr>
-            <a:r>
-              <a:rPr sz="1100">
-                <a:solidFill>
-                  <a:srgbClr val="1A1A1A"/>
-                </a:solidFill>
-              </a:rPr>
-              <a:t>•  Growth rate &gt; 1.0 — cells proliferating faster (possible tumour suppressor knockdown)</a:t>
-            </a:r>
-          </a:p>
-          <a:p>
-            <a:pPr>
-              <a:spcBef>
-                <a:spcPts val="400"/>
-              </a:spcBef>
-            </a:pPr>
-            <a:r>
-              <a:rPr sz="1100">
-                <a:solidFill>
-                  <a:srgbClr val="1A1A1A"/>
-                </a:solidFill>
-              </a:rPr>
-              <a:t>•  Growth rate &lt; 1.0 — cells proliferating slower (growth-promoting gene silenced)</a:t>
-            </a:r>
-          </a:p>
-          <a:p>
-            <a:pPr>
-              <a:spcBef>
-                <a:spcPts val="400"/>
-              </a:spcBef>
-            </a:pPr>
-            <a:r>
-              <a:rPr sz="1100">
-                <a:solidFill>
-                  <a:srgbClr val="1A1A1A"/>
-                </a:solidFill>
-              </a:rPr>
-              <a:t>•  Multiple independent control groups enable robust plate-wide normalisation</a:t>
-            </a:r>
-          </a:p>
-          <a:p>
-            <a:pPr>
-              <a:spcBef>
-                <a:spcPts val="400"/>
-              </a:spcBef>
-            </a:pPr>
-            <a:r>
-              <a:rPr sz="1100">
-                <a:solidFill>
-                  <a:srgbClr val="1A1A1A"/>
-                </a:solidFill>
-              </a:rPr>
-              <a:t>•  Time-resolved data reveals whether effects are immediate, delayed, or transient</a:t>
-            </a:r>
-          </a:p>
-        </p:txBody>
-      </p:sp>
-      <p:sp>
-        <p:nvSpPr>
-          <p:cNvPr id="63" name="Rectangle 62"/>
-          <p:cNvSpPr/>
-          <p:nvPr/>
-        </p:nvSpPr>
-        <p:spPr>
-          <a:xfrm>
-            <a:off x="8412480" y="4636008"/>
-            <a:ext cx="3337560" cy="1664208"/>
-          </a:xfrm>
-          <a:prstGeom prst="rect">
-            <a:avLst/>
-          </a:prstGeom>
-          <a:solidFill>
-            <a:srgbClr val="FFFFFF"/>
-          </a:solidFill>
-          <a:ln w="10160">
-            <a:solidFill>
-              <a:srgbClr val="2E75B6"/>
-            </a:solidFill>
-          </a:ln>
-        </p:spPr>
-        <p:style>
-          <a:lnRef idx="1">
-            <a:schemeClr val="accent1"/>
-          </a:lnRef>
-          <a:fillRef idx="3">
-            <a:schemeClr val="accent1"/>
-          </a:fillRef>
-          <a:effectRef idx="2">
-            <a:schemeClr val="accent1"/>
-          </a:effectRef>
-          <a:fontRef idx="minor">
-            <a:schemeClr val="lt1"/>
-          </a:fontRef>
-        </p:style>
-        <p:txBody>
-          <a:bodyPr rtlCol="0" anchor="ctr"/>
-          <a:lstStyle/>
-          <a:p>
-            <a:pPr algn="ctr"/>
-          </a:p>
-        </p:txBody>
-      </p:sp>
-      <p:sp>
-        <p:nvSpPr>
-          <p:cNvPr id="64" name="TextBox 63"/>
-          <p:cNvSpPr txBox="1"/>
-          <p:nvPr/>
-        </p:nvSpPr>
-        <p:spPr>
-          <a:xfrm>
-            <a:off x="8549640" y="4681728"/>
-            <a:ext cx="3108960" cy="256032"/>
-          </a:xfrm>
-          <a:prstGeom prst="rect">
-            <a:avLst/>
-          </a:prstGeom>
-          <a:noFill/>
-        </p:spPr>
-        <p:txBody>
-          <a:bodyPr wrap="square">
-            <a:spAutoFit/>
-          </a:bodyPr>
-          <a:lstStyle/>
-          <a:p>
-            <a:pPr algn="l"/>
-            <a:r>
-              <a:rPr sz="1000" b="1" i="0">
-                <a:solidFill>
-                  <a:srgbClr val="2E75B6"/>
-                </a:solidFill>
-              </a:rPr>
-              <a:t>Interpretation</a:t>
-            </a:r>
-          </a:p>
-        </p:txBody>
-      </p:sp>
-      <p:sp>
-        <p:nvSpPr>
-          <p:cNvPr id="65" name="TextBox 64"/>
-          <p:cNvSpPr txBox="1"/>
-          <p:nvPr/>
-        </p:nvSpPr>
-        <p:spPr>
-          <a:xfrm>
-            <a:off x="8549640" y="4974336"/>
-            <a:ext cx="3108960" cy="1261872"/>
-          </a:xfrm>
-          <a:prstGeom prst="rect">
-            <a:avLst/>
-          </a:prstGeom>
-          <a:noFill/>
-        </p:spPr>
-        <p:txBody>
-          <a:bodyPr wrap="square">
-            <a:spAutoFit/>
-          </a:bodyPr>
-          <a:lstStyle/>
-          <a:p>
-            <a:pPr algn="l"/>
-            <a:r>
-              <a:rPr sz="1000" b="0" i="1">
-                <a:solidFill>
-                  <a:srgbClr val="1A1A1A"/>
-                </a:solidFill>
-              </a:rPr>
-              <a:t>Time-course data provides richer biological insight than endpoint alone — a perturbagen with a delayed growth rate change may reflect an indirect or adaptive cellular response.</a:t>
-            </a:r>
-          </a:p>
-        </p:txBody>
-      </p:sp>
-      <p:sp>
-        <p:nvSpPr>
-          <p:cNvPr id="66" name="Rectangle 65"/>
-          <p:cNvSpPr/>
-          <p:nvPr/>
-        </p:nvSpPr>
-        <p:spPr>
-          <a:xfrm>
-            <a:off x="0" y="6656832"/>
-            <a:ext cx="12188952" cy="201168"/>
-          </a:xfrm>
-          <a:prstGeom prst="rect">
-            <a:avLst/>
-          </a:prstGeom>
-          <a:solidFill>
-            <a:srgbClr val="1A375E"/>
-          </a:solidFill>
-          <a:ln>
-            <a:noFill/>
-          </a:ln>
-        </p:spPr>
-        <p:style>
-          <a:lnRef idx="1">
-            <a:schemeClr val="accent1"/>
-          </a:lnRef>
-          <a:fillRef idx="3">
-            <a:schemeClr val="accent1"/>
-          </a:fillRef>
-          <a:effectRef idx="2">
-            <a:schemeClr val="accent1"/>
-          </a:effectRef>
-          <a:fontRef idx="minor">
-            <a:schemeClr val="lt1"/>
-          </a:fontRef>
-        </p:style>
-        <p:txBody>
-          <a:bodyPr rtlCol="0" anchor="ctr"/>
-          <a:lstStyle/>
-          <a:p>
-            <a:pPr algn="ctr"/>
-          </a:p>
-        </p:txBody>
-      </p:sp>
-      <p:sp>
-        <p:nvSpPr>
-          <p:cNvPr id="67" name="TextBox 66"/>
           <p:cNvSpPr txBox="1"/>
           <p:nvPr/>
         </p:nvSpPr>
@@ -12156,14 +10623,14 @@
                   <a:srgbClr val="FFFFFF"/>
                 </a:solidFill>
               </a:rPr>
-              <a:t>Slide 5 of 6</a:t>
-            </a:r>
-          </a:p>
-        </p:txBody>
-      </p:sp>
-      <p:sp>
-        <p:nvSpPr>
-          <p:cNvPr id="68" name="TextBox 67"/>
+              <a:t>Slide 5 of 7</a:t>
+            </a:r>
+          </a:p>
+        </p:txBody>
+      </p:sp>
+      <p:sp>
+        <p:nvSpPr>
+          <p:cNvPr id="28" name="TextBox 27"/>
           <p:cNvSpPr txBox="1"/>
           <p:nvPr/>
         </p:nvSpPr>
@@ -12336,6 +10803,2772 @@
                   <a:srgbClr val="FFFFFF"/>
                 </a:solidFill>
               </a:rPr>
+              <a:t>Genetic Perturbagen Screen Results</a:t>
+            </a:r>
+          </a:p>
+        </p:txBody>
+      </p:sp>
+      <p:sp>
+        <p:nvSpPr>
+          <p:cNvPr id="5" name="TextBox 4"/>
+          <p:cNvSpPr txBox="1"/>
+          <p:nvPr/>
+        </p:nvSpPr>
+        <p:spPr>
+          <a:xfrm>
+            <a:off x="228600" y="548640"/>
+            <a:ext cx="11704320" cy="228600"/>
+          </a:xfrm>
+          <a:prstGeom prst="rect">
+            <a:avLst/>
+          </a:prstGeom>
+          <a:noFill/>
+        </p:spPr>
+        <p:txBody>
+          <a:bodyPr wrap="square">
+            <a:spAutoFit/>
+          </a:bodyPr>
+          <a:lstStyle/>
+          <a:p>
+            <a:pPr algn="l"/>
+            <a:r>
+              <a:rPr sz="1200" b="0" i="0">
+                <a:solidFill>
+                  <a:srgbClr val="BDD7EE"/>
+                </a:solidFill>
+              </a:rPr>
+              <a:t>siRNA/shRNA knockdown screens  ·  MCF7 cells  ·  1 and multi-timepoint datasets</a:t>
+            </a:r>
+          </a:p>
+        </p:txBody>
+      </p:sp>
+      <p:sp>
+        <p:nvSpPr>
+          <p:cNvPr id="6" name="Rectangle 5"/>
+          <p:cNvSpPr/>
+          <p:nvPr/>
+        </p:nvSpPr>
+        <p:spPr>
+          <a:xfrm>
+            <a:off x="274320" y="987552"/>
+            <a:ext cx="11640312" cy="2633472"/>
+          </a:xfrm>
+          <a:prstGeom prst="rect">
+            <a:avLst/>
+          </a:prstGeom>
+          <a:solidFill>
+            <a:srgbClr val="F5F9FF"/>
+          </a:solidFill>
+          <a:ln w="12700">
+            <a:solidFill>
+              <a:srgbClr val="2E75B6"/>
+            </a:solidFill>
+          </a:ln>
+        </p:spPr>
+        <p:style>
+          <a:lnRef idx="1">
+            <a:schemeClr val="accent1"/>
+          </a:lnRef>
+          <a:fillRef idx="3">
+            <a:schemeClr val="accent1"/>
+          </a:fillRef>
+          <a:effectRef idx="2">
+            <a:schemeClr val="accent1"/>
+          </a:effectRef>
+          <a:fontRef idx="minor">
+            <a:schemeClr val="lt1"/>
+          </a:fontRef>
+        </p:style>
+        <p:txBody>
+          <a:bodyPr rtlCol="0" anchor="ctr"/>
+          <a:lstStyle/>
+          <a:p>
+            <a:pPr algn="ctr"/>
+          </a:p>
+        </p:txBody>
+      </p:sp>
+      <p:sp>
+        <p:nvSpPr>
+          <p:cNvPr id="7" name="Rectangle 6"/>
+          <p:cNvSpPr/>
+          <p:nvPr/>
+        </p:nvSpPr>
+        <p:spPr>
+          <a:xfrm>
+            <a:off x="274320" y="987552"/>
+            <a:ext cx="11640312" cy="475488"/>
+          </a:xfrm>
+          <a:prstGeom prst="rect">
+            <a:avLst/>
+          </a:prstGeom>
+          <a:solidFill>
+            <a:srgbClr val="2E75B6"/>
+          </a:solidFill>
+          <a:ln>
+            <a:noFill/>
+          </a:ln>
+        </p:spPr>
+        <p:style>
+          <a:lnRef idx="1">
+            <a:schemeClr val="accent1"/>
+          </a:lnRef>
+          <a:fillRef idx="3">
+            <a:schemeClr val="accent1"/>
+          </a:fillRef>
+          <a:effectRef idx="2">
+            <a:schemeClr val="accent1"/>
+          </a:effectRef>
+          <a:fontRef idx="minor">
+            <a:schemeClr val="lt1"/>
+          </a:fontRef>
+        </p:style>
+        <p:txBody>
+          <a:bodyPr rtlCol="0" anchor="ctr"/>
+          <a:lstStyle/>
+          <a:p>
+            <a:pPr algn="ctr"/>
+          </a:p>
+        </p:txBody>
+      </p:sp>
+      <p:sp>
+        <p:nvSpPr>
+          <p:cNvPr id="8" name="TextBox 7"/>
+          <p:cNvSpPr txBox="1"/>
+          <p:nvPr/>
+        </p:nvSpPr>
+        <p:spPr>
+          <a:xfrm>
+            <a:off x="457200" y="1060704"/>
+            <a:ext cx="8686800" cy="329184"/>
+          </a:xfrm>
+          <a:prstGeom prst="rect">
+            <a:avLst/>
+          </a:prstGeom>
+          <a:noFill/>
+        </p:spPr>
+        <p:txBody>
+          <a:bodyPr wrap="square">
+            <a:spAutoFit/>
+          </a:bodyPr>
+          <a:lstStyle/>
+          <a:p>
+            <a:pPr algn="l"/>
+            <a:r>
+              <a:rPr sz="1400" b="1" i="0">
+                <a:solidFill>
+                  <a:srgbClr val="FFFFFF"/>
+                </a:solidFill>
+              </a:rPr>
+              <a:t>1 Time Point  |  1 Control  (48 h endpoint)  —  75 perturbagens screened</a:t>
+            </a:r>
+          </a:p>
+        </p:txBody>
+      </p:sp>
+      <p:sp>
+        <p:nvSpPr>
+          <p:cNvPr id="9" name="Rectangle 8"/>
+          <p:cNvSpPr/>
+          <p:nvPr/>
+        </p:nvSpPr>
+        <p:spPr>
+          <a:xfrm>
+            <a:off x="9601200" y="1078992"/>
+            <a:ext cx="2148840" cy="292608"/>
+          </a:xfrm>
+          <a:prstGeom prst="rect">
+            <a:avLst/>
+          </a:prstGeom>
+          <a:solidFill>
+            <a:srgbClr val="1F8678"/>
+          </a:solidFill>
+          <a:ln>
+            <a:noFill/>
+          </a:ln>
+        </p:spPr>
+        <p:style>
+          <a:lnRef idx="1">
+            <a:schemeClr val="accent1"/>
+          </a:lnRef>
+          <a:fillRef idx="3">
+            <a:schemeClr val="accent1"/>
+          </a:fillRef>
+          <a:effectRef idx="2">
+            <a:schemeClr val="accent1"/>
+          </a:effectRef>
+          <a:fontRef idx="minor">
+            <a:schemeClr val="lt1"/>
+          </a:fontRef>
+        </p:style>
+        <p:txBody>
+          <a:bodyPr rtlCol="0" anchor="ctr"/>
+          <a:lstStyle/>
+          <a:p>
+            <a:pPr algn="ctr"/>
+          </a:p>
+        </p:txBody>
+      </p:sp>
+      <p:sp>
+        <p:nvSpPr>
+          <p:cNvPr id="10" name="TextBox 9"/>
+          <p:cNvSpPr txBox="1"/>
+          <p:nvPr/>
+        </p:nvSpPr>
+        <p:spPr>
+          <a:xfrm>
+            <a:off x="9619488" y="1088136"/>
+            <a:ext cx="2112264" cy="256032"/>
+          </a:xfrm>
+          <a:prstGeom prst="rect">
+            <a:avLst/>
+          </a:prstGeom>
+          <a:noFill/>
+        </p:spPr>
+        <p:txBody>
+          <a:bodyPr wrap="square">
+            <a:spAutoFit/>
+          </a:bodyPr>
+          <a:lstStyle/>
+          <a:p>
+            <a:pPr algn="ctr"/>
+            <a:r>
+              <a:rPr sz="1100" b="1" i="0">
+                <a:solidFill>
+                  <a:srgbClr val="FFFFFF"/>
+                </a:solidFill>
+              </a:rPr>
+              <a:t>✅  COMPLETE</a:t>
+            </a:r>
+          </a:p>
+        </p:txBody>
+      </p:sp>
+      <p:sp>
+        <p:nvSpPr>
+          <p:cNvPr id="11" name="TextBox 10"/>
+          <p:cNvSpPr txBox="1"/>
+          <p:nvPr/>
+        </p:nvSpPr>
+        <p:spPr>
+          <a:xfrm>
+            <a:off x="457200" y="1536192"/>
+            <a:ext cx="11247120" cy="292608"/>
+          </a:xfrm>
+          <a:prstGeom prst="rect">
+            <a:avLst/>
+          </a:prstGeom>
+          <a:noFill/>
+        </p:spPr>
+        <p:txBody>
+          <a:bodyPr wrap="square">
+            <a:spAutoFit/>
+          </a:bodyPr>
+          <a:lstStyle/>
+          <a:p>
+            <a:pPr algn="l"/>
+            <a:r>
+              <a:rPr sz="1100" b="0" i="1">
+                <a:solidFill>
+                  <a:srgbClr val="1A375E"/>
+                </a:solidFill>
+              </a:rPr>
+              <a:t>Gene perturbagens tested at 40 ng/well in MCF7 cells (12K/well). Normalised confluency relative to non-targeting control (100%). Note: gene names are anonymized in the HTSplotter public example dataset.</a:t>
+            </a:r>
+          </a:p>
+        </p:txBody>
+      </p:sp>
+      <p:sp>
+        <p:nvSpPr>
+          <p:cNvPr id="12" name="TextBox 11"/>
+          <p:cNvSpPr txBox="1"/>
+          <p:nvPr/>
+        </p:nvSpPr>
+        <p:spPr>
+          <a:xfrm>
+            <a:off x="457200" y="1883664"/>
+            <a:ext cx="5029200" cy="1627632"/>
+          </a:xfrm>
+          <a:prstGeom prst="rect">
+            <a:avLst/>
+          </a:prstGeom>
+          <a:noFill/>
+        </p:spPr>
+        <p:txBody>
+          <a:bodyPr wrap="square">
+            <a:spAutoFit/>
+          </a:bodyPr>
+          <a:lstStyle/>
+          <a:p>
+            <a:pPr>
+              <a:spcBef>
+                <a:spcPts val="400"/>
+              </a:spcBef>
+            </a:pPr>
+            <a:r>
+              <a:rPr sz="1100">
+                <a:solidFill>
+                  <a:srgbClr val="1A1A1A"/>
+                </a:solidFill>
+              </a:rPr>
+              <a:t>•  75 perturbagens screened in a single endpoint confluency assay</a:t>
+            </a:r>
+          </a:p>
+          <a:p>
+            <a:pPr>
+              <a:spcBef>
+                <a:spcPts val="400"/>
+              </a:spcBef>
+            </a:pPr>
+            <a:r>
+              <a:rPr sz="1100">
+                <a:solidFill>
+                  <a:srgbClr val="1A1A1A"/>
+                </a:solidFill>
+              </a:rPr>
+              <a:t>•  Values above 100% = enhanced growth; below 100% = growth inhibition</a:t>
+            </a:r>
+          </a:p>
+          <a:p>
+            <a:pPr>
+              <a:spcBef>
+                <a:spcPts val="400"/>
+              </a:spcBef>
+            </a:pPr>
+            <a:r>
+              <a:rPr sz="1100">
+                <a:solidFill>
+                  <a:srgbClr val="1A1A1A"/>
+                </a:solidFill>
+              </a:rPr>
+              <a:t>•  Identifies candidate genes whose knockdown significantly alters cell proliferation</a:t>
+            </a:r>
+          </a:p>
+        </p:txBody>
+      </p:sp>
+      <p:sp>
+        <p:nvSpPr>
+          <p:cNvPr id="13" name="TextBox 12"/>
+          <p:cNvSpPr txBox="1"/>
+          <p:nvPr/>
+        </p:nvSpPr>
+        <p:spPr>
+          <a:xfrm>
+            <a:off x="5669280" y="1883664"/>
+            <a:ext cx="5989320" cy="256032"/>
+          </a:xfrm>
+          <a:prstGeom prst="rect">
+            <a:avLst/>
+          </a:prstGeom>
+          <a:noFill/>
+        </p:spPr>
+        <p:txBody>
+          <a:bodyPr wrap="square">
+            <a:spAutoFit/>
+          </a:bodyPr>
+          <a:lstStyle/>
+          <a:p>
+            <a:pPr algn="l"/>
+            <a:r>
+              <a:rPr sz="1100" b="1" i="0">
+                <a:solidFill>
+                  <a:srgbClr val="1A375E"/>
+                </a:solidFill>
+              </a:rPr>
+              <a:t>Notable Hits  (48 h confluency vs. control)</a:t>
+            </a:r>
+          </a:p>
+        </p:txBody>
+      </p:sp>
+      <p:sp>
+        <p:nvSpPr>
+          <p:cNvPr id="14" name="Rectangle 13"/>
+          <p:cNvSpPr/>
+          <p:nvPr/>
+        </p:nvSpPr>
+        <p:spPr>
+          <a:xfrm>
+            <a:off x="5669280" y="2176272"/>
+            <a:ext cx="1463040" cy="274320"/>
+          </a:xfrm>
+          <a:prstGeom prst="rect">
+            <a:avLst/>
+          </a:prstGeom>
+          <a:solidFill>
+            <a:srgbClr val="1A375E"/>
+          </a:solidFill>
+          <a:ln>
+            <a:noFill/>
+          </a:ln>
+        </p:spPr>
+        <p:style>
+          <a:lnRef idx="1">
+            <a:schemeClr val="accent1"/>
+          </a:lnRef>
+          <a:fillRef idx="3">
+            <a:schemeClr val="accent1"/>
+          </a:fillRef>
+          <a:effectRef idx="2">
+            <a:schemeClr val="accent1"/>
+          </a:effectRef>
+          <a:fontRef idx="minor">
+            <a:schemeClr val="lt1"/>
+          </a:fontRef>
+        </p:style>
+        <p:txBody>
+          <a:bodyPr rtlCol="0" anchor="ctr"/>
+          <a:lstStyle/>
+          <a:p>
+            <a:pPr algn="ctr"/>
+          </a:p>
+        </p:txBody>
+      </p:sp>
+      <p:sp>
+        <p:nvSpPr>
+          <p:cNvPr id="15" name="TextBox 14"/>
+          <p:cNvSpPr txBox="1"/>
+          <p:nvPr/>
+        </p:nvSpPr>
+        <p:spPr>
+          <a:xfrm>
+            <a:off x="5715000" y="2203704"/>
+            <a:ext cx="1389888" cy="219456"/>
+          </a:xfrm>
+          <a:prstGeom prst="rect">
+            <a:avLst/>
+          </a:prstGeom>
+          <a:noFill/>
+        </p:spPr>
+        <p:txBody>
+          <a:bodyPr wrap="square">
+            <a:spAutoFit/>
+          </a:bodyPr>
+          <a:lstStyle/>
+          <a:p>
+            <a:pPr algn="ctr"/>
+            <a:r>
+              <a:rPr sz="1000" b="1" i="0">
+                <a:solidFill>
+                  <a:srgbClr val="FFFFFF"/>
+                </a:solidFill>
+              </a:rPr>
+              <a:t>Target</a:t>
+            </a:r>
+          </a:p>
+        </p:txBody>
+      </p:sp>
+      <p:sp>
+        <p:nvSpPr>
+          <p:cNvPr id="16" name="Rectangle 15"/>
+          <p:cNvSpPr/>
+          <p:nvPr/>
+        </p:nvSpPr>
+        <p:spPr>
+          <a:xfrm>
+            <a:off x="7150608" y="2176272"/>
+            <a:ext cx="1554480" cy="274320"/>
+          </a:xfrm>
+          <a:prstGeom prst="rect">
+            <a:avLst/>
+          </a:prstGeom>
+          <a:solidFill>
+            <a:srgbClr val="1A375E"/>
+          </a:solidFill>
+          <a:ln>
+            <a:noFill/>
+          </a:ln>
+        </p:spPr>
+        <p:style>
+          <a:lnRef idx="1">
+            <a:schemeClr val="accent1"/>
+          </a:lnRef>
+          <a:fillRef idx="3">
+            <a:schemeClr val="accent1"/>
+          </a:fillRef>
+          <a:effectRef idx="2">
+            <a:schemeClr val="accent1"/>
+          </a:effectRef>
+          <a:fontRef idx="minor">
+            <a:schemeClr val="lt1"/>
+          </a:fontRef>
+        </p:style>
+        <p:txBody>
+          <a:bodyPr rtlCol="0" anchor="ctr"/>
+          <a:lstStyle/>
+          <a:p>
+            <a:pPr algn="ctr"/>
+          </a:p>
+        </p:txBody>
+      </p:sp>
+      <p:sp>
+        <p:nvSpPr>
+          <p:cNvPr id="17" name="TextBox 16"/>
+          <p:cNvSpPr txBox="1"/>
+          <p:nvPr/>
+        </p:nvSpPr>
+        <p:spPr>
+          <a:xfrm>
+            <a:off x="7196328" y="2203704"/>
+            <a:ext cx="1481328" cy="219456"/>
+          </a:xfrm>
+          <a:prstGeom prst="rect">
+            <a:avLst/>
+          </a:prstGeom>
+          <a:noFill/>
+        </p:spPr>
+        <p:txBody>
+          <a:bodyPr wrap="square">
+            <a:spAutoFit/>
+          </a:bodyPr>
+          <a:lstStyle/>
+          <a:p>
+            <a:pPr algn="ctr"/>
+            <a:r>
+              <a:rPr sz="1000" b="1" i="0">
+                <a:solidFill>
+                  <a:srgbClr val="FFFFFF"/>
+                </a:solidFill>
+              </a:rPr>
+              <a:t>Confluency %</a:t>
+            </a:r>
+          </a:p>
+        </p:txBody>
+      </p:sp>
+      <p:sp>
+        <p:nvSpPr>
+          <p:cNvPr id="18" name="Rectangle 17"/>
+          <p:cNvSpPr/>
+          <p:nvPr/>
+        </p:nvSpPr>
+        <p:spPr>
+          <a:xfrm>
+            <a:off x="8723376" y="2176272"/>
+            <a:ext cx="2606040" cy="274320"/>
+          </a:xfrm>
+          <a:prstGeom prst="rect">
+            <a:avLst/>
+          </a:prstGeom>
+          <a:solidFill>
+            <a:srgbClr val="1A375E"/>
+          </a:solidFill>
+          <a:ln>
+            <a:noFill/>
+          </a:ln>
+        </p:spPr>
+        <p:style>
+          <a:lnRef idx="1">
+            <a:schemeClr val="accent1"/>
+          </a:lnRef>
+          <a:fillRef idx="3">
+            <a:schemeClr val="accent1"/>
+          </a:fillRef>
+          <a:effectRef idx="2">
+            <a:schemeClr val="accent1"/>
+          </a:effectRef>
+          <a:fontRef idx="minor">
+            <a:schemeClr val="lt1"/>
+          </a:fontRef>
+        </p:style>
+        <p:txBody>
+          <a:bodyPr rtlCol="0" anchor="ctr"/>
+          <a:lstStyle/>
+          <a:p>
+            <a:pPr algn="ctr"/>
+          </a:p>
+        </p:txBody>
+      </p:sp>
+      <p:sp>
+        <p:nvSpPr>
+          <p:cNvPr id="19" name="TextBox 18"/>
+          <p:cNvSpPr txBox="1"/>
+          <p:nvPr/>
+        </p:nvSpPr>
+        <p:spPr>
+          <a:xfrm>
+            <a:off x="8769096" y="2203704"/>
+            <a:ext cx="2532888" cy="219456"/>
+          </a:xfrm>
+          <a:prstGeom prst="rect">
+            <a:avLst/>
+          </a:prstGeom>
+          <a:noFill/>
+        </p:spPr>
+        <p:txBody>
+          <a:bodyPr wrap="square">
+            <a:spAutoFit/>
+          </a:bodyPr>
+          <a:lstStyle/>
+          <a:p>
+            <a:pPr algn="ctr"/>
+            <a:r>
+              <a:rPr sz="1000" b="1" i="0">
+                <a:solidFill>
+                  <a:srgbClr val="FFFFFF"/>
+                </a:solidFill>
+              </a:rPr>
+              <a:t>Effect</a:t>
+            </a:r>
+          </a:p>
+        </p:txBody>
+      </p:sp>
+      <p:sp>
+        <p:nvSpPr>
+          <p:cNvPr id="20" name="Rectangle 19"/>
+          <p:cNvSpPr/>
+          <p:nvPr/>
+        </p:nvSpPr>
+        <p:spPr>
+          <a:xfrm>
+            <a:off x="5669280" y="2450592"/>
+            <a:ext cx="1463040" cy="292608"/>
+          </a:xfrm>
+          <a:prstGeom prst="rect">
+            <a:avLst/>
+          </a:prstGeom>
+          <a:solidFill>
+            <a:srgbClr val="E2EFDA"/>
+          </a:solidFill>
+          <a:ln w="5080">
+            <a:solidFill>
+              <a:srgbClr val="CCCCCC"/>
+            </a:solidFill>
+          </a:ln>
+        </p:spPr>
+        <p:style>
+          <a:lnRef idx="1">
+            <a:schemeClr val="accent1"/>
+          </a:lnRef>
+          <a:fillRef idx="3">
+            <a:schemeClr val="accent1"/>
+          </a:fillRef>
+          <a:effectRef idx="2">
+            <a:schemeClr val="accent1"/>
+          </a:effectRef>
+          <a:fontRef idx="minor">
+            <a:schemeClr val="lt1"/>
+          </a:fontRef>
+        </p:style>
+        <p:txBody>
+          <a:bodyPr rtlCol="0" anchor="ctr"/>
+          <a:lstStyle/>
+          <a:p>
+            <a:pPr algn="ctr"/>
+          </a:p>
+        </p:txBody>
+      </p:sp>
+      <p:sp>
+        <p:nvSpPr>
+          <p:cNvPr id="21" name="TextBox 20"/>
+          <p:cNvSpPr txBox="1"/>
+          <p:nvPr/>
+        </p:nvSpPr>
+        <p:spPr>
+          <a:xfrm>
+            <a:off x="5715000" y="2496312"/>
+            <a:ext cx="1389888" cy="219456"/>
+          </a:xfrm>
+          <a:prstGeom prst="rect">
+            <a:avLst/>
+          </a:prstGeom>
+          <a:noFill/>
+        </p:spPr>
+        <p:txBody>
+          <a:bodyPr wrap="square">
+            <a:spAutoFit/>
+          </a:bodyPr>
+          <a:lstStyle/>
+          <a:p>
+            <a:pPr algn="l"/>
+            <a:r>
+              <a:rPr sz="1000" b="1" i="0">
+                <a:solidFill>
+                  <a:srgbClr val="379637"/>
+                </a:solidFill>
+              </a:rPr>
+              <a:t>GeneBK</a:t>
+            </a:r>
+          </a:p>
+        </p:txBody>
+      </p:sp>
+      <p:sp>
+        <p:nvSpPr>
+          <p:cNvPr id="22" name="Rectangle 21"/>
+          <p:cNvSpPr/>
+          <p:nvPr/>
+        </p:nvSpPr>
+        <p:spPr>
+          <a:xfrm>
+            <a:off x="7150608" y="2450592"/>
+            <a:ext cx="1554480" cy="292608"/>
+          </a:xfrm>
+          <a:prstGeom prst="rect">
+            <a:avLst/>
+          </a:prstGeom>
+          <a:solidFill>
+            <a:srgbClr val="E2EFDA"/>
+          </a:solidFill>
+          <a:ln w="5080">
+            <a:solidFill>
+              <a:srgbClr val="CCCCCC"/>
+            </a:solidFill>
+          </a:ln>
+        </p:spPr>
+        <p:style>
+          <a:lnRef idx="1">
+            <a:schemeClr val="accent1"/>
+          </a:lnRef>
+          <a:fillRef idx="3">
+            <a:schemeClr val="accent1"/>
+          </a:fillRef>
+          <a:effectRef idx="2">
+            <a:schemeClr val="accent1"/>
+          </a:effectRef>
+          <a:fontRef idx="minor">
+            <a:schemeClr val="lt1"/>
+          </a:fontRef>
+        </p:style>
+        <p:txBody>
+          <a:bodyPr rtlCol="0" anchor="ctr"/>
+          <a:lstStyle/>
+          <a:p>
+            <a:pPr algn="ctr"/>
+          </a:p>
+        </p:txBody>
+      </p:sp>
+      <p:sp>
+        <p:nvSpPr>
+          <p:cNvPr id="23" name="TextBox 22"/>
+          <p:cNvSpPr txBox="1"/>
+          <p:nvPr/>
+        </p:nvSpPr>
+        <p:spPr>
+          <a:xfrm>
+            <a:off x="7196328" y="2496312"/>
+            <a:ext cx="1481328" cy="219456"/>
+          </a:xfrm>
+          <a:prstGeom prst="rect">
+            <a:avLst/>
+          </a:prstGeom>
+          <a:noFill/>
+        </p:spPr>
+        <p:txBody>
+          <a:bodyPr wrap="square">
+            <a:spAutoFit/>
+          </a:bodyPr>
+          <a:lstStyle/>
+          <a:p>
+            <a:pPr algn="ctr"/>
+            <a:r>
+              <a:rPr sz="1000" b="0" i="0">
+                <a:solidFill>
+                  <a:srgbClr val="379637"/>
+                </a:solidFill>
+              </a:rPr>
+              <a:t>65.2%</a:t>
+            </a:r>
+          </a:p>
+        </p:txBody>
+      </p:sp>
+      <p:sp>
+        <p:nvSpPr>
+          <p:cNvPr id="24" name="Rectangle 23"/>
+          <p:cNvSpPr/>
+          <p:nvPr/>
+        </p:nvSpPr>
+        <p:spPr>
+          <a:xfrm>
+            <a:off x="8723376" y="2450592"/>
+            <a:ext cx="2606040" cy="292608"/>
+          </a:xfrm>
+          <a:prstGeom prst="rect">
+            <a:avLst/>
+          </a:prstGeom>
+          <a:solidFill>
+            <a:srgbClr val="E2EFDA"/>
+          </a:solidFill>
+          <a:ln w="5080">
+            <a:solidFill>
+              <a:srgbClr val="CCCCCC"/>
+            </a:solidFill>
+          </a:ln>
+        </p:spPr>
+        <p:style>
+          <a:lnRef idx="1">
+            <a:schemeClr val="accent1"/>
+          </a:lnRef>
+          <a:fillRef idx="3">
+            <a:schemeClr val="accent1"/>
+          </a:fillRef>
+          <a:effectRef idx="2">
+            <a:schemeClr val="accent1"/>
+          </a:effectRef>
+          <a:fontRef idx="minor">
+            <a:schemeClr val="lt1"/>
+          </a:fontRef>
+        </p:style>
+        <p:txBody>
+          <a:bodyPr rtlCol="0" anchor="ctr"/>
+          <a:lstStyle/>
+          <a:p>
+            <a:pPr algn="ctr"/>
+          </a:p>
+        </p:txBody>
+      </p:sp>
+      <p:sp>
+        <p:nvSpPr>
+          <p:cNvPr id="25" name="TextBox 24"/>
+          <p:cNvSpPr txBox="1"/>
+          <p:nvPr/>
+        </p:nvSpPr>
+        <p:spPr>
+          <a:xfrm>
+            <a:off x="8769096" y="2496312"/>
+            <a:ext cx="2532888" cy="219456"/>
+          </a:xfrm>
+          <a:prstGeom prst="rect">
+            <a:avLst/>
+          </a:prstGeom>
+          <a:noFill/>
+        </p:spPr>
+        <p:txBody>
+          <a:bodyPr wrap="square">
+            <a:spAutoFit/>
+          </a:bodyPr>
+          <a:lstStyle/>
+          <a:p>
+            <a:pPr algn="l"/>
+            <a:r>
+              <a:rPr sz="1000" b="0" i="0">
+                <a:solidFill>
+                  <a:srgbClr val="1A1A1A"/>
+                </a:solidFill>
+              </a:rPr>
+              <a:t>↓ Growth inhibition</a:t>
+            </a:r>
+          </a:p>
+        </p:txBody>
+      </p:sp>
+      <p:sp>
+        <p:nvSpPr>
+          <p:cNvPr id="26" name="Rectangle 25"/>
+          <p:cNvSpPr/>
+          <p:nvPr/>
+        </p:nvSpPr>
+        <p:spPr>
+          <a:xfrm>
+            <a:off x="5669280" y="2761488"/>
+            <a:ext cx="1463040" cy="292608"/>
+          </a:xfrm>
+          <a:prstGeom prst="rect">
+            <a:avLst/>
+          </a:prstGeom>
+          <a:solidFill>
+            <a:srgbClr val="FFFFFF"/>
+          </a:solidFill>
+          <a:ln w="5080">
+            <a:solidFill>
+              <a:srgbClr val="CCCCCC"/>
+            </a:solidFill>
+          </a:ln>
+        </p:spPr>
+        <p:style>
+          <a:lnRef idx="1">
+            <a:schemeClr val="accent1"/>
+          </a:lnRef>
+          <a:fillRef idx="3">
+            <a:schemeClr val="accent1"/>
+          </a:fillRef>
+          <a:effectRef idx="2">
+            <a:schemeClr val="accent1"/>
+          </a:effectRef>
+          <a:fontRef idx="minor">
+            <a:schemeClr val="lt1"/>
+          </a:fontRef>
+        </p:style>
+        <p:txBody>
+          <a:bodyPr rtlCol="0" anchor="ctr"/>
+          <a:lstStyle/>
+          <a:p>
+            <a:pPr algn="ctr"/>
+          </a:p>
+        </p:txBody>
+      </p:sp>
+      <p:sp>
+        <p:nvSpPr>
+          <p:cNvPr id="27" name="TextBox 26"/>
+          <p:cNvSpPr txBox="1"/>
+          <p:nvPr/>
+        </p:nvSpPr>
+        <p:spPr>
+          <a:xfrm>
+            <a:off x="5715000" y="2807208"/>
+            <a:ext cx="1389888" cy="219456"/>
+          </a:xfrm>
+          <a:prstGeom prst="rect">
+            <a:avLst/>
+          </a:prstGeom>
+          <a:noFill/>
+        </p:spPr>
+        <p:txBody>
+          <a:bodyPr wrap="square">
+            <a:spAutoFit/>
+          </a:bodyPr>
+          <a:lstStyle/>
+          <a:p>
+            <a:pPr algn="l"/>
+            <a:r>
+              <a:rPr sz="1000" b="1" i="0">
+                <a:solidFill>
+                  <a:srgbClr val="379637"/>
+                </a:solidFill>
+              </a:rPr>
+              <a:t>GeneBI</a:t>
+            </a:r>
+          </a:p>
+        </p:txBody>
+      </p:sp>
+      <p:sp>
+        <p:nvSpPr>
+          <p:cNvPr id="28" name="Rectangle 27"/>
+          <p:cNvSpPr/>
+          <p:nvPr/>
+        </p:nvSpPr>
+        <p:spPr>
+          <a:xfrm>
+            <a:off x="7150608" y="2761488"/>
+            <a:ext cx="1554480" cy="292608"/>
+          </a:xfrm>
+          <a:prstGeom prst="rect">
+            <a:avLst/>
+          </a:prstGeom>
+          <a:solidFill>
+            <a:srgbClr val="FFFFFF"/>
+          </a:solidFill>
+          <a:ln w="5080">
+            <a:solidFill>
+              <a:srgbClr val="CCCCCC"/>
+            </a:solidFill>
+          </a:ln>
+        </p:spPr>
+        <p:style>
+          <a:lnRef idx="1">
+            <a:schemeClr val="accent1"/>
+          </a:lnRef>
+          <a:fillRef idx="3">
+            <a:schemeClr val="accent1"/>
+          </a:fillRef>
+          <a:effectRef idx="2">
+            <a:schemeClr val="accent1"/>
+          </a:effectRef>
+          <a:fontRef idx="minor">
+            <a:schemeClr val="lt1"/>
+          </a:fontRef>
+        </p:style>
+        <p:txBody>
+          <a:bodyPr rtlCol="0" anchor="ctr"/>
+          <a:lstStyle/>
+          <a:p>
+            <a:pPr algn="ctr"/>
+          </a:p>
+        </p:txBody>
+      </p:sp>
+      <p:sp>
+        <p:nvSpPr>
+          <p:cNvPr id="29" name="TextBox 28"/>
+          <p:cNvSpPr txBox="1"/>
+          <p:nvPr/>
+        </p:nvSpPr>
+        <p:spPr>
+          <a:xfrm>
+            <a:off x="7196328" y="2807208"/>
+            <a:ext cx="1481328" cy="219456"/>
+          </a:xfrm>
+          <a:prstGeom prst="rect">
+            <a:avLst/>
+          </a:prstGeom>
+          <a:noFill/>
+        </p:spPr>
+        <p:txBody>
+          <a:bodyPr wrap="square">
+            <a:spAutoFit/>
+          </a:bodyPr>
+          <a:lstStyle/>
+          <a:p>
+            <a:pPr algn="ctr"/>
+            <a:r>
+              <a:rPr sz="1000" b="0" i="0">
+                <a:solidFill>
+                  <a:srgbClr val="379637"/>
+                </a:solidFill>
+              </a:rPr>
+              <a:t>79.1%</a:t>
+            </a:r>
+          </a:p>
+        </p:txBody>
+      </p:sp>
+      <p:sp>
+        <p:nvSpPr>
+          <p:cNvPr id="30" name="Rectangle 29"/>
+          <p:cNvSpPr/>
+          <p:nvPr/>
+        </p:nvSpPr>
+        <p:spPr>
+          <a:xfrm>
+            <a:off x="8723376" y="2761488"/>
+            <a:ext cx="2606040" cy="292608"/>
+          </a:xfrm>
+          <a:prstGeom prst="rect">
+            <a:avLst/>
+          </a:prstGeom>
+          <a:solidFill>
+            <a:srgbClr val="FFFFFF"/>
+          </a:solidFill>
+          <a:ln w="5080">
+            <a:solidFill>
+              <a:srgbClr val="CCCCCC"/>
+            </a:solidFill>
+          </a:ln>
+        </p:spPr>
+        <p:style>
+          <a:lnRef idx="1">
+            <a:schemeClr val="accent1"/>
+          </a:lnRef>
+          <a:fillRef idx="3">
+            <a:schemeClr val="accent1"/>
+          </a:fillRef>
+          <a:effectRef idx="2">
+            <a:schemeClr val="accent1"/>
+          </a:effectRef>
+          <a:fontRef idx="minor">
+            <a:schemeClr val="lt1"/>
+          </a:fontRef>
+        </p:style>
+        <p:txBody>
+          <a:bodyPr rtlCol="0" anchor="ctr"/>
+          <a:lstStyle/>
+          <a:p>
+            <a:pPr algn="ctr"/>
+          </a:p>
+        </p:txBody>
+      </p:sp>
+      <p:sp>
+        <p:nvSpPr>
+          <p:cNvPr id="31" name="TextBox 30"/>
+          <p:cNvSpPr txBox="1"/>
+          <p:nvPr/>
+        </p:nvSpPr>
+        <p:spPr>
+          <a:xfrm>
+            <a:off x="8769096" y="2807208"/>
+            <a:ext cx="2532888" cy="219456"/>
+          </a:xfrm>
+          <a:prstGeom prst="rect">
+            <a:avLst/>
+          </a:prstGeom>
+          <a:noFill/>
+        </p:spPr>
+        <p:txBody>
+          <a:bodyPr wrap="square">
+            <a:spAutoFit/>
+          </a:bodyPr>
+          <a:lstStyle/>
+          <a:p>
+            <a:pPr algn="l"/>
+            <a:r>
+              <a:rPr sz="1000" b="0" i="0">
+                <a:solidFill>
+                  <a:srgbClr val="1A1A1A"/>
+                </a:solidFill>
+              </a:rPr>
+              <a:t>↓ Growth inhibition</a:t>
+            </a:r>
+          </a:p>
+        </p:txBody>
+      </p:sp>
+      <p:sp>
+        <p:nvSpPr>
+          <p:cNvPr id="32" name="Rectangle 31"/>
+          <p:cNvSpPr/>
+          <p:nvPr/>
+        </p:nvSpPr>
+        <p:spPr>
+          <a:xfrm>
+            <a:off x="5669280" y="3072384"/>
+            <a:ext cx="1463040" cy="292608"/>
+          </a:xfrm>
+          <a:prstGeom prst="rect">
+            <a:avLst/>
+          </a:prstGeom>
+          <a:solidFill>
+            <a:srgbClr val="E2EFDA"/>
+          </a:solidFill>
+          <a:ln w="5080">
+            <a:solidFill>
+              <a:srgbClr val="CCCCCC"/>
+            </a:solidFill>
+          </a:ln>
+        </p:spPr>
+        <p:style>
+          <a:lnRef idx="1">
+            <a:schemeClr val="accent1"/>
+          </a:lnRef>
+          <a:fillRef idx="3">
+            <a:schemeClr val="accent1"/>
+          </a:fillRef>
+          <a:effectRef idx="2">
+            <a:schemeClr val="accent1"/>
+          </a:effectRef>
+          <a:fontRef idx="minor">
+            <a:schemeClr val="lt1"/>
+          </a:fontRef>
+        </p:style>
+        <p:txBody>
+          <a:bodyPr rtlCol="0" anchor="ctr"/>
+          <a:lstStyle/>
+          <a:p>
+            <a:pPr algn="ctr"/>
+          </a:p>
+        </p:txBody>
+      </p:sp>
+      <p:sp>
+        <p:nvSpPr>
+          <p:cNvPr id="33" name="TextBox 32"/>
+          <p:cNvSpPr txBox="1"/>
+          <p:nvPr/>
+        </p:nvSpPr>
+        <p:spPr>
+          <a:xfrm>
+            <a:off x="5715000" y="3118104"/>
+            <a:ext cx="1389888" cy="219456"/>
+          </a:xfrm>
+          <a:prstGeom prst="rect">
+            <a:avLst/>
+          </a:prstGeom>
+          <a:noFill/>
+        </p:spPr>
+        <p:txBody>
+          <a:bodyPr wrap="square">
+            <a:spAutoFit/>
+          </a:bodyPr>
+          <a:lstStyle/>
+          <a:p>
+            <a:pPr algn="l"/>
+            <a:r>
+              <a:rPr sz="1000" b="1" i="0">
+                <a:solidFill>
+                  <a:srgbClr val="379637"/>
+                </a:solidFill>
+              </a:rPr>
+              <a:t>GeneAG</a:t>
+            </a:r>
+          </a:p>
+        </p:txBody>
+      </p:sp>
+      <p:sp>
+        <p:nvSpPr>
+          <p:cNvPr id="34" name="Rectangle 33"/>
+          <p:cNvSpPr/>
+          <p:nvPr/>
+        </p:nvSpPr>
+        <p:spPr>
+          <a:xfrm>
+            <a:off x="7150608" y="3072384"/>
+            <a:ext cx="1554480" cy="292608"/>
+          </a:xfrm>
+          <a:prstGeom prst="rect">
+            <a:avLst/>
+          </a:prstGeom>
+          <a:solidFill>
+            <a:srgbClr val="E2EFDA"/>
+          </a:solidFill>
+          <a:ln w="5080">
+            <a:solidFill>
+              <a:srgbClr val="CCCCCC"/>
+            </a:solidFill>
+          </a:ln>
+        </p:spPr>
+        <p:style>
+          <a:lnRef idx="1">
+            <a:schemeClr val="accent1"/>
+          </a:lnRef>
+          <a:fillRef idx="3">
+            <a:schemeClr val="accent1"/>
+          </a:fillRef>
+          <a:effectRef idx="2">
+            <a:schemeClr val="accent1"/>
+          </a:effectRef>
+          <a:fontRef idx="minor">
+            <a:schemeClr val="lt1"/>
+          </a:fontRef>
+        </p:style>
+        <p:txBody>
+          <a:bodyPr rtlCol="0" anchor="ctr"/>
+          <a:lstStyle/>
+          <a:p>
+            <a:pPr algn="ctr"/>
+          </a:p>
+        </p:txBody>
+      </p:sp>
+      <p:sp>
+        <p:nvSpPr>
+          <p:cNvPr id="35" name="TextBox 34"/>
+          <p:cNvSpPr txBox="1"/>
+          <p:nvPr/>
+        </p:nvSpPr>
+        <p:spPr>
+          <a:xfrm>
+            <a:off x="7196328" y="3118104"/>
+            <a:ext cx="1481328" cy="219456"/>
+          </a:xfrm>
+          <a:prstGeom prst="rect">
+            <a:avLst/>
+          </a:prstGeom>
+          <a:noFill/>
+        </p:spPr>
+        <p:txBody>
+          <a:bodyPr wrap="square">
+            <a:spAutoFit/>
+          </a:bodyPr>
+          <a:lstStyle/>
+          <a:p>
+            <a:pPr algn="ctr"/>
+            <a:r>
+              <a:rPr sz="1000" b="0" i="0">
+                <a:solidFill>
+                  <a:srgbClr val="379637"/>
+                </a:solidFill>
+              </a:rPr>
+              <a:t>79.9%</a:t>
+            </a:r>
+          </a:p>
+        </p:txBody>
+      </p:sp>
+      <p:sp>
+        <p:nvSpPr>
+          <p:cNvPr id="36" name="Rectangle 35"/>
+          <p:cNvSpPr/>
+          <p:nvPr/>
+        </p:nvSpPr>
+        <p:spPr>
+          <a:xfrm>
+            <a:off x="8723376" y="3072384"/>
+            <a:ext cx="2606040" cy="292608"/>
+          </a:xfrm>
+          <a:prstGeom prst="rect">
+            <a:avLst/>
+          </a:prstGeom>
+          <a:solidFill>
+            <a:srgbClr val="E2EFDA"/>
+          </a:solidFill>
+          <a:ln w="5080">
+            <a:solidFill>
+              <a:srgbClr val="CCCCCC"/>
+            </a:solidFill>
+          </a:ln>
+        </p:spPr>
+        <p:style>
+          <a:lnRef idx="1">
+            <a:schemeClr val="accent1"/>
+          </a:lnRef>
+          <a:fillRef idx="3">
+            <a:schemeClr val="accent1"/>
+          </a:fillRef>
+          <a:effectRef idx="2">
+            <a:schemeClr val="accent1"/>
+          </a:effectRef>
+          <a:fontRef idx="minor">
+            <a:schemeClr val="lt1"/>
+          </a:fontRef>
+        </p:style>
+        <p:txBody>
+          <a:bodyPr rtlCol="0" anchor="ctr"/>
+          <a:lstStyle/>
+          <a:p>
+            <a:pPr algn="ctr"/>
+          </a:p>
+        </p:txBody>
+      </p:sp>
+      <p:sp>
+        <p:nvSpPr>
+          <p:cNvPr id="37" name="TextBox 36"/>
+          <p:cNvSpPr txBox="1"/>
+          <p:nvPr/>
+        </p:nvSpPr>
+        <p:spPr>
+          <a:xfrm>
+            <a:off x="8769096" y="3118104"/>
+            <a:ext cx="2532888" cy="219456"/>
+          </a:xfrm>
+          <a:prstGeom prst="rect">
+            <a:avLst/>
+          </a:prstGeom>
+          <a:noFill/>
+        </p:spPr>
+        <p:txBody>
+          <a:bodyPr wrap="square">
+            <a:spAutoFit/>
+          </a:bodyPr>
+          <a:lstStyle/>
+          <a:p>
+            <a:pPr algn="l"/>
+            <a:r>
+              <a:rPr sz="1000" b="0" i="0">
+                <a:solidFill>
+                  <a:srgbClr val="1A1A1A"/>
+                </a:solidFill>
+              </a:rPr>
+              <a:t>↓ Growth inhibition</a:t>
+            </a:r>
+          </a:p>
+        </p:txBody>
+      </p:sp>
+      <p:sp>
+        <p:nvSpPr>
+          <p:cNvPr id="38" name="Rectangle 37"/>
+          <p:cNvSpPr/>
+          <p:nvPr/>
+        </p:nvSpPr>
+        <p:spPr>
+          <a:xfrm>
+            <a:off x="5669280" y="3383280"/>
+            <a:ext cx="1463040" cy="292608"/>
+          </a:xfrm>
+          <a:prstGeom prst="rect">
+            <a:avLst/>
+          </a:prstGeom>
+          <a:solidFill>
+            <a:srgbClr val="FFF3E8"/>
+          </a:solidFill>
+          <a:ln w="5080">
+            <a:solidFill>
+              <a:srgbClr val="CCCCCC"/>
+            </a:solidFill>
+          </a:ln>
+        </p:spPr>
+        <p:style>
+          <a:lnRef idx="1">
+            <a:schemeClr val="accent1"/>
+          </a:lnRef>
+          <a:fillRef idx="3">
+            <a:schemeClr val="accent1"/>
+          </a:fillRef>
+          <a:effectRef idx="2">
+            <a:schemeClr val="accent1"/>
+          </a:effectRef>
+          <a:fontRef idx="minor">
+            <a:schemeClr val="lt1"/>
+          </a:fontRef>
+        </p:style>
+        <p:txBody>
+          <a:bodyPr rtlCol="0" anchor="ctr"/>
+          <a:lstStyle/>
+          <a:p>
+            <a:pPr algn="ctr"/>
+          </a:p>
+        </p:txBody>
+      </p:sp>
+      <p:sp>
+        <p:nvSpPr>
+          <p:cNvPr id="39" name="TextBox 38"/>
+          <p:cNvSpPr txBox="1"/>
+          <p:nvPr/>
+        </p:nvSpPr>
+        <p:spPr>
+          <a:xfrm>
+            <a:off x="5715000" y="3429000"/>
+            <a:ext cx="1389888" cy="219456"/>
+          </a:xfrm>
+          <a:prstGeom prst="rect">
+            <a:avLst/>
+          </a:prstGeom>
+          <a:noFill/>
+        </p:spPr>
+        <p:txBody>
+          <a:bodyPr wrap="square">
+            <a:spAutoFit/>
+          </a:bodyPr>
+          <a:lstStyle/>
+          <a:p>
+            <a:pPr algn="l"/>
+            <a:r>
+              <a:rPr sz="1000" b="1" i="0">
+                <a:solidFill>
+                  <a:srgbClr val="C55A11"/>
+                </a:solidFill>
+              </a:rPr>
+              <a:t>GeneAC</a:t>
+            </a:r>
+          </a:p>
+        </p:txBody>
+      </p:sp>
+      <p:sp>
+        <p:nvSpPr>
+          <p:cNvPr id="40" name="Rectangle 39"/>
+          <p:cNvSpPr/>
+          <p:nvPr/>
+        </p:nvSpPr>
+        <p:spPr>
+          <a:xfrm>
+            <a:off x="7150608" y="3383280"/>
+            <a:ext cx="1554480" cy="292608"/>
+          </a:xfrm>
+          <a:prstGeom prst="rect">
+            <a:avLst/>
+          </a:prstGeom>
+          <a:solidFill>
+            <a:srgbClr val="FFF3E8"/>
+          </a:solidFill>
+          <a:ln w="5080">
+            <a:solidFill>
+              <a:srgbClr val="CCCCCC"/>
+            </a:solidFill>
+          </a:ln>
+        </p:spPr>
+        <p:style>
+          <a:lnRef idx="1">
+            <a:schemeClr val="accent1"/>
+          </a:lnRef>
+          <a:fillRef idx="3">
+            <a:schemeClr val="accent1"/>
+          </a:fillRef>
+          <a:effectRef idx="2">
+            <a:schemeClr val="accent1"/>
+          </a:effectRef>
+          <a:fontRef idx="minor">
+            <a:schemeClr val="lt1"/>
+          </a:fontRef>
+        </p:style>
+        <p:txBody>
+          <a:bodyPr rtlCol="0" anchor="ctr"/>
+          <a:lstStyle/>
+          <a:p>
+            <a:pPr algn="ctr"/>
+          </a:p>
+        </p:txBody>
+      </p:sp>
+      <p:sp>
+        <p:nvSpPr>
+          <p:cNvPr id="41" name="TextBox 40"/>
+          <p:cNvSpPr txBox="1"/>
+          <p:nvPr/>
+        </p:nvSpPr>
+        <p:spPr>
+          <a:xfrm>
+            <a:off x="7196328" y="3429000"/>
+            <a:ext cx="1481328" cy="219456"/>
+          </a:xfrm>
+          <a:prstGeom prst="rect">
+            <a:avLst/>
+          </a:prstGeom>
+          <a:noFill/>
+        </p:spPr>
+        <p:txBody>
+          <a:bodyPr wrap="square">
+            <a:spAutoFit/>
+          </a:bodyPr>
+          <a:lstStyle/>
+          <a:p>
+            <a:pPr algn="ctr"/>
+            <a:r>
+              <a:rPr sz="1000" b="0" i="0">
+                <a:solidFill>
+                  <a:srgbClr val="C55A11"/>
+                </a:solidFill>
+              </a:rPr>
+              <a:t>126.1%</a:t>
+            </a:r>
+          </a:p>
+        </p:txBody>
+      </p:sp>
+      <p:sp>
+        <p:nvSpPr>
+          <p:cNvPr id="42" name="Rectangle 41"/>
+          <p:cNvSpPr/>
+          <p:nvPr/>
+        </p:nvSpPr>
+        <p:spPr>
+          <a:xfrm>
+            <a:off x="8723376" y="3383280"/>
+            <a:ext cx="2606040" cy="292608"/>
+          </a:xfrm>
+          <a:prstGeom prst="rect">
+            <a:avLst/>
+          </a:prstGeom>
+          <a:solidFill>
+            <a:srgbClr val="FFF3E8"/>
+          </a:solidFill>
+          <a:ln w="5080">
+            <a:solidFill>
+              <a:srgbClr val="CCCCCC"/>
+            </a:solidFill>
+          </a:ln>
+        </p:spPr>
+        <p:style>
+          <a:lnRef idx="1">
+            <a:schemeClr val="accent1"/>
+          </a:lnRef>
+          <a:fillRef idx="3">
+            <a:schemeClr val="accent1"/>
+          </a:fillRef>
+          <a:effectRef idx="2">
+            <a:schemeClr val="accent1"/>
+          </a:effectRef>
+          <a:fontRef idx="minor">
+            <a:schemeClr val="lt1"/>
+          </a:fontRef>
+        </p:style>
+        <p:txBody>
+          <a:bodyPr rtlCol="0" anchor="ctr"/>
+          <a:lstStyle/>
+          <a:p>
+            <a:pPr algn="ctr"/>
+          </a:p>
+        </p:txBody>
+      </p:sp>
+      <p:sp>
+        <p:nvSpPr>
+          <p:cNvPr id="43" name="TextBox 42"/>
+          <p:cNvSpPr txBox="1"/>
+          <p:nvPr/>
+        </p:nvSpPr>
+        <p:spPr>
+          <a:xfrm>
+            <a:off x="8769096" y="3429000"/>
+            <a:ext cx="2532888" cy="219456"/>
+          </a:xfrm>
+          <a:prstGeom prst="rect">
+            <a:avLst/>
+          </a:prstGeom>
+          <a:noFill/>
+        </p:spPr>
+        <p:txBody>
+          <a:bodyPr wrap="square">
+            <a:spAutoFit/>
+          </a:bodyPr>
+          <a:lstStyle/>
+          <a:p>
+            <a:pPr algn="l"/>
+            <a:r>
+              <a:rPr sz="1000" b="0" i="0">
+                <a:solidFill>
+                  <a:srgbClr val="1A1A1A"/>
+                </a:solidFill>
+              </a:rPr>
+              <a:t>↑ Enhanced growth</a:t>
+            </a:r>
+          </a:p>
+        </p:txBody>
+      </p:sp>
+      <p:sp>
+        <p:nvSpPr>
+          <p:cNvPr id="44" name="Rectangle 43"/>
+          <p:cNvSpPr/>
+          <p:nvPr/>
+        </p:nvSpPr>
+        <p:spPr>
+          <a:xfrm>
+            <a:off x="5669280" y="3694176"/>
+            <a:ext cx="1463040" cy="292608"/>
+          </a:xfrm>
+          <a:prstGeom prst="rect">
+            <a:avLst/>
+          </a:prstGeom>
+          <a:solidFill>
+            <a:srgbClr val="FFFFFF"/>
+          </a:solidFill>
+          <a:ln w="5080">
+            <a:solidFill>
+              <a:srgbClr val="CCCCCC"/>
+            </a:solidFill>
+          </a:ln>
+        </p:spPr>
+        <p:style>
+          <a:lnRef idx="1">
+            <a:schemeClr val="accent1"/>
+          </a:lnRef>
+          <a:fillRef idx="3">
+            <a:schemeClr val="accent1"/>
+          </a:fillRef>
+          <a:effectRef idx="2">
+            <a:schemeClr val="accent1"/>
+          </a:effectRef>
+          <a:fontRef idx="minor">
+            <a:schemeClr val="lt1"/>
+          </a:fontRef>
+        </p:style>
+        <p:txBody>
+          <a:bodyPr rtlCol="0" anchor="ctr"/>
+          <a:lstStyle/>
+          <a:p>
+            <a:pPr algn="ctr"/>
+          </a:p>
+        </p:txBody>
+      </p:sp>
+      <p:sp>
+        <p:nvSpPr>
+          <p:cNvPr id="45" name="TextBox 44"/>
+          <p:cNvSpPr txBox="1"/>
+          <p:nvPr/>
+        </p:nvSpPr>
+        <p:spPr>
+          <a:xfrm>
+            <a:off x="5715000" y="3739896"/>
+            <a:ext cx="1389888" cy="219456"/>
+          </a:xfrm>
+          <a:prstGeom prst="rect">
+            <a:avLst/>
+          </a:prstGeom>
+          <a:noFill/>
+        </p:spPr>
+        <p:txBody>
+          <a:bodyPr wrap="square">
+            <a:spAutoFit/>
+          </a:bodyPr>
+          <a:lstStyle/>
+          <a:p>
+            <a:pPr algn="l"/>
+            <a:r>
+              <a:rPr sz="1000" b="1" i="0">
+                <a:solidFill>
+                  <a:srgbClr val="C55A11"/>
+                </a:solidFill>
+              </a:rPr>
+              <a:t>GeneX</a:t>
+            </a:r>
+          </a:p>
+        </p:txBody>
+      </p:sp>
+      <p:sp>
+        <p:nvSpPr>
+          <p:cNvPr id="46" name="Rectangle 45"/>
+          <p:cNvSpPr/>
+          <p:nvPr/>
+        </p:nvSpPr>
+        <p:spPr>
+          <a:xfrm>
+            <a:off x="7150608" y="3694176"/>
+            <a:ext cx="1554480" cy="292608"/>
+          </a:xfrm>
+          <a:prstGeom prst="rect">
+            <a:avLst/>
+          </a:prstGeom>
+          <a:solidFill>
+            <a:srgbClr val="FFFFFF"/>
+          </a:solidFill>
+          <a:ln w="5080">
+            <a:solidFill>
+              <a:srgbClr val="CCCCCC"/>
+            </a:solidFill>
+          </a:ln>
+        </p:spPr>
+        <p:style>
+          <a:lnRef idx="1">
+            <a:schemeClr val="accent1"/>
+          </a:lnRef>
+          <a:fillRef idx="3">
+            <a:schemeClr val="accent1"/>
+          </a:fillRef>
+          <a:effectRef idx="2">
+            <a:schemeClr val="accent1"/>
+          </a:effectRef>
+          <a:fontRef idx="minor">
+            <a:schemeClr val="lt1"/>
+          </a:fontRef>
+        </p:style>
+        <p:txBody>
+          <a:bodyPr rtlCol="0" anchor="ctr"/>
+          <a:lstStyle/>
+          <a:p>
+            <a:pPr algn="ctr"/>
+          </a:p>
+        </p:txBody>
+      </p:sp>
+      <p:sp>
+        <p:nvSpPr>
+          <p:cNvPr id="47" name="TextBox 46"/>
+          <p:cNvSpPr txBox="1"/>
+          <p:nvPr/>
+        </p:nvSpPr>
+        <p:spPr>
+          <a:xfrm>
+            <a:off x="7196328" y="3739896"/>
+            <a:ext cx="1481328" cy="219456"/>
+          </a:xfrm>
+          <a:prstGeom prst="rect">
+            <a:avLst/>
+          </a:prstGeom>
+          <a:noFill/>
+        </p:spPr>
+        <p:txBody>
+          <a:bodyPr wrap="square">
+            <a:spAutoFit/>
+          </a:bodyPr>
+          <a:lstStyle/>
+          <a:p>
+            <a:pPr algn="ctr"/>
+            <a:r>
+              <a:rPr sz="1000" b="0" i="0">
+                <a:solidFill>
+                  <a:srgbClr val="C55A11"/>
+                </a:solidFill>
+              </a:rPr>
+              <a:t>124.5%</a:t>
+            </a:r>
+          </a:p>
+        </p:txBody>
+      </p:sp>
+      <p:sp>
+        <p:nvSpPr>
+          <p:cNvPr id="48" name="Rectangle 47"/>
+          <p:cNvSpPr/>
+          <p:nvPr/>
+        </p:nvSpPr>
+        <p:spPr>
+          <a:xfrm>
+            <a:off x="8723376" y="3694176"/>
+            <a:ext cx="2606040" cy="292608"/>
+          </a:xfrm>
+          <a:prstGeom prst="rect">
+            <a:avLst/>
+          </a:prstGeom>
+          <a:solidFill>
+            <a:srgbClr val="FFFFFF"/>
+          </a:solidFill>
+          <a:ln w="5080">
+            <a:solidFill>
+              <a:srgbClr val="CCCCCC"/>
+            </a:solidFill>
+          </a:ln>
+        </p:spPr>
+        <p:style>
+          <a:lnRef idx="1">
+            <a:schemeClr val="accent1"/>
+          </a:lnRef>
+          <a:fillRef idx="3">
+            <a:schemeClr val="accent1"/>
+          </a:fillRef>
+          <a:effectRef idx="2">
+            <a:schemeClr val="accent1"/>
+          </a:effectRef>
+          <a:fontRef idx="minor">
+            <a:schemeClr val="lt1"/>
+          </a:fontRef>
+        </p:style>
+        <p:txBody>
+          <a:bodyPr rtlCol="0" anchor="ctr"/>
+          <a:lstStyle/>
+          <a:p>
+            <a:pPr algn="ctr"/>
+          </a:p>
+        </p:txBody>
+      </p:sp>
+      <p:sp>
+        <p:nvSpPr>
+          <p:cNvPr id="49" name="TextBox 48"/>
+          <p:cNvSpPr txBox="1"/>
+          <p:nvPr/>
+        </p:nvSpPr>
+        <p:spPr>
+          <a:xfrm>
+            <a:off x="8769096" y="3739896"/>
+            <a:ext cx="2532888" cy="219456"/>
+          </a:xfrm>
+          <a:prstGeom prst="rect">
+            <a:avLst/>
+          </a:prstGeom>
+          <a:noFill/>
+        </p:spPr>
+        <p:txBody>
+          <a:bodyPr wrap="square">
+            <a:spAutoFit/>
+          </a:bodyPr>
+          <a:lstStyle/>
+          <a:p>
+            <a:pPr algn="l"/>
+            <a:r>
+              <a:rPr sz="1000" b="0" i="0">
+                <a:solidFill>
+                  <a:srgbClr val="1A1A1A"/>
+                </a:solidFill>
+              </a:rPr>
+              <a:t>↑ Enhanced growth</a:t>
+            </a:r>
+          </a:p>
+        </p:txBody>
+      </p:sp>
+      <p:sp>
+        <p:nvSpPr>
+          <p:cNvPr id="50" name="Rectangle 49"/>
+          <p:cNvSpPr/>
+          <p:nvPr/>
+        </p:nvSpPr>
+        <p:spPr>
+          <a:xfrm>
+            <a:off x="5669280" y="4005072"/>
+            <a:ext cx="1463040" cy="292608"/>
+          </a:xfrm>
+          <a:prstGeom prst="rect">
+            <a:avLst/>
+          </a:prstGeom>
+          <a:solidFill>
+            <a:srgbClr val="FFF3E8"/>
+          </a:solidFill>
+          <a:ln w="5080">
+            <a:solidFill>
+              <a:srgbClr val="CCCCCC"/>
+            </a:solidFill>
+          </a:ln>
+        </p:spPr>
+        <p:style>
+          <a:lnRef idx="1">
+            <a:schemeClr val="accent1"/>
+          </a:lnRef>
+          <a:fillRef idx="3">
+            <a:schemeClr val="accent1"/>
+          </a:fillRef>
+          <a:effectRef idx="2">
+            <a:schemeClr val="accent1"/>
+          </a:effectRef>
+          <a:fontRef idx="minor">
+            <a:schemeClr val="lt1"/>
+          </a:fontRef>
+        </p:style>
+        <p:txBody>
+          <a:bodyPr rtlCol="0" anchor="ctr"/>
+          <a:lstStyle/>
+          <a:p>
+            <a:pPr algn="ctr"/>
+          </a:p>
+        </p:txBody>
+      </p:sp>
+      <p:sp>
+        <p:nvSpPr>
+          <p:cNvPr id="51" name="TextBox 50"/>
+          <p:cNvSpPr txBox="1"/>
+          <p:nvPr/>
+        </p:nvSpPr>
+        <p:spPr>
+          <a:xfrm>
+            <a:off x="5715000" y="4050792"/>
+            <a:ext cx="1389888" cy="219456"/>
+          </a:xfrm>
+          <a:prstGeom prst="rect">
+            <a:avLst/>
+          </a:prstGeom>
+          <a:noFill/>
+        </p:spPr>
+        <p:txBody>
+          <a:bodyPr wrap="square">
+            <a:spAutoFit/>
+          </a:bodyPr>
+          <a:lstStyle/>
+          <a:p>
+            <a:pPr algn="l"/>
+            <a:r>
+              <a:rPr sz="1000" b="1" i="0">
+                <a:solidFill>
+                  <a:srgbClr val="C55A11"/>
+                </a:solidFill>
+              </a:rPr>
+              <a:t>GeneE</a:t>
+            </a:r>
+          </a:p>
+        </p:txBody>
+      </p:sp>
+      <p:sp>
+        <p:nvSpPr>
+          <p:cNvPr id="52" name="Rectangle 51"/>
+          <p:cNvSpPr/>
+          <p:nvPr/>
+        </p:nvSpPr>
+        <p:spPr>
+          <a:xfrm>
+            <a:off x="7150608" y="4005072"/>
+            <a:ext cx="1554480" cy="292608"/>
+          </a:xfrm>
+          <a:prstGeom prst="rect">
+            <a:avLst/>
+          </a:prstGeom>
+          <a:solidFill>
+            <a:srgbClr val="FFF3E8"/>
+          </a:solidFill>
+          <a:ln w="5080">
+            <a:solidFill>
+              <a:srgbClr val="CCCCCC"/>
+            </a:solidFill>
+          </a:ln>
+        </p:spPr>
+        <p:style>
+          <a:lnRef idx="1">
+            <a:schemeClr val="accent1"/>
+          </a:lnRef>
+          <a:fillRef idx="3">
+            <a:schemeClr val="accent1"/>
+          </a:fillRef>
+          <a:effectRef idx="2">
+            <a:schemeClr val="accent1"/>
+          </a:effectRef>
+          <a:fontRef idx="minor">
+            <a:schemeClr val="lt1"/>
+          </a:fontRef>
+        </p:style>
+        <p:txBody>
+          <a:bodyPr rtlCol="0" anchor="ctr"/>
+          <a:lstStyle/>
+          <a:p>
+            <a:pPr algn="ctr"/>
+          </a:p>
+        </p:txBody>
+      </p:sp>
+      <p:sp>
+        <p:nvSpPr>
+          <p:cNvPr id="53" name="TextBox 52"/>
+          <p:cNvSpPr txBox="1"/>
+          <p:nvPr/>
+        </p:nvSpPr>
+        <p:spPr>
+          <a:xfrm>
+            <a:off x="7196328" y="4050792"/>
+            <a:ext cx="1481328" cy="219456"/>
+          </a:xfrm>
+          <a:prstGeom prst="rect">
+            <a:avLst/>
+          </a:prstGeom>
+          <a:noFill/>
+        </p:spPr>
+        <p:txBody>
+          <a:bodyPr wrap="square">
+            <a:spAutoFit/>
+          </a:bodyPr>
+          <a:lstStyle/>
+          <a:p>
+            <a:pPr algn="ctr"/>
+            <a:r>
+              <a:rPr sz="1000" b="0" i="0">
+                <a:solidFill>
+                  <a:srgbClr val="C55A11"/>
+                </a:solidFill>
+              </a:rPr>
+              <a:t>124.0%</a:t>
+            </a:r>
+          </a:p>
+        </p:txBody>
+      </p:sp>
+      <p:sp>
+        <p:nvSpPr>
+          <p:cNvPr id="54" name="Rectangle 53"/>
+          <p:cNvSpPr/>
+          <p:nvPr/>
+        </p:nvSpPr>
+        <p:spPr>
+          <a:xfrm>
+            <a:off x="8723376" y="4005072"/>
+            <a:ext cx="2606040" cy="292608"/>
+          </a:xfrm>
+          <a:prstGeom prst="rect">
+            <a:avLst/>
+          </a:prstGeom>
+          <a:solidFill>
+            <a:srgbClr val="FFF3E8"/>
+          </a:solidFill>
+          <a:ln w="5080">
+            <a:solidFill>
+              <a:srgbClr val="CCCCCC"/>
+            </a:solidFill>
+          </a:ln>
+        </p:spPr>
+        <p:style>
+          <a:lnRef idx="1">
+            <a:schemeClr val="accent1"/>
+          </a:lnRef>
+          <a:fillRef idx="3">
+            <a:schemeClr val="accent1"/>
+          </a:fillRef>
+          <a:effectRef idx="2">
+            <a:schemeClr val="accent1"/>
+          </a:effectRef>
+          <a:fontRef idx="minor">
+            <a:schemeClr val="lt1"/>
+          </a:fontRef>
+        </p:style>
+        <p:txBody>
+          <a:bodyPr rtlCol="0" anchor="ctr"/>
+          <a:lstStyle/>
+          <a:p>
+            <a:pPr algn="ctr"/>
+          </a:p>
+        </p:txBody>
+      </p:sp>
+      <p:sp>
+        <p:nvSpPr>
+          <p:cNvPr id="55" name="TextBox 54"/>
+          <p:cNvSpPr txBox="1"/>
+          <p:nvPr/>
+        </p:nvSpPr>
+        <p:spPr>
+          <a:xfrm>
+            <a:off x="8769096" y="4050792"/>
+            <a:ext cx="2532888" cy="219456"/>
+          </a:xfrm>
+          <a:prstGeom prst="rect">
+            <a:avLst/>
+          </a:prstGeom>
+          <a:noFill/>
+        </p:spPr>
+        <p:txBody>
+          <a:bodyPr wrap="square">
+            <a:spAutoFit/>
+          </a:bodyPr>
+          <a:lstStyle/>
+          <a:p>
+            <a:pPr algn="l"/>
+            <a:r>
+              <a:rPr sz="1000" b="0" i="0">
+                <a:solidFill>
+                  <a:srgbClr val="1A1A1A"/>
+                </a:solidFill>
+              </a:rPr>
+              <a:t>↑ Enhanced growth</a:t>
+            </a:r>
+          </a:p>
+        </p:txBody>
+      </p:sp>
+      <p:sp>
+        <p:nvSpPr>
+          <p:cNvPr id="56" name="Rectangle 55"/>
+          <p:cNvSpPr/>
+          <p:nvPr/>
+        </p:nvSpPr>
+        <p:spPr>
+          <a:xfrm>
+            <a:off x="274320" y="3767328"/>
+            <a:ext cx="11640312" cy="2633472"/>
+          </a:xfrm>
+          <a:prstGeom prst="rect">
+            <a:avLst/>
+          </a:prstGeom>
+          <a:solidFill>
+            <a:srgbClr val="F5F9FF"/>
+          </a:solidFill>
+          <a:ln w="12700">
+            <a:solidFill>
+              <a:srgbClr val="2E75B6"/>
+            </a:solidFill>
+          </a:ln>
+        </p:spPr>
+        <p:style>
+          <a:lnRef idx="1">
+            <a:schemeClr val="accent1"/>
+          </a:lnRef>
+          <a:fillRef idx="3">
+            <a:schemeClr val="accent1"/>
+          </a:fillRef>
+          <a:effectRef idx="2">
+            <a:schemeClr val="accent1"/>
+          </a:effectRef>
+          <a:fontRef idx="minor">
+            <a:schemeClr val="lt1"/>
+          </a:fontRef>
+        </p:style>
+        <p:txBody>
+          <a:bodyPr rtlCol="0" anchor="ctr"/>
+          <a:lstStyle/>
+          <a:p>
+            <a:pPr algn="ctr"/>
+          </a:p>
+        </p:txBody>
+      </p:sp>
+      <p:sp>
+        <p:nvSpPr>
+          <p:cNvPr id="57" name="Rectangle 56"/>
+          <p:cNvSpPr/>
+          <p:nvPr/>
+        </p:nvSpPr>
+        <p:spPr>
+          <a:xfrm>
+            <a:off x="274320" y="3767328"/>
+            <a:ext cx="11640312" cy="475488"/>
+          </a:xfrm>
+          <a:prstGeom prst="rect">
+            <a:avLst/>
+          </a:prstGeom>
+          <a:solidFill>
+            <a:srgbClr val="2E75B6"/>
+          </a:solidFill>
+          <a:ln>
+            <a:noFill/>
+          </a:ln>
+        </p:spPr>
+        <p:style>
+          <a:lnRef idx="1">
+            <a:schemeClr val="accent1"/>
+          </a:lnRef>
+          <a:fillRef idx="3">
+            <a:schemeClr val="accent1"/>
+          </a:fillRef>
+          <a:effectRef idx="2">
+            <a:schemeClr val="accent1"/>
+          </a:effectRef>
+          <a:fontRef idx="minor">
+            <a:schemeClr val="lt1"/>
+          </a:fontRef>
+        </p:style>
+        <p:txBody>
+          <a:bodyPr rtlCol="0" anchor="ctr"/>
+          <a:lstStyle/>
+          <a:p>
+            <a:pPr algn="ctr"/>
+          </a:p>
+        </p:txBody>
+      </p:sp>
+      <p:sp>
+        <p:nvSpPr>
+          <p:cNvPr id="58" name="TextBox 57"/>
+          <p:cNvSpPr txBox="1"/>
+          <p:nvPr/>
+        </p:nvSpPr>
+        <p:spPr>
+          <a:xfrm>
+            <a:off x="457200" y="3840480"/>
+            <a:ext cx="8686800" cy="329184"/>
+          </a:xfrm>
+          <a:prstGeom prst="rect">
+            <a:avLst/>
+          </a:prstGeom>
+          <a:noFill/>
+        </p:spPr>
+        <p:txBody>
+          <a:bodyPr wrap="square">
+            <a:spAutoFit/>
+          </a:bodyPr>
+          <a:lstStyle/>
+          <a:p>
+            <a:pPr algn="l"/>
+            <a:r>
+              <a:rPr sz="1400" b="1" i="0">
+                <a:solidFill>
+                  <a:srgbClr val="FFFFFF"/>
+                </a:solidFill>
+              </a:rPr>
+              <a:t>Several Time Points  |  Multiple Controls  (23 time points, 3 h intervals, ~69 h total)</a:t>
+            </a:r>
+          </a:p>
+        </p:txBody>
+      </p:sp>
+      <p:sp>
+        <p:nvSpPr>
+          <p:cNvPr id="59" name="Rectangle 58"/>
+          <p:cNvSpPr/>
+          <p:nvPr/>
+        </p:nvSpPr>
+        <p:spPr>
+          <a:xfrm>
+            <a:off x="9601200" y="3858768"/>
+            <a:ext cx="2148840" cy="292608"/>
+          </a:xfrm>
+          <a:prstGeom prst="rect">
+            <a:avLst/>
+          </a:prstGeom>
+          <a:solidFill>
+            <a:srgbClr val="1F8678"/>
+          </a:solidFill>
+          <a:ln>
+            <a:noFill/>
+          </a:ln>
+        </p:spPr>
+        <p:style>
+          <a:lnRef idx="1">
+            <a:schemeClr val="accent1"/>
+          </a:lnRef>
+          <a:fillRef idx="3">
+            <a:schemeClr val="accent1"/>
+          </a:fillRef>
+          <a:effectRef idx="2">
+            <a:schemeClr val="accent1"/>
+          </a:effectRef>
+          <a:fontRef idx="minor">
+            <a:schemeClr val="lt1"/>
+          </a:fontRef>
+        </p:style>
+        <p:txBody>
+          <a:bodyPr rtlCol="0" anchor="ctr"/>
+          <a:lstStyle/>
+          <a:p>
+            <a:pPr algn="ctr"/>
+          </a:p>
+        </p:txBody>
+      </p:sp>
+      <p:sp>
+        <p:nvSpPr>
+          <p:cNvPr id="60" name="TextBox 59"/>
+          <p:cNvSpPr txBox="1"/>
+          <p:nvPr/>
+        </p:nvSpPr>
+        <p:spPr>
+          <a:xfrm>
+            <a:off x="9619488" y="3867912"/>
+            <a:ext cx="2112264" cy="256032"/>
+          </a:xfrm>
+          <a:prstGeom prst="rect">
+            <a:avLst/>
+          </a:prstGeom>
+          <a:noFill/>
+        </p:spPr>
+        <p:txBody>
+          <a:bodyPr wrap="square">
+            <a:spAutoFit/>
+          </a:bodyPr>
+          <a:lstStyle/>
+          <a:p>
+            <a:pPr algn="ctr"/>
+            <a:r>
+              <a:rPr sz="1100" b="1" i="0">
+                <a:solidFill>
+                  <a:srgbClr val="FFFFFF"/>
+                </a:solidFill>
+              </a:rPr>
+              <a:t>✅  COMPLETE</a:t>
+            </a:r>
+          </a:p>
+        </p:txBody>
+      </p:sp>
+      <p:sp>
+        <p:nvSpPr>
+          <p:cNvPr id="61" name="TextBox 60"/>
+          <p:cNvSpPr txBox="1"/>
+          <p:nvPr/>
+        </p:nvSpPr>
+        <p:spPr>
+          <a:xfrm>
+            <a:off x="457200" y="4315968"/>
+            <a:ext cx="11247120" cy="292608"/>
+          </a:xfrm>
+          <a:prstGeom prst="rect">
+            <a:avLst/>
+          </a:prstGeom>
+          <a:noFill/>
+        </p:spPr>
+        <p:txBody>
+          <a:bodyPr wrap="square">
+            <a:spAutoFit/>
+          </a:bodyPr>
+          <a:lstStyle/>
+          <a:p>
+            <a:pPr algn="l"/>
+            <a:r>
+              <a:rPr sz="1100" b="0" i="1">
+                <a:solidFill>
+                  <a:srgbClr val="1A375E"/>
+                </a:solidFill>
+              </a:rPr>
+              <a:t>Same perturbagens measured across time, enabling growth kinetics and rate calculations per target.</a:t>
+            </a:r>
+          </a:p>
+        </p:txBody>
+      </p:sp>
+      <p:sp>
+        <p:nvSpPr>
+          <p:cNvPr id="62" name="TextBox 61"/>
+          <p:cNvSpPr txBox="1"/>
+          <p:nvPr/>
+        </p:nvSpPr>
+        <p:spPr>
+          <a:xfrm>
+            <a:off x="457200" y="4663440"/>
+            <a:ext cx="7772400" cy="1627632"/>
+          </a:xfrm>
+          <a:prstGeom prst="rect">
+            <a:avLst/>
+          </a:prstGeom>
+          <a:noFill/>
+        </p:spPr>
+        <p:txBody>
+          <a:bodyPr wrap="square">
+            <a:spAutoFit/>
+          </a:bodyPr>
+          <a:lstStyle/>
+          <a:p>
+            <a:pPr>
+              <a:spcBef>
+                <a:spcPts val="400"/>
+              </a:spcBef>
+            </a:pPr>
+            <a:r>
+              <a:rPr sz="1100">
+                <a:solidFill>
+                  <a:srgbClr val="1A1A1A"/>
+                </a:solidFill>
+              </a:rPr>
+              <a:t>•  Growth rate computed at each time point as a ratio to matched control</a:t>
+            </a:r>
+          </a:p>
+          <a:p>
+            <a:pPr>
+              <a:spcBef>
+                <a:spcPts val="400"/>
+              </a:spcBef>
+            </a:pPr>
+            <a:r>
+              <a:rPr sz="1100">
+                <a:solidFill>
+                  <a:srgbClr val="1A1A1A"/>
+                </a:solidFill>
+              </a:rPr>
+              <a:t>•  Growth rate &gt; 1.0 — cells proliferating faster (possible tumour suppressor knockdown)</a:t>
+            </a:r>
+          </a:p>
+          <a:p>
+            <a:pPr>
+              <a:spcBef>
+                <a:spcPts val="400"/>
+              </a:spcBef>
+            </a:pPr>
+            <a:r>
+              <a:rPr sz="1100">
+                <a:solidFill>
+                  <a:srgbClr val="1A1A1A"/>
+                </a:solidFill>
+              </a:rPr>
+              <a:t>•  Growth rate &lt; 1.0 — cells proliferating slower (growth-promoting gene silenced)</a:t>
+            </a:r>
+          </a:p>
+          <a:p>
+            <a:pPr>
+              <a:spcBef>
+                <a:spcPts val="400"/>
+              </a:spcBef>
+            </a:pPr>
+            <a:r>
+              <a:rPr sz="1100">
+                <a:solidFill>
+                  <a:srgbClr val="1A1A1A"/>
+                </a:solidFill>
+              </a:rPr>
+              <a:t>•  Multiple independent control groups enable robust plate-wide normalisation</a:t>
+            </a:r>
+          </a:p>
+          <a:p>
+            <a:pPr>
+              <a:spcBef>
+                <a:spcPts val="400"/>
+              </a:spcBef>
+            </a:pPr>
+            <a:r>
+              <a:rPr sz="1100">
+                <a:solidFill>
+                  <a:srgbClr val="1A1A1A"/>
+                </a:solidFill>
+              </a:rPr>
+              <a:t>•  Time-resolved data reveals whether effects are immediate, delayed, or transient</a:t>
+            </a:r>
+          </a:p>
+        </p:txBody>
+      </p:sp>
+      <p:sp>
+        <p:nvSpPr>
+          <p:cNvPr id="63" name="Rectangle 62"/>
+          <p:cNvSpPr/>
+          <p:nvPr/>
+        </p:nvSpPr>
+        <p:spPr>
+          <a:xfrm>
+            <a:off x="8412480" y="4636008"/>
+            <a:ext cx="3337560" cy="1664208"/>
+          </a:xfrm>
+          <a:prstGeom prst="rect">
+            <a:avLst/>
+          </a:prstGeom>
+          <a:solidFill>
+            <a:srgbClr val="F3EEFA"/>
+          </a:solidFill>
+          <a:ln w="15240">
+            <a:solidFill>
+              <a:srgbClr val="5B2D8E"/>
+            </a:solidFill>
+          </a:ln>
+        </p:spPr>
+        <p:style>
+          <a:lnRef idx="1">
+            <a:schemeClr val="accent1"/>
+          </a:lnRef>
+          <a:fillRef idx="3">
+            <a:schemeClr val="accent1"/>
+          </a:fillRef>
+          <a:effectRef idx="2">
+            <a:schemeClr val="accent1"/>
+          </a:effectRef>
+          <a:fontRef idx="minor">
+            <a:schemeClr val="lt1"/>
+          </a:fontRef>
+        </p:style>
+        <p:txBody>
+          <a:bodyPr rtlCol="0" anchor="ctr"/>
+          <a:lstStyle/>
+          <a:p>
+            <a:pPr algn="ctr"/>
+          </a:p>
+        </p:txBody>
+      </p:sp>
+      <p:sp>
+        <p:nvSpPr>
+          <p:cNvPr id="64" name="Rectangle 63"/>
+          <p:cNvSpPr/>
+          <p:nvPr/>
+        </p:nvSpPr>
+        <p:spPr>
+          <a:xfrm>
+            <a:off x="8503920" y="4681728"/>
+            <a:ext cx="2240280" cy="256032"/>
+          </a:xfrm>
+          <a:prstGeom prst="rect">
+            <a:avLst/>
+          </a:prstGeom>
+          <a:solidFill>
+            <a:srgbClr val="5B2D8E"/>
+          </a:solidFill>
+          <a:ln>
+            <a:noFill/>
+          </a:ln>
+        </p:spPr>
+        <p:style>
+          <a:lnRef idx="1">
+            <a:schemeClr val="accent1"/>
+          </a:lnRef>
+          <a:fillRef idx="3">
+            <a:schemeClr val="accent1"/>
+          </a:fillRef>
+          <a:effectRef idx="2">
+            <a:schemeClr val="accent1"/>
+          </a:effectRef>
+          <a:fontRef idx="minor">
+            <a:schemeClr val="lt1"/>
+          </a:fontRef>
+        </p:style>
+        <p:txBody>
+          <a:bodyPr rtlCol="0" anchor="ctr"/>
+          <a:lstStyle/>
+          <a:p>
+            <a:pPr algn="ctr"/>
+          </a:p>
+        </p:txBody>
+      </p:sp>
+      <p:sp>
+        <p:nvSpPr>
+          <p:cNvPr id="65" name="TextBox 64"/>
+          <p:cNvSpPr txBox="1"/>
+          <p:nvPr/>
+        </p:nvSpPr>
+        <p:spPr>
+          <a:xfrm>
+            <a:off x="8577072" y="4718304"/>
+            <a:ext cx="2130552" cy="201168"/>
+          </a:xfrm>
+          <a:prstGeom prst="rect">
+            <a:avLst/>
+          </a:prstGeom>
+          <a:noFill/>
+        </p:spPr>
+        <p:txBody>
+          <a:bodyPr wrap="square">
+            <a:spAutoFit/>
+          </a:bodyPr>
+          <a:lstStyle/>
+          <a:p>
+            <a:pPr algn="l"/>
+            <a:r>
+              <a:rPr sz="1000" b="1" i="0">
+                <a:solidFill>
+                  <a:srgbClr val="FFFFFF"/>
+                </a:solidFill>
+              </a:rPr>
+              <a:t>🤖  AI-Assisted Interpretation</a:t>
+            </a:r>
+          </a:p>
+        </p:txBody>
+      </p:sp>
+      <p:sp>
+        <p:nvSpPr>
+          <p:cNvPr id="66" name="TextBox 65"/>
+          <p:cNvSpPr txBox="1"/>
+          <p:nvPr/>
+        </p:nvSpPr>
+        <p:spPr>
+          <a:xfrm>
+            <a:off x="8503920" y="5001768"/>
+            <a:ext cx="3154680" cy="1188720"/>
+          </a:xfrm>
+          <a:prstGeom prst="rect">
+            <a:avLst/>
+          </a:prstGeom>
+          <a:noFill/>
+        </p:spPr>
+        <p:txBody>
+          <a:bodyPr wrap="square">
+            <a:spAutoFit/>
+          </a:bodyPr>
+          <a:lstStyle/>
+          <a:p>
+            <a:pPr algn="l"/>
+            <a:r>
+              <a:rPr sz="1000" b="0" i="1">
+                <a:solidFill>
+                  <a:srgbClr val="1A1A1A"/>
+                </a:solidFill>
+              </a:rPr>
+              <a:t>Time-course data provides richer biological insight than endpoint alone — a perturbagen with a delayed growth rate change may reflect an indirect or adaptive cellular response.</a:t>
+            </a:r>
+          </a:p>
+        </p:txBody>
+      </p:sp>
+      <p:sp>
+        <p:nvSpPr>
+          <p:cNvPr id="67" name="Rectangle 66"/>
+          <p:cNvSpPr/>
+          <p:nvPr/>
+        </p:nvSpPr>
+        <p:spPr>
+          <a:xfrm>
+            <a:off x="0" y="6656832"/>
+            <a:ext cx="12188952" cy="201168"/>
+          </a:xfrm>
+          <a:prstGeom prst="rect">
+            <a:avLst/>
+          </a:prstGeom>
+          <a:solidFill>
+            <a:srgbClr val="1A375E"/>
+          </a:solidFill>
+          <a:ln>
+            <a:noFill/>
+          </a:ln>
+        </p:spPr>
+        <p:style>
+          <a:lnRef idx="1">
+            <a:schemeClr val="accent1"/>
+          </a:lnRef>
+          <a:fillRef idx="3">
+            <a:schemeClr val="accent1"/>
+          </a:fillRef>
+          <a:effectRef idx="2">
+            <a:schemeClr val="accent1"/>
+          </a:effectRef>
+          <a:fontRef idx="minor">
+            <a:schemeClr val="lt1"/>
+          </a:fontRef>
+        </p:style>
+        <p:txBody>
+          <a:bodyPr rtlCol="0" anchor="ctr"/>
+          <a:lstStyle/>
+          <a:p>
+            <a:pPr algn="ctr"/>
+          </a:p>
+        </p:txBody>
+      </p:sp>
+      <p:sp>
+        <p:nvSpPr>
+          <p:cNvPr id="68" name="TextBox 67"/>
+          <p:cNvSpPr txBox="1"/>
+          <p:nvPr/>
+        </p:nvSpPr>
+        <p:spPr>
+          <a:xfrm>
+            <a:off x="10515600" y="6675120"/>
+            <a:ext cx="1554480" cy="182880"/>
+          </a:xfrm>
+          <a:prstGeom prst="rect">
+            <a:avLst/>
+          </a:prstGeom>
+          <a:noFill/>
+        </p:spPr>
+        <p:txBody>
+          <a:bodyPr wrap="square">
+            <a:spAutoFit/>
+          </a:bodyPr>
+          <a:lstStyle/>
+          <a:p>
+            <a:pPr algn="r"/>
+            <a:r>
+              <a:rPr sz="900" b="0" i="0">
+                <a:solidFill>
+                  <a:srgbClr val="FFFFFF"/>
+                </a:solidFill>
+              </a:rPr>
+              <a:t>Slide 6 of 7</a:t>
+            </a:r>
+          </a:p>
+        </p:txBody>
+      </p:sp>
+      <p:sp>
+        <p:nvSpPr>
+          <p:cNvPr id="69" name="TextBox 68"/>
+          <p:cNvSpPr txBox="1"/>
+          <p:nvPr/>
+        </p:nvSpPr>
+        <p:spPr>
+          <a:xfrm>
+            <a:off x="228600" y="6675120"/>
+            <a:ext cx="9144000" cy="182880"/>
+          </a:xfrm>
+          <a:prstGeom prst="rect">
+            <a:avLst/>
+          </a:prstGeom>
+          <a:noFill/>
+        </p:spPr>
+        <p:txBody>
+          <a:bodyPr wrap="square">
+            <a:spAutoFit/>
+          </a:bodyPr>
+          <a:lstStyle/>
+          <a:p>
+            <a:pPr algn="l"/>
+            <a:r>
+              <a:rPr sz="900" b="0" i="0">
+                <a:solidFill>
+                  <a:srgbClr val="BDD7EE"/>
+                </a:solidFill>
+              </a:rPr>
+              <a:t>HTSplotter  |  Nunes et al., PLoS One 2024  |  DOI: 10.1371/journal.pone.0296322</a:t>
+            </a:r>
+          </a:p>
+        </p:txBody>
+      </p:sp>
+    </p:spTree>
+  </p:cSld>
+  <p:clrMapOvr>
+    <a:masterClrMapping/>
+  </p:clrMapOvr>
+</p:sld>
+</file>
+
+<file path=ppt/slides/slide7.xml><?xml version="1.0" encoding="utf-8"?>
+<p:sld xmlns:a="http://schemas.openxmlformats.org/drawingml/2006/main" xmlns:p="http://schemas.openxmlformats.org/presentationml/2006/main" xmlns:r="http://schemas.openxmlformats.org/officeDocument/2006/relationships">
+  <p:cSld>
+    <p:bg>
+      <p:bgPr>
+        <a:solidFill>
+          <a:srgbClr val="FFFFFF"/>
+        </a:solidFill>
+        <a:effectLst/>
+      </p:bgPr>
+    </p:bg>
+    <p:spTree>
+      <p:nvGrpSpPr>
+        <p:cNvPr id="1" name=""/>
+        <p:cNvGrpSpPr/>
+        <p:nvPr/>
+      </p:nvGrpSpPr>
+      <p:grpSpPr/>
+      <p:sp>
+        <p:nvSpPr>
+          <p:cNvPr id="2" name="Rectangle 1"/>
+          <p:cNvSpPr/>
+          <p:nvPr/>
+        </p:nvSpPr>
+        <p:spPr>
+          <a:xfrm>
+            <a:off x="0" y="0"/>
+            <a:ext cx="12188952" cy="804672"/>
+          </a:xfrm>
+          <a:prstGeom prst="rect">
+            <a:avLst/>
+          </a:prstGeom>
+          <a:solidFill>
+            <a:srgbClr val="1A375E"/>
+          </a:solidFill>
+          <a:ln>
+            <a:noFill/>
+          </a:ln>
+        </p:spPr>
+        <p:style>
+          <a:lnRef idx="1">
+            <a:schemeClr val="accent1"/>
+          </a:lnRef>
+          <a:fillRef idx="3">
+            <a:schemeClr val="accent1"/>
+          </a:fillRef>
+          <a:effectRef idx="2">
+            <a:schemeClr val="accent1"/>
+          </a:effectRef>
+          <a:fontRef idx="minor">
+            <a:schemeClr val="lt1"/>
+          </a:fontRef>
+        </p:style>
+        <p:txBody>
+          <a:bodyPr rtlCol="0" anchor="ctr"/>
+          <a:lstStyle/>
+          <a:p>
+            <a:pPr algn="ctr"/>
+          </a:p>
+        </p:txBody>
+      </p:sp>
+      <p:sp>
+        <p:nvSpPr>
+          <p:cNvPr id="3" name="Rectangle 2"/>
+          <p:cNvSpPr/>
+          <p:nvPr/>
+        </p:nvSpPr>
+        <p:spPr>
+          <a:xfrm>
+            <a:off x="0" y="0"/>
+            <a:ext cx="73152" cy="804672"/>
+          </a:xfrm>
+          <a:prstGeom prst="rect">
+            <a:avLst/>
+          </a:prstGeom>
+          <a:solidFill>
+            <a:srgbClr val="2E75B6"/>
+          </a:solidFill>
+          <a:ln>
+            <a:noFill/>
+          </a:ln>
+        </p:spPr>
+        <p:style>
+          <a:lnRef idx="1">
+            <a:schemeClr val="accent1"/>
+          </a:lnRef>
+          <a:fillRef idx="3">
+            <a:schemeClr val="accent1"/>
+          </a:fillRef>
+          <a:effectRef idx="2">
+            <a:schemeClr val="accent1"/>
+          </a:effectRef>
+          <a:fontRef idx="minor">
+            <a:schemeClr val="lt1"/>
+          </a:fontRef>
+        </p:style>
+        <p:txBody>
+          <a:bodyPr rtlCol="0" anchor="ctr"/>
+          <a:lstStyle/>
+          <a:p>
+            <a:pPr algn="ctr"/>
+          </a:p>
+        </p:txBody>
+      </p:sp>
+      <p:sp>
+        <p:nvSpPr>
+          <p:cNvPr id="4" name="TextBox 3"/>
+          <p:cNvSpPr txBox="1"/>
+          <p:nvPr/>
+        </p:nvSpPr>
+        <p:spPr>
+          <a:xfrm>
+            <a:off x="228600" y="91440"/>
+            <a:ext cx="11704320" cy="502920"/>
+          </a:xfrm>
+          <a:prstGeom prst="rect">
+            <a:avLst/>
+          </a:prstGeom>
+          <a:noFill/>
+        </p:spPr>
+        <p:txBody>
+          <a:bodyPr wrap="square">
+            <a:spAutoFit/>
+          </a:bodyPr>
+          <a:lstStyle/>
+          <a:p>
+            <a:pPr algn="l"/>
+            <a:r>
+              <a:rPr sz="2600" b="1" i="0">
+                <a:solidFill>
+                  <a:srgbClr val="FFFFFF"/>
+                </a:solidFill>
+              </a:rPr>
               <a:t>AI-Assisted Results Interpretation</a:t>
             </a:r>
           </a:p>
@@ -14002,7 +15235,7 @@
                   <a:srgbClr val="FFFFFF"/>
                 </a:solidFill>
               </a:rPr>
-              <a:t>Slide 6 of 6</a:t>
+              <a:t>Slide 7 of 7</a:t>
             </a:r>
           </a:p>
         </p:txBody>
